--- a/templates/02-game-gdd-game-design-proposal/02__darkneon.pptx
+++ b/templates/02-game-gdd-game-design-proposal/02__darkneon.pptx
@@ -20,6 +20,9 @@
     <p:sldId id="268" r:id="rId19"/>
     <p:sldId id="269" r:id="rId20"/>
     <p:sldId id="270" r:id="rId21"/>
+    <p:sldId id="271" r:id="rId22"/>
+    <p:sldId id="272" r:id="rId23"/>
+    <p:sldId id="273" r:id="rId24"/>
   </p:sldIdLst>
   <p:sldSz cx="12191695" cy="6858000" type="screen4x3"/>
   <p:notesSz cx="6858000" cy="9144000"/>
@@ -3246,14 +3249,16 @@
         </p:nvSpPr>
         <p:spPr>
           <a:xfrm>
-            <a:off x="822960" y="1874519"/>
-            <a:ext cx="822960" cy="91440"/>
+            <a:off x="0" y="0"/>
+            <a:ext cx="4937760" cy="6858000"/>
           </a:xfrm>
           <a:prstGeom prst="rect">
             <a:avLst/>
           </a:prstGeom>
           <a:solidFill>
-            <a:srgbClr val="22D3EE"/>
+            <a:srgbClr val="22D3EE">
+              <a:alpha val="95000"/>
+            </a:srgbClr>
           </a:solidFill>
           <a:ln>
             <a:noFill/>
@@ -3290,8 +3295,8 @@
         </p:nvSpPr>
         <p:spPr>
           <a:xfrm>
-            <a:off x="822960" y="2194560"/>
-            <a:ext cx="9692640" cy="1463040"/>
+            <a:off x="731520" y="2194560"/>
+            <a:ext cx="3657600" cy="1463040"/>
           </a:xfrm>
           <a:prstGeom prst="rect">
             <a:avLst/>
@@ -3306,22 +3311,43 @@
           <a:p>
             <a:pPr algn="l">
               <a:lnSpc>
-                <a:spcPct val="102000"/>
+                <a:spcPct val="105000"/>
               </a:lnSpc>
               <a:spcAft>
                 <a:spcPts val="400"/>
               </a:spcAft>
             </a:pPr>
             <a:r>
-              <a:rPr sz="4400" b="1" i="0">
-                <a:solidFill>
-                  <a:srgbClr val="EAF2FF"/>
-                </a:solidFill>
-                <a:latin typeface="Segoe UI"/>
-                <a:ea typeface="微软雅黑"/>
-                <a:cs typeface="微软雅黑"/>
-              </a:rPr>
-              <a:t>游戏设计提案</a:t>
+              <a:rPr sz="4000" b="1" i="0">
+                <a:solidFill>
+                  <a:srgbClr val="FFFFFF"/>
+                </a:solidFill>
+                <a:latin typeface="Segoe UI"/>
+                <a:ea typeface="微软雅黑"/>
+                <a:cs typeface="微软雅黑"/>
+              </a:rPr>
+              <a:t>SECTION</a:t>
+            </a:r>
+          </a:p>
+          <a:p>
+            <a:pPr algn="l">
+              <a:lnSpc>
+                <a:spcPct val="105000"/>
+              </a:lnSpc>
+              <a:spcAft>
+                <a:spcPts val="400"/>
+              </a:spcAft>
+            </a:pPr>
+            <a:r>
+              <a:rPr sz="4000" b="1" i="0">
+                <a:solidFill>
+                  <a:srgbClr val="FFFFFF"/>
+                </a:solidFill>
+                <a:latin typeface="Segoe UI"/>
+                <a:ea typeface="微软雅黑"/>
+                <a:cs typeface="微软雅黑"/>
+              </a:rPr>
+              <a:t>01</a:t>
             </a:r>
           </a:p>
         </p:txBody>
@@ -3334,8 +3360,52 @@
         </p:nvSpPr>
         <p:spPr>
           <a:xfrm>
-            <a:off x="822960" y="3794760"/>
-            <a:ext cx="9144000" cy="548640"/>
+            <a:off x="5486400" y="2286000"/>
+            <a:ext cx="6035040" cy="1828800"/>
+          </a:xfrm>
+          <a:prstGeom prst="rect">
+            <a:avLst/>
+          </a:prstGeom>
+          <a:noFill/>
+        </p:spPr>
+        <p:txBody>
+          <a:bodyPr wrap="square" anchor="t" lIns="0" rIns="0" tIns="0" bIns="0">
+            <a:spAutoFit/>
+          </a:bodyPr>
+          <a:lstStyle/>
+          <a:p>
+            <a:pPr algn="l">
+              <a:lnSpc>
+                <a:spcPct val="103000"/>
+              </a:lnSpc>
+              <a:spcAft>
+                <a:spcPts val="400"/>
+              </a:spcAft>
+            </a:pPr>
+            <a:r>
+              <a:rPr sz="3600" b="1" i="0">
+                <a:solidFill>
+                  <a:srgbClr val="EAF2FF"/>
+                </a:solidFill>
+                <a:latin typeface="Segoe UI"/>
+                <a:ea typeface="微软雅黑"/>
+                <a:cs typeface="微软雅黑"/>
+              </a:rPr>
+              <a:t>游戏设计提案</a:t>
+            </a:r>
+          </a:p>
+        </p:txBody>
+      </p:sp>
+      <p:sp>
+        <p:nvSpPr>
+          <p:cNvPr id="8" name="TextBox 7"/>
+          <p:cNvSpPr txBox="1"/>
+          <p:nvPr/>
+        </p:nvSpPr>
+        <p:spPr>
+          <a:xfrm>
+            <a:off x="5486400" y="4206240"/>
+            <a:ext cx="5852160" cy="640080"/>
           </a:xfrm>
           <a:prstGeom prst="rect">
             <a:avLst/>
@@ -3357,7 +3427,7 @@
               </a:spcAft>
             </a:pPr>
             <a:r>
-              <a:rPr sz="1800" b="0" i="0">
+              <a:rPr sz="1700" b="0" i="0">
                 <a:solidFill>
                   <a:srgbClr val="94A3C4"/>
                 </a:solidFill>
@@ -3365,51 +3435,7 @@
                 <a:ea typeface="微软雅黑"/>
                 <a:cs typeface="微软雅黑"/>
               </a:rPr>
-              <a:t>玩法原型提案 · 在此输入项目代号</a:t>
-            </a:r>
-          </a:p>
-        </p:txBody>
-      </p:sp>
-      <p:sp>
-        <p:nvSpPr>
-          <p:cNvPr id="8" name="TextBox 7"/>
-          <p:cNvSpPr txBox="1"/>
-          <p:nvPr/>
-        </p:nvSpPr>
-        <p:spPr>
-          <a:xfrm>
-            <a:off x="822960" y="5394960"/>
-            <a:ext cx="7315200" cy="365760"/>
-          </a:xfrm>
-          <a:prstGeom prst="rect">
-            <a:avLst/>
-          </a:prstGeom>
-          <a:noFill/>
-        </p:spPr>
-        <p:txBody>
-          <a:bodyPr wrap="square" anchor="t" lIns="0" rIns="0" tIns="0" bIns="0">
-            <a:spAutoFit/>
-          </a:bodyPr>
-          <a:lstStyle/>
-          <a:p>
-            <a:pPr algn="l">
-              <a:lnSpc>
-                <a:spcPct val="100000"/>
-              </a:lnSpc>
-              <a:spcAft>
-                <a:spcPts val="400"/>
-              </a:spcAft>
-            </a:pPr>
-            <a:r>
-              <a:rPr sz="1200" b="0" i="0">
-                <a:solidFill>
-                  <a:srgbClr val="94A3C4"/>
-                </a:solidFill>
-                <a:latin typeface="Segoe UI"/>
-                <a:ea typeface="微软雅黑"/>
-                <a:cs typeface="微软雅黑"/>
-              </a:rPr>
-              <a:t>团队 / 组名  ·  YYYY-MM-DD</a:t>
+              <a:t>游戏设计提案 · 在此输入副标题 / 项目名称</a:t>
             </a:r>
           </a:p>
         </p:txBody>
@@ -3419,6 +3445,9 @@
   <p:clrMapOvr>
     <a:masterClrMapping/>
   </p:clrMapOvr>
+  <p:transition spd="med">
+    <p:fade/>
+  </p:transition>
 </p:sld>
 </file>
 
@@ -3515,7 +3544,7 @@
                 <a:ea typeface="微软雅黑"/>
                 <a:cs typeface="微软雅黑"/>
               </a:rPr>
-              <a:t>ROADMAP</a:t>
+              <a:t>DATA</a:t>
             </a:r>
           </a:p>
         </p:txBody>
@@ -3529,7 +3558,7 @@
         <p:spPr>
           <a:xfrm>
             <a:off x="822960" y="868680"/>
-            <a:ext cx="10515600" cy="548640"/>
+            <a:ext cx="10607040" cy="548640"/>
           </a:xfrm>
           <a:prstGeom prst="rect">
             <a:avLst/>
@@ -3691,7 +3720,7 @@
                 <a:ea typeface="微软雅黑"/>
                 <a:cs typeface="微软雅黑"/>
               </a:rPr>
-              <a:t>模块</a:t>
+              <a:t>项目</a:t>
             </a:r>
           </a:p>
         </p:txBody>
@@ -3735,7 +3764,7 @@
                 <a:ea typeface="微软雅黑"/>
                 <a:cs typeface="微软雅黑"/>
               </a:rPr>
-              <a:t>状态</a:t>
+              <a:t>内容</a:t>
             </a:r>
           </a:p>
         </p:txBody>
@@ -3779,7 +3808,7 @@
                 <a:ea typeface="微软雅黑"/>
                 <a:cs typeface="微软雅黑"/>
               </a:rPr>
-              <a:t>负责</a:t>
+              <a:t>备注</a:t>
             </a:r>
           </a:p>
         </p:txBody>
@@ -3903,7 +3932,7 @@
                 <a:ea typeface="微软雅黑"/>
                 <a:cs typeface="微软雅黑"/>
               </a:rPr>
-              <a:t>战斗</a:t>
+              <a:t>项一</a:t>
             </a:r>
           </a:p>
         </p:txBody>
@@ -3947,7 +3976,7 @@
                 <a:ea typeface="微软雅黑"/>
                 <a:cs typeface="微软雅黑"/>
               </a:rPr>
-              <a:t>在此填状态</a:t>
+              <a:t>在此填内容</a:t>
             </a:r>
           </a:p>
         </p:txBody>
@@ -3991,7 +4020,7 @@
                 <a:ea typeface="微软雅黑"/>
                 <a:cs typeface="微软雅黑"/>
               </a:rPr>
-              <a:t>在此填负责</a:t>
+              <a:t>在此填备注</a:t>
             </a:r>
           </a:p>
         </p:txBody>
@@ -4071,7 +4100,7 @@
                 <a:ea typeface="微软雅黑"/>
                 <a:cs typeface="微软雅黑"/>
               </a:rPr>
-              <a:t>关卡</a:t>
+              <a:t>项二</a:t>
             </a:r>
           </a:p>
         </p:txBody>
@@ -4115,7 +4144,7 @@
                 <a:ea typeface="微软雅黑"/>
                 <a:cs typeface="微软雅黑"/>
               </a:rPr>
-              <a:t>在此填状态</a:t>
+              <a:t>在此填内容</a:t>
             </a:r>
           </a:p>
         </p:txBody>
@@ -4159,7 +4188,7 @@
                 <a:ea typeface="微软雅黑"/>
                 <a:cs typeface="微软雅黑"/>
               </a:rPr>
-              <a:t>在此填负责</a:t>
+              <a:t>在此填备注</a:t>
             </a:r>
           </a:p>
         </p:txBody>
@@ -4283,7 +4312,7 @@
                 <a:ea typeface="微软雅黑"/>
                 <a:cs typeface="微软雅黑"/>
               </a:rPr>
-              <a:t>UI</a:t>
+              <a:t>项三</a:t>
             </a:r>
           </a:p>
         </p:txBody>
@@ -4327,7 +4356,7 @@
                 <a:ea typeface="微软雅黑"/>
                 <a:cs typeface="微软雅黑"/>
               </a:rPr>
-              <a:t>在此填状态</a:t>
+              <a:t>在此填内容</a:t>
             </a:r>
           </a:p>
         </p:txBody>
@@ -4371,7 +4400,7 @@
                 <a:ea typeface="微软雅黑"/>
                 <a:cs typeface="微软雅黑"/>
               </a:rPr>
-              <a:t>在此填负责</a:t>
+              <a:t>在此填备注</a:t>
             </a:r>
           </a:p>
         </p:txBody>
@@ -4429,7 +4458,7 @@
         <p:spPr>
           <a:xfrm>
             <a:off x="822960" y="6355080"/>
-            <a:ext cx="6400800" cy="274320"/>
+            <a:ext cx="6583680" cy="274320"/>
           </a:xfrm>
           <a:prstGeom prst="rect">
             <a:avLst/>
@@ -4469,6 +4498,9 @@
   <p:clrMapOvr>
     <a:masterClrMapping/>
   </p:clrMapOvr>
+  <p:transition spd="med">
+    <p:fade/>
+  </p:transition>
 </p:sld>
 </file>
 
@@ -4565,7 +4597,7 @@
                 <a:ea typeface="微软雅黑"/>
                 <a:cs typeface="微软雅黑"/>
               </a:rPr>
-              <a:t>CORE LOOP</a:t>
+              <a:t>KEY POINTS</a:t>
             </a:r>
           </a:p>
         </p:txBody>
@@ -4579,7 +4611,7 @@
         <p:spPr>
           <a:xfrm>
             <a:off x="822960" y="868680"/>
-            <a:ext cx="10515600" cy="548640"/>
+            <a:ext cx="10607040" cy="548640"/>
           </a:xfrm>
           <a:prstGeom prst="rect">
             <a:avLst/>
@@ -5257,7 +5289,7 @@
         <p:spPr>
           <a:xfrm>
             <a:off x="822960" y="6355080"/>
-            <a:ext cx="6400800" cy="274320"/>
+            <a:ext cx="6583680" cy="274320"/>
           </a:xfrm>
           <a:prstGeom prst="rect">
             <a:avLst/>
@@ -5297,6 +5329,9 @@
   <p:clrMapOvr>
     <a:masterClrMapping/>
   </p:clrMapOvr>
+  <p:transition spd="med">
+    <p:fade/>
+  </p:transition>
 </p:sld>
 </file>
 
@@ -5675,7 +5710,7 @@
         <p:spPr>
           <a:xfrm>
             <a:off x="822960" y="6355080"/>
-            <a:ext cx="6400800" cy="274320"/>
+            <a:ext cx="6583680" cy="274320"/>
           </a:xfrm>
           <a:prstGeom prst="rect">
             <a:avLst/>
@@ -5715,6 +5750,9 @@
   <p:clrMapOvr>
     <a:masterClrMapping/>
   </p:clrMapOvr>
+  <p:transition spd="med">
+    <p:fade/>
+  </p:transition>
 </p:sld>
 </file>
 
@@ -6035,7 +6073,7 @@
                 <a:ea typeface="微软雅黑"/>
                 <a:cs typeface="微软雅黑"/>
               </a:rPr>
-              <a:t>— 制作人</a:t>
+              <a:t>— 署名 / 出处</a:t>
             </a:r>
           </a:p>
         </p:txBody>
@@ -6093,7 +6131,7 @@
         <p:spPr>
           <a:xfrm>
             <a:off x="822960" y="6355080"/>
-            <a:ext cx="6400800" cy="274320"/>
+            <a:ext cx="6583680" cy="274320"/>
           </a:xfrm>
           <a:prstGeom prst="rect">
             <a:avLst/>
@@ -6133,6 +6171,9 @@
   <p:clrMapOvr>
     <a:masterClrMapping/>
   </p:clrMapOvr>
+  <p:transition spd="med">
+    <p:fade/>
+  </p:transition>
 </p:sld>
 </file>
 
@@ -6229,7 +6270,7 @@
                 <a:ea typeface="微软雅黑"/>
                 <a:cs typeface="微软雅黑"/>
               </a:rPr>
-              <a:t>ROADMAP</a:t>
+              <a:t>TEAM</a:t>
             </a:r>
           </a:p>
         </p:txBody>
@@ -6243,7 +6284,7 @@
         <p:spPr>
           <a:xfrm>
             <a:off x="822960" y="868680"/>
-            <a:ext cx="10515600" cy="548640"/>
+            <a:ext cx="10607040" cy="548640"/>
           </a:xfrm>
           <a:prstGeom prst="rect">
             <a:avLst/>
@@ -6541,7 +6582,7 @@
                 <a:ea typeface="微软雅黑"/>
                 <a:cs typeface="微软雅黑"/>
               </a:rPr>
-              <a:t>策划</a:t>
+              <a:t>角色一</a:t>
             </a:r>
           </a:p>
         </p:txBody>
@@ -6765,7 +6806,7 @@
                 <a:ea typeface="微软雅黑"/>
                 <a:cs typeface="微软雅黑"/>
               </a:rPr>
-              <a:t>程序</a:t>
+              <a:t>角色二</a:t>
             </a:r>
           </a:p>
         </p:txBody>
@@ -6989,7 +7030,7 @@
                 <a:ea typeface="微软雅黑"/>
                 <a:cs typeface="微软雅黑"/>
               </a:rPr>
-              <a:t>美术</a:t>
+              <a:t>角色三</a:t>
             </a:r>
           </a:p>
         </p:txBody>
@@ -7047,7 +7088,7 @@
         <p:spPr>
           <a:xfrm>
             <a:off x="822960" y="6355080"/>
-            <a:ext cx="6400800" cy="274320"/>
+            <a:ext cx="6583680" cy="274320"/>
           </a:xfrm>
           <a:prstGeom prst="rect">
             <a:avLst/>
@@ -7087,6 +7128,9 @@
   <p:clrMapOvr>
     <a:masterClrMapping/>
   </p:clrMapOvr>
+  <p:transition spd="med">
+    <p:fade/>
+  </p:transition>
 </p:sld>
 </file>
 
@@ -7146,6 +7190,2825 @@
       </p:sp>
       <p:sp>
         <p:nvSpPr>
+          <p:cNvPr id="3" name="TextBox 2"/>
+          <p:cNvSpPr txBox="1"/>
+          <p:nvPr/>
+        </p:nvSpPr>
+        <p:spPr>
+          <a:xfrm>
+            <a:off x="822960" y="566928"/>
+            <a:ext cx="7772400" cy="274320"/>
+          </a:xfrm>
+          <a:prstGeom prst="rect">
+            <a:avLst/>
+          </a:prstGeom>
+          <a:noFill/>
+        </p:spPr>
+        <p:txBody>
+          <a:bodyPr wrap="square" anchor="t" lIns="0" rIns="0" tIns="0" bIns="0">
+            <a:spAutoFit/>
+          </a:bodyPr>
+          <a:lstStyle/>
+          <a:p>
+            <a:pPr algn="l">
+              <a:lnSpc>
+                <a:spcPct val="100000"/>
+              </a:lnSpc>
+              <a:spcAft>
+                <a:spcPts val="400"/>
+              </a:spcAft>
+            </a:pPr>
+            <a:r>
+              <a:rPr sz="1150" b="1" i="0">
+                <a:solidFill>
+                  <a:srgbClr val="22D3EE"/>
+                </a:solidFill>
+                <a:latin typeface="Segoe UI"/>
+                <a:ea typeface="微软雅黑"/>
+                <a:cs typeface="微软雅黑"/>
+              </a:rPr>
+              <a:t>FAQ</a:t>
+            </a:r>
+          </a:p>
+        </p:txBody>
+      </p:sp>
+      <p:sp>
+        <p:nvSpPr>
+          <p:cNvPr id="4" name="TextBox 3"/>
+          <p:cNvSpPr txBox="1"/>
+          <p:nvPr/>
+        </p:nvSpPr>
+        <p:spPr>
+          <a:xfrm>
+            <a:off x="822960" y="868680"/>
+            <a:ext cx="10607040" cy="548640"/>
+          </a:xfrm>
+          <a:prstGeom prst="rect">
+            <a:avLst/>
+          </a:prstGeom>
+          <a:noFill/>
+        </p:spPr>
+        <p:txBody>
+          <a:bodyPr wrap="square" anchor="t" lIns="0" rIns="0" tIns="0" bIns="0">
+            <a:spAutoFit/>
+          </a:bodyPr>
+          <a:lstStyle/>
+          <a:p>
+            <a:pPr algn="l">
+              <a:lnSpc>
+                <a:spcPct val="100000"/>
+              </a:lnSpc>
+              <a:spcAft>
+                <a:spcPts val="400"/>
+              </a:spcAft>
+            </a:pPr>
+            <a:r>
+              <a:rPr sz="2800" b="1" i="0">
+                <a:solidFill>
+                  <a:srgbClr val="EAF2FF"/>
+                </a:solidFill>
+                <a:latin typeface="Segoe UI"/>
+                <a:ea typeface="微软雅黑"/>
+                <a:cs typeface="微软雅黑"/>
+              </a:rPr>
+              <a:t>常见问题</a:t>
+            </a:r>
+          </a:p>
+        </p:txBody>
+      </p:sp>
+      <p:sp>
+        <p:nvSpPr>
+          <p:cNvPr id="5" name="Rectangle 4"/>
+          <p:cNvSpPr/>
+          <p:nvPr/>
+        </p:nvSpPr>
+        <p:spPr>
+          <a:xfrm>
+            <a:off x="822960" y="1572768"/>
+            <a:ext cx="566928" cy="50292"/>
+          </a:xfrm>
+          <a:prstGeom prst="rect">
+            <a:avLst/>
+          </a:prstGeom>
+          <a:solidFill>
+            <a:srgbClr val="22D3EE"/>
+          </a:solidFill>
+          <a:ln>
+            <a:noFill/>
+          </a:ln>
+          <a:effectLst/>
+        </p:spPr>
+        <p:style>
+          <a:lnRef idx="1">
+            <a:schemeClr val="accent1"/>
+          </a:lnRef>
+          <a:fillRef idx="3">
+            <a:schemeClr val="accent1"/>
+          </a:fillRef>
+          <a:effectRef idx="2">
+            <a:schemeClr val="accent1"/>
+          </a:effectRef>
+          <a:fontRef idx="minor">
+            <a:schemeClr val="lt1"/>
+          </a:fontRef>
+        </p:style>
+        <p:txBody>
+          <a:bodyPr rtlCol="0" anchor="ctr"/>
+          <a:lstStyle/>
+          <a:p>
+            <a:pPr algn="ctr"/>
+          </a:p>
+        </p:txBody>
+      </p:sp>
+      <p:sp>
+        <p:nvSpPr>
+          <p:cNvPr id="6" name="Rounded Rectangle 5"/>
+          <p:cNvSpPr/>
+          <p:nvPr/>
+        </p:nvSpPr>
+        <p:spPr>
+          <a:xfrm>
+            <a:off x="822960" y="2103120"/>
+            <a:ext cx="10424160" cy="841248"/>
+          </a:xfrm>
+          <a:prstGeom prst="roundRect">
+            <a:avLst>
+              <a:gd name="adj" fmla="val 8000"/>
+            </a:avLst>
+          </a:prstGeom>
+          <a:solidFill>
+            <a:srgbClr val="151B2B"/>
+          </a:solidFill>
+          <a:ln w="9525">
+            <a:solidFill>
+              <a:srgbClr val="26314B"/>
+            </a:solidFill>
+          </a:ln>
+          <a:effectLst/>
+        </p:spPr>
+        <p:style>
+          <a:lnRef idx="1">
+            <a:schemeClr val="accent1"/>
+          </a:lnRef>
+          <a:fillRef idx="3">
+            <a:schemeClr val="accent1"/>
+          </a:fillRef>
+          <a:effectRef idx="2">
+            <a:schemeClr val="accent1"/>
+          </a:effectRef>
+          <a:fontRef idx="minor">
+            <a:schemeClr val="lt1"/>
+          </a:fontRef>
+        </p:style>
+        <p:txBody>
+          <a:bodyPr rtlCol="0" anchor="ctr"/>
+          <a:lstStyle/>
+          <a:p>
+            <a:pPr algn="ctr"/>
+          </a:p>
+        </p:txBody>
+      </p:sp>
+      <p:sp>
+        <p:nvSpPr>
+          <p:cNvPr id="7" name="Oval 6"/>
+          <p:cNvSpPr/>
+          <p:nvPr/>
+        </p:nvSpPr>
+        <p:spPr>
+          <a:xfrm>
+            <a:off x="1060704" y="2322576"/>
+            <a:ext cx="402336" cy="402336"/>
+          </a:xfrm>
+          <a:prstGeom prst="ellipse">
+            <a:avLst/>
+          </a:prstGeom>
+          <a:solidFill>
+            <a:srgbClr val="22D3EE"/>
+          </a:solidFill>
+          <a:ln>
+            <a:noFill/>
+          </a:ln>
+          <a:effectLst/>
+        </p:spPr>
+        <p:style>
+          <a:lnRef idx="1">
+            <a:schemeClr val="accent1"/>
+          </a:lnRef>
+          <a:fillRef idx="3">
+            <a:schemeClr val="accent1"/>
+          </a:fillRef>
+          <a:effectRef idx="2">
+            <a:schemeClr val="accent1"/>
+          </a:effectRef>
+          <a:fontRef idx="minor">
+            <a:schemeClr val="lt1"/>
+          </a:fontRef>
+        </p:style>
+        <p:txBody>
+          <a:bodyPr rtlCol="0" anchor="ctr"/>
+          <a:lstStyle/>
+          <a:p>
+            <a:pPr algn="ctr"/>
+          </a:p>
+        </p:txBody>
+      </p:sp>
+      <p:sp>
+        <p:nvSpPr>
+          <p:cNvPr id="8" name="TextBox 7"/>
+          <p:cNvSpPr txBox="1"/>
+          <p:nvPr/>
+        </p:nvSpPr>
+        <p:spPr>
+          <a:xfrm>
+            <a:off x="1060704" y="2322576"/>
+            <a:ext cx="402336" cy="402336"/>
+          </a:xfrm>
+          <a:prstGeom prst="rect">
+            <a:avLst/>
+          </a:prstGeom>
+          <a:noFill/>
+        </p:spPr>
+        <p:txBody>
+          <a:bodyPr wrap="square" anchor="ctr" lIns="0" rIns="0" tIns="0" bIns="0">
+            <a:spAutoFit/>
+          </a:bodyPr>
+          <a:lstStyle/>
+          <a:p>
+            <a:pPr algn="ctr">
+              <a:lnSpc>
+                <a:spcPct val="100000"/>
+              </a:lnSpc>
+              <a:spcAft>
+                <a:spcPts val="400"/>
+              </a:spcAft>
+            </a:pPr>
+            <a:r>
+              <a:rPr sz="1300" b="1" i="0">
+                <a:solidFill>
+                  <a:srgbClr val="FFFFFF"/>
+                </a:solidFill>
+                <a:latin typeface="Segoe UI"/>
+                <a:ea typeface="微软雅黑"/>
+                <a:cs typeface="微软雅黑"/>
+              </a:rPr>
+              <a:t>Q</a:t>
+            </a:r>
+          </a:p>
+        </p:txBody>
+      </p:sp>
+      <p:sp>
+        <p:nvSpPr>
+          <p:cNvPr id="9" name="TextBox 8"/>
+          <p:cNvSpPr txBox="1"/>
+          <p:nvPr/>
+        </p:nvSpPr>
+        <p:spPr>
+          <a:xfrm>
+            <a:off x="1691640" y="2249424"/>
+            <a:ext cx="9235440" cy="365760"/>
+          </a:xfrm>
+          <a:prstGeom prst="rect">
+            <a:avLst/>
+          </a:prstGeom>
+          <a:noFill/>
+        </p:spPr>
+        <p:txBody>
+          <a:bodyPr wrap="square" anchor="t" lIns="0" rIns="0" tIns="0" bIns="0">
+            <a:spAutoFit/>
+          </a:bodyPr>
+          <a:lstStyle/>
+          <a:p>
+            <a:pPr algn="l">
+              <a:lnSpc>
+                <a:spcPct val="100000"/>
+              </a:lnSpc>
+              <a:spcAft>
+                <a:spcPts val="400"/>
+              </a:spcAft>
+            </a:pPr>
+            <a:r>
+              <a:rPr sz="1400" b="1" i="0">
+                <a:solidFill>
+                  <a:srgbClr val="EAF2FF"/>
+                </a:solidFill>
+                <a:latin typeface="Segoe UI"/>
+                <a:ea typeface="微软雅黑"/>
+                <a:cs typeface="微软雅黑"/>
+              </a:rPr>
+              <a:t>在此输入问题一？</a:t>
+            </a:r>
+          </a:p>
+        </p:txBody>
+      </p:sp>
+      <p:sp>
+        <p:nvSpPr>
+          <p:cNvPr id="10" name="TextBox 9"/>
+          <p:cNvSpPr txBox="1"/>
+          <p:nvPr/>
+        </p:nvSpPr>
+        <p:spPr>
+          <a:xfrm>
+            <a:off x="1691640" y="2596896"/>
+            <a:ext cx="9235440" cy="310896"/>
+          </a:xfrm>
+          <a:prstGeom prst="rect">
+            <a:avLst/>
+          </a:prstGeom>
+          <a:noFill/>
+        </p:spPr>
+        <p:txBody>
+          <a:bodyPr wrap="square" anchor="t" lIns="0" rIns="0" tIns="0" bIns="0">
+            <a:spAutoFit/>
+          </a:bodyPr>
+          <a:lstStyle/>
+          <a:p>
+            <a:pPr algn="l">
+              <a:lnSpc>
+                <a:spcPct val="100000"/>
+              </a:lnSpc>
+              <a:spcAft>
+                <a:spcPts val="400"/>
+              </a:spcAft>
+            </a:pPr>
+            <a:r>
+              <a:rPr sz="1150" b="0" i="0">
+                <a:solidFill>
+                  <a:srgbClr val="94A3C4"/>
+                </a:solidFill>
+                <a:latin typeface="Segoe UI"/>
+                <a:ea typeface="微软雅黑"/>
+                <a:cs typeface="微软雅黑"/>
+              </a:rPr>
+              <a:t>在此输入回答（占位）</a:t>
+            </a:r>
+          </a:p>
+        </p:txBody>
+      </p:sp>
+      <p:sp>
+        <p:nvSpPr>
+          <p:cNvPr id="11" name="Rounded Rectangle 10"/>
+          <p:cNvSpPr/>
+          <p:nvPr/>
+        </p:nvSpPr>
+        <p:spPr>
+          <a:xfrm>
+            <a:off x="822960" y="3063239"/>
+            <a:ext cx="10424160" cy="841248"/>
+          </a:xfrm>
+          <a:prstGeom prst="roundRect">
+            <a:avLst>
+              <a:gd name="adj" fmla="val 8000"/>
+            </a:avLst>
+          </a:prstGeom>
+          <a:solidFill>
+            <a:srgbClr val="151B2B"/>
+          </a:solidFill>
+          <a:ln w="9525">
+            <a:solidFill>
+              <a:srgbClr val="26314B"/>
+            </a:solidFill>
+          </a:ln>
+          <a:effectLst/>
+        </p:spPr>
+        <p:style>
+          <a:lnRef idx="1">
+            <a:schemeClr val="accent1"/>
+          </a:lnRef>
+          <a:fillRef idx="3">
+            <a:schemeClr val="accent1"/>
+          </a:fillRef>
+          <a:effectRef idx="2">
+            <a:schemeClr val="accent1"/>
+          </a:effectRef>
+          <a:fontRef idx="minor">
+            <a:schemeClr val="lt1"/>
+          </a:fontRef>
+        </p:style>
+        <p:txBody>
+          <a:bodyPr rtlCol="0" anchor="ctr"/>
+          <a:lstStyle/>
+          <a:p>
+            <a:pPr algn="ctr"/>
+          </a:p>
+        </p:txBody>
+      </p:sp>
+      <p:sp>
+        <p:nvSpPr>
+          <p:cNvPr id="12" name="Oval 11"/>
+          <p:cNvSpPr/>
+          <p:nvPr/>
+        </p:nvSpPr>
+        <p:spPr>
+          <a:xfrm>
+            <a:off x="1060704" y="3282696"/>
+            <a:ext cx="402336" cy="402336"/>
+          </a:xfrm>
+          <a:prstGeom prst="ellipse">
+            <a:avLst/>
+          </a:prstGeom>
+          <a:solidFill>
+            <a:srgbClr val="22D3EE"/>
+          </a:solidFill>
+          <a:ln>
+            <a:noFill/>
+          </a:ln>
+          <a:effectLst/>
+        </p:spPr>
+        <p:style>
+          <a:lnRef idx="1">
+            <a:schemeClr val="accent1"/>
+          </a:lnRef>
+          <a:fillRef idx="3">
+            <a:schemeClr val="accent1"/>
+          </a:fillRef>
+          <a:effectRef idx="2">
+            <a:schemeClr val="accent1"/>
+          </a:effectRef>
+          <a:fontRef idx="minor">
+            <a:schemeClr val="lt1"/>
+          </a:fontRef>
+        </p:style>
+        <p:txBody>
+          <a:bodyPr rtlCol="0" anchor="ctr"/>
+          <a:lstStyle/>
+          <a:p>
+            <a:pPr algn="ctr"/>
+          </a:p>
+        </p:txBody>
+      </p:sp>
+      <p:sp>
+        <p:nvSpPr>
+          <p:cNvPr id="13" name="TextBox 12"/>
+          <p:cNvSpPr txBox="1"/>
+          <p:nvPr/>
+        </p:nvSpPr>
+        <p:spPr>
+          <a:xfrm>
+            <a:off x="1060704" y="3282696"/>
+            <a:ext cx="402336" cy="402336"/>
+          </a:xfrm>
+          <a:prstGeom prst="rect">
+            <a:avLst/>
+          </a:prstGeom>
+          <a:noFill/>
+        </p:spPr>
+        <p:txBody>
+          <a:bodyPr wrap="square" anchor="ctr" lIns="0" rIns="0" tIns="0" bIns="0">
+            <a:spAutoFit/>
+          </a:bodyPr>
+          <a:lstStyle/>
+          <a:p>
+            <a:pPr algn="ctr">
+              <a:lnSpc>
+                <a:spcPct val="100000"/>
+              </a:lnSpc>
+              <a:spcAft>
+                <a:spcPts val="400"/>
+              </a:spcAft>
+            </a:pPr>
+            <a:r>
+              <a:rPr sz="1300" b="1" i="0">
+                <a:solidFill>
+                  <a:srgbClr val="FFFFFF"/>
+                </a:solidFill>
+                <a:latin typeface="Segoe UI"/>
+                <a:ea typeface="微软雅黑"/>
+                <a:cs typeface="微软雅黑"/>
+              </a:rPr>
+              <a:t>Q</a:t>
+            </a:r>
+          </a:p>
+        </p:txBody>
+      </p:sp>
+      <p:sp>
+        <p:nvSpPr>
+          <p:cNvPr id="14" name="TextBox 13"/>
+          <p:cNvSpPr txBox="1"/>
+          <p:nvPr/>
+        </p:nvSpPr>
+        <p:spPr>
+          <a:xfrm>
+            <a:off x="1691640" y="3209544"/>
+            <a:ext cx="9235440" cy="365760"/>
+          </a:xfrm>
+          <a:prstGeom prst="rect">
+            <a:avLst/>
+          </a:prstGeom>
+          <a:noFill/>
+        </p:spPr>
+        <p:txBody>
+          <a:bodyPr wrap="square" anchor="t" lIns="0" rIns="0" tIns="0" bIns="0">
+            <a:spAutoFit/>
+          </a:bodyPr>
+          <a:lstStyle/>
+          <a:p>
+            <a:pPr algn="l">
+              <a:lnSpc>
+                <a:spcPct val="100000"/>
+              </a:lnSpc>
+              <a:spcAft>
+                <a:spcPts val="400"/>
+              </a:spcAft>
+            </a:pPr>
+            <a:r>
+              <a:rPr sz="1400" b="1" i="0">
+                <a:solidFill>
+                  <a:srgbClr val="EAF2FF"/>
+                </a:solidFill>
+                <a:latin typeface="Segoe UI"/>
+                <a:ea typeface="微软雅黑"/>
+                <a:cs typeface="微软雅黑"/>
+              </a:rPr>
+              <a:t>在此输入问题二？</a:t>
+            </a:r>
+          </a:p>
+        </p:txBody>
+      </p:sp>
+      <p:sp>
+        <p:nvSpPr>
+          <p:cNvPr id="15" name="TextBox 14"/>
+          <p:cNvSpPr txBox="1"/>
+          <p:nvPr/>
+        </p:nvSpPr>
+        <p:spPr>
+          <a:xfrm>
+            <a:off x="1691640" y="3557015"/>
+            <a:ext cx="9235440" cy="310896"/>
+          </a:xfrm>
+          <a:prstGeom prst="rect">
+            <a:avLst/>
+          </a:prstGeom>
+          <a:noFill/>
+        </p:spPr>
+        <p:txBody>
+          <a:bodyPr wrap="square" anchor="t" lIns="0" rIns="0" tIns="0" bIns="0">
+            <a:spAutoFit/>
+          </a:bodyPr>
+          <a:lstStyle/>
+          <a:p>
+            <a:pPr algn="l">
+              <a:lnSpc>
+                <a:spcPct val="100000"/>
+              </a:lnSpc>
+              <a:spcAft>
+                <a:spcPts val="400"/>
+              </a:spcAft>
+            </a:pPr>
+            <a:r>
+              <a:rPr sz="1150" b="0" i="0">
+                <a:solidFill>
+                  <a:srgbClr val="94A3C4"/>
+                </a:solidFill>
+                <a:latin typeface="Segoe UI"/>
+                <a:ea typeface="微软雅黑"/>
+                <a:cs typeface="微软雅黑"/>
+              </a:rPr>
+              <a:t>在此输入回答（占位）</a:t>
+            </a:r>
+          </a:p>
+        </p:txBody>
+      </p:sp>
+      <p:sp>
+        <p:nvSpPr>
+          <p:cNvPr id="16" name="Rounded Rectangle 15"/>
+          <p:cNvSpPr/>
+          <p:nvPr/>
+        </p:nvSpPr>
+        <p:spPr>
+          <a:xfrm>
+            <a:off x="822960" y="4023360"/>
+            <a:ext cx="10424160" cy="841248"/>
+          </a:xfrm>
+          <a:prstGeom prst="roundRect">
+            <a:avLst>
+              <a:gd name="adj" fmla="val 8000"/>
+            </a:avLst>
+          </a:prstGeom>
+          <a:solidFill>
+            <a:srgbClr val="151B2B"/>
+          </a:solidFill>
+          <a:ln w="9525">
+            <a:solidFill>
+              <a:srgbClr val="26314B"/>
+            </a:solidFill>
+          </a:ln>
+          <a:effectLst/>
+        </p:spPr>
+        <p:style>
+          <a:lnRef idx="1">
+            <a:schemeClr val="accent1"/>
+          </a:lnRef>
+          <a:fillRef idx="3">
+            <a:schemeClr val="accent1"/>
+          </a:fillRef>
+          <a:effectRef idx="2">
+            <a:schemeClr val="accent1"/>
+          </a:effectRef>
+          <a:fontRef idx="minor">
+            <a:schemeClr val="lt1"/>
+          </a:fontRef>
+        </p:style>
+        <p:txBody>
+          <a:bodyPr rtlCol="0" anchor="ctr"/>
+          <a:lstStyle/>
+          <a:p>
+            <a:pPr algn="ctr"/>
+          </a:p>
+        </p:txBody>
+      </p:sp>
+      <p:sp>
+        <p:nvSpPr>
+          <p:cNvPr id="17" name="Oval 16"/>
+          <p:cNvSpPr/>
+          <p:nvPr/>
+        </p:nvSpPr>
+        <p:spPr>
+          <a:xfrm>
+            <a:off x="1060704" y="4242816"/>
+            <a:ext cx="402336" cy="402336"/>
+          </a:xfrm>
+          <a:prstGeom prst="ellipse">
+            <a:avLst/>
+          </a:prstGeom>
+          <a:solidFill>
+            <a:srgbClr val="22D3EE"/>
+          </a:solidFill>
+          <a:ln>
+            <a:noFill/>
+          </a:ln>
+          <a:effectLst/>
+        </p:spPr>
+        <p:style>
+          <a:lnRef idx="1">
+            <a:schemeClr val="accent1"/>
+          </a:lnRef>
+          <a:fillRef idx="3">
+            <a:schemeClr val="accent1"/>
+          </a:fillRef>
+          <a:effectRef idx="2">
+            <a:schemeClr val="accent1"/>
+          </a:effectRef>
+          <a:fontRef idx="minor">
+            <a:schemeClr val="lt1"/>
+          </a:fontRef>
+        </p:style>
+        <p:txBody>
+          <a:bodyPr rtlCol="0" anchor="ctr"/>
+          <a:lstStyle/>
+          <a:p>
+            <a:pPr algn="ctr"/>
+          </a:p>
+        </p:txBody>
+      </p:sp>
+      <p:sp>
+        <p:nvSpPr>
+          <p:cNvPr id="18" name="TextBox 17"/>
+          <p:cNvSpPr txBox="1"/>
+          <p:nvPr/>
+        </p:nvSpPr>
+        <p:spPr>
+          <a:xfrm>
+            <a:off x="1060704" y="4242816"/>
+            <a:ext cx="402336" cy="402336"/>
+          </a:xfrm>
+          <a:prstGeom prst="rect">
+            <a:avLst/>
+          </a:prstGeom>
+          <a:noFill/>
+        </p:spPr>
+        <p:txBody>
+          <a:bodyPr wrap="square" anchor="ctr" lIns="0" rIns="0" tIns="0" bIns="0">
+            <a:spAutoFit/>
+          </a:bodyPr>
+          <a:lstStyle/>
+          <a:p>
+            <a:pPr algn="ctr">
+              <a:lnSpc>
+                <a:spcPct val="100000"/>
+              </a:lnSpc>
+              <a:spcAft>
+                <a:spcPts val="400"/>
+              </a:spcAft>
+            </a:pPr>
+            <a:r>
+              <a:rPr sz="1300" b="1" i="0">
+                <a:solidFill>
+                  <a:srgbClr val="FFFFFF"/>
+                </a:solidFill>
+                <a:latin typeface="Segoe UI"/>
+                <a:ea typeface="微软雅黑"/>
+                <a:cs typeface="微软雅黑"/>
+              </a:rPr>
+              <a:t>Q</a:t>
+            </a:r>
+          </a:p>
+        </p:txBody>
+      </p:sp>
+      <p:sp>
+        <p:nvSpPr>
+          <p:cNvPr id="19" name="TextBox 18"/>
+          <p:cNvSpPr txBox="1"/>
+          <p:nvPr/>
+        </p:nvSpPr>
+        <p:spPr>
+          <a:xfrm>
+            <a:off x="1691640" y="4169664"/>
+            <a:ext cx="9235440" cy="365760"/>
+          </a:xfrm>
+          <a:prstGeom prst="rect">
+            <a:avLst/>
+          </a:prstGeom>
+          <a:noFill/>
+        </p:spPr>
+        <p:txBody>
+          <a:bodyPr wrap="square" anchor="t" lIns="0" rIns="0" tIns="0" bIns="0">
+            <a:spAutoFit/>
+          </a:bodyPr>
+          <a:lstStyle/>
+          <a:p>
+            <a:pPr algn="l">
+              <a:lnSpc>
+                <a:spcPct val="100000"/>
+              </a:lnSpc>
+              <a:spcAft>
+                <a:spcPts val="400"/>
+              </a:spcAft>
+            </a:pPr>
+            <a:r>
+              <a:rPr sz="1400" b="1" i="0">
+                <a:solidFill>
+                  <a:srgbClr val="EAF2FF"/>
+                </a:solidFill>
+                <a:latin typeface="Segoe UI"/>
+                <a:ea typeface="微软雅黑"/>
+                <a:cs typeface="微软雅黑"/>
+              </a:rPr>
+              <a:t>在此输入问题三？</a:t>
+            </a:r>
+          </a:p>
+        </p:txBody>
+      </p:sp>
+      <p:sp>
+        <p:nvSpPr>
+          <p:cNvPr id="20" name="TextBox 19"/>
+          <p:cNvSpPr txBox="1"/>
+          <p:nvPr/>
+        </p:nvSpPr>
+        <p:spPr>
+          <a:xfrm>
+            <a:off x="1691640" y="4517136"/>
+            <a:ext cx="9235440" cy="310896"/>
+          </a:xfrm>
+          <a:prstGeom prst="rect">
+            <a:avLst/>
+          </a:prstGeom>
+          <a:noFill/>
+        </p:spPr>
+        <p:txBody>
+          <a:bodyPr wrap="square" anchor="t" lIns="0" rIns="0" tIns="0" bIns="0">
+            <a:spAutoFit/>
+          </a:bodyPr>
+          <a:lstStyle/>
+          <a:p>
+            <a:pPr algn="l">
+              <a:lnSpc>
+                <a:spcPct val="100000"/>
+              </a:lnSpc>
+              <a:spcAft>
+                <a:spcPts val="400"/>
+              </a:spcAft>
+            </a:pPr>
+            <a:r>
+              <a:rPr sz="1150" b="0" i="0">
+                <a:solidFill>
+                  <a:srgbClr val="94A3C4"/>
+                </a:solidFill>
+                <a:latin typeface="Segoe UI"/>
+                <a:ea typeface="微软雅黑"/>
+                <a:cs typeface="微软雅黑"/>
+              </a:rPr>
+              <a:t>在此输入回答（占位）</a:t>
+            </a:r>
+          </a:p>
+        </p:txBody>
+      </p:sp>
+      <p:sp>
+        <p:nvSpPr>
+          <p:cNvPr id="21" name="Rectangle 20"/>
+          <p:cNvSpPr/>
+          <p:nvPr/>
+        </p:nvSpPr>
+        <p:spPr>
+          <a:xfrm>
+            <a:off x="822960" y="6291072"/>
+            <a:ext cx="10545775" cy="7315"/>
+          </a:xfrm>
+          <a:prstGeom prst="rect">
+            <a:avLst/>
+          </a:prstGeom>
+          <a:solidFill>
+            <a:srgbClr val="26314B"/>
+          </a:solidFill>
+          <a:ln>
+            <a:noFill/>
+          </a:ln>
+          <a:effectLst/>
+        </p:spPr>
+        <p:style>
+          <a:lnRef idx="1">
+            <a:schemeClr val="accent1"/>
+          </a:lnRef>
+          <a:fillRef idx="3">
+            <a:schemeClr val="accent1"/>
+          </a:fillRef>
+          <a:effectRef idx="2">
+            <a:schemeClr val="accent1"/>
+          </a:effectRef>
+          <a:fontRef idx="minor">
+            <a:schemeClr val="lt1"/>
+          </a:fontRef>
+        </p:style>
+        <p:txBody>
+          <a:bodyPr rtlCol="0" anchor="ctr"/>
+          <a:lstStyle/>
+          <a:p>
+            <a:pPr algn="ctr"/>
+          </a:p>
+        </p:txBody>
+      </p:sp>
+      <p:sp>
+        <p:nvSpPr>
+          <p:cNvPr id="22" name="TextBox 21"/>
+          <p:cNvSpPr txBox="1"/>
+          <p:nvPr/>
+        </p:nvSpPr>
+        <p:spPr>
+          <a:xfrm>
+            <a:off x="822960" y="6355080"/>
+            <a:ext cx="6583680" cy="274320"/>
+          </a:xfrm>
+          <a:prstGeom prst="rect">
+            <a:avLst/>
+          </a:prstGeom>
+          <a:noFill/>
+        </p:spPr>
+        <p:txBody>
+          <a:bodyPr wrap="square" anchor="t" lIns="0" rIns="0" tIns="0" bIns="0">
+            <a:spAutoFit/>
+          </a:bodyPr>
+          <a:lstStyle/>
+          <a:p>
+            <a:pPr algn="l">
+              <a:lnSpc>
+                <a:spcPct val="100000"/>
+              </a:lnSpc>
+              <a:spcAft>
+                <a:spcPts val="400"/>
+              </a:spcAft>
+            </a:pPr>
+            <a:r>
+              <a:rPr sz="900" b="0" i="0">
+                <a:solidFill>
+                  <a:srgbClr val="94A3C4"/>
+                </a:solidFill>
+                <a:latin typeface="Segoe UI"/>
+                <a:ea typeface="微软雅黑"/>
+                <a:cs typeface="微软雅黑"/>
+              </a:rPr>
+              <a:t>暗黑霓虹  ·  Dark Neon</a:t>
+            </a:r>
+          </a:p>
+        </p:txBody>
+      </p:sp>
+    </p:spTree>
+  </p:cSld>
+  <p:clrMapOvr>
+    <a:masterClrMapping/>
+  </p:clrMapOvr>
+  <p:transition spd="med">
+    <p:fade/>
+  </p:transition>
+</p:sld>
+</file>
+
+<file path=ppt/slides/slide16.xml><?xml version="1.0" encoding="utf-8"?>
+<p:sld xmlns:a="http://schemas.openxmlformats.org/drawingml/2006/main" xmlns:p="http://schemas.openxmlformats.org/presentationml/2006/main" xmlns:r="http://schemas.openxmlformats.org/officeDocument/2006/relationships">
+  <p:cSld>
+    <p:spTree>
+      <p:nvGrpSpPr>
+        <p:cNvPr id="1" name=""/>
+        <p:cNvGrpSpPr/>
+        <p:nvPr/>
+      </p:nvGrpSpPr>
+      <p:grpSpPr/>
+      <p:sp>
+        <p:nvSpPr>
+          <p:cNvPr id="2" name="Rectangle 1"/>
+          <p:cNvSpPr/>
+          <p:nvPr/>
+        </p:nvSpPr>
+        <p:spPr>
+          <a:xfrm>
+            <a:off x="0" y="0"/>
+            <a:ext cx="12191695" cy="6858000"/>
+          </a:xfrm>
+          <a:prstGeom prst="rect">
+            <a:avLst/>
+          </a:prstGeom>
+          <a:solidFill>
+            <a:srgbClr val="0B0F1A"/>
+          </a:solidFill>
+          <a:ln>
+            <a:noFill/>
+          </a:ln>
+          <a:effectLst/>
+        </p:spPr>
+        <p:style>
+          <a:lnRef idx="1">
+            <a:schemeClr val="accent1"/>
+          </a:lnRef>
+          <a:fillRef idx="3">
+            <a:schemeClr val="accent1"/>
+          </a:fillRef>
+          <a:effectRef idx="2">
+            <a:schemeClr val="accent1"/>
+          </a:effectRef>
+          <a:fontRef idx="minor">
+            <a:schemeClr val="lt1"/>
+          </a:fontRef>
+        </p:style>
+        <p:txBody>
+          <a:bodyPr rtlCol="0" anchor="ctr"/>
+          <a:lstStyle/>
+          <a:p>
+            <a:pPr algn="ctr"/>
+          </a:p>
+        </p:txBody>
+      </p:sp>
+      <p:sp>
+        <p:nvSpPr>
+          <p:cNvPr id="3" name="TextBox 2"/>
+          <p:cNvSpPr txBox="1"/>
+          <p:nvPr/>
+        </p:nvSpPr>
+        <p:spPr>
+          <a:xfrm>
+            <a:off x="822960" y="566928"/>
+            <a:ext cx="7772400" cy="274320"/>
+          </a:xfrm>
+          <a:prstGeom prst="rect">
+            <a:avLst/>
+          </a:prstGeom>
+          <a:noFill/>
+        </p:spPr>
+        <p:txBody>
+          <a:bodyPr wrap="square" anchor="t" lIns="0" rIns="0" tIns="0" bIns="0">
+            <a:spAutoFit/>
+          </a:bodyPr>
+          <a:lstStyle/>
+          <a:p>
+            <a:pPr algn="l">
+              <a:lnSpc>
+                <a:spcPct val="100000"/>
+              </a:lnSpc>
+              <a:spcAft>
+                <a:spcPts val="400"/>
+              </a:spcAft>
+            </a:pPr>
+            <a:r>
+              <a:rPr sz="1150" b="1" i="0">
+                <a:solidFill>
+                  <a:srgbClr val="22D3EE"/>
+                </a:solidFill>
+                <a:latin typeface="Segoe UI"/>
+                <a:ea typeface="微软雅黑"/>
+                <a:cs typeface="微软雅黑"/>
+              </a:rPr>
+              <a:t>ROADMAP</a:t>
+            </a:r>
+          </a:p>
+        </p:txBody>
+      </p:sp>
+      <p:sp>
+        <p:nvSpPr>
+          <p:cNvPr id="4" name="TextBox 3"/>
+          <p:cNvSpPr txBox="1"/>
+          <p:nvPr/>
+        </p:nvSpPr>
+        <p:spPr>
+          <a:xfrm>
+            <a:off x="822960" y="868680"/>
+            <a:ext cx="10607040" cy="548640"/>
+          </a:xfrm>
+          <a:prstGeom prst="rect">
+            <a:avLst/>
+          </a:prstGeom>
+          <a:noFill/>
+        </p:spPr>
+        <p:txBody>
+          <a:bodyPr wrap="square" anchor="t" lIns="0" rIns="0" tIns="0" bIns="0">
+            <a:spAutoFit/>
+          </a:bodyPr>
+          <a:lstStyle/>
+          <a:p>
+            <a:pPr algn="l">
+              <a:lnSpc>
+                <a:spcPct val="100000"/>
+              </a:lnSpc>
+              <a:spcAft>
+                <a:spcPts val="400"/>
+              </a:spcAft>
+            </a:pPr>
+            <a:r>
+              <a:rPr sz="2800" b="1" i="0">
+                <a:solidFill>
+                  <a:srgbClr val="EAF2FF"/>
+                </a:solidFill>
+                <a:latin typeface="Segoe UI"/>
+                <a:ea typeface="微软雅黑"/>
+                <a:cs typeface="微软雅黑"/>
+              </a:rPr>
+              <a:t>多线路线图</a:t>
+            </a:r>
+          </a:p>
+        </p:txBody>
+      </p:sp>
+      <p:sp>
+        <p:nvSpPr>
+          <p:cNvPr id="5" name="Rectangle 4"/>
+          <p:cNvSpPr/>
+          <p:nvPr/>
+        </p:nvSpPr>
+        <p:spPr>
+          <a:xfrm>
+            <a:off x="822960" y="1572768"/>
+            <a:ext cx="566928" cy="50292"/>
+          </a:xfrm>
+          <a:prstGeom prst="rect">
+            <a:avLst/>
+          </a:prstGeom>
+          <a:solidFill>
+            <a:srgbClr val="22D3EE"/>
+          </a:solidFill>
+          <a:ln>
+            <a:noFill/>
+          </a:ln>
+          <a:effectLst/>
+        </p:spPr>
+        <p:style>
+          <a:lnRef idx="1">
+            <a:schemeClr val="accent1"/>
+          </a:lnRef>
+          <a:fillRef idx="3">
+            <a:schemeClr val="accent1"/>
+          </a:fillRef>
+          <a:effectRef idx="2">
+            <a:schemeClr val="accent1"/>
+          </a:effectRef>
+          <a:fontRef idx="minor">
+            <a:schemeClr val="lt1"/>
+          </a:fontRef>
+        </p:style>
+        <p:txBody>
+          <a:bodyPr rtlCol="0" anchor="ctr"/>
+          <a:lstStyle/>
+          <a:p>
+            <a:pPr algn="ctr"/>
+          </a:p>
+        </p:txBody>
+      </p:sp>
+      <p:sp>
+        <p:nvSpPr>
+          <p:cNvPr id="6" name="TextBox 5"/>
+          <p:cNvSpPr txBox="1"/>
+          <p:nvPr/>
+        </p:nvSpPr>
+        <p:spPr>
+          <a:xfrm>
+            <a:off x="822960" y="2368296"/>
+            <a:ext cx="1371600" cy="365760"/>
+          </a:xfrm>
+          <a:prstGeom prst="rect">
+            <a:avLst/>
+          </a:prstGeom>
+          <a:noFill/>
+        </p:spPr>
+        <p:txBody>
+          <a:bodyPr wrap="square" anchor="t" lIns="0" rIns="0" tIns="0" bIns="0">
+            <a:spAutoFit/>
+          </a:bodyPr>
+          <a:lstStyle/>
+          <a:p>
+            <a:pPr algn="l">
+              <a:lnSpc>
+                <a:spcPct val="100000"/>
+              </a:lnSpc>
+              <a:spcAft>
+                <a:spcPts val="400"/>
+              </a:spcAft>
+            </a:pPr>
+            <a:r>
+              <a:rPr sz="1300" b="1" i="0">
+                <a:solidFill>
+                  <a:srgbClr val="EAF2FF"/>
+                </a:solidFill>
+                <a:latin typeface="Segoe UI"/>
+                <a:ea typeface="微软雅黑"/>
+                <a:cs typeface="微软雅黑"/>
+              </a:rPr>
+              <a:t>线一</a:t>
+            </a:r>
+          </a:p>
+        </p:txBody>
+      </p:sp>
+      <p:cxnSp>
+        <p:nvCxnSpPr>
+          <p:cNvPr id="7" name="Connector 6"/>
+          <p:cNvCxnSpPr/>
+          <p:nvPr/>
+        </p:nvCxnSpPr>
+        <p:spPr>
+          <a:xfrm>
+            <a:off x="2286000" y="2971800"/>
+            <a:ext cx="9052560" cy="0"/>
+          </a:xfrm>
+          <a:prstGeom prst="line">
+            <a:avLst/>
+          </a:prstGeom>
+          <a:ln w="12700">
+            <a:solidFill>
+              <a:srgbClr val="26314B"/>
+            </a:solidFill>
+          </a:ln>
+          <a:effectLst/>
+        </p:spPr>
+        <p:style>
+          <a:lnRef idx="2">
+            <a:schemeClr val="accent1"/>
+          </a:lnRef>
+          <a:fillRef idx="0">
+            <a:schemeClr val="accent1"/>
+          </a:fillRef>
+          <a:effectRef idx="1">
+            <a:schemeClr val="accent1"/>
+          </a:effectRef>
+          <a:fontRef idx="minor">
+            <a:schemeClr val="tx1"/>
+          </a:fontRef>
+        </p:style>
+      </p:cxnSp>
+      <p:sp>
+        <p:nvSpPr>
+          <p:cNvPr id="8" name="Rounded Rectangle 7"/>
+          <p:cNvSpPr/>
+          <p:nvPr/>
+        </p:nvSpPr>
+        <p:spPr>
+          <a:xfrm>
+            <a:off x="2377440" y="2258568"/>
+            <a:ext cx="1042415" cy="1335024"/>
+          </a:xfrm>
+          <a:prstGeom prst="roundRect">
+            <a:avLst>
+              <a:gd name="adj" fmla="val 30000"/>
+            </a:avLst>
+          </a:prstGeom>
+          <a:solidFill>
+            <a:srgbClr val="22D3EE">
+              <a:alpha val="90000"/>
+            </a:srgbClr>
+          </a:solidFill>
+          <a:ln>
+            <a:noFill/>
+          </a:ln>
+          <a:effectLst/>
+        </p:spPr>
+        <p:style>
+          <a:lnRef idx="1">
+            <a:schemeClr val="accent1"/>
+          </a:lnRef>
+          <a:fillRef idx="3">
+            <a:schemeClr val="accent1"/>
+          </a:fillRef>
+          <a:effectRef idx="2">
+            <a:schemeClr val="accent1"/>
+          </a:effectRef>
+          <a:fontRef idx="minor">
+            <a:schemeClr val="lt1"/>
+          </a:fontRef>
+        </p:style>
+        <p:txBody>
+          <a:bodyPr rtlCol="0" anchor="ctr"/>
+          <a:lstStyle/>
+          <a:p>
+            <a:pPr algn="ctr"/>
+          </a:p>
+        </p:txBody>
+      </p:sp>
+      <p:sp>
+        <p:nvSpPr>
+          <p:cNvPr id="9" name="TextBox 8"/>
+          <p:cNvSpPr txBox="1"/>
+          <p:nvPr/>
+        </p:nvSpPr>
+        <p:spPr>
+          <a:xfrm>
+            <a:off x="2487168" y="2295144"/>
+            <a:ext cx="822959" cy="1261872"/>
+          </a:xfrm>
+          <a:prstGeom prst="rect">
+            <a:avLst/>
+          </a:prstGeom>
+          <a:noFill/>
+        </p:spPr>
+        <p:txBody>
+          <a:bodyPr wrap="square" anchor="ctr" lIns="0" rIns="0" tIns="0" bIns="0">
+            <a:spAutoFit/>
+          </a:bodyPr>
+          <a:lstStyle/>
+          <a:p>
+            <a:pPr algn="l">
+              <a:lnSpc>
+                <a:spcPct val="100000"/>
+              </a:lnSpc>
+              <a:spcAft>
+                <a:spcPts val="400"/>
+              </a:spcAft>
+            </a:pPr>
+            <a:r>
+              <a:rPr sz="1050" b="1" i="0">
+                <a:solidFill>
+                  <a:srgbClr val="FFFFFF"/>
+                </a:solidFill>
+                <a:latin typeface="Segoe UI"/>
+                <a:ea typeface="微软雅黑"/>
+                <a:cs typeface="微软雅黑"/>
+              </a:rPr>
+              <a:t>任务</a:t>
+            </a:r>
+          </a:p>
+        </p:txBody>
+      </p:sp>
+      <p:sp>
+        <p:nvSpPr>
+          <p:cNvPr id="10" name="Rounded Rectangle 9"/>
+          <p:cNvSpPr/>
+          <p:nvPr/>
+        </p:nvSpPr>
+        <p:spPr>
+          <a:xfrm>
+            <a:off x="4572000" y="2258568"/>
+            <a:ext cx="1042415" cy="1335024"/>
+          </a:xfrm>
+          <a:prstGeom prst="roundRect">
+            <a:avLst>
+              <a:gd name="adj" fmla="val 30000"/>
+            </a:avLst>
+          </a:prstGeom>
+          <a:solidFill>
+            <a:srgbClr val="22D3EE">
+              <a:alpha val="90000"/>
+            </a:srgbClr>
+          </a:solidFill>
+          <a:ln>
+            <a:noFill/>
+          </a:ln>
+          <a:effectLst/>
+        </p:spPr>
+        <p:style>
+          <a:lnRef idx="1">
+            <a:schemeClr val="accent1"/>
+          </a:lnRef>
+          <a:fillRef idx="3">
+            <a:schemeClr val="accent1"/>
+          </a:fillRef>
+          <a:effectRef idx="2">
+            <a:schemeClr val="accent1"/>
+          </a:effectRef>
+          <a:fontRef idx="minor">
+            <a:schemeClr val="lt1"/>
+          </a:fontRef>
+        </p:style>
+        <p:txBody>
+          <a:bodyPr rtlCol="0" anchor="ctr"/>
+          <a:lstStyle/>
+          <a:p>
+            <a:pPr algn="ctr"/>
+          </a:p>
+        </p:txBody>
+      </p:sp>
+      <p:sp>
+        <p:nvSpPr>
+          <p:cNvPr id="11" name="TextBox 10"/>
+          <p:cNvSpPr txBox="1"/>
+          <p:nvPr/>
+        </p:nvSpPr>
+        <p:spPr>
+          <a:xfrm>
+            <a:off x="4681728" y="2295144"/>
+            <a:ext cx="822959" cy="1261872"/>
+          </a:xfrm>
+          <a:prstGeom prst="rect">
+            <a:avLst/>
+          </a:prstGeom>
+          <a:noFill/>
+        </p:spPr>
+        <p:txBody>
+          <a:bodyPr wrap="square" anchor="ctr" lIns="0" rIns="0" tIns="0" bIns="0">
+            <a:spAutoFit/>
+          </a:bodyPr>
+          <a:lstStyle/>
+          <a:p>
+            <a:pPr algn="l">
+              <a:lnSpc>
+                <a:spcPct val="100000"/>
+              </a:lnSpc>
+              <a:spcAft>
+                <a:spcPts val="400"/>
+              </a:spcAft>
+            </a:pPr>
+            <a:r>
+              <a:rPr sz="1050" b="1" i="0">
+                <a:solidFill>
+                  <a:srgbClr val="FFFFFF"/>
+                </a:solidFill>
+                <a:latin typeface="Segoe UI"/>
+                <a:ea typeface="微软雅黑"/>
+                <a:cs typeface="微软雅黑"/>
+              </a:rPr>
+              <a:t>任务</a:t>
+            </a:r>
+          </a:p>
+        </p:txBody>
+      </p:sp>
+      <p:sp>
+        <p:nvSpPr>
+          <p:cNvPr id="12" name="Rounded Rectangle 11"/>
+          <p:cNvSpPr/>
+          <p:nvPr/>
+        </p:nvSpPr>
+        <p:spPr>
+          <a:xfrm>
+            <a:off x="6766560" y="2258568"/>
+            <a:ext cx="1042415" cy="1335024"/>
+          </a:xfrm>
+          <a:prstGeom prst="roundRect">
+            <a:avLst>
+              <a:gd name="adj" fmla="val 30000"/>
+            </a:avLst>
+          </a:prstGeom>
+          <a:solidFill>
+            <a:srgbClr val="22D3EE">
+              <a:alpha val="90000"/>
+            </a:srgbClr>
+          </a:solidFill>
+          <a:ln>
+            <a:noFill/>
+          </a:ln>
+          <a:effectLst/>
+        </p:spPr>
+        <p:style>
+          <a:lnRef idx="1">
+            <a:schemeClr val="accent1"/>
+          </a:lnRef>
+          <a:fillRef idx="3">
+            <a:schemeClr val="accent1"/>
+          </a:fillRef>
+          <a:effectRef idx="2">
+            <a:schemeClr val="accent1"/>
+          </a:effectRef>
+          <a:fontRef idx="minor">
+            <a:schemeClr val="lt1"/>
+          </a:fontRef>
+        </p:style>
+        <p:txBody>
+          <a:bodyPr rtlCol="0" anchor="ctr"/>
+          <a:lstStyle/>
+          <a:p>
+            <a:pPr algn="ctr"/>
+          </a:p>
+        </p:txBody>
+      </p:sp>
+      <p:sp>
+        <p:nvSpPr>
+          <p:cNvPr id="13" name="TextBox 12"/>
+          <p:cNvSpPr txBox="1"/>
+          <p:nvPr/>
+        </p:nvSpPr>
+        <p:spPr>
+          <a:xfrm>
+            <a:off x="6876288" y="2295144"/>
+            <a:ext cx="822959" cy="1261872"/>
+          </a:xfrm>
+          <a:prstGeom prst="rect">
+            <a:avLst/>
+          </a:prstGeom>
+          <a:noFill/>
+        </p:spPr>
+        <p:txBody>
+          <a:bodyPr wrap="square" anchor="ctr" lIns="0" rIns="0" tIns="0" bIns="0">
+            <a:spAutoFit/>
+          </a:bodyPr>
+          <a:lstStyle/>
+          <a:p>
+            <a:pPr algn="l">
+              <a:lnSpc>
+                <a:spcPct val="100000"/>
+              </a:lnSpc>
+              <a:spcAft>
+                <a:spcPts val="400"/>
+              </a:spcAft>
+            </a:pPr>
+            <a:r>
+              <a:rPr sz="1050" b="1" i="0">
+                <a:solidFill>
+                  <a:srgbClr val="FFFFFF"/>
+                </a:solidFill>
+                <a:latin typeface="Segoe UI"/>
+                <a:ea typeface="微软雅黑"/>
+                <a:cs typeface="微软雅黑"/>
+              </a:rPr>
+              <a:t>任务</a:t>
+            </a:r>
+          </a:p>
+        </p:txBody>
+      </p:sp>
+      <p:sp>
+        <p:nvSpPr>
+          <p:cNvPr id="14" name="TextBox 13"/>
+          <p:cNvSpPr txBox="1"/>
+          <p:nvPr/>
+        </p:nvSpPr>
+        <p:spPr>
+          <a:xfrm>
+            <a:off x="822960" y="4014216"/>
+            <a:ext cx="1371600" cy="365760"/>
+          </a:xfrm>
+          <a:prstGeom prst="rect">
+            <a:avLst/>
+          </a:prstGeom>
+          <a:noFill/>
+        </p:spPr>
+        <p:txBody>
+          <a:bodyPr wrap="square" anchor="t" lIns="0" rIns="0" tIns="0" bIns="0">
+            <a:spAutoFit/>
+          </a:bodyPr>
+          <a:lstStyle/>
+          <a:p>
+            <a:pPr algn="l">
+              <a:lnSpc>
+                <a:spcPct val="100000"/>
+              </a:lnSpc>
+              <a:spcAft>
+                <a:spcPts val="400"/>
+              </a:spcAft>
+            </a:pPr>
+            <a:r>
+              <a:rPr sz="1300" b="1" i="0">
+                <a:solidFill>
+                  <a:srgbClr val="EAF2FF"/>
+                </a:solidFill>
+                <a:latin typeface="Segoe UI"/>
+                <a:ea typeface="微软雅黑"/>
+                <a:cs typeface="微软雅黑"/>
+              </a:rPr>
+              <a:t>线二</a:t>
+            </a:r>
+          </a:p>
+        </p:txBody>
+      </p:sp>
+      <p:cxnSp>
+        <p:nvCxnSpPr>
+          <p:cNvPr id="15" name="Connector 14"/>
+          <p:cNvCxnSpPr/>
+          <p:nvPr/>
+        </p:nvCxnSpPr>
+        <p:spPr>
+          <a:xfrm>
+            <a:off x="2286000" y="4617720"/>
+            <a:ext cx="9052560" cy="0"/>
+          </a:xfrm>
+          <a:prstGeom prst="line">
+            <a:avLst/>
+          </a:prstGeom>
+          <a:ln w="12700">
+            <a:solidFill>
+              <a:srgbClr val="26314B"/>
+            </a:solidFill>
+          </a:ln>
+          <a:effectLst/>
+        </p:spPr>
+        <p:style>
+          <a:lnRef idx="2">
+            <a:schemeClr val="accent1"/>
+          </a:lnRef>
+          <a:fillRef idx="0">
+            <a:schemeClr val="accent1"/>
+          </a:fillRef>
+          <a:effectRef idx="1">
+            <a:schemeClr val="accent1"/>
+          </a:effectRef>
+          <a:fontRef idx="minor">
+            <a:schemeClr val="tx1"/>
+          </a:fontRef>
+        </p:style>
+      </p:cxnSp>
+      <p:sp>
+        <p:nvSpPr>
+          <p:cNvPr id="16" name="Rounded Rectangle 15"/>
+          <p:cNvSpPr/>
+          <p:nvPr/>
+        </p:nvSpPr>
+        <p:spPr>
+          <a:xfrm>
+            <a:off x="2377440" y="3904488"/>
+            <a:ext cx="1042415" cy="1335024"/>
+          </a:xfrm>
+          <a:prstGeom prst="roundRect">
+            <a:avLst>
+              <a:gd name="adj" fmla="val 30000"/>
+            </a:avLst>
+          </a:prstGeom>
+          <a:solidFill>
+            <a:srgbClr val="F472B6">
+              <a:alpha val="90000"/>
+            </a:srgbClr>
+          </a:solidFill>
+          <a:ln>
+            <a:noFill/>
+          </a:ln>
+          <a:effectLst/>
+        </p:spPr>
+        <p:style>
+          <a:lnRef idx="1">
+            <a:schemeClr val="accent1"/>
+          </a:lnRef>
+          <a:fillRef idx="3">
+            <a:schemeClr val="accent1"/>
+          </a:fillRef>
+          <a:effectRef idx="2">
+            <a:schemeClr val="accent1"/>
+          </a:effectRef>
+          <a:fontRef idx="minor">
+            <a:schemeClr val="lt1"/>
+          </a:fontRef>
+        </p:style>
+        <p:txBody>
+          <a:bodyPr rtlCol="0" anchor="ctr"/>
+          <a:lstStyle/>
+          <a:p>
+            <a:pPr algn="ctr"/>
+          </a:p>
+        </p:txBody>
+      </p:sp>
+      <p:sp>
+        <p:nvSpPr>
+          <p:cNvPr id="17" name="TextBox 16"/>
+          <p:cNvSpPr txBox="1"/>
+          <p:nvPr/>
+        </p:nvSpPr>
+        <p:spPr>
+          <a:xfrm>
+            <a:off x="2487168" y="3941064"/>
+            <a:ext cx="822959" cy="1261872"/>
+          </a:xfrm>
+          <a:prstGeom prst="rect">
+            <a:avLst/>
+          </a:prstGeom>
+          <a:noFill/>
+        </p:spPr>
+        <p:txBody>
+          <a:bodyPr wrap="square" anchor="ctr" lIns="0" rIns="0" tIns="0" bIns="0">
+            <a:spAutoFit/>
+          </a:bodyPr>
+          <a:lstStyle/>
+          <a:p>
+            <a:pPr algn="l">
+              <a:lnSpc>
+                <a:spcPct val="100000"/>
+              </a:lnSpc>
+              <a:spcAft>
+                <a:spcPts val="400"/>
+              </a:spcAft>
+            </a:pPr>
+            <a:r>
+              <a:rPr sz="1050" b="1" i="0">
+                <a:solidFill>
+                  <a:srgbClr val="FFFFFF"/>
+                </a:solidFill>
+                <a:latin typeface="Segoe UI"/>
+                <a:ea typeface="微软雅黑"/>
+                <a:cs typeface="微软雅黑"/>
+              </a:rPr>
+              <a:t>任务</a:t>
+            </a:r>
+          </a:p>
+        </p:txBody>
+      </p:sp>
+      <p:sp>
+        <p:nvSpPr>
+          <p:cNvPr id="18" name="Rounded Rectangle 17"/>
+          <p:cNvSpPr/>
+          <p:nvPr/>
+        </p:nvSpPr>
+        <p:spPr>
+          <a:xfrm>
+            <a:off x="4572000" y="3904488"/>
+            <a:ext cx="1042415" cy="1335024"/>
+          </a:xfrm>
+          <a:prstGeom prst="roundRect">
+            <a:avLst>
+              <a:gd name="adj" fmla="val 30000"/>
+            </a:avLst>
+          </a:prstGeom>
+          <a:solidFill>
+            <a:srgbClr val="F472B6">
+              <a:alpha val="90000"/>
+            </a:srgbClr>
+          </a:solidFill>
+          <a:ln>
+            <a:noFill/>
+          </a:ln>
+          <a:effectLst/>
+        </p:spPr>
+        <p:style>
+          <a:lnRef idx="1">
+            <a:schemeClr val="accent1"/>
+          </a:lnRef>
+          <a:fillRef idx="3">
+            <a:schemeClr val="accent1"/>
+          </a:fillRef>
+          <a:effectRef idx="2">
+            <a:schemeClr val="accent1"/>
+          </a:effectRef>
+          <a:fontRef idx="minor">
+            <a:schemeClr val="lt1"/>
+          </a:fontRef>
+        </p:style>
+        <p:txBody>
+          <a:bodyPr rtlCol="0" anchor="ctr"/>
+          <a:lstStyle/>
+          <a:p>
+            <a:pPr algn="ctr"/>
+          </a:p>
+        </p:txBody>
+      </p:sp>
+      <p:sp>
+        <p:nvSpPr>
+          <p:cNvPr id="19" name="TextBox 18"/>
+          <p:cNvSpPr txBox="1"/>
+          <p:nvPr/>
+        </p:nvSpPr>
+        <p:spPr>
+          <a:xfrm>
+            <a:off x="4681728" y="3941064"/>
+            <a:ext cx="822959" cy="1261872"/>
+          </a:xfrm>
+          <a:prstGeom prst="rect">
+            <a:avLst/>
+          </a:prstGeom>
+          <a:noFill/>
+        </p:spPr>
+        <p:txBody>
+          <a:bodyPr wrap="square" anchor="ctr" lIns="0" rIns="0" tIns="0" bIns="0">
+            <a:spAutoFit/>
+          </a:bodyPr>
+          <a:lstStyle/>
+          <a:p>
+            <a:pPr algn="l">
+              <a:lnSpc>
+                <a:spcPct val="100000"/>
+              </a:lnSpc>
+              <a:spcAft>
+                <a:spcPts val="400"/>
+              </a:spcAft>
+            </a:pPr>
+            <a:r>
+              <a:rPr sz="1050" b="1" i="0">
+                <a:solidFill>
+                  <a:srgbClr val="FFFFFF"/>
+                </a:solidFill>
+                <a:latin typeface="Segoe UI"/>
+                <a:ea typeface="微软雅黑"/>
+                <a:cs typeface="微软雅黑"/>
+              </a:rPr>
+              <a:t>任务</a:t>
+            </a:r>
+          </a:p>
+        </p:txBody>
+      </p:sp>
+      <p:sp>
+        <p:nvSpPr>
+          <p:cNvPr id="20" name="Rectangle 19"/>
+          <p:cNvSpPr/>
+          <p:nvPr/>
+        </p:nvSpPr>
+        <p:spPr>
+          <a:xfrm>
+            <a:off x="822960" y="6291072"/>
+            <a:ext cx="10545775" cy="7315"/>
+          </a:xfrm>
+          <a:prstGeom prst="rect">
+            <a:avLst/>
+          </a:prstGeom>
+          <a:solidFill>
+            <a:srgbClr val="26314B"/>
+          </a:solidFill>
+          <a:ln>
+            <a:noFill/>
+          </a:ln>
+          <a:effectLst/>
+        </p:spPr>
+        <p:style>
+          <a:lnRef idx="1">
+            <a:schemeClr val="accent1"/>
+          </a:lnRef>
+          <a:fillRef idx="3">
+            <a:schemeClr val="accent1"/>
+          </a:fillRef>
+          <a:effectRef idx="2">
+            <a:schemeClr val="accent1"/>
+          </a:effectRef>
+          <a:fontRef idx="minor">
+            <a:schemeClr val="lt1"/>
+          </a:fontRef>
+        </p:style>
+        <p:txBody>
+          <a:bodyPr rtlCol="0" anchor="ctr"/>
+          <a:lstStyle/>
+          <a:p>
+            <a:pPr algn="ctr"/>
+          </a:p>
+        </p:txBody>
+      </p:sp>
+      <p:sp>
+        <p:nvSpPr>
+          <p:cNvPr id="21" name="TextBox 20"/>
+          <p:cNvSpPr txBox="1"/>
+          <p:nvPr/>
+        </p:nvSpPr>
+        <p:spPr>
+          <a:xfrm>
+            <a:off x="822960" y="6355080"/>
+            <a:ext cx="6583680" cy="274320"/>
+          </a:xfrm>
+          <a:prstGeom prst="rect">
+            <a:avLst/>
+          </a:prstGeom>
+          <a:noFill/>
+        </p:spPr>
+        <p:txBody>
+          <a:bodyPr wrap="square" anchor="t" lIns="0" rIns="0" tIns="0" bIns="0">
+            <a:spAutoFit/>
+          </a:bodyPr>
+          <a:lstStyle/>
+          <a:p>
+            <a:pPr algn="l">
+              <a:lnSpc>
+                <a:spcPct val="100000"/>
+              </a:lnSpc>
+              <a:spcAft>
+                <a:spcPts val="400"/>
+              </a:spcAft>
+            </a:pPr>
+            <a:r>
+              <a:rPr sz="900" b="0" i="0">
+                <a:solidFill>
+                  <a:srgbClr val="94A3C4"/>
+                </a:solidFill>
+                <a:latin typeface="Segoe UI"/>
+                <a:ea typeface="微软雅黑"/>
+                <a:cs typeface="微软雅黑"/>
+              </a:rPr>
+              <a:t>暗黑霓虹  ·  Dark Neon</a:t>
+            </a:r>
+          </a:p>
+        </p:txBody>
+      </p:sp>
+    </p:spTree>
+  </p:cSld>
+  <p:clrMapOvr>
+    <a:masterClrMapping/>
+  </p:clrMapOvr>
+  <p:transition spd="med">
+    <p:fade/>
+  </p:transition>
+</p:sld>
+</file>
+
+<file path=ppt/slides/slide17.xml><?xml version="1.0" encoding="utf-8"?>
+<p:sld xmlns:a="http://schemas.openxmlformats.org/drawingml/2006/main" xmlns:p="http://schemas.openxmlformats.org/presentationml/2006/main" xmlns:r="http://schemas.openxmlformats.org/officeDocument/2006/relationships">
+  <p:cSld>
+    <p:spTree>
+      <p:nvGrpSpPr>
+        <p:cNvPr id="1" name=""/>
+        <p:cNvGrpSpPr/>
+        <p:nvPr/>
+      </p:nvGrpSpPr>
+      <p:grpSpPr/>
+      <p:sp>
+        <p:nvSpPr>
+          <p:cNvPr id="2" name="Rectangle 1"/>
+          <p:cNvSpPr/>
+          <p:nvPr/>
+        </p:nvSpPr>
+        <p:spPr>
+          <a:xfrm>
+            <a:off x="0" y="0"/>
+            <a:ext cx="12191695" cy="6858000"/>
+          </a:xfrm>
+          <a:prstGeom prst="rect">
+            <a:avLst/>
+          </a:prstGeom>
+          <a:solidFill>
+            <a:srgbClr val="0B0F1A"/>
+          </a:solidFill>
+          <a:ln>
+            <a:noFill/>
+          </a:ln>
+          <a:effectLst/>
+        </p:spPr>
+        <p:style>
+          <a:lnRef idx="1">
+            <a:schemeClr val="accent1"/>
+          </a:lnRef>
+          <a:fillRef idx="3">
+            <a:schemeClr val="accent1"/>
+          </a:fillRef>
+          <a:effectRef idx="2">
+            <a:schemeClr val="accent1"/>
+          </a:effectRef>
+          <a:fontRef idx="minor">
+            <a:schemeClr val="lt1"/>
+          </a:fontRef>
+        </p:style>
+        <p:txBody>
+          <a:bodyPr rtlCol="0" anchor="ctr"/>
+          <a:lstStyle/>
+          <a:p>
+            <a:pPr algn="ctr"/>
+          </a:p>
+        </p:txBody>
+      </p:sp>
+      <p:sp>
+        <p:nvSpPr>
+          <p:cNvPr id="3" name="TextBox 2"/>
+          <p:cNvSpPr txBox="1"/>
+          <p:nvPr/>
+        </p:nvSpPr>
+        <p:spPr>
+          <a:xfrm>
+            <a:off x="822960" y="566928"/>
+            <a:ext cx="7772400" cy="274320"/>
+          </a:xfrm>
+          <a:prstGeom prst="rect">
+            <a:avLst/>
+          </a:prstGeom>
+          <a:noFill/>
+        </p:spPr>
+        <p:txBody>
+          <a:bodyPr wrap="square" anchor="t" lIns="0" rIns="0" tIns="0" bIns="0">
+            <a:spAutoFit/>
+          </a:bodyPr>
+          <a:lstStyle/>
+          <a:p>
+            <a:pPr algn="l">
+              <a:lnSpc>
+                <a:spcPct val="100000"/>
+              </a:lnSpc>
+              <a:spcAft>
+                <a:spcPts val="400"/>
+              </a:spcAft>
+            </a:pPr>
+            <a:r>
+              <a:rPr sz="1150" b="1" i="0">
+                <a:solidFill>
+                  <a:srgbClr val="22D3EE"/>
+                </a:solidFill>
+                <a:latin typeface="Segoe UI"/>
+                <a:ea typeface="微软雅黑"/>
+                <a:cs typeface="微软雅黑"/>
+              </a:rPr>
+              <a:t>CHECKLIST</a:t>
+            </a:r>
+          </a:p>
+        </p:txBody>
+      </p:sp>
+      <p:sp>
+        <p:nvSpPr>
+          <p:cNvPr id="4" name="TextBox 3"/>
+          <p:cNvSpPr txBox="1"/>
+          <p:nvPr/>
+        </p:nvSpPr>
+        <p:spPr>
+          <a:xfrm>
+            <a:off x="822960" y="868680"/>
+            <a:ext cx="10607040" cy="548640"/>
+          </a:xfrm>
+          <a:prstGeom prst="rect">
+            <a:avLst/>
+          </a:prstGeom>
+          <a:noFill/>
+        </p:spPr>
+        <p:txBody>
+          <a:bodyPr wrap="square" anchor="t" lIns="0" rIns="0" tIns="0" bIns="0">
+            <a:spAutoFit/>
+          </a:bodyPr>
+          <a:lstStyle/>
+          <a:p>
+            <a:pPr algn="l">
+              <a:lnSpc>
+                <a:spcPct val="100000"/>
+              </a:lnSpc>
+              <a:spcAft>
+                <a:spcPts val="400"/>
+              </a:spcAft>
+            </a:pPr>
+            <a:r>
+              <a:rPr sz="2800" b="1" i="0">
+                <a:solidFill>
+                  <a:srgbClr val="EAF2FF"/>
+                </a:solidFill>
+                <a:latin typeface="Segoe UI"/>
+                <a:ea typeface="微软雅黑"/>
+                <a:cs typeface="微软雅黑"/>
+              </a:rPr>
+              <a:t>清单</a:t>
+            </a:r>
+          </a:p>
+        </p:txBody>
+      </p:sp>
+      <p:sp>
+        <p:nvSpPr>
+          <p:cNvPr id="5" name="Rectangle 4"/>
+          <p:cNvSpPr/>
+          <p:nvPr/>
+        </p:nvSpPr>
+        <p:spPr>
+          <a:xfrm>
+            <a:off x="822960" y="1572768"/>
+            <a:ext cx="566928" cy="50292"/>
+          </a:xfrm>
+          <a:prstGeom prst="rect">
+            <a:avLst/>
+          </a:prstGeom>
+          <a:solidFill>
+            <a:srgbClr val="22D3EE"/>
+          </a:solidFill>
+          <a:ln>
+            <a:noFill/>
+          </a:ln>
+          <a:effectLst/>
+        </p:spPr>
+        <p:style>
+          <a:lnRef idx="1">
+            <a:schemeClr val="accent1"/>
+          </a:lnRef>
+          <a:fillRef idx="3">
+            <a:schemeClr val="accent1"/>
+          </a:fillRef>
+          <a:effectRef idx="2">
+            <a:schemeClr val="accent1"/>
+          </a:effectRef>
+          <a:fontRef idx="minor">
+            <a:schemeClr val="lt1"/>
+          </a:fontRef>
+        </p:style>
+        <p:txBody>
+          <a:bodyPr rtlCol="0" anchor="ctr"/>
+          <a:lstStyle/>
+          <a:p>
+            <a:pPr algn="ctr"/>
+          </a:p>
+        </p:txBody>
+      </p:sp>
+      <p:sp>
+        <p:nvSpPr>
+          <p:cNvPr id="6" name="Rectangle 5"/>
+          <p:cNvSpPr/>
+          <p:nvPr/>
+        </p:nvSpPr>
+        <p:spPr>
+          <a:xfrm>
+            <a:off x="868680" y="2148839"/>
+            <a:ext cx="310896" cy="310896"/>
+          </a:xfrm>
+          <a:prstGeom prst="rect">
+            <a:avLst/>
+          </a:prstGeom>
+          <a:noFill/>
+          <a:ln w="17780">
+            <a:solidFill>
+              <a:srgbClr val="22D3EE"/>
+            </a:solidFill>
+          </a:ln>
+          <a:effectLst/>
+        </p:spPr>
+        <p:style>
+          <a:lnRef idx="1">
+            <a:schemeClr val="accent1"/>
+          </a:lnRef>
+          <a:fillRef idx="3">
+            <a:schemeClr val="accent1"/>
+          </a:fillRef>
+          <a:effectRef idx="2">
+            <a:schemeClr val="accent1"/>
+          </a:effectRef>
+          <a:fontRef idx="minor">
+            <a:schemeClr val="lt1"/>
+          </a:fontRef>
+        </p:style>
+        <p:txBody>
+          <a:bodyPr rtlCol="0" anchor="ctr"/>
+          <a:lstStyle/>
+          <a:p>
+            <a:pPr algn="ctr"/>
+          </a:p>
+        </p:txBody>
+      </p:sp>
+      <p:sp>
+        <p:nvSpPr>
+          <p:cNvPr id="7" name="TextBox 6"/>
+          <p:cNvSpPr txBox="1"/>
+          <p:nvPr/>
+        </p:nvSpPr>
+        <p:spPr>
+          <a:xfrm>
+            <a:off x="868680" y="2130551"/>
+            <a:ext cx="310896" cy="347472"/>
+          </a:xfrm>
+          <a:prstGeom prst="rect">
+            <a:avLst/>
+          </a:prstGeom>
+          <a:noFill/>
+        </p:spPr>
+        <p:txBody>
+          <a:bodyPr wrap="square" anchor="t" lIns="0" rIns="0" tIns="0" bIns="0">
+            <a:spAutoFit/>
+          </a:bodyPr>
+          <a:lstStyle/>
+          <a:p>
+            <a:pPr algn="ctr">
+              <a:lnSpc>
+                <a:spcPct val="100000"/>
+              </a:lnSpc>
+              <a:spcAft>
+                <a:spcPts val="400"/>
+              </a:spcAft>
+            </a:pPr>
+            <a:r>
+              <a:rPr sz="1300" b="1" i="0">
+                <a:solidFill>
+                  <a:srgbClr val="22D3EE"/>
+                </a:solidFill>
+                <a:latin typeface="Segoe UI"/>
+                <a:ea typeface="微软雅黑"/>
+                <a:cs typeface="微软雅黑"/>
+              </a:rPr>
+              <a:t>✓</a:t>
+            </a:r>
+          </a:p>
+        </p:txBody>
+      </p:sp>
+      <p:sp>
+        <p:nvSpPr>
+          <p:cNvPr id="8" name="TextBox 7"/>
+          <p:cNvSpPr txBox="1"/>
+          <p:nvPr/>
+        </p:nvSpPr>
+        <p:spPr>
+          <a:xfrm>
+            <a:off x="1554480" y="2103120"/>
+            <a:ext cx="9692640" cy="457200"/>
+          </a:xfrm>
+          <a:prstGeom prst="rect">
+            <a:avLst/>
+          </a:prstGeom>
+          <a:noFill/>
+        </p:spPr>
+        <p:txBody>
+          <a:bodyPr wrap="square" anchor="t" lIns="0" rIns="0" tIns="0" bIns="0">
+            <a:spAutoFit/>
+          </a:bodyPr>
+          <a:lstStyle/>
+          <a:p>
+            <a:pPr algn="l">
+              <a:lnSpc>
+                <a:spcPct val="100000"/>
+              </a:lnSpc>
+              <a:spcAft>
+                <a:spcPts val="400"/>
+              </a:spcAft>
+            </a:pPr>
+            <a:r>
+              <a:rPr sz="1450" b="0" i="0">
+                <a:solidFill>
+                  <a:srgbClr val="EAF2FF"/>
+                </a:solidFill>
+                <a:latin typeface="Segoe UI"/>
+                <a:ea typeface="微软雅黑"/>
+                <a:cs typeface="微软雅黑"/>
+              </a:rPr>
+              <a:t>在此输入待办项一</a:t>
+            </a:r>
+          </a:p>
+        </p:txBody>
+      </p:sp>
+      <p:cxnSp>
+        <p:nvCxnSpPr>
+          <p:cNvPr id="9" name="Connector 8"/>
+          <p:cNvCxnSpPr/>
+          <p:nvPr/>
+        </p:nvCxnSpPr>
+        <p:spPr>
+          <a:xfrm>
+            <a:off x="1554480" y="2615184"/>
+            <a:ext cx="9784080" cy="0"/>
+          </a:xfrm>
+          <a:prstGeom prst="line">
+            <a:avLst/>
+          </a:prstGeom>
+          <a:ln w="7620">
+            <a:solidFill>
+              <a:srgbClr val="26314B"/>
+            </a:solidFill>
+          </a:ln>
+          <a:effectLst/>
+        </p:spPr>
+        <p:style>
+          <a:lnRef idx="2">
+            <a:schemeClr val="accent1"/>
+          </a:lnRef>
+          <a:fillRef idx="0">
+            <a:schemeClr val="accent1"/>
+          </a:fillRef>
+          <a:effectRef idx="1">
+            <a:schemeClr val="accent1"/>
+          </a:effectRef>
+          <a:fontRef idx="minor">
+            <a:schemeClr val="tx1"/>
+          </a:fontRef>
+        </p:style>
+      </p:cxnSp>
+      <p:sp>
+        <p:nvSpPr>
+          <p:cNvPr id="10" name="Rectangle 9"/>
+          <p:cNvSpPr/>
+          <p:nvPr/>
+        </p:nvSpPr>
+        <p:spPr>
+          <a:xfrm>
+            <a:off x="868680" y="2807207"/>
+            <a:ext cx="310896" cy="310896"/>
+          </a:xfrm>
+          <a:prstGeom prst="rect">
+            <a:avLst/>
+          </a:prstGeom>
+          <a:noFill/>
+          <a:ln w="17780">
+            <a:solidFill>
+              <a:srgbClr val="22D3EE"/>
+            </a:solidFill>
+          </a:ln>
+          <a:effectLst/>
+        </p:spPr>
+        <p:style>
+          <a:lnRef idx="1">
+            <a:schemeClr val="accent1"/>
+          </a:lnRef>
+          <a:fillRef idx="3">
+            <a:schemeClr val="accent1"/>
+          </a:fillRef>
+          <a:effectRef idx="2">
+            <a:schemeClr val="accent1"/>
+          </a:effectRef>
+          <a:fontRef idx="minor">
+            <a:schemeClr val="lt1"/>
+          </a:fontRef>
+        </p:style>
+        <p:txBody>
+          <a:bodyPr rtlCol="0" anchor="ctr"/>
+          <a:lstStyle/>
+          <a:p>
+            <a:pPr algn="ctr"/>
+          </a:p>
+        </p:txBody>
+      </p:sp>
+      <p:sp>
+        <p:nvSpPr>
+          <p:cNvPr id="11" name="TextBox 10"/>
+          <p:cNvSpPr txBox="1"/>
+          <p:nvPr/>
+        </p:nvSpPr>
+        <p:spPr>
+          <a:xfrm>
+            <a:off x="868680" y="2788919"/>
+            <a:ext cx="310896" cy="347472"/>
+          </a:xfrm>
+          <a:prstGeom prst="rect">
+            <a:avLst/>
+          </a:prstGeom>
+          <a:noFill/>
+        </p:spPr>
+        <p:txBody>
+          <a:bodyPr wrap="square" anchor="t" lIns="0" rIns="0" tIns="0" bIns="0">
+            <a:spAutoFit/>
+          </a:bodyPr>
+          <a:lstStyle/>
+          <a:p>
+            <a:pPr algn="ctr">
+              <a:lnSpc>
+                <a:spcPct val="100000"/>
+              </a:lnSpc>
+              <a:spcAft>
+                <a:spcPts val="400"/>
+              </a:spcAft>
+            </a:pPr>
+            <a:r>
+              <a:rPr sz="1300" b="1" i="0">
+                <a:solidFill>
+                  <a:srgbClr val="22D3EE"/>
+                </a:solidFill>
+                <a:latin typeface="Segoe UI"/>
+                <a:ea typeface="微软雅黑"/>
+                <a:cs typeface="微软雅黑"/>
+              </a:rPr>
+              <a:t>✓</a:t>
+            </a:r>
+          </a:p>
+        </p:txBody>
+      </p:sp>
+      <p:sp>
+        <p:nvSpPr>
+          <p:cNvPr id="12" name="TextBox 11"/>
+          <p:cNvSpPr txBox="1"/>
+          <p:nvPr/>
+        </p:nvSpPr>
+        <p:spPr>
+          <a:xfrm>
+            <a:off x="1554480" y="2761487"/>
+            <a:ext cx="9692640" cy="457200"/>
+          </a:xfrm>
+          <a:prstGeom prst="rect">
+            <a:avLst/>
+          </a:prstGeom>
+          <a:noFill/>
+        </p:spPr>
+        <p:txBody>
+          <a:bodyPr wrap="square" anchor="t" lIns="0" rIns="0" tIns="0" bIns="0">
+            <a:spAutoFit/>
+          </a:bodyPr>
+          <a:lstStyle/>
+          <a:p>
+            <a:pPr algn="l">
+              <a:lnSpc>
+                <a:spcPct val="100000"/>
+              </a:lnSpc>
+              <a:spcAft>
+                <a:spcPts val="400"/>
+              </a:spcAft>
+            </a:pPr>
+            <a:r>
+              <a:rPr sz="1450" b="0" i="0">
+                <a:solidFill>
+                  <a:srgbClr val="EAF2FF"/>
+                </a:solidFill>
+                <a:latin typeface="Segoe UI"/>
+                <a:ea typeface="微软雅黑"/>
+                <a:cs typeface="微软雅黑"/>
+              </a:rPr>
+              <a:t>在此输入待办项二</a:t>
+            </a:r>
+          </a:p>
+        </p:txBody>
+      </p:sp>
+      <p:cxnSp>
+        <p:nvCxnSpPr>
+          <p:cNvPr id="13" name="Connector 12"/>
+          <p:cNvCxnSpPr/>
+          <p:nvPr/>
+        </p:nvCxnSpPr>
+        <p:spPr>
+          <a:xfrm>
+            <a:off x="1554480" y="3273551"/>
+            <a:ext cx="9784080" cy="0"/>
+          </a:xfrm>
+          <a:prstGeom prst="line">
+            <a:avLst/>
+          </a:prstGeom>
+          <a:ln w="7620">
+            <a:solidFill>
+              <a:srgbClr val="26314B"/>
+            </a:solidFill>
+          </a:ln>
+          <a:effectLst/>
+        </p:spPr>
+        <p:style>
+          <a:lnRef idx="2">
+            <a:schemeClr val="accent1"/>
+          </a:lnRef>
+          <a:fillRef idx="0">
+            <a:schemeClr val="accent1"/>
+          </a:fillRef>
+          <a:effectRef idx="1">
+            <a:schemeClr val="accent1"/>
+          </a:effectRef>
+          <a:fontRef idx="minor">
+            <a:schemeClr val="tx1"/>
+          </a:fontRef>
+        </p:style>
+      </p:cxnSp>
+      <p:sp>
+        <p:nvSpPr>
+          <p:cNvPr id="14" name="Rectangle 13"/>
+          <p:cNvSpPr/>
+          <p:nvPr/>
+        </p:nvSpPr>
+        <p:spPr>
+          <a:xfrm>
+            <a:off x="868680" y="3465575"/>
+            <a:ext cx="310896" cy="310896"/>
+          </a:xfrm>
+          <a:prstGeom prst="rect">
+            <a:avLst/>
+          </a:prstGeom>
+          <a:noFill/>
+          <a:ln w="17780">
+            <a:solidFill>
+              <a:srgbClr val="22D3EE"/>
+            </a:solidFill>
+          </a:ln>
+          <a:effectLst/>
+        </p:spPr>
+        <p:style>
+          <a:lnRef idx="1">
+            <a:schemeClr val="accent1"/>
+          </a:lnRef>
+          <a:fillRef idx="3">
+            <a:schemeClr val="accent1"/>
+          </a:fillRef>
+          <a:effectRef idx="2">
+            <a:schemeClr val="accent1"/>
+          </a:effectRef>
+          <a:fontRef idx="minor">
+            <a:schemeClr val="lt1"/>
+          </a:fontRef>
+        </p:style>
+        <p:txBody>
+          <a:bodyPr rtlCol="0" anchor="ctr"/>
+          <a:lstStyle/>
+          <a:p>
+            <a:pPr algn="ctr"/>
+          </a:p>
+        </p:txBody>
+      </p:sp>
+      <p:sp>
+        <p:nvSpPr>
+          <p:cNvPr id="15" name="TextBox 14"/>
+          <p:cNvSpPr txBox="1"/>
+          <p:nvPr/>
+        </p:nvSpPr>
+        <p:spPr>
+          <a:xfrm>
+            <a:off x="868680" y="3447287"/>
+            <a:ext cx="310896" cy="347472"/>
+          </a:xfrm>
+          <a:prstGeom prst="rect">
+            <a:avLst/>
+          </a:prstGeom>
+          <a:noFill/>
+        </p:spPr>
+        <p:txBody>
+          <a:bodyPr wrap="square" anchor="t" lIns="0" rIns="0" tIns="0" bIns="0">
+            <a:spAutoFit/>
+          </a:bodyPr>
+          <a:lstStyle/>
+          <a:p>
+            <a:pPr algn="ctr">
+              <a:lnSpc>
+                <a:spcPct val="100000"/>
+              </a:lnSpc>
+              <a:spcAft>
+                <a:spcPts val="400"/>
+              </a:spcAft>
+            </a:pPr>
+            <a:r>
+              <a:rPr sz="1300" b="1" i="0">
+                <a:solidFill>
+                  <a:srgbClr val="22D3EE"/>
+                </a:solidFill>
+                <a:latin typeface="Segoe UI"/>
+                <a:ea typeface="微软雅黑"/>
+                <a:cs typeface="微软雅黑"/>
+              </a:rPr>
+              <a:t>✓</a:t>
+            </a:r>
+          </a:p>
+        </p:txBody>
+      </p:sp>
+      <p:sp>
+        <p:nvSpPr>
+          <p:cNvPr id="16" name="TextBox 15"/>
+          <p:cNvSpPr txBox="1"/>
+          <p:nvPr/>
+        </p:nvSpPr>
+        <p:spPr>
+          <a:xfrm>
+            <a:off x="1554480" y="3419856"/>
+            <a:ext cx="9692640" cy="457200"/>
+          </a:xfrm>
+          <a:prstGeom prst="rect">
+            <a:avLst/>
+          </a:prstGeom>
+          <a:noFill/>
+        </p:spPr>
+        <p:txBody>
+          <a:bodyPr wrap="square" anchor="t" lIns="0" rIns="0" tIns="0" bIns="0">
+            <a:spAutoFit/>
+          </a:bodyPr>
+          <a:lstStyle/>
+          <a:p>
+            <a:pPr algn="l">
+              <a:lnSpc>
+                <a:spcPct val="100000"/>
+              </a:lnSpc>
+              <a:spcAft>
+                <a:spcPts val="400"/>
+              </a:spcAft>
+            </a:pPr>
+            <a:r>
+              <a:rPr sz="1450" b="0" i="0">
+                <a:solidFill>
+                  <a:srgbClr val="EAF2FF"/>
+                </a:solidFill>
+                <a:latin typeface="Segoe UI"/>
+                <a:ea typeface="微软雅黑"/>
+                <a:cs typeface="微软雅黑"/>
+              </a:rPr>
+              <a:t>在此输入待办项三</a:t>
+            </a:r>
+          </a:p>
+        </p:txBody>
+      </p:sp>
+      <p:cxnSp>
+        <p:nvCxnSpPr>
+          <p:cNvPr id="17" name="Connector 16"/>
+          <p:cNvCxnSpPr/>
+          <p:nvPr/>
+        </p:nvCxnSpPr>
+        <p:spPr>
+          <a:xfrm>
+            <a:off x="1554480" y="3931920"/>
+            <a:ext cx="9784080" cy="0"/>
+          </a:xfrm>
+          <a:prstGeom prst="line">
+            <a:avLst/>
+          </a:prstGeom>
+          <a:ln w="7620">
+            <a:solidFill>
+              <a:srgbClr val="26314B"/>
+            </a:solidFill>
+          </a:ln>
+          <a:effectLst/>
+        </p:spPr>
+        <p:style>
+          <a:lnRef idx="2">
+            <a:schemeClr val="accent1"/>
+          </a:lnRef>
+          <a:fillRef idx="0">
+            <a:schemeClr val="accent1"/>
+          </a:fillRef>
+          <a:effectRef idx="1">
+            <a:schemeClr val="accent1"/>
+          </a:effectRef>
+          <a:fontRef idx="minor">
+            <a:schemeClr val="tx1"/>
+          </a:fontRef>
+        </p:style>
+      </p:cxnSp>
+      <p:sp>
+        <p:nvSpPr>
+          <p:cNvPr id="18" name="Rectangle 17"/>
+          <p:cNvSpPr/>
+          <p:nvPr/>
+        </p:nvSpPr>
+        <p:spPr>
+          <a:xfrm>
+            <a:off x="868680" y="4123944"/>
+            <a:ext cx="310896" cy="310896"/>
+          </a:xfrm>
+          <a:prstGeom prst="rect">
+            <a:avLst/>
+          </a:prstGeom>
+          <a:noFill/>
+          <a:ln w="17780">
+            <a:solidFill>
+              <a:srgbClr val="22D3EE"/>
+            </a:solidFill>
+          </a:ln>
+          <a:effectLst/>
+        </p:spPr>
+        <p:style>
+          <a:lnRef idx="1">
+            <a:schemeClr val="accent1"/>
+          </a:lnRef>
+          <a:fillRef idx="3">
+            <a:schemeClr val="accent1"/>
+          </a:fillRef>
+          <a:effectRef idx="2">
+            <a:schemeClr val="accent1"/>
+          </a:effectRef>
+          <a:fontRef idx="minor">
+            <a:schemeClr val="lt1"/>
+          </a:fontRef>
+        </p:style>
+        <p:txBody>
+          <a:bodyPr rtlCol="0" anchor="ctr"/>
+          <a:lstStyle/>
+          <a:p>
+            <a:pPr algn="ctr"/>
+          </a:p>
+        </p:txBody>
+      </p:sp>
+      <p:sp>
+        <p:nvSpPr>
+          <p:cNvPr id="19" name="TextBox 18"/>
+          <p:cNvSpPr txBox="1"/>
+          <p:nvPr/>
+        </p:nvSpPr>
+        <p:spPr>
+          <a:xfrm>
+            <a:off x="868680" y="4105656"/>
+            <a:ext cx="310896" cy="347472"/>
+          </a:xfrm>
+          <a:prstGeom prst="rect">
+            <a:avLst/>
+          </a:prstGeom>
+          <a:noFill/>
+        </p:spPr>
+        <p:txBody>
+          <a:bodyPr wrap="square" anchor="t" lIns="0" rIns="0" tIns="0" bIns="0">
+            <a:spAutoFit/>
+          </a:bodyPr>
+          <a:lstStyle/>
+          <a:p>
+            <a:pPr algn="ctr">
+              <a:lnSpc>
+                <a:spcPct val="100000"/>
+              </a:lnSpc>
+              <a:spcAft>
+                <a:spcPts val="400"/>
+              </a:spcAft>
+            </a:pPr>
+            <a:r>
+              <a:rPr sz="1300" b="1" i="0">
+                <a:solidFill>
+                  <a:srgbClr val="22D3EE"/>
+                </a:solidFill>
+                <a:latin typeface="Segoe UI"/>
+                <a:ea typeface="微软雅黑"/>
+                <a:cs typeface="微软雅黑"/>
+              </a:rPr>
+              <a:t>✓</a:t>
+            </a:r>
+          </a:p>
+        </p:txBody>
+      </p:sp>
+      <p:sp>
+        <p:nvSpPr>
+          <p:cNvPr id="20" name="TextBox 19"/>
+          <p:cNvSpPr txBox="1"/>
+          <p:nvPr/>
+        </p:nvSpPr>
+        <p:spPr>
+          <a:xfrm>
+            <a:off x="1554480" y="4078224"/>
+            <a:ext cx="9692640" cy="457200"/>
+          </a:xfrm>
+          <a:prstGeom prst="rect">
+            <a:avLst/>
+          </a:prstGeom>
+          <a:noFill/>
+        </p:spPr>
+        <p:txBody>
+          <a:bodyPr wrap="square" anchor="t" lIns="0" rIns="0" tIns="0" bIns="0">
+            <a:spAutoFit/>
+          </a:bodyPr>
+          <a:lstStyle/>
+          <a:p>
+            <a:pPr algn="l">
+              <a:lnSpc>
+                <a:spcPct val="100000"/>
+              </a:lnSpc>
+              <a:spcAft>
+                <a:spcPts val="400"/>
+              </a:spcAft>
+            </a:pPr>
+            <a:r>
+              <a:rPr sz="1450" b="0" i="0">
+                <a:solidFill>
+                  <a:srgbClr val="EAF2FF"/>
+                </a:solidFill>
+                <a:latin typeface="Segoe UI"/>
+                <a:ea typeface="微软雅黑"/>
+                <a:cs typeface="微软雅黑"/>
+              </a:rPr>
+              <a:t>在此输入待办项四</a:t>
+            </a:r>
+          </a:p>
+        </p:txBody>
+      </p:sp>
+      <p:cxnSp>
+        <p:nvCxnSpPr>
+          <p:cNvPr id="21" name="Connector 20"/>
+          <p:cNvCxnSpPr/>
+          <p:nvPr/>
+        </p:nvCxnSpPr>
+        <p:spPr>
+          <a:xfrm>
+            <a:off x="1554480" y="4590288"/>
+            <a:ext cx="9784080" cy="0"/>
+          </a:xfrm>
+          <a:prstGeom prst="line">
+            <a:avLst/>
+          </a:prstGeom>
+          <a:ln w="7620">
+            <a:solidFill>
+              <a:srgbClr val="26314B"/>
+            </a:solidFill>
+          </a:ln>
+          <a:effectLst/>
+        </p:spPr>
+        <p:style>
+          <a:lnRef idx="2">
+            <a:schemeClr val="accent1"/>
+          </a:lnRef>
+          <a:fillRef idx="0">
+            <a:schemeClr val="accent1"/>
+          </a:fillRef>
+          <a:effectRef idx="1">
+            <a:schemeClr val="accent1"/>
+          </a:effectRef>
+          <a:fontRef idx="minor">
+            <a:schemeClr val="tx1"/>
+          </a:fontRef>
+        </p:style>
+      </p:cxnSp>
+      <p:sp>
+        <p:nvSpPr>
+          <p:cNvPr id="22" name="Rectangle 21"/>
+          <p:cNvSpPr/>
+          <p:nvPr/>
+        </p:nvSpPr>
+        <p:spPr>
+          <a:xfrm>
+            <a:off x="822960" y="6291072"/>
+            <a:ext cx="10545775" cy="7315"/>
+          </a:xfrm>
+          <a:prstGeom prst="rect">
+            <a:avLst/>
+          </a:prstGeom>
+          <a:solidFill>
+            <a:srgbClr val="26314B"/>
+          </a:solidFill>
+          <a:ln>
+            <a:noFill/>
+          </a:ln>
+          <a:effectLst/>
+        </p:spPr>
+        <p:style>
+          <a:lnRef idx="1">
+            <a:schemeClr val="accent1"/>
+          </a:lnRef>
+          <a:fillRef idx="3">
+            <a:schemeClr val="accent1"/>
+          </a:fillRef>
+          <a:effectRef idx="2">
+            <a:schemeClr val="accent1"/>
+          </a:effectRef>
+          <a:fontRef idx="minor">
+            <a:schemeClr val="lt1"/>
+          </a:fontRef>
+        </p:style>
+        <p:txBody>
+          <a:bodyPr rtlCol="0" anchor="ctr"/>
+          <a:lstStyle/>
+          <a:p>
+            <a:pPr algn="ctr"/>
+          </a:p>
+        </p:txBody>
+      </p:sp>
+      <p:sp>
+        <p:nvSpPr>
+          <p:cNvPr id="23" name="TextBox 22"/>
+          <p:cNvSpPr txBox="1"/>
+          <p:nvPr/>
+        </p:nvSpPr>
+        <p:spPr>
+          <a:xfrm>
+            <a:off x="822960" y="6355080"/>
+            <a:ext cx="6583680" cy="274320"/>
+          </a:xfrm>
+          <a:prstGeom prst="rect">
+            <a:avLst/>
+          </a:prstGeom>
+          <a:noFill/>
+        </p:spPr>
+        <p:txBody>
+          <a:bodyPr wrap="square" anchor="t" lIns="0" rIns="0" tIns="0" bIns="0">
+            <a:spAutoFit/>
+          </a:bodyPr>
+          <a:lstStyle/>
+          <a:p>
+            <a:pPr algn="l">
+              <a:lnSpc>
+                <a:spcPct val="100000"/>
+              </a:lnSpc>
+              <a:spcAft>
+                <a:spcPts val="400"/>
+              </a:spcAft>
+            </a:pPr>
+            <a:r>
+              <a:rPr sz="900" b="0" i="0">
+                <a:solidFill>
+                  <a:srgbClr val="94A3C4"/>
+                </a:solidFill>
+                <a:latin typeface="Segoe UI"/>
+                <a:ea typeface="微软雅黑"/>
+                <a:cs typeface="微软雅黑"/>
+              </a:rPr>
+              <a:t>暗黑霓虹  ·  Dark Neon</a:t>
+            </a:r>
+          </a:p>
+        </p:txBody>
+      </p:sp>
+    </p:spTree>
+  </p:cSld>
+  <p:clrMapOvr>
+    <a:masterClrMapping/>
+  </p:clrMapOvr>
+  <p:transition spd="med">
+    <p:fade/>
+  </p:transition>
+</p:sld>
+</file>
+
+<file path=ppt/slides/slide18.xml><?xml version="1.0" encoding="utf-8"?>
+<p:sld xmlns:a="http://schemas.openxmlformats.org/drawingml/2006/main" xmlns:p="http://schemas.openxmlformats.org/presentationml/2006/main" xmlns:r="http://schemas.openxmlformats.org/officeDocument/2006/relationships">
+  <p:cSld>
+    <p:spTree>
+      <p:nvGrpSpPr>
+        <p:cNvPr id="1" name=""/>
+        <p:cNvGrpSpPr/>
+        <p:nvPr/>
+      </p:nvGrpSpPr>
+      <p:grpSpPr/>
+      <p:sp>
+        <p:nvSpPr>
+          <p:cNvPr id="2" name="Rectangle 1"/>
+          <p:cNvSpPr/>
+          <p:nvPr/>
+        </p:nvSpPr>
+        <p:spPr>
+          <a:xfrm>
+            <a:off x="0" y="0"/>
+            <a:ext cx="12191695" cy="6858000"/>
+          </a:xfrm>
+          <a:prstGeom prst="rect">
+            <a:avLst/>
+          </a:prstGeom>
+          <a:solidFill>
+            <a:srgbClr val="0B0F1A"/>
+          </a:solidFill>
+          <a:ln>
+            <a:noFill/>
+          </a:ln>
+          <a:effectLst/>
+        </p:spPr>
+        <p:style>
+          <a:lnRef idx="1">
+            <a:schemeClr val="accent1"/>
+          </a:lnRef>
+          <a:fillRef idx="3">
+            <a:schemeClr val="accent1"/>
+          </a:fillRef>
+          <a:effectRef idx="2">
+            <a:schemeClr val="accent1"/>
+          </a:effectRef>
+          <a:fontRef idx="minor">
+            <a:schemeClr val="lt1"/>
+          </a:fontRef>
+        </p:style>
+        <p:txBody>
+          <a:bodyPr rtlCol="0" anchor="ctr"/>
+          <a:lstStyle/>
+          <a:p>
+            <a:pPr algn="ctr"/>
+          </a:p>
+        </p:txBody>
+      </p:sp>
+      <p:sp>
+        <p:nvSpPr>
           <p:cNvPr id="3" name="Oval 2"/>
           <p:cNvSpPr/>
           <p:nvPr/>
@@ -7421,7 +10284,7 @@
         <p:spPr>
           <a:xfrm>
             <a:off x="822960" y="6355080"/>
-            <a:ext cx="6400800" cy="274320"/>
+            <a:ext cx="6583680" cy="274320"/>
           </a:xfrm>
           <a:prstGeom prst="rect">
             <a:avLst/>
@@ -7461,6 +10324,9 @@
   <p:clrMapOvr>
     <a:masterClrMapping/>
   </p:clrMapOvr>
+  <p:transition spd="med">
+    <p:fade/>
+  </p:transition>
 </p:sld>
 </file>
 
@@ -7571,7 +10437,7 @@
         <p:spPr>
           <a:xfrm>
             <a:off x="822960" y="868680"/>
-            <a:ext cx="10515600" cy="548640"/>
+            <a:ext cx="10607040" cy="548640"/>
           </a:xfrm>
           <a:prstGeom prst="rect">
             <a:avLst/>
@@ -7652,14 +10518,62 @@
       </p:sp>
       <p:sp>
         <p:nvSpPr>
-          <p:cNvPr id="6" name="TextBox 5"/>
+          <p:cNvPr id="6" name="Rounded Rectangle 5"/>
+          <p:cNvSpPr/>
+          <p:nvPr/>
+        </p:nvSpPr>
+        <p:spPr>
+          <a:xfrm>
+            <a:off x="822960" y="2377440"/>
+            <a:ext cx="2430703" cy="2194560"/>
+          </a:xfrm>
+          <a:prstGeom prst="roundRect">
+            <a:avLst>
+              <a:gd name="adj" fmla="val 8000"/>
+            </a:avLst>
+          </a:prstGeom>
+          <a:solidFill>
+            <a:srgbClr val="151B2B"/>
+          </a:solidFill>
+          <a:ln w="9525">
+            <a:solidFill>
+              <a:srgbClr val="26314B"/>
+            </a:solidFill>
+          </a:ln>
+          <a:effectLst/>
+        </p:spPr>
+        <p:style>
+          <a:lnRef idx="1">
+            <a:schemeClr val="accent1"/>
+          </a:lnRef>
+          <a:fillRef idx="3">
+            <a:schemeClr val="accent1"/>
+          </a:fillRef>
+          <a:effectRef idx="2">
+            <a:schemeClr val="accent1"/>
+          </a:effectRef>
+          <a:fontRef idx="minor">
+            <a:schemeClr val="lt1"/>
+          </a:fontRef>
+        </p:style>
+        <p:txBody>
+          <a:bodyPr rtlCol="0" anchor="ctr"/>
+          <a:lstStyle/>
+          <a:p>
+            <a:pPr algn="ctr"/>
+          </a:p>
+        </p:txBody>
+      </p:sp>
+      <p:sp>
+        <p:nvSpPr>
+          <p:cNvPr id="7" name="TextBox 6"/>
           <p:cNvSpPr txBox="1"/>
           <p:nvPr/>
         </p:nvSpPr>
         <p:spPr>
           <a:xfrm>
-            <a:off x="822960" y="2148840"/>
-            <a:ext cx="731520" cy="457200"/>
+            <a:off x="1143000" y="2606040"/>
+            <a:ext cx="1790623" cy="457200"/>
           </a:xfrm>
           <a:prstGeom prst="rect">
             <a:avLst/>
@@ -7681,7 +10595,7 @@
               </a:spcAft>
             </a:pPr>
             <a:r>
-              <a:rPr sz="1800" b="1" i="0">
+              <a:rPr sz="2600" b="1" i="0">
                 <a:solidFill>
                   <a:srgbClr val="22D3EE"/>
                 </a:solidFill>
@@ -7696,14 +10610,106 @@
       </p:sp>
       <p:sp>
         <p:nvSpPr>
-          <p:cNvPr id="7" name="TextBox 6"/>
+          <p:cNvPr id="8" name="TextBox 7"/>
           <p:cNvSpPr txBox="1"/>
           <p:nvPr/>
         </p:nvSpPr>
         <p:spPr>
           <a:xfrm>
-            <a:off x="1783080" y="2130552"/>
-            <a:ext cx="4206240" cy="457200"/>
+            <a:off x="1143000" y="3383280"/>
+            <a:ext cx="1790623" cy="914400"/>
+          </a:xfrm>
+          <a:prstGeom prst="rect">
+            <a:avLst/>
+          </a:prstGeom>
+          <a:noFill/>
+        </p:spPr>
+        <p:txBody>
+          <a:bodyPr wrap="square" anchor="t" lIns="0" rIns="0" tIns="0" bIns="0">
+            <a:spAutoFit/>
+          </a:bodyPr>
+          <a:lstStyle/>
+          <a:p>
+            <a:pPr algn="l">
+              <a:lnSpc>
+                <a:spcPct val="110000"/>
+              </a:lnSpc>
+              <a:spcAft>
+                <a:spcPts val="400"/>
+              </a:spcAft>
+            </a:pPr>
+            <a:r>
+              <a:rPr sz="1500" b="0" i="0">
+                <a:solidFill>
+                  <a:srgbClr val="EAF2FF"/>
+                </a:solidFill>
+                <a:latin typeface="Segoe UI"/>
+                <a:ea typeface="微软雅黑"/>
+                <a:cs typeface="微软雅黑"/>
+              </a:rPr>
+              <a:t>游戏概述</a:t>
+            </a:r>
+          </a:p>
+        </p:txBody>
+      </p:sp>
+      <p:sp>
+        <p:nvSpPr>
+          <p:cNvPr id="9" name="Rounded Rectangle 8"/>
+          <p:cNvSpPr/>
+          <p:nvPr/>
+        </p:nvSpPr>
+        <p:spPr>
+          <a:xfrm>
+            <a:off x="3527983" y="2377440"/>
+            <a:ext cx="2430703" cy="2194560"/>
+          </a:xfrm>
+          <a:prstGeom prst="roundRect">
+            <a:avLst>
+              <a:gd name="adj" fmla="val 8000"/>
+            </a:avLst>
+          </a:prstGeom>
+          <a:solidFill>
+            <a:srgbClr val="151B2B"/>
+          </a:solidFill>
+          <a:ln w="9525">
+            <a:solidFill>
+              <a:srgbClr val="26314B"/>
+            </a:solidFill>
+          </a:ln>
+          <a:effectLst/>
+        </p:spPr>
+        <p:style>
+          <a:lnRef idx="1">
+            <a:schemeClr val="accent1"/>
+          </a:lnRef>
+          <a:fillRef idx="3">
+            <a:schemeClr val="accent1"/>
+          </a:fillRef>
+          <a:effectRef idx="2">
+            <a:schemeClr val="accent1"/>
+          </a:effectRef>
+          <a:fontRef idx="minor">
+            <a:schemeClr val="lt1"/>
+          </a:fontRef>
+        </p:style>
+        <p:txBody>
+          <a:bodyPr rtlCol="0" anchor="ctr"/>
+          <a:lstStyle/>
+          <a:p>
+            <a:pPr algn="ctr"/>
+          </a:p>
+        </p:txBody>
+      </p:sp>
+      <p:sp>
+        <p:nvSpPr>
+          <p:cNvPr id="10" name="TextBox 9"/>
+          <p:cNvSpPr txBox="1"/>
+          <p:nvPr/>
+        </p:nvSpPr>
+        <p:spPr>
+          <a:xfrm>
+            <a:off x="3848023" y="2606040"/>
+            <a:ext cx="1790623" cy="457200"/>
           </a:xfrm>
           <a:prstGeom prst="rect">
             <a:avLst/>
@@ -7725,7 +10731,51 @@
               </a:spcAft>
             </a:pPr>
             <a:r>
-              <a:rPr sz="1800" b="0" i="0">
+              <a:rPr sz="2600" b="1" i="0">
+                <a:solidFill>
+                  <a:srgbClr val="22D3EE"/>
+                </a:solidFill>
+                <a:latin typeface="Segoe UI"/>
+                <a:ea typeface="微软雅黑"/>
+                <a:cs typeface="微软雅黑"/>
+              </a:rPr>
+              <a:t>02</a:t>
+            </a:r>
+          </a:p>
+        </p:txBody>
+      </p:sp>
+      <p:sp>
+        <p:nvSpPr>
+          <p:cNvPr id="11" name="TextBox 10"/>
+          <p:cNvSpPr txBox="1"/>
+          <p:nvPr/>
+        </p:nvSpPr>
+        <p:spPr>
+          <a:xfrm>
+            <a:off x="3848023" y="3383280"/>
+            <a:ext cx="1790623" cy="914400"/>
+          </a:xfrm>
+          <a:prstGeom prst="rect">
+            <a:avLst/>
+          </a:prstGeom>
+          <a:noFill/>
+        </p:spPr>
+        <p:txBody>
+          <a:bodyPr wrap="square" anchor="t" lIns="0" rIns="0" tIns="0" bIns="0">
+            <a:spAutoFit/>
+          </a:bodyPr>
+          <a:lstStyle/>
+          <a:p>
+            <a:pPr algn="l">
+              <a:lnSpc>
+                <a:spcPct val="110000"/>
+              </a:lnSpc>
+              <a:spcAft>
+                <a:spcPts val="400"/>
+              </a:spcAft>
+            </a:pPr>
+            <a:r>
+              <a:rPr sz="1500" b="0" i="0">
                 <a:solidFill>
                   <a:srgbClr val="EAF2FF"/>
                 </a:solidFill>
@@ -7733,25 +10783,30 @@
                 <a:ea typeface="微软雅黑"/>
                 <a:cs typeface="微软雅黑"/>
               </a:rPr>
-              <a:t>游戏概述</a:t>
-            </a:r>
-          </a:p>
-        </p:txBody>
-      </p:sp>
-      <p:cxnSp>
-        <p:nvCxnSpPr>
-          <p:cNvPr id="8" name="Connector 7"/>
-          <p:cNvCxnSpPr/>
-          <p:nvPr/>
-        </p:nvCxnSpPr>
-        <p:spPr>
-          <a:xfrm>
-            <a:off x="1783080" y="2660904"/>
-            <a:ext cx="4160520" cy="0"/>
-          </a:xfrm>
-          <a:prstGeom prst="line">
-            <a:avLst/>
-          </a:prstGeom>
+              <a:t>核心玩法</a:t>
+            </a:r>
+          </a:p>
+        </p:txBody>
+      </p:sp>
+      <p:sp>
+        <p:nvSpPr>
+          <p:cNvPr id="12" name="Rounded Rectangle 11"/>
+          <p:cNvSpPr/>
+          <p:nvPr/>
+        </p:nvSpPr>
+        <p:spPr>
+          <a:xfrm>
+            <a:off x="6233007" y="2377440"/>
+            <a:ext cx="2430703" cy="2194560"/>
+          </a:xfrm>
+          <a:prstGeom prst="roundRect">
+            <a:avLst>
+              <a:gd name="adj" fmla="val 8000"/>
+            </a:avLst>
+          </a:prstGeom>
+          <a:solidFill>
+            <a:srgbClr val="151B2B"/>
+          </a:solidFill>
           <a:ln w="9525">
             <a:solidFill>
               <a:srgbClr val="26314B"/>
@@ -7760,30 +10815,37 @@
           <a:effectLst/>
         </p:spPr>
         <p:style>
-          <a:lnRef idx="2">
+          <a:lnRef idx="1">
             <a:schemeClr val="accent1"/>
           </a:lnRef>
-          <a:fillRef idx="0">
+          <a:fillRef idx="3">
             <a:schemeClr val="accent1"/>
           </a:fillRef>
-          <a:effectRef idx="1">
+          <a:effectRef idx="2">
             <a:schemeClr val="accent1"/>
           </a:effectRef>
           <a:fontRef idx="minor">
-            <a:schemeClr val="tx1"/>
+            <a:schemeClr val="lt1"/>
           </a:fontRef>
         </p:style>
-      </p:cxnSp>
-      <p:sp>
-        <p:nvSpPr>
-          <p:cNvPr id="9" name="TextBox 8"/>
+        <p:txBody>
+          <a:bodyPr rtlCol="0" anchor="ctr"/>
+          <a:lstStyle/>
+          <a:p>
+            <a:pPr algn="ctr"/>
+          </a:p>
+        </p:txBody>
+      </p:sp>
+      <p:sp>
+        <p:nvSpPr>
+          <p:cNvPr id="13" name="TextBox 12"/>
           <p:cNvSpPr txBox="1"/>
           <p:nvPr/>
         </p:nvSpPr>
         <p:spPr>
           <a:xfrm>
-            <a:off x="6309360" y="2148840"/>
-            <a:ext cx="731520" cy="457200"/>
+            <a:off x="6553047" y="2606040"/>
+            <a:ext cx="1790623" cy="457200"/>
           </a:xfrm>
           <a:prstGeom prst="rect">
             <a:avLst/>
@@ -7805,7 +10867,7 @@
               </a:spcAft>
             </a:pPr>
             <a:r>
-              <a:rPr sz="1800" b="1" i="0">
+              <a:rPr sz="2600" b="1" i="0">
                 <a:solidFill>
                   <a:srgbClr val="22D3EE"/>
                 </a:solidFill>
@@ -7813,21 +10875,113 @@
                 <a:ea typeface="微软雅黑"/>
                 <a:cs typeface="微软雅黑"/>
               </a:rPr>
-              <a:t>02</a:t>
-            </a:r>
-          </a:p>
-        </p:txBody>
-      </p:sp>
-      <p:sp>
-        <p:nvSpPr>
-          <p:cNvPr id="10" name="TextBox 9"/>
+              <a:t>03</a:t>
+            </a:r>
+          </a:p>
+        </p:txBody>
+      </p:sp>
+      <p:sp>
+        <p:nvSpPr>
+          <p:cNvPr id="14" name="TextBox 13"/>
           <p:cNvSpPr txBox="1"/>
           <p:nvPr/>
         </p:nvSpPr>
         <p:spPr>
           <a:xfrm>
-            <a:off x="7269480" y="2130552"/>
-            <a:ext cx="4206240" cy="457200"/>
+            <a:off x="6553047" y="3383280"/>
+            <a:ext cx="1790623" cy="914400"/>
+          </a:xfrm>
+          <a:prstGeom prst="rect">
+            <a:avLst/>
+          </a:prstGeom>
+          <a:noFill/>
+        </p:spPr>
+        <p:txBody>
+          <a:bodyPr wrap="square" anchor="t" lIns="0" rIns="0" tIns="0" bIns="0">
+            <a:spAutoFit/>
+          </a:bodyPr>
+          <a:lstStyle/>
+          <a:p>
+            <a:pPr algn="l">
+              <a:lnSpc>
+                <a:spcPct val="110000"/>
+              </a:lnSpc>
+              <a:spcAft>
+                <a:spcPts val="400"/>
+              </a:spcAft>
+            </a:pPr>
+            <a:r>
+              <a:rPr sz="1500" b="0" i="0">
+                <a:solidFill>
+                  <a:srgbClr val="EAF2FF"/>
+                </a:solidFill>
+                <a:latin typeface="Segoe UI"/>
+                <a:ea typeface="微软雅黑"/>
+                <a:cs typeface="微软雅黑"/>
+              </a:rPr>
+              <a:t>美术与世界观</a:t>
+            </a:r>
+          </a:p>
+        </p:txBody>
+      </p:sp>
+      <p:sp>
+        <p:nvSpPr>
+          <p:cNvPr id="15" name="Rounded Rectangle 14"/>
+          <p:cNvSpPr/>
+          <p:nvPr/>
+        </p:nvSpPr>
+        <p:spPr>
+          <a:xfrm>
+            <a:off x="8938031" y="2377440"/>
+            <a:ext cx="2430703" cy="2194560"/>
+          </a:xfrm>
+          <a:prstGeom prst="roundRect">
+            <a:avLst>
+              <a:gd name="adj" fmla="val 8000"/>
+            </a:avLst>
+          </a:prstGeom>
+          <a:solidFill>
+            <a:srgbClr val="151B2B"/>
+          </a:solidFill>
+          <a:ln w="9525">
+            <a:solidFill>
+              <a:srgbClr val="26314B"/>
+            </a:solidFill>
+          </a:ln>
+          <a:effectLst/>
+        </p:spPr>
+        <p:style>
+          <a:lnRef idx="1">
+            <a:schemeClr val="accent1"/>
+          </a:lnRef>
+          <a:fillRef idx="3">
+            <a:schemeClr val="accent1"/>
+          </a:fillRef>
+          <a:effectRef idx="2">
+            <a:schemeClr val="accent1"/>
+          </a:effectRef>
+          <a:fontRef idx="minor">
+            <a:schemeClr val="lt1"/>
+          </a:fontRef>
+        </p:style>
+        <p:txBody>
+          <a:bodyPr rtlCol="0" anchor="ctr"/>
+          <a:lstStyle/>
+          <a:p>
+            <a:pPr algn="ctr"/>
+          </a:p>
+        </p:txBody>
+      </p:sp>
+      <p:sp>
+        <p:nvSpPr>
+          <p:cNvPr id="16" name="TextBox 15"/>
+          <p:cNvSpPr txBox="1"/>
+          <p:nvPr/>
+        </p:nvSpPr>
+        <p:spPr>
+          <a:xfrm>
+            <a:off x="9258071" y="2606040"/>
+            <a:ext cx="1790623" cy="457200"/>
           </a:xfrm>
           <a:prstGeom prst="rect">
             <a:avLst/>
@@ -7849,7 +11003,51 @@
               </a:spcAft>
             </a:pPr>
             <a:r>
-              <a:rPr sz="1800" b="0" i="0">
+              <a:rPr sz="2600" b="1" i="0">
+                <a:solidFill>
+                  <a:srgbClr val="22D3EE"/>
+                </a:solidFill>
+                <a:latin typeface="Segoe UI"/>
+                <a:ea typeface="微软雅黑"/>
+                <a:cs typeface="微软雅黑"/>
+              </a:rPr>
+              <a:t>04</a:t>
+            </a:r>
+          </a:p>
+        </p:txBody>
+      </p:sp>
+      <p:sp>
+        <p:nvSpPr>
+          <p:cNvPr id="17" name="TextBox 16"/>
+          <p:cNvSpPr txBox="1"/>
+          <p:nvPr/>
+        </p:nvSpPr>
+        <p:spPr>
+          <a:xfrm>
+            <a:off x="9258071" y="3383280"/>
+            <a:ext cx="1790623" cy="914400"/>
+          </a:xfrm>
+          <a:prstGeom prst="rect">
+            <a:avLst/>
+          </a:prstGeom>
+          <a:noFill/>
+        </p:spPr>
+        <p:txBody>
+          <a:bodyPr wrap="square" anchor="t" lIns="0" rIns="0" tIns="0" bIns="0">
+            <a:spAutoFit/>
+          </a:bodyPr>
+          <a:lstStyle/>
+          <a:p>
+            <a:pPr algn="l">
+              <a:lnSpc>
+                <a:spcPct val="110000"/>
+              </a:lnSpc>
+              <a:spcAft>
+                <a:spcPts val="400"/>
+              </a:spcAft>
+            </a:pPr>
+            <a:r>
+              <a:rPr sz="1500" b="0" i="0">
                 <a:solidFill>
                   <a:srgbClr val="EAF2FF"/>
                 </a:solidFill>
@@ -7857,57 +11055,65 @@
                 <a:ea typeface="微软雅黑"/>
                 <a:cs typeface="微软雅黑"/>
               </a:rPr>
-              <a:t>核心玩法</a:t>
-            </a:r>
-          </a:p>
-        </p:txBody>
-      </p:sp>
-      <p:cxnSp>
-        <p:nvCxnSpPr>
-          <p:cNvPr id="11" name="Connector 10"/>
-          <p:cNvCxnSpPr/>
-          <p:nvPr/>
-        </p:nvCxnSpPr>
-        <p:spPr>
-          <a:xfrm>
-            <a:off x="7269480" y="2660904"/>
-            <a:ext cx="4160520" cy="0"/>
-          </a:xfrm>
-          <a:prstGeom prst="line">
-            <a:avLst/>
-          </a:prstGeom>
-          <a:ln w="9525">
-            <a:solidFill>
-              <a:srgbClr val="26314B"/>
-            </a:solidFill>
+              <a:t>开发计划</a:t>
+            </a:r>
+          </a:p>
+        </p:txBody>
+      </p:sp>
+      <p:sp>
+        <p:nvSpPr>
+          <p:cNvPr id="18" name="Rectangle 17"/>
+          <p:cNvSpPr/>
+          <p:nvPr/>
+        </p:nvSpPr>
+        <p:spPr>
+          <a:xfrm>
+            <a:off x="822960" y="6291072"/>
+            <a:ext cx="10545775" cy="7315"/>
+          </a:xfrm>
+          <a:prstGeom prst="rect">
+            <a:avLst/>
+          </a:prstGeom>
+          <a:solidFill>
+            <a:srgbClr val="26314B"/>
+          </a:solidFill>
+          <a:ln>
+            <a:noFill/>
           </a:ln>
           <a:effectLst/>
         </p:spPr>
         <p:style>
-          <a:lnRef idx="2">
+          <a:lnRef idx="1">
             <a:schemeClr val="accent1"/>
           </a:lnRef>
-          <a:fillRef idx="0">
+          <a:fillRef idx="3">
             <a:schemeClr val="accent1"/>
           </a:fillRef>
-          <a:effectRef idx="1">
+          <a:effectRef idx="2">
             <a:schemeClr val="accent1"/>
           </a:effectRef>
           <a:fontRef idx="minor">
-            <a:schemeClr val="tx1"/>
+            <a:schemeClr val="lt1"/>
           </a:fontRef>
         </p:style>
-      </p:cxnSp>
-      <p:sp>
-        <p:nvSpPr>
-          <p:cNvPr id="12" name="TextBox 11"/>
+        <p:txBody>
+          <a:bodyPr rtlCol="0" anchor="ctr"/>
+          <a:lstStyle/>
+          <a:p>
+            <a:pPr algn="ctr"/>
+          </a:p>
+        </p:txBody>
+      </p:sp>
+      <p:sp>
+        <p:nvSpPr>
+          <p:cNvPr id="19" name="TextBox 18"/>
           <p:cNvSpPr txBox="1"/>
           <p:nvPr/>
         </p:nvSpPr>
         <p:spPr>
           <a:xfrm>
-            <a:off x="822960" y="3063240"/>
-            <a:ext cx="731520" cy="457200"/>
+            <a:off x="822960" y="6355080"/>
+            <a:ext cx="6583680" cy="274320"/>
           </a:xfrm>
           <a:prstGeom prst="rect">
             <a:avLst/>
@@ -7929,298 +11135,6 @@
               </a:spcAft>
             </a:pPr>
             <a:r>
-              <a:rPr sz="1800" b="1" i="0">
-                <a:solidFill>
-                  <a:srgbClr val="22D3EE"/>
-                </a:solidFill>
-                <a:latin typeface="Segoe UI"/>
-                <a:ea typeface="微软雅黑"/>
-                <a:cs typeface="微软雅黑"/>
-              </a:rPr>
-              <a:t>03</a:t>
-            </a:r>
-          </a:p>
-        </p:txBody>
-      </p:sp>
-      <p:sp>
-        <p:nvSpPr>
-          <p:cNvPr id="13" name="TextBox 12"/>
-          <p:cNvSpPr txBox="1"/>
-          <p:nvPr/>
-        </p:nvSpPr>
-        <p:spPr>
-          <a:xfrm>
-            <a:off x="1783080" y="3044952"/>
-            <a:ext cx="4206240" cy="457200"/>
-          </a:xfrm>
-          <a:prstGeom prst="rect">
-            <a:avLst/>
-          </a:prstGeom>
-          <a:noFill/>
-        </p:spPr>
-        <p:txBody>
-          <a:bodyPr wrap="square" anchor="t" lIns="0" rIns="0" tIns="0" bIns="0">
-            <a:spAutoFit/>
-          </a:bodyPr>
-          <a:lstStyle/>
-          <a:p>
-            <a:pPr algn="l">
-              <a:lnSpc>
-                <a:spcPct val="100000"/>
-              </a:lnSpc>
-              <a:spcAft>
-                <a:spcPts val="400"/>
-              </a:spcAft>
-            </a:pPr>
-            <a:r>
-              <a:rPr sz="1800" b="0" i="0">
-                <a:solidFill>
-                  <a:srgbClr val="EAF2FF"/>
-                </a:solidFill>
-                <a:latin typeface="Segoe UI"/>
-                <a:ea typeface="微软雅黑"/>
-                <a:cs typeface="微软雅黑"/>
-              </a:rPr>
-              <a:t>美术与世界观</a:t>
-            </a:r>
-          </a:p>
-        </p:txBody>
-      </p:sp>
-      <p:cxnSp>
-        <p:nvCxnSpPr>
-          <p:cNvPr id="14" name="Connector 13"/>
-          <p:cNvCxnSpPr/>
-          <p:nvPr/>
-        </p:nvCxnSpPr>
-        <p:spPr>
-          <a:xfrm>
-            <a:off x="1783080" y="3575304"/>
-            <a:ext cx="4160520" cy="0"/>
-          </a:xfrm>
-          <a:prstGeom prst="line">
-            <a:avLst/>
-          </a:prstGeom>
-          <a:ln w="9525">
-            <a:solidFill>
-              <a:srgbClr val="26314B"/>
-            </a:solidFill>
-          </a:ln>
-          <a:effectLst/>
-        </p:spPr>
-        <p:style>
-          <a:lnRef idx="2">
-            <a:schemeClr val="accent1"/>
-          </a:lnRef>
-          <a:fillRef idx="0">
-            <a:schemeClr val="accent1"/>
-          </a:fillRef>
-          <a:effectRef idx="1">
-            <a:schemeClr val="accent1"/>
-          </a:effectRef>
-          <a:fontRef idx="minor">
-            <a:schemeClr val="tx1"/>
-          </a:fontRef>
-        </p:style>
-      </p:cxnSp>
-      <p:sp>
-        <p:nvSpPr>
-          <p:cNvPr id="15" name="TextBox 14"/>
-          <p:cNvSpPr txBox="1"/>
-          <p:nvPr/>
-        </p:nvSpPr>
-        <p:spPr>
-          <a:xfrm>
-            <a:off x="6309360" y="3063240"/>
-            <a:ext cx="731520" cy="457200"/>
-          </a:xfrm>
-          <a:prstGeom prst="rect">
-            <a:avLst/>
-          </a:prstGeom>
-          <a:noFill/>
-        </p:spPr>
-        <p:txBody>
-          <a:bodyPr wrap="square" anchor="t" lIns="0" rIns="0" tIns="0" bIns="0">
-            <a:spAutoFit/>
-          </a:bodyPr>
-          <a:lstStyle/>
-          <a:p>
-            <a:pPr algn="l">
-              <a:lnSpc>
-                <a:spcPct val="100000"/>
-              </a:lnSpc>
-              <a:spcAft>
-                <a:spcPts val="400"/>
-              </a:spcAft>
-            </a:pPr>
-            <a:r>
-              <a:rPr sz="1800" b="1" i="0">
-                <a:solidFill>
-                  <a:srgbClr val="22D3EE"/>
-                </a:solidFill>
-                <a:latin typeface="Segoe UI"/>
-                <a:ea typeface="微软雅黑"/>
-                <a:cs typeface="微软雅黑"/>
-              </a:rPr>
-              <a:t>04</a:t>
-            </a:r>
-          </a:p>
-        </p:txBody>
-      </p:sp>
-      <p:sp>
-        <p:nvSpPr>
-          <p:cNvPr id="16" name="TextBox 15"/>
-          <p:cNvSpPr txBox="1"/>
-          <p:nvPr/>
-        </p:nvSpPr>
-        <p:spPr>
-          <a:xfrm>
-            <a:off x="7269480" y="3044952"/>
-            <a:ext cx="4206240" cy="457200"/>
-          </a:xfrm>
-          <a:prstGeom prst="rect">
-            <a:avLst/>
-          </a:prstGeom>
-          <a:noFill/>
-        </p:spPr>
-        <p:txBody>
-          <a:bodyPr wrap="square" anchor="t" lIns="0" rIns="0" tIns="0" bIns="0">
-            <a:spAutoFit/>
-          </a:bodyPr>
-          <a:lstStyle/>
-          <a:p>
-            <a:pPr algn="l">
-              <a:lnSpc>
-                <a:spcPct val="100000"/>
-              </a:lnSpc>
-              <a:spcAft>
-                <a:spcPts val="400"/>
-              </a:spcAft>
-            </a:pPr>
-            <a:r>
-              <a:rPr sz="1800" b="0" i="0">
-                <a:solidFill>
-                  <a:srgbClr val="EAF2FF"/>
-                </a:solidFill>
-                <a:latin typeface="Segoe UI"/>
-                <a:ea typeface="微软雅黑"/>
-                <a:cs typeface="微软雅黑"/>
-              </a:rPr>
-              <a:t>开发计划</a:t>
-            </a:r>
-          </a:p>
-        </p:txBody>
-      </p:sp>
-      <p:cxnSp>
-        <p:nvCxnSpPr>
-          <p:cNvPr id="17" name="Connector 16"/>
-          <p:cNvCxnSpPr/>
-          <p:nvPr/>
-        </p:nvCxnSpPr>
-        <p:spPr>
-          <a:xfrm>
-            <a:off x="7269480" y="3575304"/>
-            <a:ext cx="4160520" cy="0"/>
-          </a:xfrm>
-          <a:prstGeom prst="line">
-            <a:avLst/>
-          </a:prstGeom>
-          <a:ln w="9525">
-            <a:solidFill>
-              <a:srgbClr val="26314B"/>
-            </a:solidFill>
-          </a:ln>
-          <a:effectLst/>
-        </p:spPr>
-        <p:style>
-          <a:lnRef idx="2">
-            <a:schemeClr val="accent1"/>
-          </a:lnRef>
-          <a:fillRef idx="0">
-            <a:schemeClr val="accent1"/>
-          </a:fillRef>
-          <a:effectRef idx="1">
-            <a:schemeClr val="accent1"/>
-          </a:effectRef>
-          <a:fontRef idx="minor">
-            <a:schemeClr val="tx1"/>
-          </a:fontRef>
-        </p:style>
-      </p:cxnSp>
-      <p:sp>
-        <p:nvSpPr>
-          <p:cNvPr id="18" name="Rectangle 17"/>
-          <p:cNvSpPr/>
-          <p:nvPr/>
-        </p:nvSpPr>
-        <p:spPr>
-          <a:xfrm>
-            <a:off x="822960" y="6291072"/>
-            <a:ext cx="10545775" cy="7315"/>
-          </a:xfrm>
-          <a:prstGeom prst="rect">
-            <a:avLst/>
-          </a:prstGeom>
-          <a:solidFill>
-            <a:srgbClr val="26314B"/>
-          </a:solidFill>
-          <a:ln>
-            <a:noFill/>
-          </a:ln>
-          <a:effectLst/>
-        </p:spPr>
-        <p:style>
-          <a:lnRef idx="1">
-            <a:schemeClr val="accent1"/>
-          </a:lnRef>
-          <a:fillRef idx="3">
-            <a:schemeClr val="accent1"/>
-          </a:fillRef>
-          <a:effectRef idx="2">
-            <a:schemeClr val="accent1"/>
-          </a:effectRef>
-          <a:fontRef idx="minor">
-            <a:schemeClr val="lt1"/>
-          </a:fontRef>
-        </p:style>
-        <p:txBody>
-          <a:bodyPr rtlCol="0" anchor="ctr"/>
-          <a:lstStyle/>
-          <a:p>
-            <a:pPr algn="ctr"/>
-          </a:p>
-        </p:txBody>
-      </p:sp>
-      <p:sp>
-        <p:nvSpPr>
-          <p:cNvPr id="19" name="TextBox 18"/>
-          <p:cNvSpPr txBox="1"/>
-          <p:nvPr/>
-        </p:nvSpPr>
-        <p:spPr>
-          <a:xfrm>
-            <a:off x="822960" y="6355080"/>
-            <a:ext cx="6400800" cy="274320"/>
-          </a:xfrm>
-          <a:prstGeom prst="rect">
-            <a:avLst/>
-          </a:prstGeom>
-          <a:noFill/>
-        </p:spPr>
-        <p:txBody>
-          <a:bodyPr wrap="square" anchor="t" lIns="0" rIns="0" tIns="0" bIns="0">
-            <a:spAutoFit/>
-          </a:bodyPr>
-          <a:lstStyle/>
-          <a:p>
-            <a:pPr algn="l">
-              <a:lnSpc>
-                <a:spcPct val="100000"/>
-              </a:lnSpc>
-              <a:spcAft>
-                <a:spcPts val="400"/>
-              </a:spcAft>
-            </a:pPr>
-            <a:r>
               <a:rPr sz="900" b="0" i="0">
                 <a:solidFill>
                   <a:srgbClr val="94A3C4"/>
@@ -8239,6 +11153,9 @@
   <p:clrMapOvr>
     <a:masterClrMapping/>
   </p:clrMapOvr>
+  <p:transition spd="med">
+    <p:fade/>
+  </p:transition>
 </p:sld>
 </file>
 
@@ -8617,7 +11534,7 @@
         <p:spPr>
           <a:xfrm>
             <a:off x="822960" y="6355080"/>
-            <a:ext cx="6400800" cy="274320"/>
+            <a:ext cx="6583680" cy="274320"/>
           </a:xfrm>
           <a:prstGeom prst="rect">
             <a:avLst/>
@@ -8657,6 +11574,9 @@
   <p:clrMapOvr>
     <a:masterClrMapping/>
   </p:clrMapOvr>
+  <p:transition spd="med">
+    <p:fade/>
+  </p:transition>
 </p:sld>
 </file>
 
@@ -8767,7 +11687,7 @@
         <p:spPr>
           <a:xfrm>
             <a:off x="822960" y="868680"/>
-            <a:ext cx="10515600" cy="548640"/>
+            <a:ext cx="10607040" cy="548640"/>
           </a:xfrm>
           <a:prstGeom prst="rect">
             <a:avLst/>
@@ -8854,203 +11774,8 @@
         </p:nvSpPr>
         <p:spPr>
           <a:xfrm>
-            <a:off x="822960" y="2148840"/>
-            <a:ext cx="10424160" cy="3840480"/>
-          </a:xfrm>
-          <a:prstGeom prst="rect">
-            <a:avLst/>
-          </a:prstGeom>
-          <a:noFill/>
-        </p:spPr>
-        <p:txBody>
-          <a:bodyPr wrap="square">
-            <a:spAutoFit/>
-          </a:bodyPr>
-          <a:lstStyle/>
-          <a:p>
-            <a:pPr>
-              <a:lnSpc>
-                <a:spcPct val="115000"/>
-              </a:lnSpc>
-              <a:spcAft>
-                <a:spcPts val="1400"/>
-              </a:spcAft>
-            </a:pPr>
-            <a:r>
-              <a:rPr sz="1189">
-                <a:solidFill>
-                  <a:srgbClr val="22D3EE"/>
-                </a:solidFill>
-                <a:latin typeface="Segoe UI"/>
-                <a:ea typeface="微软雅黑"/>
-                <a:cs typeface="微软雅黑"/>
-              </a:rPr>
-              <a:t>●  </a:t>
-            </a:r>
-            <a:r>
-              <a:rPr sz="1700">
-                <a:solidFill>
-                  <a:srgbClr val="94A3C4"/>
-                </a:solidFill>
-                <a:latin typeface="Segoe UI"/>
-                <a:ea typeface="微软雅黑"/>
-                <a:cs typeface="微软雅黑"/>
-              </a:rPr>
-              <a:t>在此输入设计目标一（体验 / 情感）</a:t>
-            </a:r>
-          </a:p>
-          <a:p>
-            <a:pPr>
-              <a:lnSpc>
-                <a:spcPct val="115000"/>
-              </a:lnSpc>
-              <a:spcAft>
-                <a:spcPts val="1400"/>
-              </a:spcAft>
-            </a:pPr>
-            <a:r>
-              <a:rPr sz="1189">
-                <a:solidFill>
-                  <a:srgbClr val="22D3EE"/>
-                </a:solidFill>
-                <a:latin typeface="Segoe UI"/>
-                <a:ea typeface="微软雅黑"/>
-                <a:cs typeface="微软雅黑"/>
-              </a:rPr>
-              <a:t>●  </a:t>
-            </a:r>
-            <a:r>
-              <a:rPr sz="1700">
-                <a:solidFill>
-                  <a:srgbClr val="94A3C4"/>
-                </a:solidFill>
-                <a:latin typeface="Segoe UI"/>
-                <a:ea typeface="微软雅黑"/>
-                <a:cs typeface="微软雅黑"/>
-              </a:rPr>
-              <a:t>在此输入设计目标二（机制 / 循环）</a:t>
-            </a:r>
-          </a:p>
-          <a:p>
-            <a:pPr>
-              <a:lnSpc>
-                <a:spcPct val="115000"/>
-              </a:lnSpc>
-              <a:spcAft>
-                <a:spcPts val="1400"/>
-              </a:spcAft>
-            </a:pPr>
-            <a:r>
-              <a:rPr sz="1189">
-                <a:solidFill>
-                  <a:srgbClr val="22D3EE"/>
-                </a:solidFill>
-                <a:latin typeface="Segoe UI"/>
-                <a:ea typeface="微软雅黑"/>
-                <a:cs typeface="微软雅黑"/>
-              </a:rPr>
-              <a:t>●  </a:t>
-            </a:r>
-            <a:r>
-              <a:rPr sz="1700">
-                <a:solidFill>
-                  <a:srgbClr val="94A3C4"/>
-                </a:solidFill>
-                <a:latin typeface="Segoe UI"/>
-                <a:ea typeface="微软雅黑"/>
-                <a:cs typeface="微软雅黑"/>
-              </a:rPr>
-              <a:t>在此输入设计目标三（差异点）</a:t>
-            </a:r>
-          </a:p>
-          <a:p>
-            <a:pPr>
-              <a:lnSpc>
-                <a:spcPct val="115000"/>
-              </a:lnSpc>
-              <a:spcAft>
-                <a:spcPts val="1400"/>
-              </a:spcAft>
-            </a:pPr>
-            <a:r>
-              <a:rPr sz="1189">
-                <a:solidFill>
-                  <a:srgbClr val="22D3EE"/>
-                </a:solidFill>
-                <a:latin typeface="Segoe UI"/>
-                <a:ea typeface="微软雅黑"/>
-                <a:cs typeface="微软雅黑"/>
-              </a:rPr>
-              <a:t>●  </a:t>
-            </a:r>
-            <a:r>
-              <a:rPr sz="1700">
-                <a:solidFill>
-                  <a:srgbClr val="94A3C4"/>
-                </a:solidFill>
-                <a:latin typeface="Segoe UI"/>
-                <a:ea typeface="微软雅黑"/>
-                <a:cs typeface="微软雅黑"/>
-              </a:rPr>
-              <a:t>在此输入设计目标四（约束 / 风险）</a:t>
-            </a:r>
-          </a:p>
-        </p:txBody>
-      </p:sp>
-      <p:sp>
-        <p:nvSpPr>
-          <p:cNvPr id="7" name="Rectangle 6"/>
-          <p:cNvSpPr/>
-          <p:nvPr/>
-        </p:nvSpPr>
-        <p:spPr>
-          <a:xfrm>
-            <a:off x="822960" y="6291072"/>
-            <a:ext cx="10545775" cy="7315"/>
-          </a:xfrm>
-          <a:prstGeom prst="rect">
-            <a:avLst/>
-          </a:prstGeom>
-          <a:solidFill>
-            <a:srgbClr val="26314B"/>
-          </a:solidFill>
-          <a:ln>
-            <a:noFill/>
-          </a:ln>
-          <a:effectLst/>
-        </p:spPr>
-        <p:style>
-          <a:lnRef idx="1">
-            <a:schemeClr val="accent1"/>
-          </a:lnRef>
-          <a:fillRef idx="3">
-            <a:schemeClr val="accent1"/>
-          </a:fillRef>
-          <a:effectRef idx="2">
-            <a:schemeClr val="accent1"/>
-          </a:effectRef>
-          <a:fontRef idx="minor">
-            <a:schemeClr val="lt1"/>
-          </a:fontRef>
-        </p:style>
-        <p:txBody>
-          <a:bodyPr rtlCol="0" anchor="ctr"/>
-          <a:lstStyle/>
-          <a:p>
-            <a:pPr algn="ctr"/>
-          </a:p>
-        </p:txBody>
-      </p:sp>
-      <p:sp>
-        <p:nvSpPr>
-          <p:cNvPr id="8" name="TextBox 7"/>
-          <p:cNvSpPr txBox="1"/>
-          <p:nvPr/>
-        </p:nvSpPr>
-        <p:spPr>
-          <a:xfrm>
-            <a:off x="822960" y="6355080"/>
-            <a:ext cx="6400800" cy="274320"/>
+            <a:off x="822960" y="2057400"/>
+            <a:ext cx="914400" cy="548640"/>
           </a:xfrm>
           <a:prstGeom prst="rect">
             <a:avLst/>
@@ -9072,6 +11797,546 @@
               </a:spcAft>
             </a:pPr>
             <a:r>
+              <a:rPr sz="2200" b="1" i="0">
+                <a:solidFill>
+                  <a:srgbClr val="22D3EE"/>
+                </a:solidFill>
+                <a:latin typeface="Segoe UI"/>
+                <a:ea typeface="微软雅黑"/>
+                <a:cs typeface="微软雅黑"/>
+              </a:rPr>
+              <a:t>01</a:t>
+            </a:r>
+          </a:p>
+        </p:txBody>
+      </p:sp>
+      <p:sp>
+        <p:nvSpPr>
+          <p:cNvPr id="7" name="TextBox 6"/>
+          <p:cNvSpPr txBox="1"/>
+          <p:nvPr/>
+        </p:nvSpPr>
+        <p:spPr>
+          <a:xfrm>
+            <a:off x="1920240" y="2103120"/>
+            <a:ext cx="9144000" cy="457200"/>
+          </a:xfrm>
+          <a:prstGeom prst="rect">
+            <a:avLst/>
+          </a:prstGeom>
+          <a:noFill/>
+        </p:spPr>
+        <p:txBody>
+          <a:bodyPr wrap="square" anchor="t" lIns="0" rIns="0" tIns="0" bIns="0">
+            <a:spAutoFit/>
+          </a:bodyPr>
+          <a:lstStyle/>
+          <a:p>
+            <a:pPr algn="l">
+              <a:lnSpc>
+                <a:spcPct val="100000"/>
+              </a:lnSpc>
+              <a:spcAft>
+                <a:spcPts val="400"/>
+              </a:spcAft>
+            </a:pPr>
+            <a:r>
+              <a:rPr sz="1600" b="0" i="0">
+                <a:solidFill>
+                  <a:srgbClr val="EAF2FF"/>
+                </a:solidFill>
+                <a:latin typeface="Segoe UI"/>
+                <a:ea typeface="微软雅黑"/>
+                <a:cs typeface="微软雅黑"/>
+              </a:rPr>
+              <a:t>在此输入「游戏概述」的要点一</a:t>
+            </a:r>
+          </a:p>
+        </p:txBody>
+      </p:sp>
+      <p:cxnSp>
+        <p:nvCxnSpPr>
+          <p:cNvPr id="8" name="Connector 7"/>
+          <p:cNvCxnSpPr/>
+          <p:nvPr/>
+        </p:nvCxnSpPr>
+        <p:spPr>
+          <a:xfrm>
+            <a:off x="1920240" y="2660904"/>
+            <a:ext cx="9418320" cy="0"/>
+          </a:xfrm>
+          <a:prstGeom prst="line">
+            <a:avLst/>
+          </a:prstGeom>
+          <a:ln w="7620">
+            <a:solidFill>
+              <a:srgbClr val="26314B"/>
+            </a:solidFill>
+          </a:ln>
+          <a:effectLst/>
+        </p:spPr>
+        <p:style>
+          <a:lnRef idx="2">
+            <a:schemeClr val="accent1"/>
+          </a:lnRef>
+          <a:fillRef idx="0">
+            <a:schemeClr val="accent1"/>
+          </a:fillRef>
+          <a:effectRef idx="1">
+            <a:schemeClr val="accent1"/>
+          </a:effectRef>
+          <a:fontRef idx="minor">
+            <a:schemeClr val="tx1"/>
+          </a:fontRef>
+        </p:style>
+      </p:cxnSp>
+      <p:sp>
+        <p:nvSpPr>
+          <p:cNvPr id="9" name="TextBox 8"/>
+          <p:cNvSpPr txBox="1"/>
+          <p:nvPr/>
+        </p:nvSpPr>
+        <p:spPr>
+          <a:xfrm>
+            <a:off x="822960" y="2843784"/>
+            <a:ext cx="914400" cy="548640"/>
+          </a:xfrm>
+          <a:prstGeom prst="rect">
+            <a:avLst/>
+          </a:prstGeom>
+          <a:noFill/>
+        </p:spPr>
+        <p:txBody>
+          <a:bodyPr wrap="square" anchor="t" lIns="0" rIns="0" tIns="0" bIns="0">
+            <a:spAutoFit/>
+          </a:bodyPr>
+          <a:lstStyle/>
+          <a:p>
+            <a:pPr algn="l">
+              <a:lnSpc>
+                <a:spcPct val="100000"/>
+              </a:lnSpc>
+              <a:spcAft>
+                <a:spcPts val="400"/>
+              </a:spcAft>
+            </a:pPr>
+            <a:r>
+              <a:rPr sz="2200" b="1" i="0">
+                <a:solidFill>
+                  <a:srgbClr val="22D3EE"/>
+                </a:solidFill>
+                <a:latin typeface="Segoe UI"/>
+                <a:ea typeface="微软雅黑"/>
+                <a:cs typeface="微软雅黑"/>
+              </a:rPr>
+              <a:t>02</a:t>
+            </a:r>
+          </a:p>
+        </p:txBody>
+      </p:sp>
+      <p:sp>
+        <p:nvSpPr>
+          <p:cNvPr id="10" name="TextBox 9"/>
+          <p:cNvSpPr txBox="1"/>
+          <p:nvPr/>
+        </p:nvSpPr>
+        <p:spPr>
+          <a:xfrm>
+            <a:off x="1920240" y="2889503"/>
+            <a:ext cx="9144000" cy="457200"/>
+          </a:xfrm>
+          <a:prstGeom prst="rect">
+            <a:avLst/>
+          </a:prstGeom>
+          <a:noFill/>
+        </p:spPr>
+        <p:txBody>
+          <a:bodyPr wrap="square" anchor="t" lIns="0" rIns="0" tIns="0" bIns="0">
+            <a:spAutoFit/>
+          </a:bodyPr>
+          <a:lstStyle/>
+          <a:p>
+            <a:pPr algn="l">
+              <a:lnSpc>
+                <a:spcPct val="100000"/>
+              </a:lnSpc>
+              <a:spcAft>
+                <a:spcPts val="400"/>
+              </a:spcAft>
+            </a:pPr>
+            <a:r>
+              <a:rPr sz="1600" b="0" i="0">
+                <a:solidFill>
+                  <a:srgbClr val="EAF2FF"/>
+                </a:solidFill>
+                <a:latin typeface="Segoe UI"/>
+                <a:ea typeface="微软雅黑"/>
+                <a:cs typeface="微软雅黑"/>
+              </a:rPr>
+              <a:t>在此输入「游戏概述」的要点二</a:t>
+            </a:r>
+          </a:p>
+        </p:txBody>
+      </p:sp>
+      <p:cxnSp>
+        <p:nvCxnSpPr>
+          <p:cNvPr id="11" name="Connector 10"/>
+          <p:cNvCxnSpPr/>
+          <p:nvPr/>
+        </p:nvCxnSpPr>
+        <p:spPr>
+          <a:xfrm>
+            <a:off x="1920240" y="3447288"/>
+            <a:ext cx="9418320" cy="0"/>
+          </a:xfrm>
+          <a:prstGeom prst="line">
+            <a:avLst/>
+          </a:prstGeom>
+          <a:ln w="7620">
+            <a:solidFill>
+              <a:srgbClr val="26314B"/>
+            </a:solidFill>
+          </a:ln>
+          <a:effectLst/>
+        </p:spPr>
+        <p:style>
+          <a:lnRef idx="2">
+            <a:schemeClr val="accent1"/>
+          </a:lnRef>
+          <a:fillRef idx="0">
+            <a:schemeClr val="accent1"/>
+          </a:fillRef>
+          <a:effectRef idx="1">
+            <a:schemeClr val="accent1"/>
+          </a:effectRef>
+          <a:fontRef idx="minor">
+            <a:schemeClr val="tx1"/>
+          </a:fontRef>
+        </p:style>
+      </p:cxnSp>
+      <p:sp>
+        <p:nvSpPr>
+          <p:cNvPr id="12" name="TextBox 11"/>
+          <p:cNvSpPr txBox="1"/>
+          <p:nvPr/>
+        </p:nvSpPr>
+        <p:spPr>
+          <a:xfrm>
+            <a:off x="822960" y="3630168"/>
+            <a:ext cx="914400" cy="548640"/>
+          </a:xfrm>
+          <a:prstGeom prst="rect">
+            <a:avLst/>
+          </a:prstGeom>
+          <a:noFill/>
+        </p:spPr>
+        <p:txBody>
+          <a:bodyPr wrap="square" anchor="t" lIns="0" rIns="0" tIns="0" bIns="0">
+            <a:spAutoFit/>
+          </a:bodyPr>
+          <a:lstStyle/>
+          <a:p>
+            <a:pPr algn="l">
+              <a:lnSpc>
+                <a:spcPct val="100000"/>
+              </a:lnSpc>
+              <a:spcAft>
+                <a:spcPts val="400"/>
+              </a:spcAft>
+            </a:pPr>
+            <a:r>
+              <a:rPr sz="2200" b="1" i="0">
+                <a:solidFill>
+                  <a:srgbClr val="22D3EE"/>
+                </a:solidFill>
+                <a:latin typeface="Segoe UI"/>
+                <a:ea typeface="微软雅黑"/>
+                <a:cs typeface="微软雅黑"/>
+              </a:rPr>
+              <a:t>03</a:t>
+            </a:r>
+          </a:p>
+        </p:txBody>
+      </p:sp>
+      <p:sp>
+        <p:nvSpPr>
+          <p:cNvPr id="13" name="TextBox 12"/>
+          <p:cNvSpPr txBox="1"/>
+          <p:nvPr/>
+        </p:nvSpPr>
+        <p:spPr>
+          <a:xfrm>
+            <a:off x="1920240" y="3675887"/>
+            <a:ext cx="9144000" cy="457200"/>
+          </a:xfrm>
+          <a:prstGeom prst="rect">
+            <a:avLst/>
+          </a:prstGeom>
+          <a:noFill/>
+        </p:spPr>
+        <p:txBody>
+          <a:bodyPr wrap="square" anchor="t" lIns="0" rIns="0" tIns="0" bIns="0">
+            <a:spAutoFit/>
+          </a:bodyPr>
+          <a:lstStyle/>
+          <a:p>
+            <a:pPr algn="l">
+              <a:lnSpc>
+                <a:spcPct val="100000"/>
+              </a:lnSpc>
+              <a:spcAft>
+                <a:spcPts val="400"/>
+              </a:spcAft>
+            </a:pPr>
+            <a:r>
+              <a:rPr sz="1600" b="0" i="0">
+                <a:solidFill>
+                  <a:srgbClr val="EAF2FF"/>
+                </a:solidFill>
+                <a:latin typeface="Segoe UI"/>
+                <a:ea typeface="微软雅黑"/>
+                <a:cs typeface="微软雅黑"/>
+              </a:rPr>
+              <a:t>在此输入「游戏概述」的要点三</a:t>
+            </a:r>
+          </a:p>
+        </p:txBody>
+      </p:sp>
+      <p:cxnSp>
+        <p:nvCxnSpPr>
+          <p:cNvPr id="14" name="Connector 13"/>
+          <p:cNvCxnSpPr/>
+          <p:nvPr/>
+        </p:nvCxnSpPr>
+        <p:spPr>
+          <a:xfrm>
+            <a:off x="1920240" y="4233672"/>
+            <a:ext cx="9418320" cy="0"/>
+          </a:xfrm>
+          <a:prstGeom prst="line">
+            <a:avLst/>
+          </a:prstGeom>
+          <a:ln w="7620">
+            <a:solidFill>
+              <a:srgbClr val="26314B"/>
+            </a:solidFill>
+          </a:ln>
+          <a:effectLst/>
+        </p:spPr>
+        <p:style>
+          <a:lnRef idx="2">
+            <a:schemeClr val="accent1"/>
+          </a:lnRef>
+          <a:fillRef idx="0">
+            <a:schemeClr val="accent1"/>
+          </a:fillRef>
+          <a:effectRef idx="1">
+            <a:schemeClr val="accent1"/>
+          </a:effectRef>
+          <a:fontRef idx="minor">
+            <a:schemeClr val="tx1"/>
+          </a:fontRef>
+        </p:style>
+      </p:cxnSp>
+      <p:sp>
+        <p:nvSpPr>
+          <p:cNvPr id="15" name="TextBox 14"/>
+          <p:cNvSpPr txBox="1"/>
+          <p:nvPr/>
+        </p:nvSpPr>
+        <p:spPr>
+          <a:xfrm>
+            <a:off x="822960" y="4416552"/>
+            <a:ext cx="914400" cy="548640"/>
+          </a:xfrm>
+          <a:prstGeom prst="rect">
+            <a:avLst/>
+          </a:prstGeom>
+          <a:noFill/>
+        </p:spPr>
+        <p:txBody>
+          <a:bodyPr wrap="square" anchor="t" lIns="0" rIns="0" tIns="0" bIns="0">
+            <a:spAutoFit/>
+          </a:bodyPr>
+          <a:lstStyle/>
+          <a:p>
+            <a:pPr algn="l">
+              <a:lnSpc>
+                <a:spcPct val="100000"/>
+              </a:lnSpc>
+              <a:spcAft>
+                <a:spcPts val="400"/>
+              </a:spcAft>
+            </a:pPr>
+            <a:r>
+              <a:rPr sz="2200" b="1" i="0">
+                <a:solidFill>
+                  <a:srgbClr val="22D3EE"/>
+                </a:solidFill>
+                <a:latin typeface="Segoe UI"/>
+                <a:ea typeface="微软雅黑"/>
+                <a:cs typeface="微软雅黑"/>
+              </a:rPr>
+              <a:t>04</a:t>
+            </a:r>
+          </a:p>
+        </p:txBody>
+      </p:sp>
+      <p:sp>
+        <p:nvSpPr>
+          <p:cNvPr id="16" name="TextBox 15"/>
+          <p:cNvSpPr txBox="1"/>
+          <p:nvPr/>
+        </p:nvSpPr>
+        <p:spPr>
+          <a:xfrm>
+            <a:off x="1920240" y="4462272"/>
+            <a:ext cx="9144000" cy="457200"/>
+          </a:xfrm>
+          <a:prstGeom prst="rect">
+            <a:avLst/>
+          </a:prstGeom>
+          <a:noFill/>
+        </p:spPr>
+        <p:txBody>
+          <a:bodyPr wrap="square" anchor="t" lIns="0" rIns="0" tIns="0" bIns="0">
+            <a:spAutoFit/>
+          </a:bodyPr>
+          <a:lstStyle/>
+          <a:p>
+            <a:pPr algn="l">
+              <a:lnSpc>
+                <a:spcPct val="100000"/>
+              </a:lnSpc>
+              <a:spcAft>
+                <a:spcPts val="400"/>
+              </a:spcAft>
+            </a:pPr>
+            <a:r>
+              <a:rPr sz="1600" b="0" i="0">
+                <a:solidFill>
+                  <a:srgbClr val="EAF2FF"/>
+                </a:solidFill>
+                <a:latin typeface="Segoe UI"/>
+                <a:ea typeface="微软雅黑"/>
+                <a:cs typeface="微软雅黑"/>
+              </a:rPr>
+              <a:t>在此输入「游戏概述」的要点四</a:t>
+            </a:r>
+          </a:p>
+        </p:txBody>
+      </p:sp>
+      <p:cxnSp>
+        <p:nvCxnSpPr>
+          <p:cNvPr id="17" name="Connector 16"/>
+          <p:cNvCxnSpPr/>
+          <p:nvPr/>
+        </p:nvCxnSpPr>
+        <p:spPr>
+          <a:xfrm>
+            <a:off x="1920240" y="5020056"/>
+            <a:ext cx="9418320" cy="0"/>
+          </a:xfrm>
+          <a:prstGeom prst="line">
+            <a:avLst/>
+          </a:prstGeom>
+          <a:ln w="7620">
+            <a:solidFill>
+              <a:srgbClr val="26314B"/>
+            </a:solidFill>
+          </a:ln>
+          <a:effectLst/>
+        </p:spPr>
+        <p:style>
+          <a:lnRef idx="2">
+            <a:schemeClr val="accent1"/>
+          </a:lnRef>
+          <a:fillRef idx="0">
+            <a:schemeClr val="accent1"/>
+          </a:fillRef>
+          <a:effectRef idx="1">
+            <a:schemeClr val="accent1"/>
+          </a:effectRef>
+          <a:fontRef idx="minor">
+            <a:schemeClr val="tx1"/>
+          </a:fontRef>
+        </p:style>
+      </p:cxnSp>
+      <p:sp>
+        <p:nvSpPr>
+          <p:cNvPr id="18" name="Rectangle 17"/>
+          <p:cNvSpPr/>
+          <p:nvPr/>
+        </p:nvSpPr>
+        <p:spPr>
+          <a:xfrm>
+            <a:off x="822960" y="6291072"/>
+            <a:ext cx="10545775" cy="7315"/>
+          </a:xfrm>
+          <a:prstGeom prst="rect">
+            <a:avLst/>
+          </a:prstGeom>
+          <a:solidFill>
+            <a:srgbClr val="26314B"/>
+          </a:solidFill>
+          <a:ln>
+            <a:noFill/>
+          </a:ln>
+          <a:effectLst/>
+        </p:spPr>
+        <p:style>
+          <a:lnRef idx="1">
+            <a:schemeClr val="accent1"/>
+          </a:lnRef>
+          <a:fillRef idx="3">
+            <a:schemeClr val="accent1"/>
+          </a:fillRef>
+          <a:effectRef idx="2">
+            <a:schemeClr val="accent1"/>
+          </a:effectRef>
+          <a:fontRef idx="minor">
+            <a:schemeClr val="lt1"/>
+          </a:fontRef>
+        </p:style>
+        <p:txBody>
+          <a:bodyPr rtlCol="0" anchor="ctr"/>
+          <a:lstStyle/>
+          <a:p>
+            <a:pPr algn="ctr"/>
+          </a:p>
+        </p:txBody>
+      </p:sp>
+      <p:sp>
+        <p:nvSpPr>
+          <p:cNvPr id="19" name="TextBox 18"/>
+          <p:cNvSpPr txBox="1"/>
+          <p:nvPr/>
+        </p:nvSpPr>
+        <p:spPr>
+          <a:xfrm>
+            <a:off x="822960" y="6355080"/>
+            <a:ext cx="6583680" cy="274320"/>
+          </a:xfrm>
+          <a:prstGeom prst="rect">
+            <a:avLst/>
+          </a:prstGeom>
+          <a:noFill/>
+        </p:spPr>
+        <p:txBody>
+          <a:bodyPr wrap="square" anchor="t" lIns="0" rIns="0" tIns="0" bIns="0">
+            <a:spAutoFit/>
+          </a:bodyPr>
+          <a:lstStyle/>
+          <a:p>
+            <a:pPr algn="l">
+              <a:lnSpc>
+                <a:spcPct val="100000"/>
+              </a:lnSpc>
+              <a:spcAft>
+                <a:spcPts val="400"/>
+              </a:spcAft>
+            </a:pPr>
+            <a:r>
               <a:rPr sz="900" b="0" i="0">
                 <a:solidFill>
                   <a:srgbClr val="94A3C4"/>
@@ -9090,6 +12355,9 @@
   <p:clrMapOvr>
     <a:masterClrMapping/>
   </p:clrMapOvr>
+  <p:transition spd="med">
+    <p:fade/>
+  </p:transition>
 </p:sld>
 </file>
 
@@ -9186,7 +12454,7 @@
                 <a:ea typeface="微软雅黑"/>
                 <a:cs typeface="微软雅黑"/>
               </a:rPr>
-              <a:t>OVERVIEW</a:t>
+              <a:t>KEY POINTS</a:t>
             </a:r>
           </a:p>
         </p:txBody>
@@ -9200,7 +12468,7 @@
         <p:spPr>
           <a:xfrm>
             <a:off x="822960" y="868680"/>
-            <a:ext cx="10515600" cy="548640"/>
+            <a:ext cx="10607040" cy="548640"/>
           </a:xfrm>
           <a:prstGeom prst="rect">
             <a:avLst/>
@@ -9230,7 +12498,7 @@
                 <a:ea typeface="微软雅黑"/>
                 <a:cs typeface="微软雅黑"/>
               </a:rPr>
-              <a:t>参考作品 A / 参考作品 B</a:t>
+              <a:t>核心玩法</a:t>
             </a:r>
           </a:p>
         </p:txBody>
@@ -9410,7 +12678,7 @@
                 <a:ea typeface="微软雅黑"/>
                 <a:cs typeface="微软雅黑"/>
               </a:rPr>
-              <a:t>A · 参考作品 A</a:t>
+              <a:t>A · 游戏概述</a:t>
             </a:r>
           </a:p>
         </p:txBody>
@@ -9465,7 +12733,7 @@
                 <a:ea typeface="微软雅黑"/>
                 <a:cs typeface="微软雅黑"/>
               </a:rPr>
-              <a:t>借鉴点一</a:t>
+              <a:t>在此输入要点一</a:t>
             </a:r>
           </a:p>
           <a:p>
@@ -9497,7 +12765,7 @@
                 <a:ea typeface="微软雅黑"/>
                 <a:cs typeface="微软雅黑"/>
               </a:rPr>
-              <a:t>借鉴点二</a:t>
+              <a:t>在此输入要点二</a:t>
             </a:r>
           </a:p>
           <a:p>
@@ -9529,7 +12797,7 @@
                 <a:ea typeface="微软雅黑"/>
                 <a:cs typeface="微软雅黑"/>
               </a:rPr>
-              <a:t>借鉴点三</a:t>
+              <a:t>在此输入要点三</a:t>
             </a:r>
           </a:p>
         </p:txBody>
@@ -9665,7 +12933,7 @@
                 <a:ea typeface="微软雅黑"/>
                 <a:cs typeface="微软雅黑"/>
               </a:rPr>
-              <a:t>B · 参考作品 B</a:t>
+              <a:t>B · 核心玩法</a:t>
             </a:r>
           </a:p>
         </p:txBody>
@@ -9720,7 +12988,7 @@
                 <a:ea typeface="微软雅黑"/>
                 <a:cs typeface="微软雅黑"/>
               </a:rPr>
-              <a:t>借鉴点一</a:t>
+              <a:t>在此输入要点一</a:t>
             </a:r>
           </a:p>
           <a:p>
@@ -9752,7 +13020,7 @@
                 <a:ea typeface="微软雅黑"/>
                 <a:cs typeface="微软雅黑"/>
               </a:rPr>
-              <a:t>借鉴点二</a:t>
+              <a:t>在此输入要点二</a:t>
             </a:r>
           </a:p>
           <a:p>
@@ -9784,7 +13052,7 @@
                 <a:ea typeface="微软雅黑"/>
                 <a:cs typeface="微软雅黑"/>
               </a:rPr>
-              <a:t>借鉴点三</a:t>
+              <a:t>在此输入要点三</a:t>
             </a:r>
           </a:p>
         </p:txBody>
@@ -9930,7 +13198,7 @@
         <p:spPr>
           <a:xfrm>
             <a:off x="822960" y="6355080"/>
-            <a:ext cx="6400800" cy="274320"/>
+            <a:ext cx="6583680" cy="274320"/>
           </a:xfrm>
           <a:prstGeom prst="rect">
             <a:avLst/>
@@ -9970,6 +13238,9 @@
   <p:clrMapOvr>
     <a:masterClrMapping/>
   </p:clrMapOvr>
+  <p:transition spd="med">
+    <p:fade/>
+  </p:transition>
 </p:sld>
 </file>
 
@@ -10080,7 +13351,7 @@
         <p:spPr>
           <a:xfrm>
             <a:off x="822960" y="868680"/>
-            <a:ext cx="10515600" cy="548640"/>
+            <a:ext cx="10607040" cy="548640"/>
           </a:xfrm>
           <a:prstGeom prst="rect">
             <a:avLst/>
@@ -10259,8 +13530,8 @@
         </p:nvSpPr>
         <p:spPr>
           <a:xfrm>
-            <a:off x="1143000" y="2670048"/>
-            <a:ext cx="1790623" cy="1632204"/>
+            <a:off x="1143000" y="2651760"/>
+            <a:ext cx="1790623" cy="1554480"/>
           </a:xfrm>
           <a:prstGeom prst="rect">
             <a:avLst/>
@@ -10282,7 +13553,7 @@
               </a:spcAft>
             </a:pPr>
             <a:r>
-              <a:rPr sz="3000" b="1" i="0">
+              <a:rPr sz="2800" b="1" i="0">
                 <a:solidFill>
                   <a:srgbClr val="22D3EE"/>
                 </a:solidFill>
@@ -10290,7 +13561,7 @@
                 <a:ea typeface="微软雅黑"/>
                 <a:cs typeface="微软雅黑"/>
               </a:rPr>
-              <a:t>核心循环</a:t>
+              <a:t>00</a:t>
             </a:r>
           </a:p>
         </p:txBody>
@@ -10303,7 +13574,7 @@
         </p:nvSpPr>
         <p:spPr>
           <a:xfrm>
-            <a:off x="1143000" y="4668012"/>
+            <a:off x="1143000" y="4590288"/>
             <a:ext cx="1790623" cy="365760"/>
           </a:xfrm>
           <a:prstGeom prst="rect">
@@ -10334,7 +13605,7 @@
                 <a:ea typeface="微软雅黑"/>
                 <a:cs typeface="微软雅黑"/>
               </a:rPr>
-              <a:t>玩法</a:t>
+              <a:t>指标一</a:t>
             </a:r>
           </a:p>
         </p:txBody>
@@ -10347,7 +13618,7 @@
         </p:nvSpPr>
         <p:spPr>
           <a:xfrm>
-            <a:off x="1143000" y="5289804"/>
+            <a:off x="1143000" y="5212080"/>
             <a:ext cx="1790623" cy="1165860"/>
           </a:xfrm>
           <a:prstGeom prst="rect">
@@ -10483,8 +13754,8 @@
         </p:nvSpPr>
         <p:spPr>
           <a:xfrm>
-            <a:off x="3848023" y="2670048"/>
-            <a:ext cx="1790623" cy="1632204"/>
+            <a:off x="3848023" y="2651760"/>
+            <a:ext cx="1790623" cy="1554480"/>
           </a:xfrm>
           <a:prstGeom prst="rect">
             <a:avLst/>
@@ -10506,7 +13777,7 @@
               </a:spcAft>
             </a:pPr>
             <a:r>
-              <a:rPr sz="3000" b="1" i="0">
+              <a:rPr sz="2800" b="1" i="0">
                 <a:solidFill>
                   <a:srgbClr val="22D3EE"/>
                 </a:solidFill>
@@ -10514,7 +13785,7 @@
                 <a:ea typeface="微软雅黑"/>
                 <a:cs typeface="微软雅黑"/>
               </a:rPr>
-              <a:t>目标时长</a:t>
+              <a:t>00</a:t>
             </a:r>
           </a:p>
         </p:txBody>
@@ -10527,7 +13798,7 @@
         </p:nvSpPr>
         <p:spPr>
           <a:xfrm>
-            <a:off x="3848023" y="4668012"/>
+            <a:off x="3848023" y="4590288"/>
             <a:ext cx="1790623" cy="365760"/>
           </a:xfrm>
           <a:prstGeom prst="rect">
@@ -10558,7 +13829,7 @@
                 <a:ea typeface="微软雅黑"/>
                 <a:cs typeface="微软雅黑"/>
               </a:rPr>
-              <a:t>单局 / 单章</a:t>
+              <a:t>指标二</a:t>
             </a:r>
           </a:p>
         </p:txBody>
@@ -10571,7 +13842,7 @@
         </p:nvSpPr>
         <p:spPr>
           <a:xfrm>
-            <a:off x="3848023" y="5289804"/>
+            <a:off x="3848023" y="5212080"/>
             <a:ext cx="1790623" cy="1165860"/>
           </a:xfrm>
           <a:prstGeom prst="rect">
@@ -10707,8 +13978,8 @@
         </p:nvSpPr>
         <p:spPr>
           <a:xfrm>
-            <a:off x="6553047" y="2670048"/>
-            <a:ext cx="1790623" cy="1632204"/>
+            <a:off x="6553047" y="2651760"/>
+            <a:ext cx="1790623" cy="1554480"/>
           </a:xfrm>
           <a:prstGeom prst="rect">
             <a:avLst/>
@@ -10730,7 +14001,7 @@
               </a:spcAft>
             </a:pPr>
             <a:r>
-              <a:rPr sz="3000" b="1" i="0">
+              <a:rPr sz="2800" b="1" i="0">
                 <a:solidFill>
                   <a:srgbClr val="22D3EE"/>
                 </a:solidFill>
@@ -10738,7 +14009,7 @@
                 <a:ea typeface="微软雅黑"/>
                 <a:cs typeface="微软雅黑"/>
               </a:rPr>
-              <a:t>美术风格</a:t>
+              <a:t>00</a:t>
             </a:r>
           </a:p>
         </p:txBody>
@@ -10751,7 +14022,7 @@
         </p:nvSpPr>
         <p:spPr>
           <a:xfrm>
-            <a:off x="6553047" y="4668012"/>
+            <a:off x="6553047" y="4590288"/>
             <a:ext cx="1790623" cy="365760"/>
           </a:xfrm>
           <a:prstGeom prst="rect">
@@ -10782,7 +14053,7 @@
                 <a:ea typeface="微软雅黑"/>
                 <a:cs typeface="微软雅黑"/>
               </a:rPr>
-              <a:t>视觉</a:t>
+              <a:t>指标三</a:t>
             </a:r>
           </a:p>
         </p:txBody>
@@ -10795,7 +14066,7 @@
         </p:nvSpPr>
         <p:spPr>
           <a:xfrm>
-            <a:off x="6553047" y="5289804"/>
+            <a:off x="6553047" y="5212080"/>
             <a:ext cx="1790623" cy="1165860"/>
           </a:xfrm>
           <a:prstGeom prst="rect">
@@ -10931,8 +14202,8 @@
         </p:nvSpPr>
         <p:spPr>
           <a:xfrm>
-            <a:off x="9258071" y="2670048"/>
-            <a:ext cx="1790623" cy="1632204"/>
+            <a:off x="9258071" y="2651760"/>
+            <a:ext cx="1790623" cy="1554480"/>
           </a:xfrm>
           <a:prstGeom prst="rect">
             <a:avLst/>
@@ -10954,7 +14225,7 @@
               </a:spcAft>
             </a:pPr>
             <a:r>
-              <a:rPr sz="3000" b="1" i="0">
+              <a:rPr sz="2800" b="1" i="0">
                 <a:solidFill>
                   <a:srgbClr val="22D3EE"/>
                 </a:solidFill>
@@ -10962,7 +14233,7 @@
                 <a:ea typeface="微软雅黑"/>
                 <a:cs typeface="微软雅黑"/>
               </a:rPr>
-              <a:t>目标平台</a:t>
+              <a:t>00</a:t>
             </a:r>
           </a:p>
         </p:txBody>
@@ -10975,7 +14246,7 @@
         </p:nvSpPr>
         <p:spPr>
           <a:xfrm>
-            <a:off x="9258071" y="4668012"/>
+            <a:off x="9258071" y="4590288"/>
             <a:ext cx="1790623" cy="365760"/>
           </a:xfrm>
           <a:prstGeom prst="rect">
@@ -11006,7 +14277,7 @@
                 <a:ea typeface="微软雅黑"/>
                 <a:cs typeface="微软雅黑"/>
               </a:rPr>
-              <a:t>发布</a:t>
+              <a:t>指标四</a:t>
             </a:r>
           </a:p>
         </p:txBody>
@@ -11019,7 +14290,7 @@
         </p:nvSpPr>
         <p:spPr>
           <a:xfrm>
-            <a:off x="9258071" y="5289804"/>
+            <a:off x="9258071" y="5212080"/>
             <a:ext cx="1790623" cy="1165860"/>
           </a:xfrm>
           <a:prstGeom prst="rect">
@@ -11108,7 +14379,7 @@
         <p:spPr>
           <a:xfrm>
             <a:off x="822960" y="6355080"/>
-            <a:ext cx="6400800" cy="274320"/>
+            <a:ext cx="6583680" cy="274320"/>
           </a:xfrm>
           <a:prstGeom prst="rect">
             <a:avLst/>
@@ -11148,6 +14419,9 @@
   <p:clrMapOvr>
     <a:masterClrMapping/>
   </p:clrMapOvr>
+  <p:transition spd="med">
+    <p:fade/>
+  </p:transition>
 </p:sld>
 </file>
 
@@ -11244,7 +14518,7 @@
                 <a:ea typeface="微软雅黑"/>
                 <a:cs typeface="微软雅黑"/>
               </a:rPr>
-              <a:t>ART &amp; WORLD</a:t>
+              <a:t>PROCESS</a:t>
             </a:r>
           </a:p>
         </p:txBody>
@@ -11258,7 +14532,7 @@
         <p:spPr>
           <a:xfrm>
             <a:off x="822960" y="868680"/>
-            <a:ext cx="10515600" cy="548640"/>
+            <a:ext cx="10607040" cy="548640"/>
           </a:xfrm>
           <a:prstGeom prst="rect">
             <a:avLst/>
@@ -11500,7 +14774,7 @@
                 <a:ea typeface="微软雅黑"/>
                 <a:cs typeface="微软雅黑"/>
               </a:rPr>
-              <a:t>概念</a:t>
+              <a:t>游戏概述</a:t>
             </a:r>
           </a:p>
         </p:txBody>
@@ -11676,7 +14950,7 @@
                 <a:ea typeface="微软雅黑"/>
                 <a:cs typeface="微软雅黑"/>
               </a:rPr>
-              <a:t>原型</a:t>
+              <a:t>核心玩法</a:t>
             </a:r>
           </a:p>
         </p:txBody>
@@ -11852,7 +15126,7 @@
                 <a:ea typeface="微软雅黑"/>
                 <a:cs typeface="微软雅黑"/>
               </a:rPr>
-              <a:t>垂直切片</a:t>
+              <a:t>美术与世界观</a:t>
             </a:r>
           </a:p>
         </p:txBody>
@@ -12028,7 +15302,7 @@
                 <a:ea typeface="微软雅黑"/>
                 <a:cs typeface="微软雅黑"/>
               </a:rPr>
-              <a:t>发布</a:t>
+              <a:t>开发计划</a:t>
             </a:r>
           </a:p>
         </p:txBody>
@@ -12130,7 +15404,7 @@
         <p:spPr>
           <a:xfrm>
             <a:off x="822960" y="6355080"/>
-            <a:ext cx="6400800" cy="274320"/>
+            <a:ext cx="6583680" cy="274320"/>
           </a:xfrm>
           <a:prstGeom prst="rect">
             <a:avLst/>
@@ -12170,6 +15444,9 @@
   <p:clrMapOvr>
     <a:masterClrMapping/>
   </p:clrMapOvr>
+  <p:transition spd="med">
+    <p:fade/>
+  </p:transition>
 </p:sld>
 </file>
 
@@ -12266,7 +15543,7 @@
                 <a:ea typeface="微软雅黑"/>
                 <a:cs typeface="微软雅黑"/>
               </a:rPr>
-              <a:t>ART &amp; WORLD</a:t>
+              <a:t>PROCESS</a:t>
             </a:r>
           </a:p>
         </p:txBody>
@@ -12280,7 +15557,7 @@
         <p:spPr>
           <a:xfrm>
             <a:off x="822960" y="868680"/>
-            <a:ext cx="10515600" cy="548640"/>
+            <a:ext cx="10607040" cy="548640"/>
           </a:xfrm>
           <a:prstGeom prst="rect">
             <a:avLst/>
@@ -12361,7 +15638,7 @@
       </p:sp>
       <p:sp>
         <p:nvSpPr>
-          <p:cNvPr id="6" name="Chevron 5"/>
+          <p:cNvPr id="6" name="Rounded Rectangle 5"/>
           <p:cNvSpPr/>
           <p:nvPr/>
         </p:nvSpPr>
@@ -12370,8 +15647,10 @@
             <a:off x="822960" y="2743200"/>
             <a:ext cx="2464993" cy="1371600"/>
           </a:xfrm>
-          <a:prstGeom prst="chevron">
-            <a:avLst/>
+          <a:prstGeom prst="roundRect">
+            <a:avLst>
+              <a:gd name="adj" fmla="val 12000"/>
+            </a:avLst>
           </a:prstGeom>
           <a:solidFill>
             <a:srgbClr val="22D3EE"/>
@@ -12413,8 +15692,8 @@
         </p:nvSpPr>
         <p:spPr>
           <a:xfrm>
-            <a:off x="1051560" y="3246120"/>
-            <a:ext cx="2007793" cy="457200"/>
+            <a:off x="1024128" y="3246120"/>
+            <a:ext cx="2062657" cy="457200"/>
           </a:xfrm>
           <a:prstGeom prst="rect">
             <a:avLst/>
@@ -12436,7 +15715,7 @@
               </a:spcAft>
             </a:pPr>
             <a:r>
-              <a:rPr sz="1450" b="1" i="0">
+              <a:rPr sz="1400" b="1" i="0">
                 <a:solidFill>
                   <a:srgbClr val="FFFFFF"/>
                 </a:solidFill>
@@ -12495,7 +15774,7 @@
       </p:sp>
       <p:sp>
         <p:nvSpPr>
-          <p:cNvPr id="9" name="Chevron 8"/>
+          <p:cNvPr id="9" name="Rounded Rectangle 8"/>
           <p:cNvSpPr/>
           <p:nvPr/>
         </p:nvSpPr>
@@ -12504,8 +15783,10 @@
             <a:off x="3516553" y="2743200"/>
             <a:ext cx="2464993" cy="1371600"/>
           </a:xfrm>
-          <a:prstGeom prst="chevron">
-            <a:avLst/>
+          <a:prstGeom prst="roundRect">
+            <a:avLst>
+              <a:gd name="adj" fmla="val 12000"/>
+            </a:avLst>
           </a:prstGeom>
           <a:solidFill>
             <a:srgbClr val="151B2B"/>
@@ -12547,8 +15828,8 @@
         </p:nvSpPr>
         <p:spPr>
           <a:xfrm>
-            <a:off x="3745153" y="3246120"/>
-            <a:ext cx="2007793" cy="457200"/>
+            <a:off x="3717721" y="3246120"/>
+            <a:ext cx="2062657" cy="457200"/>
           </a:xfrm>
           <a:prstGeom prst="rect">
             <a:avLst/>
@@ -12570,7 +15851,7 @@
               </a:spcAft>
             </a:pPr>
             <a:r>
-              <a:rPr sz="1450" b="1" i="0">
+              <a:rPr sz="1400" b="1" i="0">
                 <a:solidFill>
                   <a:srgbClr val="EAF2FF"/>
                 </a:solidFill>
@@ -12629,7 +15910,7 @@
       </p:sp>
       <p:sp>
         <p:nvSpPr>
-          <p:cNvPr id="12" name="Chevron 11"/>
+          <p:cNvPr id="12" name="Rounded Rectangle 11"/>
           <p:cNvSpPr/>
           <p:nvPr/>
         </p:nvSpPr>
@@ -12638,8 +15919,10 @@
             <a:off x="6210147" y="2743200"/>
             <a:ext cx="2464993" cy="1371600"/>
           </a:xfrm>
-          <a:prstGeom prst="chevron">
-            <a:avLst/>
+          <a:prstGeom prst="roundRect">
+            <a:avLst>
+              <a:gd name="adj" fmla="val 12000"/>
+            </a:avLst>
           </a:prstGeom>
           <a:solidFill>
             <a:srgbClr val="22D3EE"/>
@@ -12681,8 +15964,8 @@
         </p:nvSpPr>
         <p:spPr>
           <a:xfrm>
-            <a:off x="6438747" y="3246120"/>
-            <a:ext cx="2007793" cy="457200"/>
+            <a:off x="6411315" y="3246120"/>
+            <a:ext cx="2062657" cy="457200"/>
           </a:xfrm>
           <a:prstGeom prst="rect">
             <a:avLst/>
@@ -12704,7 +15987,7 @@
               </a:spcAft>
             </a:pPr>
             <a:r>
-              <a:rPr sz="1450" b="1" i="0">
+              <a:rPr sz="1400" b="1" i="0">
                 <a:solidFill>
                   <a:srgbClr val="FFFFFF"/>
                 </a:solidFill>
@@ -12763,7 +16046,7 @@
       </p:sp>
       <p:sp>
         <p:nvSpPr>
-          <p:cNvPr id="15" name="Chevron 14"/>
+          <p:cNvPr id="15" name="Rounded Rectangle 14"/>
           <p:cNvSpPr/>
           <p:nvPr/>
         </p:nvSpPr>
@@ -12772,8 +16055,10 @@
             <a:off x="8903741" y="2743200"/>
             <a:ext cx="2464993" cy="1371600"/>
           </a:xfrm>
-          <a:prstGeom prst="chevron">
-            <a:avLst/>
+          <a:prstGeom prst="roundRect">
+            <a:avLst>
+              <a:gd name="adj" fmla="val 12000"/>
+            </a:avLst>
           </a:prstGeom>
           <a:solidFill>
             <a:srgbClr val="151B2B"/>
@@ -12815,8 +16100,8 @@
         </p:nvSpPr>
         <p:spPr>
           <a:xfrm>
-            <a:off x="9132341" y="3246120"/>
-            <a:ext cx="2007793" cy="457200"/>
+            <a:off x="9104909" y="3246120"/>
+            <a:ext cx="2062657" cy="457200"/>
           </a:xfrm>
           <a:prstGeom prst="rect">
             <a:avLst/>
@@ -12838,7 +16123,7 @@
               </a:spcAft>
             </a:pPr>
             <a:r>
-              <a:rPr sz="1450" b="1" i="0">
+              <a:rPr sz="1400" b="1" i="0">
                 <a:solidFill>
                   <a:srgbClr val="EAF2FF"/>
                 </a:solidFill>
@@ -12904,7 +16189,7 @@
         <p:spPr>
           <a:xfrm>
             <a:off x="822960" y="6355080"/>
-            <a:ext cx="6400800" cy="274320"/>
+            <a:ext cx="6583680" cy="274320"/>
           </a:xfrm>
           <a:prstGeom prst="rect">
             <a:avLst/>
@@ -12944,6 +16229,9 @@
   <p:clrMapOvr>
     <a:masterClrMapping/>
   </p:clrMapOvr>
+  <p:transition spd="med">
+    <p:fade/>
+  </p:transition>
 </p:sld>
 </file>
 
@@ -13040,7 +16328,7 @@
                 <a:ea typeface="微软雅黑"/>
                 <a:cs typeface="微软雅黑"/>
               </a:rPr>
-              <a:t>ART &amp; WORLD</a:t>
+              <a:t>DATA</a:t>
             </a:r>
           </a:p>
         </p:txBody>
@@ -13054,7 +16342,7 @@
         <p:spPr>
           <a:xfrm>
             <a:off x="822960" y="868680"/>
-            <a:ext cx="10515600" cy="548640"/>
+            <a:ext cx="10607040" cy="548640"/>
           </a:xfrm>
           <a:prstGeom prst="rect">
             <a:avLst/>
@@ -13183,21 +16471,21 @@
       </p:sp>
       <p:sp>
         <p:nvSpPr>
-          <p:cNvPr id="7" name="Rectangle 6"/>
+          <p:cNvPr id="7" name="Oval 6"/>
           <p:cNvSpPr/>
           <p:nvPr/>
         </p:nvSpPr>
         <p:spPr>
           <a:xfrm>
-            <a:off x="1371600" y="3877056"/>
-            <a:ext cx="685800" cy="1609344"/>
-          </a:xfrm>
-          <a:prstGeom prst="rect">
+            <a:off x="3291840" y="2743200"/>
+            <a:ext cx="2560320" cy="2560320"/>
+          </a:xfrm>
+          <a:prstGeom prst="ellipse">
             <a:avLst/>
           </a:prstGeom>
           <a:solidFill>
             <a:srgbClr val="22D3EE">
-              <a:alpha val="90000"/>
+              <a:alpha val="25000"/>
             </a:srgbClr>
           </a:solidFill>
           <a:ln>
@@ -13229,22 +16517,20 @@
       </p:sp>
       <p:sp>
         <p:nvSpPr>
-          <p:cNvPr id="8" name="Rectangle 7"/>
+          <p:cNvPr id="8" name="Oval 7"/>
           <p:cNvSpPr/>
           <p:nvPr/>
         </p:nvSpPr>
         <p:spPr>
           <a:xfrm>
-            <a:off x="2514600" y="3145535"/>
-            <a:ext cx="685800" cy="2340864"/>
-          </a:xfrm>
-          <a:prstGeom prst="rect">
+            <a:off x="4114800" y="3566160"/>
+            <a:ext cx="914400" cy="914400"/>
+          </a:xfrm>
+          <a:prstGeom prst="ellipse">
             <a:avLst/>
           </a:prstGeom>
           <a:solidFill>
-            <a:srgbClr val="F472B6">
-              <a:alpha val="90000"/>
-            </a:srgbClr>
+            <a:srgbClr val="151B2B"/>
           </a:solidFill>
           <a:ln>
             <a:noFill/>
@@ -13275,198 +16561,58 @@
       </p:sp>
       <p:sp>
         <p:nvSpPr>
-          <p:cNvPr id="9" name="Rectangle 8"/>
-          <p:cNvSpPr/>
-          <p:nvPr/>
-        </p:nvSpPr>
-        <p:spPr>
-          <a:xfrm>
-            <a:off x="3657600" y="4169663"/>
-            <a:ext cx="685800" cy="1316736"/>
-          </a:xfrm>
-          <a:prstGeom prst="rect">
-            <a:avLst/>
-          </a:prstGeom>
-          <a:solidFill>
-            <a:srgbClr val="22D3EE">
-              <a:alpha val="90000"/>
-            </a:srgbClr>
-          </a:solidFill>
-          <a:ln>
-            <a:noFill/>
-          </a:ln>
-          <a:effectLst/>
-        </p:spPr>
-        <p:style>
-          <a:lnRef idx="1">
-            <a:schemeClr val="accent1"/>
-          </a:lnRef>
-          <a:fillRef idx="3">
-            <a:schemeClr val="accent1"/>
-          </a:fillRef>
-          <a:effectRef idx="2">
-            <a:schemeClr val="accent1"/>
-          </a:effectRef>
-          <a:fontRef idx="minor">
-            <a:schemeClr val="lt1"/>
-          </a:fontRef>
-        </p:style>
-        <p:txBody>
-          <a:bodyPr rtlCol="0" anchor="ctr"/>
-          <a:lstStyle/>
-          <a:p>
-            <a:pPr algn="ctr"/>
-          </a:p>
-        </p:txBody>
-      </p:sp>
-      <p:sp>
-        <p:nvSpPr>
-          <p:cNvPr id="10" name="Rectangle 9"/>
-          <p:cNvSpPr/>
-          <p:nvPr/>
-        </p:nvSpPr>
-        <p:spPr>
-          <a:xfrm>
-            <a:off x="4800600" y="2706624"/>
-            <a:ext cx="685800" cy="2779776"/>
-          </a:xfrm>
-          <a:prstGeom prst="rect">
-            <a:avLst/>
-          </a:prstGeom>
-          <a:solidFill>
-            <a:srgbClr val="F472B6">
-              <a:alpha val="90000"/>
-            </a:srgbClr>
-          </a:solidFill>
-          <a:ln>
-            <a:noFill/>
-          </a:ln>
-          <a:effectLst/>
-        </p:spPr>
-        <p:style>
-          <a:lnRef idx="1">
-            <a:schemeClr val="accent1"/>
-          </a:lnRef>
-          <a:fillRef idx="3">
-            <a:schemeClr val="accent1"/>
-          </a:fillRef>
-          <a:effectRef idx="2">
-            <a:schemeClr val="accent1"/>
-          </a:effectRef>
-          <a:fontRef idx="minor">
-            <a:schemeClr val="lt1"/>
-          </a:fontRef>
-        </p:style>
-        <p:txBody>
-          <a:bodyPr rtlCol="0" anchor="ctr"/>
-          <a:lstStyle/>
-          <a:p>
-            <a:pPr algn="ctr"/>
-          </a:p>
-        </p:txBody>
-      </p:sp>
-      <p:sp>
-        <p:nvSpPr>
-          <p:cNvPr id="11" name="Rectangle 10"/>
-          <p:cNvSpPr/>
-          <p:nvPr/>
-        </p:nvSpPr>
-        <p:spPr>
-          <a:xfrm>
-            <a:off x="5943600" y="3438144"/>
-            <a:ext cx="685800" cy="2048255"/>
-          </a:xfrm>
-          <a:prstGeom prst="rect">
-            <a:avLst/>
-          </a:prstGeom>
-          <a:solidFill>
-            <a:srgbClr val="22D3EE">
-              <a:alpha val="90000"/>
-            </a:srgbClr>
-          </a:solidFill>
-          <a:ln>
-            <a:noFill/>
-          </a:ln>
-          <a:effectLst/>
-        </p:spPr>
-        <p:style>
-          <a:lnRef idx="1">
-            <a:schemeClr val="accent1"/>
-          </a:lnRef>
-          <a:fillRef idx="3">
-            <a:schemeClr val="accent1"/>
-          </a:fillRef>
-          <a:effectRef idx="2">
-            <a:schemeClr val="accent1"/>
-          </a:effectRef>
-          <a:fontRef idx="minor">
-            <a:schemeClr val="lt1"/>
-          </a:fontRef>
-        </p:style>
-        <p:txBody>
-          <a:bodyPr rtlCol="0" anchor="ctr"/>
-          <a:lstStyle/>
-          <a:p>
-            <a:pPr algn="ctr"/>
-          </a:p>
-        </p:txBody>
-      </p:sp>
-      <p:sp>
-        <p:nvSpPr>
-          <p:cNvPr id="12" name="Rectangle 11"/>
-          <p:cNvSpPr/>
-          <p:nvPr/>
-        </p:nvSpPr>
-        <p:spPr>
-          <a:xfrm>
-            <a:off x="7086600" y="3730752"/>
-            <a:ext cx="685800" cy="1755648"/>
-          </a:xfrm>
-          <a:prstGeom prst="rect">
-            <a:avLst/>
-          </a:prstGeom>
-          <a:solidFill>
-            <a:srgbClr val="F472B6">
-              <a:alpha val="90000"/>
-            </a:srgbClr>
-          </a:solidFill>
-          <a:ln>
-            <a:noFill/>
-          </a:ln>
-          <a:effectLst/>
-        </p:spPr>
-        <p:style>
-          <a:lnRef idx="1">
-            <a:schemeClr val="accent1"/>
-          </a:lnRef>
-          <a:fillRef idx="3">
-            <a:schemeClr val="accent1"/>
-          </a:fillRef>
-          <a:effectRef idx="2">
-            <a:schemeClr val="accent1"/>
-          </a:effectRef>
-          <a:fontRef idx="minor">
-            <a:schemeClr val="lt1"/>
-          </a:fontRef>
-        </p:style>
-        <p:txBody>
-          <a:bodyPr rtlCol="0" anchor="ctr"/>
-          <a:lstStyle/>
-          <a:p>
-            <a:pPr algn="ctr"/>
-          </a:p>
-        </p:txBody>
-      </p:sp>
-      <p:sp>
-        <p:nvSpPr>
-          <p:cNvPr id="13" name="TextBox 12"/>
+          <p:cNvPr id="9" name="TextBox 8"/>
           <p:cNvSpPr txBox="1"/>
           <p:nvPr/>
         </p:nvSpPr>
         <p:spPr>
           <a:xfrm>
+            <a:off x="4114800" y="3566160"/>
+            <a:ext cx="914400" cy="914400"/>
+          </a:xfrm>
+          <a:prstGeom prst="rect">
+            <a:avLst/>
+          </a:prstGeom>
+          <a:noFill/>
+        </p:spPr>
+        <p:txBody>
+          <a:bodyPr wrap="square" anchor="ctr" lIns="0" rIns="0" tIns="0" bIns="0">
+            <a:spAutoFit/>
+          </a:bodyPr>
+          <a:lstStyle/>
+          <a:p>
+            <a:pPr algn="ctr">
+              <a:lnSpc>
+                <a:spcPct val="100000"/>
+              </a:lnSpc>
+              <a:spcAft>
+                <a:spcPts val="400"/>
+              </a:spcAft>
+            </a:pPr>
+            <a:r>
+              <a:rPr sz="1600" b="1" i="0">
+                <a:solidFill>
+                  <a:srgbClr val="22D3EE"/>
+                </a:solidFill>
+                <a:latin typeface="Segoe UI"/>
+                <a:ea typeface="微软雅黑"/>
+                <a:cs typeface="微软雅黑"/>
+              </a:rPr>
+              <a:t>图</a:t>
+            </a:r>
+          </a:p>
+        </p:txBody>
+      </p:sp>
+      <p:sp>
+        <p:nvSpPr>
+          <p:cNvPr id="10" name="TextBox 9"/>
+          <p:cNvSpPr txBox="1"/>
+          <p:nvPr/>
+        </p:nvSpPr>
+        <p:spPr>
+          <a:xfrm>
             <a:off x="1280160" y="5623560"/>
-            <a:ext cx="5486400" cy="274320"/>
+            <a:ext cx="5852160" cy="274320"/>
           </a:xfrm>
           <a:prstGeom prst="rect">
             <a:avLst/>
@@ -13503,7 +16649,7 @@
       </p:sp>
       <p:sp>
         <p:nvSpPr>
-          <p:cNvPr id="14" name="TextBox 13"/>
+          <p:cNvPr id="11" name="TextBox 10"/>
           <p:cNvSpPr txBox="1"/>
           <p:nvPr/>
         </p:nvSpPr>
@@ -13547,7 +16693,7 @@
       </p:sp>
       <p:sp>
         <p:nvSpPr>
-          <p:cNvPr id="15" name="TextBox 14"/>
+          <p:cNvPr id="12" name="TextBox 11"/>
           <p:cNvSpPr txBox="1"/>
           <p:nvPr/>
         </p:nvSpPr>
@@ -13666,7 +16812,7 @@
       </p:sp>
       <p:sp>
         <p:nvSpPr>
-          <p:cNvPr id="16" name="Rectangle 15"/>
+          <p:cNvPr id="13" name="Rectangle 12"/>
           <p:cNvSpPr/>
           <p:nvPr/>
         </p:nvSpPr>
@@ -13710,14 +16856,14 @@
       </p:sp>
       <p:sp>
         <p:nvSpPr>
-          <p:cNvPr id="17" name="TextBox 16"/>
+          <p:cNvPr id="14" name="TextBox 13"/>
           <p:cNvSpPr txBox="1"/>
           <p:nvPr/>
         </p:nvSpPr>
         <p:spPr>
           <a:xfrm>
             <a:off x="822960" y="6355080"/>
-            <a:ext cx="6400800" cy="274320"/>
+            <a:ext cx="6583680" cy="274320"/>
           </a:xfrm>
           <a:prstGeom prst="rect">
             <a:avLst/>
@@ -13757,6 +16903,9 @@
   <p:clrMapOvr>
     <a:masterClrMapping/>
   </p:clrMapOvr>
+  <p:transition spd="med">
+    <p:fade/>
+  </p:transition>
 </p:sld>
 </file>
 

--- a/templates/02-game-gdd-game-design-proposal/02__darkneon.pptx
+++ b/templates/02-game-gdd-game-design-proposal/02__darkneon.pptx
@@ -3446,8 +3446,257 @@
     <a:masterClrMapping/>
   </p:clrMapOvr>
   <p:transition spd="med">
-    <p:fade/>
+    <p:newsflash/>
   </p:transition>
+  <p:timing>
+    <p:tnLst>
+      <p:par>
+        <p:cTn id="1" dur="indefinite" restart="never" nodeType="tmRoot">
+          <p:childTnLst>
+            <p:seq concurrent="1" nextAc="seek">
+              <p:cTn id="2" dur="indefinite" nodeType="mainSeq">
+                <p:childTnLst>
+                  <p:par>
+                    <p:cTn id="3" fill="hold">
+                      <p:stCondLst>
+                        <p:cond delay="indefinite"/>
+                      </p:stCondLst>
+                      <p:childTnLst>
+                        <p:par>
+                          <p:cTn id="5" dur="810" fill="hold" nodeType="clickEffect" grpId="0" presetID="37" presetClass="entr" presetSubtype="0">
+                            <p:stCondLst>
+                              <p:cond delay="0"/>
+                            </p:stCondLst>
+                            <p:childTnLst>
+                              <p:set>
+                                <p:cBhvr>
+                                  <p:cTn id="6" dur="1" fill="hold">
+                                    <p:stCondLst>
+                                      <p:cond delay="0"/>
+                                    </p:stCondLst>
+                                  </p:cTn>
+                                  <p:tgtEl>
+                                    <p:spTgt spid="3"/>
+                                  </p:tgtEl>
+                                  <p:attrNameLst>
+                                    <p:attrName>style.visibility</p:attrName>
+                                  </p:attrNameLst>
+                                </p:cBhvr>
+                                <p:to>
+                                  <p:strVal val="visible"/>
+                                </p:to>
+                              </p:set>
+                              <p:animEffect transition="in" filter="wedge">
+                                <p:cBhvr>
+                                  <p:cTn id="51" dur="810"/>
+                                  <p:tgtEl>
+                                    <p:spTgt spid="3"/>
+                                  </p:tgtEl>
+                                </p:cBhvr>
+                              </p:animEffect>
+                            </p:childTnLst>
+                          </p:cTn>
+                        </p:par>
+                        <p:par>
+                          <p:cTn id="7" dur="450" fill="hold" nodeType="afterEffect" grpId="0" presetID="52" presetClass="entr" presetSubtype="0">
+                            <p:stCondLst>
+                              <p:cond delay="130"/>
+                            </p:stCondLst>
+                            <p:childTnLst>
+                              <p:set>
+                                <p:cBhvr>
+                                  <p:cTn id="8" dur="1" fill="hold">
+                                    <p:stCondLst>
+                                      <p:cond delay="0"/>
+                                    </p:stCondLst>
+                                  </p:cTn>
+                                  <p:tgtEl>
+                                    <p:spTgt spid="5"/>
+                                  </p:tgtEl>
+                                  <p:attrNameLst>
+                                    <p:attrName>style.visibility</p:attrName>
+                                  </p:attrNameLst>
+                                </p:cBhvr>
+                                <p:to>
+                                  <p:strVal val="visible"/>
+                                </p:to>
+                              </p:set>
+                              <p:animEffect transition="in" filter="randombar(horizontal)">
+                                <p:cBhvr>
+                                  <p:cTn id="71" dur="450"/>
+                                  <p:tgtEl>
+                                    <p:spTgt spid="5"/>
+                                  </p:tgtEl>
+                                </p:cBhvr>
+                              </p:animEffect>
+                            </p:childTnLst>
+                          </p:cTn>
+                        </p:par>
+                        <p:par>
+                          <p:cTn id="9" dur="570" fill="hold" nodeType="afterEffect" grpId="0" presetID="21" presetClass="entr" presetSubtype="1">
+                            <p:stCondLst>
+                              <p:cond delay="260"/>
+                            </p:stCondLst>
+                            <p:childTnLst>
+                              <p:set>
+                                <p:cBhvr>
+                                  <p:cTn id="10" dur="1" fill="hold">
+                                    <p:stCondLst>
+                                      <p:cond delay="0"/>
+                                    </p:stCondLst>
+                                  </p:cTn>
+                                  <p:tgtEl>
+                                    <p:spTgt spid="6"/>
+                                  </p:tgtEl>
+                                  <p:attrNameLst>
+                                    <p:attrName>style.visibility</p:attrName>
+                                  </p:attrNameLst>
+                                </p:cBhvr>
+                                <p:to>
+                                  <p:strVal val="visible"/>
+                                </p:to>
+                              </p:set>
+                              <p:animEffect transition="in" filter="wheel(1)">
+                                <p:cBhvr>
+                                  <p:cTn id="91" dur="570"/>
+                                  <p:tgtEl>
+                                    <p:spTgt spid="6"/>
+                                  </p:tgtEl>
+                                </p:cBhvr>
+                              </p:animEffect>
+                            </p:childTnLst>
+                          </p:cTn>
+                        </p:par>
+                        <p:par>
+                          <p:cTn id="11" dur="690" fill="hold" nodeType="afterEffect" grpId="0" presetID="22" presetClass="entr" presetSubtype="4">
+                            <p:stCondLst>
+                              <p:cond delay="390"/>
+                            </p:stCondLst>
+                            <p:childTnLst>
+                              <p:set>
+                                <p:cBhvr>
+                                  <p:cTn id="12" dur="1" fill="hold">
+                                    <p:stCondLst>
+                                      <p:cond delay="0"/>
+                                    </p:stCondLst>
+                                  </p:cTn>
+                                  <p:tgtEl>
+                                    <p:spTgt spid="7"/>
+                                  </p:tgtEl>
+                                  <p:attrNameLst>
+                                    <p:attrName>style.visibility</p:attrName>
+                                  </p:attrNameLst>
+                                </p:cBhvr>
+                                <p:to>
+                                  <p:strVal val="visible"/>
+                                </p:to>
+                              </p:set>
+                              <p:animEffect transition="in" filter="wipe(down)">
+                                <p:cBhvr>
+                                  <p:cTn id="111" dur="690"/>
+                                  <p:tgtEl>
+                                    <p:spTgt spid="7"/>
+                                  </p:tgtEl>
+                                </p:cBhvr>
+                              </p:animEffect>
+                            </p:childTnLst>
+                          </p:cTn>
+                        </p:par>
+                        <p:par>
+                          <p:cTn id="13" dur="810" fill="hold" nodeType="afterEffect" grpId="0" presetID="9" presetClass="entr" presetSubtype="0">
+                            <p:stCondLst>
+                              <p:cond delay="520"/>
+                            </p:stCondLst>
+                            <p:childTnLst>
+                              <p:set>
+                                <p:cBhvr>
+                                  <p:cTn id="14" dur="1" fill="hold">
+                                    <p:stCondLst>
+                                      <p:cond delay="0"/>
+                                    </p:stCondLst>
+                                  </p:cTn>
+                                  <p:tgtEl>
+                                    <p:spTgt spid="4"/>
+                                  </p:tgtEl>
+                                  <p:attrNameLst>
+                                    <p:attrName>style.visibility</p:attrName>
+                                  </p:attrNameLst>
+                                </p:cBhvr>
+                                <p:to>
+                                  <p:strVal val="visible"/>
+                                </p:to>
+                              </p:set>
+                              <p:animEffect transition="in" filter="fade">
+                                <p:cBhvr>
+                                  <p:cTn id="131" dur="810"/>
+                                  <p:tgtEl>
+                                    <p:spTgt spid="4"/>
+                                  </p:tgtEl>
+                                </p:cBhvr>
+                              </p:animEffect>
+                            </p:childTnLst>
+                          </p:cTn>
+                        </p:par>
+                        <p:par>
+                          <p:cTn id="15" dur="450" fill="hold" nodeType="afterEffect" grpId="0" presetID="22" presetClass="entr" presetSubtype="2">
+                            <p:stCondLst>
+                              <p:cond delay="650"/>
+                            </p:stCondLst>
+                            <p:childTnLst>
+                              <p:set>
+                                <p:cBhvr>
+                                  <p:cTn id="16" dur="1" fill="hold">
+                                    <p:stCondLst>
+                                      <p:cond delay="0"/>
+                                    </p:stCondLst>
+                                  </p:cTn>
+                                  <p:tgtEl>
+                                    <p:spTgt spid="8"/>
+                                  </p:tgtEl>
+                                  <p:attrNameLst>
+                                    <p:attrName>style.visibility</p:attrName>
+                                  </p:attrNameLst>
+                                </p:cBhvr>
+                                <p:to>
+                                  <p:strVal val="visible"/>
+                                </p:to>
+                              </p:set>
+                              <p:animEffect transition="in" filter="wipe(right)">
+                                <p:cBhvr>
+                                  <p:cTn id="151" dur="450"/>
+                                  <p:tgtEl>
+                                    <p:spTgt spid="8"/>
+                                  </p:tgtEl>
+                                </p:cBhvr>
+                              </p:animEffect>
+                            </p:childTnLst>
+                          </p:cTn>
+                        </p:par>
+                      </p:childTnLst>
+                    </p:cTn>
+                  </p:par>
+                </p:childTnLst>
+              </p:cTn>
+              <p:prevCondLst>
+                <p:cond evt="onPrev" delay="0">
+                  <p:tgtEl>
+                    <p:sldTgt/>
+                  </p:tgtEl>
+                </p:cond>
+              </p:prevCondLst>
+              <p:nextCondLst>
+                <p:cond evt="onNext" delay="0">
+                  <p:tgtEl>
+                    <p:sldTgt/>
+                  </p:tgtEl>
+                </p:cond>
+              </p:nextCondLst>
+            </p:seq>
+          </p:childTnLst>
+        </p:cTn>
+      </p:par>
+    </p:tnLst>
+  </p:timing>
 </p:sld>
 </file>
 
@@ -4499,8 +4748,537 @@
     <a:masterClrMapping/>
   </p:clrMapOvr>
   <p:transition spd="med">
-    <p:fade/>
+    <p:comb dir="horz"/>
   </p:transition>
+  <p:timing>
+    <p:tnLst>
+      <p:par>
+        <p:cTn id="1" dur="indefinite" restart="never" nodeType="tmRoot">
+          <p:childTnLst>
+            <p:seq concurrent="1" nextAc="seek">
+              <p:cTn id="2" dur="indefinite" nodeType="mainSeq">
+                <p:childTnLst>
+                  <p:par>
+                    <p:cTn id="3" fill="hold">
+                      <p:stCondLst>
+                        <p:cond delay="indefinite"/>
+                      </p:stCondLst>
+                      <p:childTnLst>
+                        <p:par>
+                          <p:cTn id="5" dur="450" fill="hold" nodeType="clickEffect" grpId="0" presetID="43" presetClass="entr" presetSubtype="0">
+                            <p:stCondLst>
+                              <p:cond delay="0"/>
+                            </p:stCondLst>
+                            <p:childTnLst>
+                              <p:set>
+                                <p:cBhvr>
+                                  <p:cTn id="6" dur="1" fill="hold">
+                                    <p:stCondLst>
+                                      <p:cond delay="0"/>
+                                    </p:stCondLst>
+                                  </p:cTn>
+                                  <p:tgtEl>
+                                    <p:spTgt spid="3"/>
+                                  </p:tgtEl>
+                                  <p:attrNameLst>
+                                    <p:attrName>style.visibility</p:attrName>
+                                  </p:attrNameLst>
+                                </p:cBhvr>
+                                <p:to>
+                                  <p:strVal val="visible"/>
+                                </p:to>
+                              </p:set>
+                              <p:animEffect transition="in" filter="checkerboard(across)">
+                                <p:cBhvr>
+                                  <p:cTn id="51" dur="450"/>
+                                  <p:tgtEl>
+                                    <p:spTgt spid="3"/>
+                                  </p:tgtEl>
+                                </p:cBhvr>
+                              </p:animEffect>
+                            </p:childTnLst>
+                          </p:cTn>
+                        </p:par>
+                        <p:par>
+                          <p:cTn id="7" dur="570" fill="hold" nodeType="afterEffect" grpId="0" presetID="21" presetClass="entr" presetSubtype="2">
+                            <p:stCondLst>
+                              <p:cond delay="130"/>
+                            </p:stCondLst>
+                            <p:childTnLst>
+                              <p:set>
+                                <p:cBhvr>
+                                  <p:cTn id="8" dur="1" fill="hold">
+                                    <p:stCondLst>
+                                      <p:cond delay="0"/>
+                                    </p:stCondLst>
+                                  </p:cTn>
+                                  <p:tgtEl>
+                                    <p:spTgt spid="4"/>
+                                  </p:tgtEl>
+                                  <p:attrNameLst>
+                                    <p:attrName>style.visibility</p:attrName>
+                                  </p:attrNameLst>
+                                </p:cBhvr>
+                                <p:to>
+                                  <p:strVal val="visible"/>
+                                </p:to>
+                              </p:set>
+                              <p:animEffect transition="in" filter="wheel(2)">
+                                <p:cBhvr>
+                                  <p:cTn id="71" dur="570"/>
+                                  <p:tgtEl>
+                                    <p:spTgt spid="4"/>
+                                  </p:tgtEl>
+                                </p:cBhvr>
+                              </p:animEffect>
+                            </p:childTnLst>
+                          </p:cTn>
+                        </p:par>
+                        <p:par>
+                          <p:cTn id="9" dur="690" fill="hold" nodeType="afterEffect" grpId="0" presetID="10" presetClass="entr" presetSubtype="0">
+                            <p:stCondLst>
+                              <p:cond delay="260"/>
+                            </p:stCondLst>
+                            <p:childTnLst>
+                              <p:set>
+                                <p:cBhvr>
+                                  <p:cTn id="10" dur="1" fill="hold">
+                                    <p:stCondLst>
+                                      <p:cond delay="0"/>
+                                    </p:stCondLst>
+                                  </p:cTn>
+                                  <p:tgtEl>
+                                    <p:spTgt spid="5"/>
+                                  </p:tgtEl>
+                                  <p:attrNameLst>
+                                    <p:attrName>style.visibility</p:attrName>
+                                  </p:attrNameLst>
+                                </p:cBhvr>
+                                <p:to>
+                                  <p:strVal val="visible"/>
+                                </p:to>
+                              </p:set>
+                              <p:animEffect transition="in" filter="dissolve">
+                                <p:cBhvr>
+                                  <p:cTn id="91" dur="690"/>
+                                  <p:tgtEl>
+                                    <p:spTgt spid="5"/>
+                                  </p:tgtEl>
+                                </p:cBhvr>
+                              </p:animEffect>
+                            </p:childTnLst>
+                          </p:cTn>
+                        </p:par>
+                        <p:par>
+                          <p:cTn id="11" dur="810" fill="hold" nodeType="afterEffect" grpId="0" presetID="25" presetClass="entr" presetSubtype="1">
+                            <p:stCondLst>
+                              <p:cond delay="390"/>
+                            </p:stCondLst>
+                            <p:childTnLst>
+                              <p:set>
+                                <p:cBhvr>
+                                  <p:cTn id="12" dur="1" fill="hold">
+                                    <p:stCondLst>
+                                      <p:cond delay="0"/>
+                                    </p:stCondLst>
+                                  </p:cTn>
+                                  <p:tgtEl>
+                                    <p:spTgt spid="6"/>
+                                  </p:tgtEl>
+                                  <p:attrNameLst>
+                                    <p:attrName>style.visibility</p:attrName>
+                                  </p:attrNameLst>
+                                </p:cBhvr>
+                                <p:to>
+                                  <p:strVal val="visible"/>
+                                </p:to>
+                              </p:set>
+                              <p:animEffect transition="in" filter="strips(downRight)">
+                                <p:cBhvr>
+                                  <p:cTn id="111" dur="810"/>
+                                  <p:tgtEl>
+                                    <p:spTgt spid="6"/>
+                                  </p:tgtEl>
+                                </p:cBhvr>
+                              </p:animEffect>
+                            </p:childTnLst>
+                          </p:cTn>
+                        </p:par>
+                        <p:par>
+                          <p:cTn id="13" dur="450" fill="hold" nodeType="afterEffect" grpId="0" presetID="45" presetClass="entr" presetSubtype="1">
+                            <p:stCondLst>
+                              <p:cond delay="520"/>
+                            </p:stCondLst>
+                            <p:childTnLst>
+                              <p:set>
+                                <p:cBhvr>
+                                  <p:cTn id="14" dur="1" fill="hold">
+                                    <p:stCondLst>
+                                      <p:cond delay="0"/>
+                                    </p:stCondLst>
+                                  </p:cTn>
+                                  <p:tgtEl>
+                                    <p:spTgt spid="7"/>
+                                  </p:tgtEl>
+                                  <p:attrNameLst>
+                                    <p:attrName>style.visibility</p:attrName>
+                                  </p:attrNameLst>
+                                </p:cBhvr>
+                                <p:to>
+                                  <p:strVal val="visible"/>
+                                </p:to>
+                              </p:set>
+                              <p:animEffect transition="in" filter="barn(inHorizontal)">
+                                <p:cBhvr>
+                                  <p:cTn id="131" dur="450"/>
+                                  <p:tgtEl>
+                                    <p:spTgt spid="7"/>
+                                  </p:tgtEl>
+                                </p:cBhvr>
+                              </p:animEffect>
+                            </p:childTnLst>
+                          </p:cTn>
+                        </p:par>
+                        <p:par>
+                          <p:cTn id="15" dur="570" fill="hold" nodeType="afterEffect" grpId="0" presetID="22" presetClass="entr" presetSubtype="8">
+                            <p:stCondLst>
+                              <p:cond delay="650"/>
+                            </p:stCondLst>
+                            <p:childTnLst>
+                              <p:set>
+                                <p:cBhvr>
+                                  <p:cTn id="16" dur="1" fill="hold">
+                                    <p:stCondLst>
+                                      <p:cond delay="0"/>
+                                    </p:stCondLst>
+                                  </p:cTn>
+                                  <p:tgtEl>
+                                    <p:spTgt spid="8"/>
+                                  </p:tgtEl>
+                                  <p:attrNameLst>
+                                    <p:attrName>style.visibility</p:attrName>
+                                  </p:attrNameLst>
+                                </p:cBhvr>
+                                <p:to>
+                                  <p:strVal val="visible"/>
+                                </p:to>
+                              </p:set>
+                              <p:animEffect transition="in" filter="wipe(left)">
+                                <p:cBhvr>
+                                  <p:cTn id="151" dur="570"/>
+                                  <p:tgtEl>
+                                    <p:spTgt spid="8"/>
+                                  </p:tgtEl>
+                                </p:cBhvr>
+                              </p:animEffect>
+                            </p:childTnLst>
+                          </p:cTn>
+                        </p:par>
+                        <p:par>
+                          <p:cTn id="17" dur="690" fill="hold" nodeType="afterEffect" grpId="0" presetID="37" presetClass="entr" presetSubtype="0">
+                            <p:stCondLst>
+                              <p:cond delay="780"/>
+                            </p:stCondLst>
+                            <p:childTnLst>
+                              <p:set>
+                                <p:cBhvr>
+                                  <p:cTn id="18" dur="1" fill="hold">
+                                    <p:stCondLst>
+                                      <p:cond delay="0"/>
+                                    </p:stCondLst>
+                                  </p:cTn>
+                                  <p:tgtEl>
+                                    <p:spTgt spid="9"/>
+                                  </p:tgtEl>
+                                  <p:attrNameLst>
+                                    <p:attrName>style.visibility</p:attrName>
+                                  </p:attrNameLst>
+                                </p:cBhvr>
+                                <p:to>
+                                  <p:strVal val="visible"/>
+                                </p:to>
+                              </p:set>
+                              <p:animEffect transition="in" filter="wedge">
+                                <p:cBhvr>
+                                  <p:cTn id="171" dur="690"/>
+                                  <p:tgtEl>
+                                    <p:spTgt spid="9"/>
+                                  </p:tgtEl>
+                                </p:cBhvr>
+                              </p:animEffect>
+                            </p:childTnLst>
+                          </p:cTn>
+                        </p:par>
+                        <p:par>
+                          <p:cTn id="19" dur="810" fill="hold" nodeType="afterEffect" grpId="0" presetID="52" presetClass="entr" presetSubtype="0">
+                            <p:stCondLst>
+                              <p:cond delay="910"/>
+                            </p:stCondLst>
+                            <p:childTnLst>
+                              <p:set>
+                                <p:cBhvr>
+                                  <p:cTn id="20" dur="1" fill="hold">
+                                    <p:stCondLst>
+                                      <p:cond delay="0"/>
+                                    </p:stCondLst>
+                                  </p:cTn>
+                                  <p:tgtEl>
+                                    <p:spTgt spid="10"/>
+                                  </p:tgtEl>
+                                  <p:attrNameLst>
+                                    <p:attrName>style.visibility</p:attrName>
+                                  </p:attrNameLst>
+                                </p:cBhvr>
+                                <p:to>
+                                  <p:strVal val="visible"/>
+                                </p:to>
+                              </p:set>
+                              <p:animEffect transition="in" filter="randombar(horizontal)">
+                                <p:cBhvr>
+                                  <p:cTn id="191" dur="810"/>
+                                  <p:tgtEl>
+                                    <p:spTgt spid="10"/>
+                                  </p:tgtEl>
+                                </p:cBhvr>
+                              </p:animEffect>
+                            </p:childTnLst>
+                          </p:cTn>
+                        </p:par>
+                        <p:par>
+                          <p:cTn id="21" dur="450" fill="hold" nodeType="afterEffect" grpId="0" presetID="21" presetClass="entr" presetSubtype="1">
+                            <p:stCondLst>
+                              <p:cond delay="1040"/>
+                            </p:stCondLst>
+                            <p:childTnLst>
+                              <p:set>
+                                <p:cBhvr>
+                                  <p:cTn id="22" dur="1" fill="hold">
+                                    <p:stCondLst>
+                                      <p:cond delay="0"/>
+                                    </p:stCondLst>
+                                  </p:cTn>
+                                  <p:tgtEl>
+                                    <p:spTgt spid="11"/>
+                                  </p:tgtEl>
+                                  <p:attrNameLst>
+                                    <p:attrName>style.visibility</p:attrName>
+                                  </p:attrNameLst>
+                                </p:cBhvr>
+                                <p:to>
+                                  <p:strVal val="visible"/>
+                                </p:to>
+                              </p:set>
+                              <p:animEffect transition="in" filter="wheel(1)">
+                                <p:cBhvr>
+                                  <p:cTn id="211" dur="450"/>
+                                  <p:tgtEl>
+                                    <p:spTgt spid="11"/>
+                                  </p:tgtEl>
+                                </p:cBhvr>
+                              </p:animEffect>
+                            </p:childTnLst>
+                          </p:cTn>
+                        </p:par>
+                        <p:par>
+                          <p:cTn id="23" dur="570" fill="hold" nodeType="afterEffect" grpId="0" presetID="22" presetClass="entr" presetSubtype="4">
+                            <p:stCondLst>
+                              <p:cond delay="1170"/>
+                            </p:stCondLst>
+                            <p:childTnLst>
+                              <p:set>
+                                <p:cBhvr>
+                                  <p:cTn id="24" dur="1" fill="hold">
+                                    <p:stCondLst>
+                                      <p:cond delay="0"/>
+                                    </p:stCondLst>
+                                  </p:cTn>
+                                  <p:tgtEl>
+                                    <p:spTgt spid="12"/>
+                                  </p:tgtEl>
+                                  <p:attrNameLst>
+                                    <p:attrName>style.visibility</p:attrName>
+                                  </p:attrNameLst>
+                                </p:cBhvr>
+                                <p:to>
+                                  <p:strVal val="visible"/>
+                                </p:to>
+                              </p:set>
+                              <p:animEffect transition="in" filter="wipe(down)">
+                                <p:cBhvr>
+                                  <p:cTn id="231" dur="570"/>
+                                  <p:tgtEl>
+                                    <p:spTgt spid="12"/>
+                                  </p:tgtEl>
+                                </p:cBhvr>
+                              </p:animEffect>
+                            </p:childTnLst>
+                          </p:cTn>
+                        </p:par>
+                        <p:par>
+                          <p:cTn id="25" dur="690" fill="hold" nodeType="afterEffect" grpId="0" presetID="9" presetClass="entr" presetSubtype="0">
+                            <p:stCondLst>
+                              <p:cond delay="1300"/>
+                            </p:stCondLst>
+                            <p:childTnLst>
+                              <p:set>
+                                <p:cBhvr>
+                                  <p:cTn id="26" dur="1" fill="hold">
+                                    <p:stCondLst>
+                                      <p:cond delay="0"/>
+                                    </p:stCondLst>
+                                  </p:cTn>
+                                  <p:tgtEl>
+                                    <p:spTgt spid="13"/>
+                                  </p:tgtEl>
+                                  <p:attrNameLst>
+                                    <p:attrName>style.visibility</p:attrName>
+                                  </p:attrNameLst>
+                                </p:cBhvr>
+                                <p:to>
+                                  <p:strVal val="visible"/>
+                                </p:to>
+                              </p:set>
+                              <p:animEffect transition="in" filter="fade">
+                                <p:cBhvr>
+                                  <p:cTn id="251" dur="690"/>
+                                  <p:tgtEl>
+                                    <p:spTgt spid="13"/>
+                                  </p:tgtEl>
+                                </p:cBhvr>
+                              </p:animEffect>
+                            </p:childTnLst>
+                          </p:cTn>
+                        </p:par>
+                        <p:par>
+                          <p:cTn id="27" dur="810" fill="hold" nodeType="afterEffect" grpId="0" presetID="22" presetClass="entr" presetSubtype="2">
+                            <p:stCondLst>
+                              <p:cond delay="1430"/>
+                            </p:stCondLst>
+                            <p:childTnLst>
+                              <p:set>
+                                <p:cBhvr>
+                                  <p:cTn id="28" dur="1" fill="hold">
+                                    <p:stCondLst>
+                                      <p:cond delay="0"/>
+                                    </p:stCondLst>
+                                  </p:cTn>
+                                  <p:tgtEl>
+                                    <p:spTgt spid="14"/>
+                                  </p:tgtEl>
+                                  <p:attrNameLst>
+                                    <p:attrName>style.visibility</p:attrName>
+                                  </p:attrNameLst>
+                                </p:cBhvr>
+                                <p:to>
+                                  <p:strVal val="visible"/>
+                                </p:to>
+                              </p:set>
+                              <p:animEffect transition="in" filter="wipe(right)">
+                                <p:cBhvr>
+                                  <p:cTn id="271" dur="810"/>
+                                  <p:tgtEl>
+                                    <p:spTgt spid="14"/>
+                                  </p:tgtEl>
+                                </p:cBhvr>
+                              </p:animEffect>
+                            </p:childTnLst>
+                          </p:cTn>
+                        </p:par>
+                        <p:par>
+                          <p:cTn id="29" dur="450" fill="hold" nodeType="afterEffect" grpId="0" presetID="18" presetClass="entr" presetSubtype="12">
+                            <p:stCondLst>
+                              <p:cond delay="1560"/>
+                            </p:stCondLst>
+                            <p:childTnLst>
+                              <p:set>
+                                <p:cBhvr>
+                                  <p:cTn id="30" dur="1" fill="hold">
+                                    <p:stCondLst>
+                                      <p:cond delay="0"/>
+                                    </p:stCondLst>
+                                  </p:cTn>
+                                  <p:tgtEl>
+                                    <p:spTgt spid="15"/>
+                                  </p:tgtEl>
+                                  <p:attrNameLst>
+                                    <p:attrName>style.visibility</p:attrName>
+                                  </p:attrNameLst>
+                                </p:cBhvr>
+                                <p:to>
+                                  <p:strVal val="visible"/>
+                                </p:to>
+                              </p:set>
+                              <p:animEffect transition="in" filter="circle(in)">
+                                <p:cBhvr>
+                                  <p:cTn id="291" dur="450"/>
+                                  <p:tgtEl>
+                                    <p:spTgt spid="15"/>
+                                  </p:tgtEl>
+                                </p:cBhvr>
+                              </p:animEffect>
+                            </p:childTnLst>
+                          </p:cTn>
+                        </p:par>
+                        <p:par>
+                          <p:cTn id="31" dur="570" fill="hold" nodeType="afterEffect" grpId="0" presetID="22" presetClass="entr" presetSubtype="1">
+                            <p:stCondLst>
+                              <p:cond delay="1690"/>
+                            </p:stCondLst>
+                            <p:childTnLst>
+                              <p:set>
+                                <p:cBhvr>
+                                  <p:cTn id="32" dur="1" fill="hold">
+                                    <p:stCondLst>
+                                      <p:cond delay="0"/>
+                                    </p:stCondLst>
+                                  </p:cTn>
+                                  <p:tgtEl>
+                                    <p:spTgt spid="16"/>
+                                  </p:tgtEl>
+                                  <p:attrNameLst>
+                                    <p:attrName>style.visibility</p:attrName>
+                                  </p:attrNameLst>
+                                </p:cBhvr>
+                                <p:to>
+                                  <p:strVal val="visible"/>
+                                </p:to>
+                              </p:set>
+                              <p:animEffect transition="in" filter="wipe(up)">
+                                <p:cBhvr>
+                                  <p:cTn id="311" dur="570"/>
+                                  <p:tgtEl>
+                                    <p:spTgt spid="16"/>
+                                  </p:tgtEl>
+                                </p:cBhvr>
+                              </p:animEffect>
+                            </p:childTnLst>
+                          </p:cTn>
+                        </p:par>
+                      </p:childTnLst>
+                    </p:cTn>
+                  </p:par>
+                </p:childTnLst>
+              </p:cTn>
+              <p:prevCondLst>
+                <p:cond evt="onPrev" delay="0">
+                  <p:tgtEl>
+                    <p:sldTgt/>
+                  </p:tgtEl>
+                </p:cond>
+              </p:prevCondLst>
+              <p:nextCondLst>
+                <p:cond evt="onNext" delay="0">
+                  <p:tgtEl>
+                    <p:sldTgt/>
+                  </p:tgtEl>
+                </p:cond>
+              </p:nextCondLst>
+            </p:seq>
+          </p:childTnLst>
+        </p:cTn>
+      </p:par>
+    </p:tnLst>
+  </p:timing>
 </p:sld>
 </file>
 
@@ -5330,8 +6108,537 @@
     <a:masterClrMapping/>
   </p:clrMapOvr>
   <p:transition spd="med">
-    <p:fade/>
+    <p:dissolve/>
   </p:transition>
+  <p:timing>
+    <p:tnLst>
+      <p:par>
+        <p:cTn id="1" dur="indefinite" restart="never" nodeType="tmRoot">
+          <p:childTnLst>
+            <p:seq concurrent="1" nextAc="seek">
+              <p:cTn id="2" dur="indefinite" nodeType="mainSeq">
+                <p:childTnLst>
+                  <p:par>
+                    <p:cTn id="3" fill="hold">
+                      <p:stCondLst>
+                        <p:cond delay="indefinite"/>
+                      </p:stCondLst>
+                      <p:childTnLst>
+                        <p:par>
+                          <p:cTn id="5" dur="570" fill="hold" nodeType="clickEffect" grpId="0" presetID="21" presetClass="entr" presetSubtype="2">
+                            <p:stCondLst>
+                              <p:cond delay="0"/>
+                            </p:stCondLst>
+                            <p:childTnLst>
+                              <p:set>
+                                <p:cBhvr>
+                                  <p:cTn id="6" dur="1" fill="hold">
+                                    <p:stCondLst>
+                                      <p:cond delay="0"/>
+                                    </p:stCondLst>
+                                  </p:cTn>
+                                  <p:tgtEl>
+                                    <p:spTgt spid="3"/>
+                                  </p:tgtEl>
+                                  <p:attrNameLst>
+                                    <p:attrName>style.visibility</p:attrName>
+                                  </p:attrNameLst>
+                                </p:cBhvr>
+                                <p:to>
+                                  <p:strVal val="visible"/>
+                                </p:to>
+                              </p:set>
+                              <p:animEffect transition="in" filter="wheel(2)">
+                                <p:cBhvr>
+                                  <p:cTn id="51" dur="570"/>
+                                  <p:tgtEl>
+                                    <p:spTgt spid="3"/>
+                                  </p:tgtEl>
+                                </p:cBhvr>
+                              </p:animEffect>
+                            </p:childTnLst>
+                          </p:cTn>
+                        </p:par>
+                        <p:par>
+                          <p:cTn id="7" dur="690" fill="hold" nodeType="afterEffect" grpId="0" presetID="10" presetClass="entr" presetSubtype="0">
+                            <p:stCondLst>
+                              <p:cond delay="130"/>
+                            </p:stCondLst>
+                            <p:childTnLst>
+                              <p:set>
+                                <p:cBhvr>
+                                  <p:cTn id="8" dur="1" fill="hold">
+                                    <p:stCondLst>
+                                      <p:cond delay="0"/>
+                                    </p:stCondLst>
+                                  </p:cTn>
+                                  <p:tgtEl>
+                                    <p:spTgt spid="4"/>
+                                  </p:tgtEl>
+                                  <p:attrNameLst>
+                                    <p:attrName>style.visibility</p:attrName>
+                                  </p:attrNameLst>
+                                </p:cBhvr>
+                                <p:to>
+                                  <p:strVal val="visible"/>
+                                </p:to>
+                              </p:set>
+                              <p:animEffect transition="in" filter="dissolve">
+                                <p:cBhvr>
+                                  <p:cTn id="71" dur="690"/>
+                                  <p:tgtEl>
+                                    <p:spTgt spid="4"/>
+                                  </p:tgtEl>
+                                </p:cBhvr>
+                              </p:animEffect>
+                            </p:childTnLst>
+                          </p:cTn>
+                        </p:par>
+                        <p:par>
+                          <p:cTn id="9" dur="810" fill="hold" nodeType="afterEffect" grpId="0" presetID="25" presetClass="entr" presetSubtype="1">
+                            <p:stCondLst>
+                              <p:cond delay="260"/>
+                            </p:stCondLst>
+                            <p:childTnLst>
+                              <p:set>
+                                <p:cBhvr>
+                                  <p:cTn id="10" dur="1" fill="hold">
+                                    <p:stCondLst>
+                                      <p:cond delay="0"/>
+                                    </p:stCondLst>
+                                  </p:cTn>
+                                  <p:tgtEl>
+                                    <p:spTgt spid="5"/>
+                                  </p:tgtEl>
+                                  <p:attrNameLst>
+                                    <p:attrName>style.visibility</p:attrName>
+                                  </p:attrNameLst>
+                                </p:cBhvr>
+                                <p:to>
+                                  <p:strVal val="visible"/>
+                                </p:to>
+                              </p:set>
+                              <p:animEffect transition="in" filter="strips(downRight)">
+                                <p:cBhvr>
+                                  <p:cTn id="91" dur="810"/>
+                                  <p:tgtEl>
+                                    <p:spTgt spid="5"/>
+                                  </p:tgtEl>
+                                </p:cBhvr>
+                              </p:animEffect>
+                            </p:childTnLst>
+                          </p:cTn>
+                        </p:par>
+                        <p:par>
+                          <p:cTn id="11" dur="450" fill="hold" nodeType="afterEffect" grpId="0" presetID="45" presetClass="entr" presetSubtype="1">
+                            <p:stCondLst>
+                              <p:cond delay="390"/>
+                            </p:stCondLst>
+                            <p:childTnLst>
+                              <p:set>
+                                <p:cBhvr>
+                                  <p:cTn id="12" dur="1" fill="hold">
+                                    <p:stCondLst>
+                                      <p:cond delay="0"/>
+                                    </p:stCondLst>
+                                  </p:cTn>
+                                  <p:tgtEl>
+                                    <p:spTgt spid="6"/>
+                                  </p:tgtEl>
+                                  <p:attrNameLst>
+                                    <p:attrName>style.visibility</p:attrName>
+                                  </p:attrNameLst>
+                                </p:cBhvr>
+                                <p:to>
+                                  <p:strVal val="visible"/>
+                                </p:to>
+                              </p:set>
+                              <p:animEffect transition="in" filter="barn(inHorizontal)">
+                                <p:cBhvr>
+                                  <p:cTn id="111" dur="450"/>
+                                  <p:tgtEl>
+                                    <p:spTgt spid="6"/>
+                                  </p:tgtEl>
+                                </p:cBhvr>
+                              </p:animEffect>
+                            </p:childTnLst>
+                          </p:cTn>
+                        </p:par>
+                        <p:par>
+                          <p:cTn id="13" dur="570" fill="hold" nodeType="afterEffect" grpId="0" presetID="22" presetClass="entr" presetSubtype="8">
+                            <p:stCondLst>
+                              <p:cond delay="520"/>
+                            </p:stCondLst>
+                            <p:childTnLst>
+                              <p:set>
+                                <p:cBhvr>
+                                  <p:cTn id="14" dur="1" fill="hold">
+                                    <p:stCondLst>
+                                      <p:cond delay="0"/>
+                                    </p:stCondLst>
+                                  </p:cTn>
+                                  <p:tgtEl>
+                                    <p:spTgt spid="8"/>
+                                  </p:tgtEl>
+                                  <p:attrNameLst>
+                                    <p:attrName>style.visibility</p:attrName>
+                                  </p:attrNameLst>
+                                </p:cBhvr>
+                                <p:to>
+                                  <p:strVal val="visible"/>
+                                </p:to>
+                              </p:set>
+                              <p:animEffect transition="in" filter="wipe(left)">
+                                <p:cBhvr>
+                                  <p:cTn id="131" dur="570"/>
+                                  <p:tgtEl>
+                                    <p:spTgt spid="8"/>
+                                  </p:tgtEl>
+                                </p:cBhvr>
+                              </p:animEffect>
+                            </p:childTnLst>
+                          </p:cTn>
+                        </p:par>
+                        <p:par>
+                          <p:cTn id="15" dur="690" fill="hold" nodeType="afterEffect" grpId="0" presetID="37" presetClass="entr" presetSubtype="0">
+                            <p:stCondLst>
+                              <p:cond delay="650"/>
+                            </p:stCondLst>
+                            <p:childTnLst>
+                              <p:set>
+                                <p:cBhvr>
+                                  <p:cTn id="16" dur="1" fill="hold">
+                                    <p:stCondLst>
+                                      <p:cond delay="0"/>
+                                    </p:stCondLst>
+                                  </p:cTn>
+                                  <p:tgtEl>
+                                    <p:spTgt spid="10"/>
+                                  </p:tgtEl>
+                                  <p:attrNameLst>
+                                    <p:attrName>style.visibility</p:attrName>
+                                  </p:attrNameLst>
+                                </p:cBhvr>
+                                <p:to>
+                                  <p:strVal val="visible"/>
+                                </p:to>
+                              </p:set>
+                              <p:animEffect transition="in" filter="wedge">
+                                <p:cBhvr>
+                                  <p:cTn id="151" dur="690"/>
+                                  <p:tgtEl>
+                                    <p:spTgt spid="10"/>
+                                  </p:tgtEl>
+                                </p:cBhvr>
+                              </p:animEffect>
+                            </p:childTnLst>
+                          </p:cTn>
+                        </p:par>
+                        <p:par>
+                          <p:cTn id="17" dur="810" fill="hold" nodeType="afterEffect" grpId="0" presetID="52" presetClass="entr" presetSubtype="0">
+                            <p:stCondLst>
+                              <p:cond delay="780"/>
+                            </p:stCondLst>
+                            <p:childTnLst>
+                              <p:set>
+                                <p:cBhvr>
+                                  <p:cTn id="18" dur="1" fill="hold">
+                                    <p:stCondLst>
+                                      <p:cond delay="0"/>
+                                    </p:stCondLst>
+                                  </p:cTn>
+                                  <p:tgtEl>
+                                    <p:spTgt spid="7"/>
+                                  </p:tgtEl>
+                                  <p:attrNameLst>
+                                    <p:attrName>style.visibility</p:attrName>
+                                  </p:attrNameLst>
+                                </p:cBhvr>
+                                <p:to>
+                                  <p:strVal val="visible"/>
+                                </p:to>
+                              </p:set>
+                              <p:animEffect transition="in" filter="randombar(horizontal)">
+                                <p:cBhvr>
+                                  <p:cTn id="171" dur="810"/>
+                                  <p:tgtEl>
+                                    <p:spTgt spid="7"/>
+                                  </p:tgtEl>
+                                </p:cBhvr>
+                              </p:animEffect>
+                            </p:childTnLst>
+                          </p:cTn>
+                        </p:par>
+                        <p:par>
+                          <p:cTn id="19" dur="450" fill="hold" nodeType="afterEffect" grpId="0" presetID="21" presetClass="entr" presetSubtype="1">
+                            <p:stCondLst>
+                              <p:cond delay="910"/>
+                            </p:stCondLst>
+                            <p:childTnLst>
+                              <p:set>
+                                <p:cBhvr>
+                                  <p:cTn id="20" dur="1" fill="hold">
+                                    <p:stCondLst>
+                                      <p:cond delay="0"/>
+                                    </p:stCondLst>
+                                  </p:cTn>
+                                  <p:tgtEl>
+                                    <p:spTgt spid="9"/>
+                                  </p:tgtEl>
+                                  <p:attrNameLst>
+                                    <p:attrName>style.visibility</p:attrName>
+                                  </p:attrNameLst>
+                                </p:cBhvr>
+                                <p:to>
+                                  <p:strVal val="visible"/>
+                                </p:to>
+                              </p:set>
+                              <p:animEffect transition="in" filter="wheel(1)">
+                                <p:cBhvr>
+                                  <p:cTn id="191" dur="450"/>
+                                  <p:tgtEl>
+                                    <p:spTgt spid="9"/>
+                                  </p:tgtEl>
+                                </p:cBhvr>
+                              </p:animEffect>
+                            </p:childTnLst>
+                          </p:cTn>
+                        </p:par>
+                        <p:par>
+                          <p:cTn id="21" dur="570" fill="hold" nodeType="afterEffect" grpId="0" presetID="22" presetClass="entr" presetSubtype="4">
+                            <p:stCondLst>
+                              <p:cond delay="1040"/>
+                            </p:stCondLst>
+                            <p:childTnLst>
+                              <p:set>
+                                <p:cBhvr>
+                                  <p:cTn id="22" dur="1" fill="hold">
+                                    <p:stCondLst>
+                                      <p:cond delay="0"/>
+                                    </p:stCondLst>
+                                  </p:cTn>
+                                  <p:tgtEl>
+                                    <p:spTgt spid="11"/>
+                                  </p:tgtEl>
+                                  <p:attrNameLst>
+                                    <p:attrName>style.visibility</p:attrName>
+                                  </p:attrNameLst>
+                                </p:cBhvr>
+                                <p:to>
+                                  <p:strVal val="visible"/>
+                                </p:to>
+                              </p:set>
+                              <p:animEffect transition="in" filter="wipe(down)">
+                                <p:cBhvr>
+                                  <p:cTn id="211" dur="570"/>
+                                  <p:tgtEl>
+                                    <p:spTgt spid="11"/>
+                                  </p:tgtEl>
+                                </p:cBhvr>
+                              </p:animEffect>
+                            </p:childTnLst>
+                          </p:cTn>
+                        </p:par>
+                        <p:par>
+                          <p:cTn id="23" dur="690" fill="hold" nodeType="afterEffect" grpId="0" presetID="9" presetClass="entr" presetSubtype="0">
+                            <p:stCondLst>
+                              <p:cond delay="1170"/>
+                            </p:stCondLst>
+                            <p:childTnLst>
+                              <p:set>
+                                <p:cBhvr>
+                                  <p:cTn id="24" dur="1" fill="hold">
+                                    <p:stCondLst>
+                                      <p:cond delay="0"/>
+                                    </p:stCondLst>
+                                  </p:cTn>
+                                  <p:tgtEl>
+                                    <p:spTgt spid="12"/>
+                                  </p:tgtEl>
+                                  <p:attrNameLst>
+                                    <p:attrName>style.visibility</p:attrName>
+                                  </p:attrNameLst>
+                                </p:cBhvr>
+                                <p:to>
+                                  <p:strVal val="visible"/>
+                                </p:to>
+                              </p:set>
+                              <p:animEffect transition="in" filter="fade">
+                                <p:cBhvr>
+                                  <p:cTn id="231" dur="690"/>
+                                  <p:tgtEl>
+                                    <p:spTgt spid="12"/>
+                                  </p:tgtEl>
+                                </p:cBhvr>
+                              </p:animEffect>
+                            </p:childTnLst>
+                          </p:cTn>
+                        </p:par>
+                        <p:par>
+                          <p:cTn id="25" dur="810" fill="hold" nodeType="afterEffect" grpId="0" presetID="22" presetClass="entr" presetSubtype="2">
+                            <p:stCondLst>
+                              <p:cond delay="1300"/>
+                            </p:stCondLst>
+                            <p:childTnLst>
+                              <p:set>
+                                <p:cBhvr>
+                                  <p:cTn id="26" dur="1" fill="hold">
+                                    <p:stCondLst>
+                                      <p:cond delay="0"/>
+                                    </p:stCondLst>
+                                  </p:cTn>
+                                  <p:tgtEl>
+                                    <p:spTgt spid="14"/>
+                                  </p:tgtEl>
+                                  <p:attrNameLst>
+                                    <p:attrName>style.visibility</p:attrName>
+                                  </p:attrNameLst>
+                                </p:cBhvr>
+                                <p:to>
+                                  <p:strVal val="visible"/>
+                                </p:to>
+                              </p:set>
+                              <p:animEffect transition="in" filter="wipe(right)">
+                                <p:cBhvr>
+                                  <p:cTn id="251" dur="810"/>
+                                  <p:tgtEl>
+                                    <p:spTgt spid="14"/>
+                                  </p:tgtEl>
+                                </p:cBhvr>
+                              </p:animEffect>
+                            </p:childTnLst>
+                          </p:cTn>
+                        </p:par>
+                        <p:par>
+                          <p:cTn id="27" dur="450" fill="hold" nodeType="afterEffect" grpId="0" presetID="18" presetClass="entr" presetSubtype="12">
+                            <p:stCondLst>
+                              <p:cond delay="1430"/>
+                            </p:stCondLst>
+                            <p:childTnLst>
+                              <p:set>
+                                <p:cBhvr>
+                                  <p:cTn id="28" dur="1" fill="hold">
+                                    <p:stCondLst>
+                                      <p:cond delay="0"/>
+                                    </p:stCondLst>
+                                  </p:cTn>
+                                  <p:tgtEl>
+                                    <p:spTgt spid="16"/>
+                                  </p:tgtEl>
+                                  <p:attrNameLst>
+                                    <p:attrName>style.visibility</p:attrName>
+                                  </p:attrNameLst>
+                                </p:cBhvr>
+                                <p:to>
+                                  <p:strVal val="visible"/>
+                                </p:to>
+                              </p:set>
+                              <p:animEffect transition="in" filter="circle(in)">
+                                <p:cBhvr>
+                                  <p:cTn id="271" dur="450"/>
+                                  <p:tgtEl>
+                                    <p:spTgt spid="16"/>
+                                  </p:tgtEl>
+                                </p:cBhvr>
+                              </p:animEffect>
+                            </p:childTnLst>
+                          </p:cTn>
+                        </p:par>
+                        <p:par>
+                          <p:cTn id="29" dur="570" fill="hold" nodeType="afterEffect" grpId="0" presetID="22" presetClass="entr" presetSubtype="1">
+                            <p:stCondLst>
+                              <p:cond delay="1560"/>
+                            </p:stCondLst>
+                            <p:childTnLst>
+                              <p:set>
+                                <p:cBhvr>
+                                  <p:cTn id="30" dur="1" fill="hold">
+                                    <p:stCondLst>
+                                      <p:cond delay="0"/>
+                                    </p:stCondLst>
+                                  </p:cTn>
+                                  <p:tgtEl>
+                                    <p:spTgt spid="13"/>
+                                  </p:tgtEl>
+                                  <p:attrNameLst>
+                                    <p:attrName>style.visibility</p:attrName>
+                                  </p:attrNameLst>
+                                </p:cBhvr>
+                                <p:to>
+                                  <p:strVal val="visible"/>
+                                </p:to>
+                              </p:set>
+                              <p:animEffect transition="in" filter="wipe(up)">
+                                <p:cBhvr>
+                                  <p:cTn id="291" dur="570"/>
+                                  <p:tgtEl>
+                                    <p:spTgt spid="13"/>
+                                  </p:tgtEl>
+                                </p:cBhvr>
+                              </p:animEffect>
+                            </p:childTnLst>
+                          </p:cTn>
+                        </p:par>
+                        <p:par>
+                          <p:cTn id="31" dur="690" fill="hold" nodeType="afterEffect" grpId="0" presetID="42" presetClass="entr" presetSubtype="10">
+                            <p:stCondLst>
+                              <p:cond delay="1690"/>
+                            </p:stCondLst>
+                            <p:childTnLst>
+                              <p:set>
+                                <p:cBhvr>
+                                  <p:cTn id="32" dur="1" fill="hold">
+                                    <p:stCondLst>
+                                      <p:cond delay="0"/>
+                                    </p:stCondLst>
+                                  </p:cTn>
+                                  <p:tgtEl>
+                                    <p:spTgt spid="15"/>
+                                  </p:tgtEl>
+                                  <p:attrNameLst>
+                                    <p:attrName>style.visibility</p:attrName>
+                                  </p:attrNameLst>
+                                </p:cBhvr>
+                                <p:to>
+                                  <p:strVal val="visible"/>
+                                </p:to>
+                              </p:set>
+                              <p:animEffect transition="in" filter="blinds(horizontal)">
+                                <p:cBhvr>
+                                  <p:cTn id="311" dur="690"/>
+                                  <p:tgtEl>
+                                    <p:spTgt spid="15"/>
+                                  </p:tgtEl>
+                                </p:cBhvr>
+                              </p:animEffect>
+                            </p:childTnLst>
+                          </p:cTn>
+                        </p:par>
+                      </p:childTnLst>
+                    </p:cTn>
+                  </p:par>
+                </p:childTnLst>
+              </p:cTn>
+              <p:prevCondLst>
+                <p:cond evt="onPrev" delay="0">
+                  <p:tgtEl>
+                    <p:sldTgt/>
+                  </p:tgtEl>
+                </p:cond>
+              </p:prevCondLst>
+              <p:nextCondLst>
+                <p:cond evt="onNext" delay="0">
+                  <p:tgtEl>
+                    <p:sldTgt/>
+                  </p:tgtEl>
+                </p:cond>
+              </p:nextCondLst>
+            </p:seq>
+          </p:childTnLst>
+        </p:cTn>
+      </p:par>
+    </p:tnLst>
+  </p:timing>
 </p:sld>
 </file>
 
@@ -5751,8 +7058,327 @@
     <a:masterClrMapping/>
   </p:clrMapOvr>
   <p:transition spd="med">
-    <p:fade/>
+    <p:zoom dir="in"/>
   </p:transition>
+  <p:timing>
+    <p:tnLst>
+      <p:par>
+        <p:cTn id="1" dur="indefinite" restart="never" nodeType="tmRoot">
+          <p:childTnLst>
+            <p:seq concurrent="1" nextAc="seek">
+              <p:cTn id="2" dur="indefinite" nodeType="mainSeq">
+                <p:childTnLst>
+                  <p:par>
+                    <p:cTn id="3" fill="hold">
+                      <p:stCondLst>
+                        <p:cond delay="indefinite"/>
+                      </p:stCondLst>
+                      <p:childTnLst>
+                        <p:par>
+                          <p:cTn id="5" dur="690" fill="hold" nodeType="clickEffect" grpId="0" presetID="10" presetClass="entr" presetSubtype="0">
+                            <p:stCondLst>
+                              <p:cond delay="0"/>
+                            </p:stCondLst>
+                            <p:childTnLst>
+                              <p:set>
+                                <p:cBhvr>
+                                  <p:cTn id="6" dur="1" fill="hold">
+                                    <p:stCondLst>
+                                      <p:cond delay="0"/>
+                                    </p:stCondLst>
+                                  </p:cTn>
+                                  <p:tgtEl>
+                                    <p:spTgt spid="3"/>
+                                  </p:tgtEl>
+                                  <p:attrNameLst>
+                                    <p:attrName>style.visibility</p:attrName>
+                                  </p:attrNameLst>
+                                </p:cBhvr>
+                                <p:to>
+                                  <p:strVal val="visible"/>
+                                </p:to>
+                              </p:set>
+                              <p:animEffect transition="in" filter="dissolve">
+                                <p:cBhvr>
+                                  <p:cTn id="51" dur="690"/>
+                                  <p:tgtEl>
+                                    <p:spTgt spid="3"/>
+                                  </p:tgtEl>
+                                </p:cBhvr>
+                              </p:animEffect>
+                            </p:childTnLst>
+                          </p:cTn>
+                        </p:par>
+                        <p:par>
+                          <p:cTn id="7" dur="810" fill="hold" nodeType="afterEffect" grpId="0" presetID="25" presetClass="entr" presetSubtype="1">
+                            <p:stCondLst>
+                              <p:cond delay="130"/>
+                            </p:stCondLst>
+                            <p:childTnLst>
+                              <p:set>
+                                <p:cBhvr>
+                                  <p:cTn id="8" dur="1" fill="hold">
+                                    <p:stCondLst>
+                                      <p:cond delay="0"/>
+                                    </p:stCondLst>
+                                  </p:cTn>
+                                  <p:tgtEl>
+                                    <p:spTgt spid="5"/>
+                                  </p:tgtEl>
+                                  <p:attrNameLst>
+                                    <p:attrName>style.visibility</p:attrName>
+                                  </p:attrNameLst>
+                                </p:cBhvr>
+                                <p:to>
+                                  <p:strVal val="visible"/>
+                                </p:to>
+                              </p:set>
+                              <p:animEffect transition="in" filter="strips(downRight)">
+                                <p:cBhvr>
+                                  <p:cTn id="71" dur="810"/>
+                                  <p:tgtEl>
+                                    <p:spTgt spid="5"/>
+                                  </p:tgtEl>
+                                </p:cBhvr>
+                              </p:animEffect>
+                            </p:childTnLst>
+                          </p:cTn>
+                        </p:par>
+                        <p:par>
+                          <p:cTn id="9" dur="450" fill="hold" nodeType="afterEffect" grpId="0" presetID="45" presetClass="entr" presetSubtype="1">
+                            <p:stCondLst>
+                              <p:cond delay="260"/>
+                            </p:stCondLst>
+                            <p:childTnLst>
+                              <p:set>
+                                <p:cBhvr>
+                                  <p:cTn id="10" dur="1" fill="hold">
+                                    <p:stCondLst>
+                                      <p:cond delay="0"/>
+                                    </p:stCondLst>
+                                  </p:cTn>
+                                  <p:tgtEl>
+                                    <p:spTgt spid="6"/>
+                                  </p:tgtEl>
+                                  <p:attrNameLst>
+                                    <p:attrName>style.visibility</p:attrName>
+                                  </p:attrNameLst>
+                                </p:cBhvr>
+                                <p:to>
+                                  <p:strVal val="visible"/>
+                                </p:to>
+                              </p:set>
+                              <p:animEffect transition="in" filter="barn(inHorizontal)">
+                                <p:cBhvr>
+                                  <p:cTn id="91" dur="450"/>
+                                  <p:tgtEl>
+                                    <p:spTgt spid="6"/>
+                                  </p:tgtEl>
+                                </p:cBhvr>
+                              </p:animEffect>
+                            </p:childTnLst>
+                          </p:cTn>
+                        </p:par>
+                        <p:par>
+                          <p:cTn id="11" dur="570" fill="hold" nodeType="afterEffect" grpId="0" presetID="22" presetClass="entr" presetSubtype="8">
+                            <p:stCondLst>
+                              <p:cond delay="390"/>
+                            </p:stCondLst>
+                            <p:childTnLst>
+                              <p:set>
+                                <p:cBhvr>
+                                  <p:cTn id="12" dur="1" fill="hold">
+                                    <p:stCondLst>
+                                      <p:cond delay="0"/>
+                                    </p:stCondLst>
+                                  </p:cTn>
+                                  <p:tgtEl>
+                                    <p:spTgt spid="7"/>
+                                  </p:tgtEl>
+                                  <p:attrNameLst>
+                                    <p:attrName>style.visibility</p:attrName>
+                                  </p:attrNameLst>
+                                </p:cBhvr>
+                                <p:to>
+                                  <p:strVal val="visible"/>
+                                </p:to>
+                              </p:set>
+                              <p:animEffect transition="in" filter="wipe(left)">
+                                <p:cBhvr>
+                                  <p:cTn id="111" dur="570"/>
+                                  <p:tgtEl>
+                                    <p:spTgt spid="7"/>
+                                  </p:tgtEl>
+                                </p:cBhvr>
+                              </p:animEffect>
+                            </p:childTnLst>
+                          </p:cTn>
+                        </p:par>
+                        <p:par>
+                          <p:cTn id="13" dur="690" fill="hold" nodeType="afterEffect" grpId="0" presetID="37" presetClass="entr" presetSubtype="0">
+                            <p:stCondLst>
+                              <p:cond delay="520"/>
+                            </p:stCondLst>
+                            <p:childTnLst>
+                              <p:set>
+                                <p:cBhvr>
+                                  <p:cTn id="14" dur="1" fill="hold">
+                                    <p:stCondLst>
+                                      <p:cond delay="0"/>
+                                    </p:stCondLst>
+                                  </p:cTn>
+                                  <p:tgtEl>
+                                    <p:spTgt spid="4"/>
+                                  </p:tgtEl>
+                                  <p:attrNameLst>
+                                    <p:attrName>style.visibility</p:attrName>
+                                  </p:attrNameLst>
+                                </p:cBhvr>
+                                <p:to>
+                                  <p:strVal val="visible"/>
+                                </p:to>
+                              </p:set>
+                              <p:animEffect transition="in" filter="wedge">
+                                <p:cBhvr>
+                                  <p:cTn id="131" dur="690"/>
+                                  <p:tgtEl>
+                                    <p:spTgt spid="4"/>
+                                  </p:tgtEl>
+                                </p:cBhvr>
+                              </p:animEffect>
+                            </p:childTnLst>
+                          </p:cTn>
+                        </p:par>
+                        <p:par>
+                          <p:cTn id="15" dur="810" fill="hold" nodeType="afterEffect" grpId="0" presetID="52" presetClass="entr" presetSubtype="0">
+                            <p:stCondLst>
+                              <p:cond delay="650"/>
+                            </p:stCondLst>
+                            <p:childTnLst>
+                              <p:set>
+                                <p:cBhvr>
+                                  <p:cTn id="16" dur="1" fill="hold">
+                                    <p:stCondLst>
+                                      <p:cond delay="0"/>
+                                    </p:stCondLst>
+                                  </p:cTn>
+                                  <p:tgtEl>
+                                    <p:spTgt spid="8"/>
+                                  </p:tgtEl>
+                                  <p:attrNameLst>
+                                    <p:attrName>style.visibility</p:attrName>
+                                  </p:attrNameLst>
+                                </p:cBhvr>
+                                <p:to>
+                                  <p:strVal val="visible"/>
+                                </p:to>
+                              </p:set>
+                              <p:animEffect transition="in" filter="randombar(horizontal)">
+                                <p:cBhvr>
+                                  <p:cTn id="151" dur="810"/>
+                                  <p:tgtEl>
+                                    <p:spTgt spid="8"/>
+                                  </p:tgtEl>
+                                </p:cBhvr>
+                              </p:animEffect>
+                            </p:childTnLst>
+                          </p:cTn>
+                        </p:par>
+                        <p:par>
+                          <p:cTn id="17" dur="450" fill="hold" nodeType="afterEffect" grpId="0" presetID="21" presetClass="entr" presetSubtype="1">
+                            <p:stCondLst>
+                              <p:cond delay="780"/>
+                            </p:stCondLst>
+                            <p:childTnLst>
+                              <p:set>
+                                <p:cBhvr>
+                                  <p:cTn id="18" dur="1" fill="hold">
+                                    <p:stCondLst>
+                                      <p:cond delay="0"/>
+                                    </p:stCondLst>
+                                  </p:cTn>
+                                  <p:tgtEl>
+                                    <p:spTgt spid="9"/>
+                                  </p:tgtEl>
+                                  <p:attrNameLst>
+                                    <p:attrName>style.visibility</p:attrName>
+                                  </p:attrNameLst>
+                                </p:cBhvr>
+                                <p:to>
+                                  <p:strVal val="visible"/>
+                                </p:to>
+                              </p:set>
+                              <p:animEffect transition="in" filter="wheel(1)">
+                                <p:cBhvr>
+                                  <p:cTn id="171" dur="450"/>
+                                  <p:tgtEl>
+                                    <p:spTgt spid="9"/>
+                                  </p:tgtEl>
+                                </p:cBhvr>
+                              </p:animEffect>
+                            </p:childTnLst>
+                          </p:cTn>
+                        </p:par>
+                        <p:par>
+                          <p:cTn id="19" dur="570" fill="hold" nodeType="afterEffect" grpId="0" presetID="22" presetClass="entr" presetSubtype="4">
+                            <p:stCondLst>
+                              <p:cond delay="910"/>
+                            </p:stCondLst>
+                            <p:childTnLst>
+                              <p:set>
+                                <p:cBhvr>
+                                  <p:cTn id="20" dur="1" fill="hold">
+                                    <p:stCondLst>
+                                      <p:cond delay="0"/>
+                                    </p:stCondLst>
+                                  </p:cTn>
+                                  <p:tgtEl>
+                                    <p:spTgt spid="10"/>
+                                  </p:tgtEl>
+                                  <p:attrNameLst>
+                                    <p:attrName>style.visibility</p:attrName>
+                                  </p:attrNameLst>
+                                </p:cBhvr>
+                                <p:to>
+                                  <p:strVal val="visible"/>
+                                </p:to>
+                              </p:set>
+                              <p:animEffect transition="in" filter="wipe(down)">
+                                <p:cBhvr>
+                                  <p:cTn id="191" dur="570"/>
+                                  <p:tgtEl>
+                                    <p:spTgt spid="10"/>
+                                  </p:tgtEl>
+                                </p:cBhvr>
+                              </p:animEffect>
+                            </p:childTnLst>
+                          </p:cTn>
+                        </p:par>
+                      </p:childTnLst>
+                    </p:cTn>
+                  </p:par>
+                </p:childTnLst>
+              </p:cTn>
+              <p:prevCondLst>
+                <p:cond evt="onPrev" delay="0">
+                  <p:tgtEl>
+                    <p:sldTgt/>
+                  </p:tgtEl>
+                </p:cond>
+              </p:prevCondLst>
+              <p:nextCondLst>
+                <p:cond evt="onNext" delay="0">
+                  <p:tgtEl>
+                    <p:sldTgt/>
+                  </p:tgtEl>
+                </p:cond>
+              </p:nextCondLst>
+            </p:seq>
+          </p:childTnLst>
+        </p:cTn>
+      </p:par>
+    </p:tnLst>
+  </p:timing>
 </p:sld>
 </file>
 
@@ -6172,8 +7798,327 @@
     <a:masterClrMapping/>
   </p:clrMapOvr>
   <p:transition spd="med">
-    <p:fade/>
+    <p:cover dir="l"/>
   </p:transition>
+  <p:timing>
+    <p:tnLst>
+      <p:par>
+        <p:cTn id="1" dur="indefinite" restart="never" nodeType="tmRoot">
+          <p:childTnLst>
+            <p:seq concurrent="1" nextAc="seek">
+              <p:cTn id="2" dur="indefinite" nodeType="mainSeq">
+                <p:childTnLst>
+                  <p:par>
+                    <p:cTn id="3" fill="hold">
+                      <p:stCondLst>
+                        <p:cond delay="indefinite"/>
+                      </p:stCondLst>
+                      <p:childTnLst>
+                        <p:par>
+                          <p:cTn id="5" dur="810" fill="hold" nodeType="clickEffect" grpId="0" presetID="25" presetClass="entr" presetSubtype="1">
+                            <p:stCondLst>
+                              <p:cond delay="0"/>
+                            </p:stCondLst>
+                            <p:childTnLst>
+                              <p:set>
+                                <p:cBhvr>
+                                  <p:cTn id="6" dur="1" fill="hold">
+                                    <p:stCondLst>
+                                      <p:cond delay="0"/>
+                                    </p:stCondLst>
+                                  </p:cTn>
+                                  <p:tgtEl>
+                                    <p:spTgt spid="3"/>
+                                  </p:tgtEl>
+                                  <p:attrNameLst>
+                                    <p:attrName>style.visibility</p:attrName>
+                                  </p:attrNameLst>
+                                </p:cBhvr>
+                                <p:to>
+                                  <p:strVal val="visible"/>
+                                </p:to>
+                              </p:set>
+                              <p:animEffect transition="in" filter="strips(downRight)">
+                                <p:cBhvr>
+                                  <p:cTn id="51" dur="810"/>
+                                  <p:tgtEl>
+                                    <p:spTgt spid="3"/>
+                                  </p:tgtEl>
+                                </p:cBhvr>
+                              </p:animEffect>
+                            </p:childTnLst>
+                          </p:cTn>
+                        </p:par>
+                        <p:par>
+                          <p:cTn id="7" dur="450" fill="hold" nodeType="afterEffect" grpId="0" presetID="45" presetClass="entr" presetSubtype="1">
+                            <p:stCondLst>
+                              <p:cond delay="130"/>
+                            </p:stCondLst>
+                            <p:childTnLst>
+                              <p:set>
+                                <p:cBhvr>
+                                  <p:cTn id="8" dur="1" fill="hold">
+                                    <p:stCondLst>
+                                      <p:cond delay="0"/>
+                                    </p:stCondLst>
+                                  </p:cTn>
+                                  <p:tgtEl>
+                                    <p:spTgt spid="5"/>
+                                  </p:tgtEl>
+                                  <p:attrNameLst>
+                                    <p:attrName>style.visibility</p:attrName>
+                                  </p:attrNameLst>
+                                </p:cBhvr>
+                                <p:to>
+                                  <p:strVal val="visible"/>
+                                </p:to>
+                              </p:set>
+                              <p:animEffect transition="in" filter="barn(inHorizontal)">
+                                <p:cBhvr>
+                                  <p:cTn id="71" dur="450"/>
+                                  <p:tgtEl>
+                                    <p:spTgt spid="5"/>
+                                  </p:tgtEl>
+                                </p:cBhvr>
+                              </p:animEffect>
+                            </p:childTnLst>
+                          </p:cTn>
+                        </p:par>
+                        <p:par>
+                          <p:cTn id="9" dur="570" fill="hold" nodeType="afterEffect" grpId="0" presetID="22" presetClass="entr" presetSubtype="8">
+                            <p:stCondLst>
+                              <p:cond delay="260"/>
+                            </p:stCondLst>
+                            <p:childTnLst>
+                              <p:set>
+                                <p:cBhvr>
+                                  <p:cTn id="10" dur="1" fill="hold">
+                                    <p:stCondLst>
+                                      <p:cond delay="0"/>
+                                    </p:stCondLst>
+                                  </p:cTn>
+                                  <p:tgtEl>
+                                    <p:spTgt spid="6"/>
+                                  </p:tgtEl>
+                                  <p:attrNameLst>
+                                    <p:attrName>style.visibility</p:attrName>
+                                  </p:attrNameLst>
+                                </p:cBhvr>
+                                <p:to>
+                                  <p:strVal val="visible"/>
+                                </p:to>
+                              </p:set>
+                              <p:animEffect transition="in" filter="wipe(left)">
+                                <p:cBhvr>
+                                  <p:cTn id="91" dur="570"/>
+                                  <p:tgtEl>
+                                    <p:spTgt spid="6"/>
+                                  </p:tgtEl>
+                                </p:cBhvr>
+                              </p:animEffect>
+                            </p:childTnLst>
+                          </p:cTn>
+                        </p:par>
+                        <p:par>
+                          <p:cTn id="11" dur="690" fill="hold" nodeType="afterEffect" grpId="0" presetID="37" presetClass="entr" presetSubtype="0">
+                            <p:stCondLst>
+                              <p:cond delay="390"/>
+                            </p:stCondLst>
+                            <p:childTnLst>
+                              <p:set>
+                                <p:cBhvr>
+                                  <p:cTn id="12" dur="1" fill="hold">
+                                    <p:stCondLst>
+                                      <p:cond delay="0"/>
+                                    </p:stCondLst>
+                                  </p:cTn>
+                                  <p:tgtEl>
+                                    <p:spTgt spid="4"/>
+                                  </p:tgtEl>
+                                  <p:attrNameLst>
+                                    <p:attrName>style.visibility</p:attrName>
+                                  </p:attrNameLst>
+                                </p:cBhvr>
+                                <p:to>
+                                  <p:strVal val="visible"/>
+                                </p:to>
+                              </p:set>
+                              <p:animEffect transition="in" filter="wedge">
+                                <p:cBhvr>
+                                  <p:cTn id="111" dur="690"/>
+                                  <p:tgtEl>
+                                    <p:spTgt spid="4"/>
+                                  </p:tgtEl>
+                                </p:cBhvr>
+                              </p:animEffect>
+                            </p:childTnLst>
+                          </p:cTn>
+                        </p:par>
+                        <p:par>
+                          <p:cTn id="13" dur="810" fill="hold" nodeType="afterEffect" grpId="0" presetID="52" presetClass="entr" presetSubtype="0">
+                            <p:stCondLst>
+                              <p:cond delay="520"/>
+                            </p:stCondLst>
+                            <p:childTnLst>
+                              <p:set>
+                                <p:cBhvr>
+                                  <p:cTn id="14" dur="1" fill="hold">
+                                    <p:stCondLst>
+                                      <p:cond delay="0"/>
+                                    </p:stCondLst>
+                                  </p:cTn>
+                                  <p:tgtEl>
+                                    <p:spTgt spid="7"/>
+                                  </p:tgtEl>
+                                  <p:attrNameLst>
+                                    <p:attrName>style.visibility</p:attrName>
+                                  </p:attrNameLst>
+                                </p:cBhvr>
+                                <p:to>
+                                  <p:strVal val="visible"/>
+                                </p:to>
+                              </p:set>
+                              <p:animEffect transition="in" filter="randombar(horizontal)">
+                                <p:cBhvr>
+                                  <p:cTn id="131" dur="810"/>
+                                  <p:tgtEl>
+                                    <p:spTgt spid="7"/>
+                                  </p:tgtEl>
+                                </p:cBhvr>
+                              </p:animEffect>
+                            </p:childTnLst>
+                          </p:cTn>
+                        </p:par>
+                        <p:par>
+                          <p:cTn id="15" dur="450" fill="hold" nodeType="afterEffect" grpId="0" presetID="21" presetClass="entr" presetSubtype="1">
+                            <p:stCondLst>
+                              <p:cond delay="650"/>
+                            </p:stCondLst>
+                            <p:childTnLst>
+                              <p:set>
+                                <p:cBhvr>
+                                  <p:cTn id="16" dur="1" fill="hold">
+                                    <p:stCondLst>
+                                      <p:cond delay="0"/>
+                                    </p:stCondLst>
+                                  </p:cTn>
+                                  <p:tgtEl>
+                                    <p:spTgt spid="8"/>
+                                  </p:tgtEl>
+                                  <p:attrNameLst>
+                                    <p:attrName>style.visibility</p:attrName>
+                                  </p:attrNameLst>
+                                </p:cBhvr>
+                                <p:to>
+                                  <p:strVal val="visible"/>
+                                </p:to>
+                              </p:set>
+                              <p:animEffect transition="in" filter="wheel(1)">
+                                <p:cBhvr>
+                                  <p:cTn id="151" dur="450"/>
+                                  <p:tgtEl>
+                                    <p:spTgt spid="8"/>
+                                  </p:tgtEl>
+                                </p:cBhvr>
+                              </p:animEffect>
+                            </p:childTnLst>
+                          </p:cTn>
+                        </p:par>
+                        <p:par>
+                          <p:cTn id="17" dur="570" fill="hold" nodeType="afterEffect" grpId="0" presetID="22" presetClass="entr" presetSubtype="4">
+                            <p:stCondLst>
+                              <p:cond delay="780"/>
+                            </p:stCondLst>
+                            <p:childTnLst>
+                              <p:set>
+                                <p:cBhvr>
+                                  <p:cTn id="18" dur="1" fill="hold">
+                                    <p:stCondLst>
+                                      <p:cond delay="0"/>
+                                    </p:stCondLst>
+                                  </p:cTn>
+                                  <p:tgtEl>
+                                    <p:spTgt spid="9"/>
+                                  </p:tgtEl>
+                                  <p:attrNameLst>
+                                    <p:attrName>style.visibility</p:attrName>
+                                  </p:attrNameLst>
+                                </p:cBhvr>
+                                <p:to>
+                                  <p:strVal val="visible"/>
+                                </p:to>
+                              </p:set>
+                              <p:animEffect transition="in" filter="wipe(down)">
+                                <p:cBhvr>
+                                  <p:cTn id="171" dur="570"/>
+                                  <p:tgtEl>
+                                    <p:spTgt spid="9"/>
+                                  </p:tgtEl>
+                                </p:cBhvr>
+                              </p:animEffect>
+                            </p:childTnLst>
+                          </p:cTn>
+                        </p:par>
+                        <p:par>
+                          <p:cTn id="19" dur="690" fill="hold" nodeType="afterEffect" grpId="0" presetID="9" presetClass="entr" presetSubtype="0">
+                            <p:stCondLst>
+                              <p:cond delay="910"/>
+                            </p:stCondLst>
+                            <p:childTnLst>
+                              <p:set>
+                                <p:cBhvr>
+                                  <p:cTn id="20" dur="1" fill="hold">
+                                    <p:stCondLst>
+                                      <p:cond delay="0"/>
+                                    </p:stCondLst>
+                                  </p:cTn>
+                                  <p:tgtEl>
+                                    <p:spTgt spid="10"/>
+                                  </p:tgtEl>
+                                  <p:attrNameLst>
+                                    <p:attrName>style.visibility</p:attrName>
+                                  </p:attrNameLst>
+                                </p:cBhvr>
+                                <p:to>
+                                  <p:strVal val="visible"/>
+                                </p:to>
+                              </p:set>
+                              <p:animEffect transition="in" filter="fade">
+                                <p:cBhvr>
+                                  <p:cTn id="191" dur="690"/>
+                                  <p:tgtEl>
+                                    <p:spTgt spid="10"/>
+                                  </p:tgtEl>
+                                </p:cBhvr>
+                              </p:animEffect>
+                            </p:childTnLst>
+                          </p:cTn>
+                        </p:par>
+                      </p:childTnLst>
+                    </p:cTn>
+                  </p:par>
+                </p:childTnLst>
+              </p:cTn>
+              <p:prevCondLst>
+                <p:cond evt="onPrev" delay="0">
+                  <p:tgtEl>
+                    <p:sldTgt/>
+                  </p:tgtEl>
+                </p:cond>
+              </p:prevCondLst>
+              <p:nextCondLst>
+                <p:cond evt="onNext" delay="0">
+                  <p:tgtEl>
+                    <p:sldTgt/>
+                  </p:tgtEl>
+                </p:cond>
+              </p:nextCondLst>
+            </p:seq>
+          </p:childTnLst>
+        </p:cTn>
+      </p:par>
+    </p:tnLst>
+  </p:timing>
 </p:sld>
 </file>
 
@@ -7129,8 +9074,537 @@
     <a:masterClrMapping/>
   </p:clrMapOvr>
   <p:transition spd="med">
-    <p:fade/>
+    <p:checker dir="across"/>
   </p:transition>
+  <p:timing>
+    <p:tnLst>
+      <p:par>
+        <p:cTn id="1" dur="indefinite" restart="never" nodeType="tmRoot">
+          <p:childTnLst>
+            <p:seq concurrent="1" nextAc="seek">
+              <p:cTn id="2" dur="indefinite" nodeType="mainSeq">
+                <p:childTnLst>
+                  <p:par>
+                    <p:cTn id="3" fill="hold">
+                      <p:stCondLst>
+                        <p:cond delay="indefinite"/>
+                      </p:stCondLst>
+                      <p:childTnLst>
+                        <p:par>
+                          <p:cTn id="5" dur="450" fill="hold" nodeType="clickEffect" grpId="0" presetID="45" presetClass="entr" presetSubtype="1">
+                            <p:stCondLst>
+                              <p:cond delay="0"/>
+                            </p:stCondLst>
+                            <p:childTnLst>
+                              <p:set>
+                                <p:cBhvr>
+                                  <p:cTn id="6" dur="1" fill="hold">
+                                    <p:stCondLst>
+                                      <p:cond delay="0"/>
+                                    </p:stCondLst>
+                                  </p:cTn>
+                                  <p:tgtEl>
+                                    <p:spTgt spid="3"/>
+                                  </p:tgtEl>
+                                  <p:attrNameLst>
+                                    <p:attrName>style.visibility</p:attrName>
+                                  </p:attrNameLst>
+                                </p:cBhvr>
+                                <p:to>
+                                  <p:strVal val="visible"/>
+                                </p:to>
+                              </p:set>
+                              <p:animEffect transition="in" filter="barn(inHorizontal)">
+                                <p:cBhvr>
+                                  <p:cTn id="51" dur="450"/>
+                                  <p:tgtEl>
+                                    <p:spTgt spid="3"/>
+                                  </p:tgtEl>
+                                </p:cBhvr>
+                              </p:animEffect>
+                            </p:childTnLst>
+                          </p:cTn>
+                        </p:par>
+                        <p:par>
+                          <p:cTn id="7" dur="570" fill="hold" nodeType="afterEffect" grpId="0" presetID="22" presetClass="entr" presetSubtype="8">
+                            <p:stCondLst>
+                              <p:cond delay="130"/>
+                            </p:stCondLst>
+                            <p:childTnLst>
+                              <p:set>
+                                <p:cBhvr>
+                                  <p:cTn id="8" dur="1" fill="hold">
+                                    <p:stCondLst>
+                                      <p:cond delay="0"/>
+                                    </p:stCondLst>
+                                  </p:cTn>
+                                  <p:tgtEl>
+                                    <p:spTgt spid="4"/>
+                                  </p:tgtEl>
+                                  <p:attrNameLst>
+                                    <p:attrName>style.visibility</p:attrName>
+                                  </p:attrNameLst>
+                                </p:cBhvr>
+                                <p:to>
+                                  <p:strVal val="visible"/>
+                                </p:to>
+                              </p:set>
+                              <p:animEffect transition="in" filter="wipe(left)">
+                                <p:cBhvr>
+                                  <p:cTn id="71" dur="570"/>
+                                  <p:tgtEl>
+                                    <p:spTgt spid="4"/>
+                                  </p:tgtEl>
+                                </p:cBhvr>
+                              </p:animEffect>
+                            </p:childTnLst>
+                          </p:cTn>
+                        </p:par>
+                        <p:par>
+                          <p:cTn id="9" dur="690" fill="hold" nodeType="afterEffect" grpId="0" presetID="37" presetClass="entr" presetSubtype="0">
+                            <p:stCondLst>
+                              <p:cond delay="260"/>
+                            </p:stCondLst>
+                            <p:childTnLst>
+                              <p:set>
+                                <p:cBhvr>
+                                  <p:cTn id="10" dur="1" fill="hold">
+                                    <p:stCondLst>
+                                      <p:cond delay="0"/>
+                                    </p:stCondLst>
+                                  </p:cTn>
+                                  <p:tgtEl>
+                                    <p:spTgt spid="5"/>
+                                  </p:tgtEl>
+                                  <p:attrNameLst>
+                                    <p:attrName>style.visibility</p:attrName>
+                                  </p:attrNameLst>
+                                </p:cBhvr>
+                                <p:to>
+                                  <p:strVal val="visible"/>
+                                </p:to>
+                              </p:set>
+                              <p:animEffect transition="in" filter="wedge">
+                                <p:cBhvr>
+                                  <p:cTn id="91" dur="690"/>
+                                  <p:tgtEl>
+                                    <p:spTgt spid="5"/>
+                                  </p:tgtEl>
+                                </p:cBhvr>
+                              </p:animEffect>
+                            </p:childTnLst>
+                          </p:cTn>
+                        </p:par>
+                        <p:par>
+                          <p:cTn id="11" dur="810" fill="hold" nodeType="afterEffect" grpId="0" presetID="52" presetClass="entr" presetSubtype="0">
+                            <p:stCondLst>
+                              <p:cond delay="390"/>
+                            </p:stCondLst>
+                            <p:childTnLst>
+                              <p:set>
+                                <p:cBhvr>
+                                  <p:cTn id="12" dur="1" fill="hold">
+                                    <p:stCondLst>
+                                      <p:cond delay="0"/>
+                                    </p:stCondLst>
+                                  </p:cTn>
+                                  <p:tgtEl>
+                                    <p:spTgt spid="6"/>
+                                  </p:tgtEl>
+                                  <p:attrNameLst>
+                                    <p:attrName>style.visibility</p:attrName>
+                                  </p:attrNameLst>
+                                </p:cBhvr>
+                                <p:to>
+                                  <p:strVal val="visible"/>
+                                </p:to>
+                              </p:set>
+                              <p:animEffect transition="in" filter="randombar(horizontal)">
+                                <p:cBhvr>
+                                  <p:cTn id="111" dur="810"/>
+                                  <p:tgtEl>
+                                    <p:spTgt spid="6"/>
+                                  </p:tgtEl>
+                                </p:cBhvr>
+                              </p:animEffect>
+                            </p:childTnLst>
+                          </p:cTn>
+                        </p:par>
+                        <p:par>
+                          <p:cTn id="13" dur="450" fill="hold" nodeType="afterEffect" grpId="0" presetID="21" presetClass="entr" presetSubtype="1">
+                            <p:stCondLst>
+                              <p:cond delay="520"/>
+                            </p:stCondLst>
+                            <p:childTnLst>
+                              <p:set>
+                                <p:cBhvr>
+                                  <p:cTn id="14" dur="1" fill="hold">
+                                    <p:stCondLst>
+                                      <p:cond delay="0"/>
+                                    </p:stCondLst>
+                                  </p:cTn>
+                                  <p:tgtEl>
+                                    <p:spTgt spid="11"/>
+                                  </p:tgtEl>
+                                  <p:attrNameLst>
+                                    <p:attrName>style.visibility</p:attrName>
+                                  </p:attrNameLst>
+                                </p:cBhvr>
+                                <p:to>
+                                  <p:strVal val="visible"/>
+                                </p:to>
+                              </p:set>
+                              <p:animEffect transition="in" filter="wheel(1)">
+                                <p:cBhvr>
+                                  <p:cTn id="131" dur="450"/>
+                                  <p:tgtEl>
+                                    <p:spTgt spid="11"/>
+                                  </p:tgtEl>
+                                </p:cBhvr>
+                              </p:animEffect>
+                            </p:childTnLst>
+                          </p:cTn>
+                        </p:par>
+                        <p:par>
+                          <p:cTn id="15" dur="570" fill="hold" nodeType="afterEffect" grpId="0" presetID="22" presetClass="entr" presetSubtype="4">
+                            <p:stCondLst>
+                              <p:cond delay="650"/>
+                            </p:stCondLst>
+                            <p:childTnLst>
+                              <p:set>
+                                <p:cBhvr>
+                                  <p:cTn id="16" dur="1" fill="hold">
+                                    <p:stCondLst>
+                                      <p:cond delay="0"/>
+                                    </p:stCondLst>
+                                  </p:cTn>
+                                  <p:tgtEl>
+                                    <p:spTgt spid="16"/>
+                                  </p:tgtEl>
+                                  <p:attrNameLst>
+                                    <p:attrName>style.visibility</p:attrName>
+                                  </p:attrNameLst>
+                                </p:cBhvr>
+                                <p:to>
+                                  <p:strVal val="visible"/>
+                                </p:to>
+                              </p:set>
+                              <p:animEffect transition="in" filter="wipe(down)">
+                                <p:cBhvr>
+                                  <p:cTn id="151" dur="570"/>
+                                  <p:tgtEl>
+                                    <p:spTgt spid="16"/>
+                                  </p:tgtEl>
+                                </p:cBhvr>
+                              </p:animEffect>
+                            </p:childTnLst>
+                          </p:cTn>
+                        </p:par>
+                        <p:par>
+                          <p:cTn id="17" dur="690" fill="hold" nodeType="afterEffect" grpId="0" presetID="9" presetClass="entr" presetSubtype="0">
+                            <p:stCondLst>
+                              <p:cond delay="780"/>
+                            </p:stCondLst>
+                            <p:childTnLst>
+                              <p:set>
+                                <p:cBhvr>
+                                  <p:cTn id="18" dur="1" fill="hold">
+                                    <p:stCondLst>
+                                      <p:cond delay="0"/>
+                                    </p:stCondLst>
+                                  </p:cTn>
+                                  <p:tgtEl>
+                                    <p:spTgt spid="7"/>
+                                  </p:tgtEl>
+                                  <p:attrNameLst>
+                                    <p:attrName>style.visibility</p:attrName>
+                                  </p:attrNameLst>
+                                </p:cBhvr>
+                                <p:to>
+                                  <p:strVal val="visible"/>
+                                </p:to>
+                              </p:set>
+                              <p:animEffect transition="in" filter="fade">
+                                <p:cBhvr>
+                                  <p:cTn id="171" dur="690"/>
+                                  <p:tgtEl>
+                                    <p:spTgt spid="7"/>
+                                  </p:tgtEl>
+                                </p:cBhvr>
+                              </p:animEffect>
+                            </p:childTnLst>
+                          </p:cTn>
+                        </p:par>
+                        <p:par>
+                          <p:cTn id="19" dur="810" fill="hold" nodeType="afterEffect" grpId="0" presetID="22" presetClass="entr" presetSubtype="2">
+                            <p:stCondLst>
+                              <p:cond delay="910"/>
+                            </p:stCondLst>
+                            <p:childTnLst>
+                              <p:set>
+                                <p:cBhvr>
+                                  <p:cTn id="20" dur="1" fill="hold">
+                                    <p:stCondLst>
+                                      <p:cond delay="0"/>
+                                    </p:stCondLst>
+                                  </p:cTn>
+                                  <p:tgtEl>
+                                    <p:spTgt spid="8"/>
+                                  </p:tgtEl>
+                                  <p:attrNameLst>
+                                    <p:attrName>style.visibility</p:attrName>
+                                  </p:attrNameLst>
+                                </p:cBhvr>
+                                <p:to>
+                                  <p:strVal val="visible"/>
+                                </p:to>
+                              </p:set>
+                              <p:animEffect transition="in" filter="wipe(right)">
+                                <p:cBhvr>
+                                  <p:cTn id="191" dur="810"/>
+                                  <p:tgtEl>
+                                    <p:spTgt spid="8"/>
+                                  </p:tgtEl>
+                                </p:cBhvr>
+                              </p:animEffect>
+                            </p:childTnLst>
+                          </p:cTn>
+                        </p:par>
+                        <p:par>
+                          <p:cTn id="21" dur="450" fill="hold" nodeType="afterEffect" grpId="0" presetID="18" presetClass="entr" presetSubtype="12">
+                            <p:stCondLst>
+                              <p:cond delay="1040"/>
+                            </p:stCondLst>
+                            <p:childTnLst>
+                              <p:set>
+                                <p:cBhvr>
+                                  <p:cTn id="22" dur="1" fill="hold">
+                                    <p:stCondLst>
+                                      <p:cond delay="0"/>
+                                    </p:stCondLst>
+                                  </p:cTn>
+                                  <p:tgtEl>
+                                    <p:spTgt spid="12"/>
+                                  </p:tgtEl>
+                                  <p:attrNameLst>
+                                    <p:attrName>style.visibility</p:attrName>
+                                  </p:attrNameLst>
+                                </p:cBhvr>
+                                <p:to>
+                                  <p:strVal val="visible"/>
+                                </p:to>
+                              </p:set>
+                              <p:animEffect transition="in" filter="circle(in)">
+                                <p:cBhvr>
+                                  <p:cTn id="211" dur="450"/>
+                                  <p:tgtEl>
+                                    <p:spTgt spid="12"/>
+                                  </p:tgtEl>
+                                </p:cBhvr>
+                              </p:animEffect>
+                            </p:childTnLst>
+                          </p:cTn>
+                        </p:par>
+                        <p:par>
+                          <p:cTn id="23" dur="570" fill="hold" nodeType="afterEffect" grpId="0" presetID="22" presetClass="entr" presetSubtype="1">
+                            <p:stCondLst>
+                              <p:cond delay="1170"/>
+                            </p:stCondLst>
+                            <p:childTnLst>
+                              <p:set>
+                                <p:cBhvr>
+                                  <p:cTn id="24" dur="1" fill="hold">
+                                    <p:stCondLst>
+                                      <p:cond delay="0"/>
+                                    </p:stCondLst>
+                                  </p:cTn>
+                                  <p:tgtEl>
+                                    <p:spTgt spid="13"/>
+                                  </p:tgtEl>
+                                  <p:attrNameLst>
+                                    <p:attrName>style.visibility</p:attrName>
+                                  </p:attrNameLst>
+                                </p:cBhvr>
+                                <p:to>
+                                  <p:strVal val="visible"/>
+                                </p:to>
+                              </p:set>
+                              <p:animEffect transition="in" filter="wipe(up)">
+                                <p:cBhvr>
+                                  <p:cTn id="231" dur="570"/>
+                                  <p:tgtEl>
+                                    <p:spTgt spid="13"/>
+                                  </p:tgtEl>
+                                </p:cBhvr>
+                              </p:animEffect>
+                            </p:childTnLst>
+                          </p:cTn>
+                        </p:par>
+                        <p:par>
+                          <p:cTn id="25" dur="690" fill="hold" nodeType="afterEffect" grpId="0" presetID="42" presetClass="entr" presetSubtype="10">
+                            <p:stCondLst>
+                              <p:cond delay="1300"/>
+                            </p:stCondLst>
+                            <p:childTnLst>
+                              <p:set>
+                                <p:cBhvr>
+                                  <p:cTn id="26" dur="1" fill="hold">
+                                    <p:stCondLst>
+                                      <p:cond delay="0"/>
+                                    </p:stCondLst>
+                                  </p:cTn>
+                                  <p:tgtEl>
+                                    <p:spTgt spid="17"/>
+                                  </p:tgtEl>
+                                  <p:attrNameLst>
+                                    <p:attrName>style.visibility</p:attrName>
+                                  </p:attrNameLst>
+                                </p:cBhvr>
+                                <p:to>
+                                  <p:strVal val="visible"/>
+                                </p:to>
+                              </p:set>
+                              <p:animEffect transition="in" filter="blinds(horizontal)">
+                                <p:cBhvr>
+                                  <p:cTn id="251" dur="690"/>
+                                  <p:tgtEl>
+                                    <p:spTgt spid="17"/>
+                                  </p:tgtEl>
+                                </p:cBhvr>
+                              </p:animEffect>
+                            </p:childTnLst>
+                          </p:cTn>
+                        </p:par>
+                        <p:par>
+                          <p:cTn id="27" dur="810" fill="hold" nodeType="afterEffect" grpId="0" presetID="43" presetClass="entr" presetSubtype="0">
+                            <p:stCondLst>
+                              <p:cond delay="1430"/>
+                            </p:stCondLst>
+                            <p:childTnLst>
+                              <p:set>
+                                <p:cBhvr>
+                                  <p:cTn id="28" dur="1" fill="hold">
+                                    <p:stCondLst>
+                                      <p:cond delay="0"/>
+                                    </p:stCondLst>
+                                  </p:cTn>
+                                  <p:tgtEl>
+                                    <p:spTgt spid="18"/>
+                                  </p:tgtEl>
+                                  <p:attrNameLst>
+                                    <p:attrName>style.visibility</p:attrName>
+                                  </p:attrNameLst>
+                                </p:cBhvr>
+                                <p:to>
+                                  <p:strVal val="visible"/>
+                                </p:to>
+                              </p:set>
+                              <p:animEffect transition="in" filter="checkerboard(across)">
+                                <p:cBhvr>
+                                  <p:cTn id="271" dur="810"/>
+                                  <p:tgtEl>
+                                    <p:spTgt spid="18"/>
+                                  </p:tgtEl>
+                                </p:cBhvr>
+                              </p:animEffect>
+                            </p:childTnLst>
+                          </p:cTn>
+                        </p:par>
+                        <p:par>
+                          <p:cTn id="29" dur="450" fill="hold" nodeType="afterEffect" grpId="0" presetID="21" presetClass="entr" presetSubtype="2">
+                            <p:stCondLst>
+                              <p:cond delay="1560"/>
+                            </p:stCondLst>
+                            <p:childTnLst>
+                              <p:set>
+                                <p:cBhvr>
+                                  <p:cTn id="30" dur="1" fill="hold">
+                                    <p:stCondLst>
+                                      <p:cond delay="0"/>
+                                    </p:stCondLst>
+                                  </p:cTn>
+                                  <p:tgtEl>
+                                    <p:spTgt spid="9"/>
+                                  </p:tgtEl>
+                                  <p:attrNameLst>
+                                    <p:attrName>style.visibility</p:attrName>
+                                  </p:attrNameLst>
+                                </p:cBhvr>
+                                <p:to>
+                                  <p:strVal val="visible"/>
+                                </p:to>
+                              </p:set>
+                              <p:animEffect transition="in" filter="wheel(2)">
+                                <p:cBhvr>
+                                  <p:cTn id="291" dur="450"/>
+                                  <p:tgtEl>
+                                    <p:spTgt spid="9"/>
+                                  </p:tgtEl>
+                                </p:cBhvr>
+                              </p:animEffect>
+                            </p:childTnLst>
+                          </p:cTn>
+                        </p:par>
+                        <p:par>
+                          <p:cTn id="31" dur="570" fill="hold" nodeType="afterEffect" grpId="0" presetID="10" presetClass="entr" presetSubtype="0">
+                            <p:stCondLst>
+                              <p:cond delay="1690"/>
+                            </p:stCondLst>
+                            <p:childTnLst>
+                              <p:set>
+                                <p:cBhvr>
+                                  <p:cTn id="32" dur="1" fill="hold">
+                                    <p:stCondLst>
+                                      <p:cond delay="0"/>
+                                    </p:stCondLst>
+                                  </p:cTn>
+                                  <p:tgtEl>
+                                    <p:spTgt spid="14"/>
+                                  </p:tgtEl>
+                                  <p:attrNameLst>
+                                    <p:attrName>style.visibility</p:attrName>
+                                  </p:attrNameLst>
+                                </p:cBhvr>
+                                <p:to>
+                                  <p:strVal val="visible"/>
+                                </p:to>
+                              </p:set>
+                              <p:animEffect transition="in" filter="dissolve">
+                                <p:cBhvr>
+                                  <p:cTn id="311" dur="570"/>
+                                  <p:tgtEl>
+                                    <p:spTgt spid="14"/>
+                                  </p:tgtEl>
+                                </p:cBhvr>
+                              </p:animEffect>
+                            </p:childTnLst>
+                          </p:cTn>
+                        </p:par>
+                      </p:childTnLst>
+                    </p:cTn>
+                  </p:par>
+                </p:childTnLst>
+              </p:cTn>
+              <p:prevCondLst>
+                <p:cond evt="onPrev" delay="0">
+                  <p:tgtEl>
+                    <p:sldTgt/>
+                  </p:tgtEl>
+                </p:cond>
+              </p:prevCondLst>
+              <p:nextCondLst>
+                <p:cond evt="onNext" delay="0">
+                  <p:tgtEl>
+                    <p:sldTgt/>
+                  </p:tgtEl>
+                </p:cond>
+              </p:nextCondLst>
+            </p:seq>
+          </p:childTnLst>
+        </p:cTn>
+      </p:par>
+    </p:tnLst>
+  </p:timing>
 </p:sld>
 </file>
 
@@ -8086,8 +10560,537 @@
     <a:masterClrMapping/>
   </p:clrMapOvr>
   <p:transition spd="med">
-    <p:fade/>
+    <p:newsflash/>
   </p:transition>
+  <p:timing>
+    <p:tnLst>
+      <p:par>
+        <p:cTn id="1" dur="indefinite" restart="never" nodeType="tmRoot">
+          <p:childTnLst>
+            <p:seq concurrent="1" nextAc="seek">
+              <p:cTn id="2" dur="indefinite" nodeType="mainSeq">
+                <p:childTnLst>
+                  <p:par>
+                    <p:cTn id="3" fill="hold">
+                      <p:stCondLst>
+                        <p:cond delay="indefinite"/>
+                      </p:stCondLst>
+                      <p:childTnLst>
+                        <p:par>
+                          <p:cTn id="5" dur="570" fill="hold" nodeType="clickEffect" grpId="0" presetID="22" presetClass="entr" presetSubtype="8">
+                            <p:stCondLst>
+                              <p:cond delay="0"/>
+                            </p:stCondLst>
+                            <p:childTnLst>
+                              <p:set>
+                                <p:cBhvr>
+                                  <p:cTn id="6" dur="1" fill="hold">
+                                    <p:stCondLst>
+                                      <p:cond delay="0"/>
+                                    </p:stCondLst>
+                                  </p:cTn>
+                                  <p:tgtEl>
+                                    <p:spTgt spid="3"/>
+                                  </p:tgtEl>
+                                  <p:attrNameLst>
+                                    <p:attrName>style.visibility</p:attrName>
+                                  </p:attrNameLst>
+                                </p:cBhvr>
+                                <p:to>
+                                  <p:strVal val="visible"/>
+                                </p:to>
+                              </p:set>
+                              <p:animEffect transition="in" filter="wipe(left)">
+                                <p:cBhvr>
+                                  <p:cTn id="51" dur="570"/>
+                                  <p:tgtEl>
+                                    <p:spTgt spid="3"/>
+                                  </p:tgtEl>
+                                </p:cBhvr>
+                              </p:animEffect>
+                            </p:childTnLst>
+                          </p:cTn>
+                        </p:par>
+                        <p:par>
+                          <p:cTn id="7" dur="690" fill="hold" nodeType="afterEffect" grpId="0" presetID="37" presetClass="entr" presetSubtype="0">
+                            <p:stCondLst>
+                              <p:cond delay="130"/>
+                            </p:stCondLst>
+                            <p:childTnLst>
+                              <p:set>
+                                <p:cBhvr>
+                                  <p:cTn id="8" dur="1" fill="hold">
+                                    <p:stCondLst>
+                                      <p:cond delay="0"/>
+                                    </p:stCondLst>
+                                  </p:cTn>
+                                  <p:tgtEl>
+                                    <p:spTgt spid="4"/>
+                                  </p:tgtEl>
+                                  <p:attrNameLst>
+                                    <p:attrName>style.visibility</p:attrName>
+                                  </p:attrNameLst>
+                                </p:cBhvr>
+                                <p:to>
+                                  <p:strVal val="visible"/>
+                                </p:to>
+                              </p:set>
+                              <p:animEffect transition="in" filter="wedge">
+                                <p:cBhvr>
+                                  <p:cTn id="71" dur="690"/>
+                                  <p:tgtEl>
+                                    <p:spTgt spid="4"/>
+                                  </p:tgtEl>
+                                </p:cBhvr>
+                              </p:animEffect>
+                            </p:childTnLst>
+                          </p:cTn>
+                        </p:par>
+                        <p:par>
+                          <p:cTn id="9" dur="810" fill="hold" nodeType="afterEffect" grpId="0" presetID="52" presetClass="entr" presetSubtype="0">
+                            <p:stCondLst>
+                              <p:cond delay="260"/>
+                            </p:stCondLst>
+                            <p:childTnLst>
+                              <p:set>
+                                <p:cBhvr>
+                                  <p:cTn id="10" dur="1" fill="hold">
+                                    <p:stCondLst>
+                                      <p:cond delay="0"/>
+                                    </p:stCondLst>
+                                  </p:cTn>
+                                  <p:tgtEl>
+                                    <p:spTgt spid="5"/>
+                                  </p:tgtEl>
+                                  <p:attrNameLst>
+                                    <p:attrName>style.visibility</p:attrName>
+                                  </p:attrNameLst>
+                                </p:cBhvr>
+                                <p:to>
+                                  <p:strVal val="visible"/>
+                                </p:to>
+                              </p:set>
+                              <p:animEffect transition="in" filter="randombar(horizontal)">
+                                <p:cBhvr>
+                                  <p:cTn id="91" dur="810"/>
+                                  <p:tgtEl>
+                                    <p:spTgt spid="5"/>
+                                  </p:tgtEl>
+                                </p:cBhvr>
+                              </p:animEffect>
+                            </p:childTnLst>
+                          </p:cTn>
+                        </p:par>
+                        <p:par>
+                          <p:cTn id="11" dur="450" fill="hold" nodeType="afterEffect" grpId="0" presetID="21" presetClass="entr" presetSubtype="1">
+                            <p:stCondLst>
+                              <p:cond delay="390"/>
+                            </p:stCondLst>
+                            <p:childTnLst>
+                              <p:set>
+                                <p:cBhvr>
+                                  <p:cTn id="12" dur="1" fill="hold">
+                                    <p:stCondLst>
+                                      <p:cond delay="0"/>
+                                    </p:stCondLst>
+                                  </p:cTn>
+                                  <p:tgtEl>
+                                    <p:spTgt spid="6"/>
+                                  </p:tgtEl>
+                                  <p:attrNameLst>
+                                    <p:attrName>style.visibility</p:attrName>
+                                  </p:attrNameLst>
+                                </p:cBhvr>
+                                <p:to>
+                                  <p:strVal val="visible"/>
+                                </p:to>
+                              </p:set>
+                              <p:animEffect transition="in" filter="wheel(1)">
+                                <p:cBhvr>
+                                  <p:cTn id="111" dur="450"/>
+                                  <p:tgtEl>
+                                    <p:spTgt spid="6"/>
+                                  </p:tgtEl>
+                                </p:cBhvr>
+                              </p:animEffect>
+                            </p:childTnLst>
+                          </p:cTn>
+                        </p:par>
+                        <p:par>
+                          <p:cTn id="13" dur="570" fill="hold" nodeType="afterEffect" grpId="0" presetID="22" presetClass="entr" presetSubtype="4">
+                            <p:stCondLst>
+                              <p:cond delay="520"/>
+                            </p:stCondLst>
+                            <p:childTnLst>
+                              <p:set>
+                                <p:cBhvr>
+                                  <p:cTn id="14" dur="1" fill="hold">
+                                    <p:stCondLst>
+                                      <p:cond delay="0"/>
+                                    </p:stCondLst>
+                                  </p:cTn>
+                                  <p:tgtEl>
+                                    <p:spTgt spid="9"/>
+                                  </p:tgtEl>
+                                  <p:attrNameLst>
+                                    <p:attrName>style.visibility</p:attrName>
+                                  </p:attrNameLst>
+                                </p:cBhvr>
+                                <p:to>
+                                  <p:strVal val="visible"/>
+                                </p:to>
+                              </p:set>
+                              <p:animEffect transition="in" filter="wipe(down)">
+                                <p:cBhvr>
+                                  <p:cTn id="131" dur="570"/>
+                                  <p:tgtEl>
+                                    <p:spTgt spid="9"/>
+                                  </p:tgtEl>
+                                </p:cBhvr>
+                              </p:animEffect>
+                            </p:childTnLst>
+                          </p:cTn>
+                        </p:par>
+                        <p:par>
+                          <p:cTn id="15" dur="690" fill="hold" nodeType="afterEffect" grpId="0" presetID="9" presetClass="entr" presetSubtype="0">
+                            <p:stCondLst>
+                              <p:cond delay="650"/>
+                            </p:stCondLst>
+                            <p:childTnLst>
+                              <p:set>
+                                <p:cBhvr>
+                                  <p:cTn id="16" dur="1" fill="hold">
+                                    <p:stCondLst>
+                                      <p:cond delay="0"/>
+                                    </p:stCondLst>
+                                  </p:cTn>
+                                  <p:tgtEl>
+                                    <p:spTgt spid="7"/>
+                                  </p:tgtEl>
+                                  <p:attrNameLst>
+                                    <p:attrName>style.visibility</p:attrName>
+                                  </p:attrNameLst>
+                                </p:cBhvr>
+                                <p:to>
+                                  <p:strVal val="visible"/>
+                                </p:to>
+                              </p:set>
+                              <p:animEffect transition="in" filter="fade">
+                                <p:cBhvr>
+                                  <p:cTn id="151" dur="690"/>
+                                  <p:tgtEl>
+                                    <p:spTgt spid="7"/>
+                                  </p:tgtEl>
+                                </p:cBhvr>
+                              </p:animEffect>
+                            </p:childTnLst>
+                          </p:cTn>
+                        </p:par>
+                        <p:par>
+                          <p:cTn id="17" dur="810" fill="hold" nodeType="afterEffect" grpId="0" presetID="22" presetClass="entr" presetSubtype="2">
+                            <p:stCondLst>
+                              <p:cond delay="780"/>
+                            </p:stCondLst>
+                            <p:childTnLst>
+                              <p:set>
+                                <p:cBhvr>
+                                  <p:cTn id="18" dur="1" fill="hold">
+                                    <p:stCondLst>
+                                      <p:cond delay="0"/>
+                                    </p:stCondLst>
+                                  </p:cTn>
+                                  <p:tgtEl>
+                                    <p:spTgt spid="8"/>
+                                  </p:tgtEl>
+                                  <p:attrNameLst>
+                                    <p:attrName>style.visibility</p:attrName>
+                                  </p:attrNameLst>
+                                </p:cBhvr>
+                                <p:to>
+                                  <p:strVal val="visible"/>
+                                </p:to>
+                              </p:set>
+                              <p:animEffect transition="in" filter="wipe(right)">
+                                <p:cBhvr>
+                                  <p:cTn id="171" dur="810"/>
+                                  <p:tgtEl>
+                                    <p:spTgt spid="8"/>
+                                  </p:tgtEl>
+                                </p:cBhvr>
+                              </p:animEffect>
+                            </p:childTnLst>
+                          </p:cTn>
+                        </p:par>
+                        <p:par>
+                          <p:cTn id="19" dur="450" fill="hold" nodeType="afterEffect" grpId="0" presetID="18" presetClass="entr" presetSubtype="12">
+                            <p:stCondLst>
+                              <p:cond delay="910"/>
+                            </p:stCondLst>
+                            <p:childTnLst>
+                              <p:set>
+                                <p:cBhvr>
+                                  <p:cTn id="20" dur="1" fill="hold">
+                                    <p:stCondLst>
+                                      <p:cond delay="0"/>
+                                    </p:stCondLst>
+                                  </p:cTn>
+                                  <p:tgtEl>
+                                    <p:spTgt spid="10"/>
+                                  </p:tgtEl>
+                                  <p:attrNameLst>
+                                    <p:attrName>style.visibility</p:attrName>
+                                  </p:attrNameLst>
+                                </p:cBhvr>
+                                <p:to>
+                                  <p:strVal val="visible"/>
+                                </p:to>
+                              </p:set>
+                              <p:animEffect transition="in" filter="circle(in)">
+                                <p:cBhvr>
+                                  <p:cTn id="191" dur="450"/>
+                                  <p:tgtEl>
+                                    <p:spTgt spid="10"/>
+                                  </p:tgtEl>
+                                </p:cBhvr>
+                              </p:animEffect>
+                            </p:childTnLst>
+                          </p:cTn>
+                        </p:par>
+                        <p:par>
+                          <p:cTn id="21" dur="570" fill="hold" nodeType="afterEffect" grpId="0" presetID="22" presetClass="entr" presetSubtype="1">
+                            <p:stCondLst>
+                              <p:cond delay="1040"/>
+                            </p:stCondLst>
+                            <p:childTnLst>
+                              <p:set>
+                                <p:cBhvr>
+                                  <p:cTn id="22" dur="1" fill="hold">
+                                    <p:stCondLst>
+                                      <p:cond delay="0"/>
+                                    </p:stCondLst>
+                                  </p:cTn>
+                                  <p:tgtEl>
+                                    <p:spTgt spid="11"/>
+                                  </p:tgtEl>
+                                  <p:attrNameLst>
+                                    <p:attrName>style.visibility</p:attrName>
+                                  </p:attrNameLst>
+                                </p:cBhvr>
+                                <p:to>
+                                  <p:strVal val="visible"/>
+                                </p:to>
+                              </p:set>
+                              <p:animEffect transition="in" filter="wipe(up)">
+                                <p:cBhvr>
+                                  <p:cTn id="211" dur="570"/>
+                                  <p:tgtEl>
+                                    <p:spTgt spid="11"/>
+                                  </p:tgtEl>
+                                </p:cBhvr>
+                              </p:animEffect>
+                            </p:childTnLst>
+                          </p:cTn>
+                        </p:par>
+                        <p:par>
+                          <p:cTn id="23" dur="690" fill="hold" nodeType="afterEffect" grpId="0" presetID="42" presetClass="entr" presetSubtype="10">
+                            <p:stCondLst>
+                              <p:cond delay="1170"/>
+                            </p:stCondLst>
+                            <p:childTnLst>
+                              <p:set>
+                                <p:cBhvr>
+                                  <p:cTn id="24" dur="1" fill="hold">
+                                    <p:stCondLst>
+                                      <p:cond delay="0"/>
+                                    </p:stCondLst>
+                                  </p:cTn>
+                                  <p:tgtEl>
+                                    <p:spTgt spid="14"/>
+                                  </p:tgtEl>
+                                  <p:attrNameLst>
+                                    <p:attrName>style.visibility</p:attrName>
+                                  </p:attrNameLst>
+                                </p:cBhvr>
+                                <p:to>
+                                  <p:strVal val="visible"/>
+                                </p:to>
+                              </p:set>
+                              <p:animEffect transition="in" filter="blinds(horizontal)">
+                                <p:cBhvr>
+                                  <p:cTn id="231" dur="690"/>
+                                  <p:tgtEl>
+                                    <p:spTgt spid="14"/>
+                                  </p:tgtEl>
+                                </p:cBhvr>
+                              </p:animEffect>
+                            </p:childTnLst>
+                          </p:cTn>
+                        </p:par>
+                        <p:par>
+                          <p:cTn id="25" dur="810" fill="hold" nodeType="afterEffect" grpId="0" presetID="43" presetClass="entr" presetSubtype="0">
+                            <p:stCondLst>
+                              <p:cond delay="1300"/>
+                            </p:stCondLst>
+                            <p:childTnLst>
+                              <p:set>
+                                <p:cBhvr>
+                                  <p:cTn id="26" dur="1" fill="hold">
+                                    <p:stCondLst>
+                                      <p:cond delay="0"/>
+                                    </p:stCondLst>
+                                  </p:cTn>
+                                  <p:tgtEl>
+                                    <p:spTgt spid="12"/>
+                                  </p:tgtEl>
+                                  <p:attrNameLst>
+                                    <p:attrName>style.visibility</p:attrName>
+                                  </p:attrNameLst>
+                                </p:cBhvr>
+                                <p:to>
+                                  <p:strVal val="visible"/>
+                                </p:to>
+                              </p:set>
+                              <p:animEffect transition="in" filter="checkerboard(across)">
+                                <p:cBhvr>
+                                  <p:cTn id="251" dur="810"/>
+                                  <p:tgtEl>
+                                    <p:spTgt spid="12"/>
+                                  </p:tgtEl>
+                                </p:cBhvr>
+                              </p:animEffect>
+                            </p:childTnLst>
+                          </p:cTn>
+                        </p:par>
+                        <p:par>
+                          <p:cTn id="27" dur="450" fill="hold" nodeType="afterEffect" grpId="0" presetID="21" presetClass="entr" presetSubtype="2">
+                            <p:stCondLst>
+                              <p:cond delay="1430"/>
+                            </p:stCondLst>
+                            <p:childTnLst>
+                              <p:set>
+                                <p:cBhvr>
+                                  <p:cTn id="28" dur="1" fill="hold">
+                                    <p:stCondLst>
+                                      <p:cond delay="0"/>
+                                    </p:stCondLst>
+                                  </p:cTn>
+                                  <p:tgtEl>
+                                    <p:spTgt spid="13"/>
+                                  </p:tgtEl>
+                                  <p:attrNameLst>
+                                    <p:attrName>style.visibility</p:attrName>
+                                  </p:attrNameLst>
+                                </p:cBhvr>
+                                <p:to>
+                                  <p:strVal val="visible"/>
+                                </p:to>
+                              </p:set>
+                              <p:animEffect transition="in" filter="wheel(2)">
+                                <p:cBhvr>
+                                  <p:cTn id="271" dur="450"/>
+                                  <p:tgtEl>
+                                    <p:spTgt spid="13"/>
+                                  </p:tgtEl>
+                                </p:cBhvr>
+                              </p:animEffect>
+                            </p:childTnLst>
+                          </p:cTn>
+                        </p:par>
+                        <p:par>
+                          <p:cTn id="29" dur="570" fill="hold" nodeType="afterEffect" grpId="0" presetID="10" presetClass="entr" presetSubtype="0">
+                            <p:stCondLst>
+                              <p:cond delay="1560"/>
+                            </p:stCondLst>
+                            <p:childTnLst>
+                              <p:set>
+                                <p:cBhvr>
+                                  <p:cTn id="30" dur="1" fill="hold">
+                                    <p:stCondLst>
+                                      <p:cond delay="0"/>
+                                    </p:stCondLst>
+                                  </p:cTn>
+                                  <p:tgtEl>
+                                    <p:spTgt spid="15"/>
+                                  </p:tgtEl>
+                                  <p:attrNameLst>
+                                    <p:attrName>style.visibility</p:attrName>
+                                  </p:attrNameLst>
+                                </p:cBhvr>
+                                <p:to>
+                                  <p:strVal val="visible"/>
+                                </p:to>
+                              </p:set>
+                              <p:animEffect transition="in" filter="dissolve">
+                                <p:cBhvr>
+                                  <p:cTn id="291" dur="570"/>
+                                  <p:tgtEl>
+                                    <p:spTgt spid="15"/>
+                                  </p:tgtEl>
+                                </p:cBhvr>
+                              </p:animEffect>
+                            </p:childTnLst>
+                          </p:cTn>
+                        </p:par>
+                        <p:par>
+                          <p:cTn id="31" dur="690" fill="hold" nodeType="afterEffect" grpId="0" presetID="25" presetClass="entr" presetSubtype="1">
+                            <p:stCondLst>
+                              <p:cond delay="1690"/>
+                            </p:stCondLst>
+                            <p:childTnLst>
+                              <p:set>
+                                <p:cBhvr>
+                                  <p:cTn id="32" dur="1" fill="hold">
+                                    <p:stCondLst>
+                                      <p:cond delay="0"/>
+                                    </p:stCondLst>
+                                  </p:cTn>
+                                  <p:tgtEl>
+                                    <p:spTgt spid="16"/>
+                                  </p:tgtEl>
+                                  <p:attrNameLst>
+                                    <p:attrName>style.visibility</p:attrName>
+                                  </p:attrNameLst>
+                                </p:cBhvr>
+                                <p:to>
+                                  <p:strVal val="visible"/>
+                                </p:to>
+                              </p:set>
+                              <p:animEffect transition="in" filter="strips(downRight)">
+                                <p:cBhvr>
+                                  <p:cTn id="311" dur="690"/>
+                                  <p:tgtEl>
+                                    <p:spTgt spid="16"/>
+                                  </p:tgtEl>
+                                </p:cBhvr>
+                              </p:animEffect>
+                            </p:childTnLst>
+                          </p:cTn>
+                        </p:par>
+                      </p:childTnLst>
+                    </p:cTn>
+                  </p:par>
+                </p:childTnLst>
+              </p:cTn>
+              <p:prevCondLst>
+                <p:cond evt="onPrev" delay="0">
+                  <p:tgtEl>
+                    <p:sldTgt/>
+                  </p:tgtEl>
+                </p:cond>
+              </p:prevCondLst>
+              <p:nextCondLst>
+                <p:cond evt="onNext" delay="0">
+                  <p:tgtEl>
+                    <p:sldTgt/>
+                  </p:tgtEl>
+                </p:cond>
+              </p:nextCondLst>
+            </p:seq>
+          </p:childTnLst>
+        </p:cTn>
+      </p:par>
+    </p:tnLst>
+  </p:timing>
 </p:sld>
 </file>
 
@@ -8991,8 +11994,537 @@
     <a:masterClrMapping/>
   </p:clrMapOvr>
   <p:transition spd="med">
-    <p:fade/>
+    <p:push dir="u"/>
   </p:transition>
+  <p:timing>
+    <p:tnLst>
+      <p:par>
+        <p:cTn id="1" dur="indefinite" restart="never" nodeType="tmRoot">
+          <p:childTnLst>
+            <p:seq concurrent="1" nextAc="seek">
+              <p:cTn id="2" dur="indefinite" nodeType="mainSeq">
+                <p:childTnLst>
+                  <p:par>
+                    <p:cTn id="3" fill="hold">
+                      <p:stCondLst>
+                        <p:cond delay="indefinite"/>
+                      </p:stCondLst>
+                      <p:childTnLst>
+                        <p:par>
+                          <p:cTn id="5" dur="690" fill="hold" nodeType="clickEffect" grpId="0" presetID="37" presetClass="entr" presetSubtype="0">
+                            <p:stCondLst>
+                              <p:cond delay="0"/>
+                            </p:stCondLst>
+                            <p:childTnLst>
+                              <p:set>
+                                <p:cBhvr>
+                                  <p:cTn id="6" dur="1" fill="hold">
+                                    <p:stCondLst>
+                                      <p:cond delay="0"/>
+                                    </p:stCondLst>
+                                  </p:cTn>
+                                  <p:tgtEl>
+                                    <p:spTgt spid="3"/>
+                                  </p:tgtEl>
+                                  <p:attrNameLst>
+                                    <p:attrName>style.visibility</p:attrName>
+                                  </p:attrNameLst>
+                                </p:cBhvr>
+                                <p:to>
+                                  <p:strVal val="visible"/>
+                                </p:to>
+                              </p:set>
+                              <p:animEffect transition="in" filter="wedge">
+                                <p:cBhvr>
+                                  <p:cTn id="51" dur="690"/>
+                                  <p:tgtEl>
+                                    <p:spTgt spid="3"/>
+                                  </p:tgtEl>
+                                </p:cBhvr>
+                              </p:animEffect>
+                            </p:childTnLst>
+                          </p:cTn>
+                        </p:par>
+                        <p:par>
+                          <p:cTn id="7" dur="810" fill="hold" nodeType="afterEffect" grpId="0" presetID="52" presetClass="entr" presetSubtype="0">
+                            <p:stCondLst>
+                              <p:cond delay="130"/>
+                            </p:stCondLst>
+                            <p:childTnLst>
+                              <p:set>
+                                <p:cBhvr>
+                                  <p:cTn id="8" dur="1" fill="hold">
+                                    <p:stCondLst>
+                                      <p:cond delay="0"/>
+                                    </p:stCondLst>
+                                  </p:cTn>
+                                  <p:tgtEl>
+                                    <p:spTgt spid="4"/>
+                                  </p:tgtEl>
+                                  <p:attrNameLst>
+                                    <p:attrName>style.visibility</p:attrName>
+                                  </p:attrNameLst>
+                                </p:cBhvr>
+                                <p:to>
+                                  <p:strVal val="visible"/>
+                                </p:to>
+                              </p:set>
+                              <p:animEffect transition="in" filter="randombar(horizontal)">
+                                <p:cBhvr>
+                                  <p:cTn id="71" dur="810"/>
+                                  <p:tgtEl>
+                                    <p:spTgt spid="4"/>
+                                  </p:tgtEl>
+                                </p:cBhvr>
+                              </p:animEffect>
+                            </p:childTnLst>
+                          </p:cTn>
+                        </p:par>
+                        <p:par>
+                          <p:cTn id="9" dur="450" fill="hold" nodeType="afterEffect" grpId="0" presetID="21" presetClass="entr" presetSubtype="1">
+                            <p:stCondLst>
+                              <p:cond delay="260"/>
+                            </p:stCondLst>
+                            <p:childTnLst>
+                              <p:set>
+                                <p:cBhvr>
+                                  <p:cTn id="10" dur="1" fill="hold">
+                                    <p:stCondLst>
+                                      <p:cond delay="0"/>
+                                    </p:stCondLst>
+                                  </p:cTn>
+                                  <p:tgtEl>
+                                    <p:spTgt spid="5"/>
+                                  </p:tgtEl>
+                                  <p:attrNameLst>
+                                    <p:attrName>style.visibility</p:attrName>
+                                  </p:attrNameLst>
+                                </p:cBhvr>
+                                <p:to>
+                                  <p:strVal val="visible"/>
+                                </p:to>
+                              </p:set>
+                              <p:animEffect transition="in" filter="wheel(1)">
+                                <p:cBhvr>
+                                  <p:cTn id="91" dur="450"/>
+                                  <p:tgtEl>
+                                    <p:spTgt spid="5"/>
+                                  </p:tgtEl>
+                                </p:cBhvr>
+                              </p:animEffect>
+                            </p:childTnLst>
+                          </p:cTn>
+                        </p:par>
+                        <p:par>
+                          <p:cTn id="11" dur="570" fill="hold" nodeType="afterEffect" grpId="0" presetID="22" presetClass="entr" presetSubtype="4">
+                            <p:stCondLst>
+                              <p:cond delay="390"/>
+                            </p:stCondLst>
+                            <p:childTnLst>
+                              <p:set>
+                                <p:cBhvr>
+                                  <p:cTn id="12" dur="1" fill="hold">
+                                    <p:stCondLst>
+                                      <p:cond delay="0"/>
+                                    </p:stCondLst>
+                                  </p:cTn>
+                                  <p:tgtEl>
+                                    <p:spTgt spid="8"/>
+                                  </p:tgtEl>
+                                  <p:attrNameLst>
+                                    <p:attrName>style.visibility</p:attrName>
+                                  </p:attrNameLst>
+                                </p:cBhvr>
+                                <p:to>
+                                  <p:strVal val="visible"/>
+                                </p:to>
+                              </p:set>
+                              <p:animEffect transition="in" filter="wipe(down)">
+                                <p:cBhvr>
+                                  <p:cTn id="111" dur="570"/>
+                                  <p:tgtEl>
+                                    <p:spTgt spid="8"/>
+                                  </p:tgtEl>
+                                </p:cBhvr>
+                              </p:animEffect>
+                            </p:childTnLst>
+                          </p:cTn>
+                        </p:par>
+                        <p:par>
+                          <p:cTn id="13" dur="690" fill="hold" nodeType="afterEffect" grpId="0" presetID="9" presetClass="entr" presetSubtype="0">
+                            <p:stCondLst>
+                              <p:cond delay="520"/>
+                            </p:stCondLst>
+                            <p:childTnLst>
+                              <p:set>
+                                <p:cBhvr>
+                                  <p:cTn id="14" dur="1" fill="hold">
+                                    <p:stCondLst>
+                                      <p:cond delay="0"/>
+                                    </p:stCondLst>
+                                  </p:cTn>
+                                  <p:tgtEl>
+                                    <p:spTgt spid="10"/>
+                                  </p:tgtEl>
+                                  <p:attrNameLst>
+                                    <p:attrName>style.visibility</p:attrName>
+                                  </p:attrNameLst>
+                                </p:cBhvr>
+                                <p:to>
+                                  <p:strVal val="visible"/>
+                                </p:to>
+                              </p:set>
+                              <p:animEffect transition="in" filter="fade">
+                                <p:cBhvr>
+                                  <p:cTn id="131" dur="690"/>
+                                  <p:tgtEl>
+                                    <p:spTgt spid="10"/>
+                                  </p:tgtEl>
+                                </p:cBhvr>
+                              </p:animEffect>
+                            </p:childTnLst>
+                          </p:cTn>
+                        </p:par>
+                        <p:par>
+                          <p:cTn id="15" dur="810" fill="hold" nodeType="afterEffect" grpId="0" presetID="22" presetClass="entr" presetSubtype="2">
+                            <p:stCondLst>
+                              <p:cond delay="650"/>
+                            </p:stCondLst>
+                            <p:childTnLst>
+                              <p:set>
+                                <p:cBhvr>
+                                  <p:cTn id="16" dur="1" fill="hold">
+                                    <p:stCondLst>
+                                      <p:cond delay="0"/>
+                                    </p:stCondLst>
+                                  </p:cTn>
+                                  <p:tgtEl>
+                                    <p:spTgt spid="12"/>
+                                  </p:tgtEl>
+                                  <p:attrNameLst>
+                                    <p:attrName>style.visibility</p:attrName>
+                                  </p:attrNameLst>
+                                </p:cBhvr>
+                                <p:to>
+                                  <p:strVal val="visible"/>
+                                </p:to>
+                              </p:set>
+                              <p:animEffect transition="in" filter="wipe(right)">
+                                <p:cBhvr>
+                                  <p:cTn id="151" dur="810"/>
+                                  <p:tgtEl>
+                                    <p:spTgt spid="12"/>
+                                  </p:tgtEl>
+                                </p:cBhvr>
+                              </p:animEffect>
+                            </p:childTnLst>
+                          </p:cTn>
+                        </p:par>
+                        <p:par>
+                          <p:cTn id="17" dur="450" fill="hold" nodeType="afterEffect" grpId="0" presetID="18" presetClass="entr" presetSubtype="12">
+                            <p:stCondLst>
+                              <p:cond delay="780"/>
+                            </p:stCondLst>
+                            <p:childTnLst>
+                              <p:set>
+                                <p:cBhvr>
+                                  <p:cTn id="18" dur="1" fill="hold">
+                                    <p:stCondLst>
+                                      <p:cond delay="0"/>
+                                    </p:stCondLst>
+                                  </p:cTn>
+                                  <p:tgtEl>
+                                    <p:spTgt spid="9"/>
+                                  </p:tgtEl>
+                                  <p:attrNameLst>
+                                    <p:attrName>style.visibility</p:attrName>
+                                  </p:attrNameLst>
+                                </p:cBhvr>
+                                <p:to>
+                                  <p:strVal val="visible"/>
+                                </p:to>
+                              </p:set>
+                              <p:animEffect transition="in" filter="circle(in)">
+                                <p:cBhvr>
+                                  <p:cTn id="171" dur="450"/>
+                                  <p:tgtEl>
+                                    <p:spTgt spid="9"/>
+                                  </p:tgtEl>
+                                </p:cBhvr>
+                              </p:animEffect>
+                            </p:childTnLst>
+                          </p:cTn>
+                        </p:par>
+                        <p:par>
+                          <p:cTn id="19" dur="570" fill="hold" nodeType="afterEffect" grpId="0" presetID="22" presetClass="entr" presetSubtype="1">
+                            <p:stCondLst>
+                              <p:cond delay="910"/>
+                            </p:stCondLst>
+                            <p:childTnLst>
+                              <p:set>
+                                <p:cBhvr>
+                                  <p:cTn id="20" dur="1" fill="hold">
+                                    <p:stCondLst>
+                                      <p:cond delay="0"/>
+                                    </p:stCondLst>
+                                  </p:cTn>
+                                  <p:tgtEl>
+                                    <p:spTgt spid="11"/>
+                                  </p:tgtEl>
+                                  <p:attrNameLst>
+                                    <p:attrName>style.visibility</p:attrName>
+                                  </p:attrNameLst>
+                                </p:cBhvr>
+                                <p:to>
+                                  <p:strVal val="visible"/>
+                                </p:to>
+                              </p:set>
+                              <p:animEffect transition="in" filter="wipe(up)">
+                                <p:cBhvr>
+                                  <p:cTn id="191" dur="570"/>
+                                  <p:tgtEl>
+                                    <p:spTgt spid="11"/>
+                                  </p:tgtEl>
+                                </p:cBhvr>
+                              </p:animEffect>
+                            </p:childTnLst>
+                          </p:cTn>
+                        </p:par>
+                        <p:par>
+                          <p:cTn id="21" dur="690" fill="hold" nodeType="afterEffect" grpId="0" presetID="42" presetClass="entr" presetSubtype="10">
+                            <p:stCondLst>
+                              <p:cond delay="1040"/>
+                            </p:stCondLst>
+                            <p:childTnLst>
+                              <p:set>
+                                <p:cBhvr>
+                                  <p:cTn id="22" dur="1" fill="hold">
+                                    <p:stCondLst>
+                                      <p:cond delay="0"/>
+                                    </p:stCondLst>
+                                  </p:cTn>
+                                  <p:tgtEl>
+                                    <p:spTgt spid="13"/>
+                                  </p:tgtEl>
+                                  <p:attrNameLst>
+                                    <p:attrName>style.visibility</p:attrName>
+                                  </p:attrNameLst>
+                                </p:cBhvr>
+                                <p:to>
+                                  <p:strVal val="visible"/>
+                                </p:to>
+                              </p:set>
+                              <p:animEffect transition="in" filter="blinds(horizontal)">
+                                <p:cBhvr>
+                                  <p:cTn id="211" dur="690"/>
+                                  <p:tgtEl>
+                                    <p:spTgt spid="13"/>
+                                  </p:tgtEl>
+                                </p:cBhvr>
+                              </p:animEffect>
+                            </p:childTnLst>
+                          </p:cTn>
+                        </p:par>
+                        <p:par>
+                          <p:cTn id="23" dur="810" fill="hold" nodeType="afterEffect" grpId="0" presetID="43" presetClass="entr" presetSubtype="0">
+                            <p:stCondLst>
+                              <p:cond delay="1170"/>
+                            </p:stCondLst>
+                            <p:childTnLst>
+                              <p:set>
+                                <p:cBhvr>
+                                  <p:cTn id="24" dur="1" fill="hold">
+                                    <p:stCondLst>
+                                      <p:cond delay="0"/>
+                                    </p:stCondLst>
+                                  </p:cTn>
+                                  <p:tgtEl>
+                                    <p:spTgt spid="6"/>
+                                  </p:tgtEl>
+                                  <p:attrNameLst>
+                                    <p:attrName>style.visibility</p:attrName>
+                                  </p:attrNameLst>
+                                </p:cBhvr>
+                                <p:to>
+                                  <p:strVal val="visible"/>
+                                </p:to>
+                              </p:set>
+                              <p:animEffect transition="in" filter="checkerboard(across)">
+                                <p:cBhvr>
+                                  <p:cTn id="231" dur="810"/>
+                                  <p:tgtEl>
+                                    <p:spTgt spid="6"/>
+                                  </p:tgtEl>
+                                </p:cBhvr>
+                              </p:animEffect>
+                            </p:childTnLst>
+                          </p:cTn>
+                        </p:par>
+                        <p:par>
+                          <p:cTn id="25" dur="450" fill="hold" nodeType="afterEffect" grpId="0" presetID="21" presetClass="entr" presetSubtype="2">
+                            <p:stCondLst>
+                              <p:cond delay="1300"/>
+                            </p:stCondLst>
+                            <p:childTnLst>
+                              <p:set>
+                                <p:cBhvr>
+                                  <p:cTn id="26" dur="1" fill="hold">
+                                    <p:stCondLst>
+                                      <p:cond delay="0"/>
+                                    </p:stCondLst>
+                                  </p:cTn>
+                                  <p:tgtEl>
+                                    <p:spTgt spid="7"/>
+                                  </p:tgtEl>
+                                  <p:attrNameLst>
+                                    <p:attrName>style.visibility</p:attrName>
+                                  </p:attrNameLst>
+                                </p:cBhvr>
+                                <p:to>
+                                  <p:strVal val="visible"/>
+                                </p:to>
+                              </p:set>
+                              <p:animEffect transition="in" filter="wheel(2)">
+                                <p:cBhvr>
+                                  <p:cTn id="251" dur="450"/>
+                                  <p:tgtEl>
+                                    <p:spTgt spid="7"/>
+                                  </p:tgtEl>
+                                </p:cBhvr>
+                              </p:animEffect>
+                            </p:childTnLst>
+                          </p:cTn>
+                        </p:par>
+                        <p:par>
+                          <p:cTn id="27" dur="570" fill="hold" nodeType="afterEffect" grpId="0" presetID="10" presetClass="entr" presetSubtype="0">
+                            <p:stCondLst>
+                              <p:cond delay="1430"/>
+                            </p:stCondLst>
+                            <p:childTnLst>
+                              <p:set>
+                                <p:cBhvr>
+                                  <p:cTn id="28" dur="1" fill="hold">
+                                    <p:stCondLst>
+                                      <p:cond delay="0"/>
+                                    </p:stCondLst>
+                                  </p:cTn>
+                                  <p:tgtEl>
+                                    <p:spTgt spid="16"/>
+                                  </p:tgtEl>
+                                  <p:attrNameLst>
+                                    <p:attrName>style.visibility</p:attrName>
+                                  </p:attrNameLst>
+                                </p:cBhvr>
+                                <p:to>
+                                  <p:strVal val="visible"/>
+                                </p:to>
+                              </p:set>
+                              <p:animEffect transition="in" filter="dissolve">
+                                <p:cBhvr>
+                                  <p:cTn id="271" dur="570"/>
+                                  <p:tgtEl>
+                                    <p:spTgt spid="16"/>
+                                  </p:tgtEl>
+                                </p:cBhvr>
+                              </p:animEffect>
+                            </p:childTnLst>
+                          </p:cTn>
+                        </p:par>
+                        <p:par>
+                          <p:cTn id="29" dur="690" fill="hold" nodeType="afterEffect" grpId="0" presetID="25" presetClass="entr" presetSubtype="1">
+                            <p:stCondLst>
+                              <p:cond delay="1560"/>
+                            </p:stCondLst>
+                            <p:childTnLst>
+                              <p:set>
+                                <p:cBhvr>
+                                  <p:cTn id="30" dur="1" fill="hold">
+                                    <p:stCondLst>
+                                      <p:cond delay="0"/>
+                                    </p:stCondLst>
+                                  </p:cTn>
+                                  <p:tgtEl>
+                                    <p:spTgt spid="18"/>
+                                  </p:tgtEl>
+                                  <p:attrNameLst>
+                                    <p:attrName>style.visibility</p:attrName>
+                                  </p:attrNameLst>
+                                </p:cBhvr>
+                                <p:to>
+                                  <p:strVal val="visible"/>
+                                </p:to>
+                              </p:set>
+                              <p:animEffect transition="in" filter="strips(downRight)">
+                                <p:cBhvr>
+                                  <p:cTn id="291" dur="690"/>
+                                  <p:tgtEl>
+                                    <p:spTgt spid="18"/>
+                                  </p:tgtEl>
+                                </p:cBhvr>
+                              </p:animEffect>
+                            </p:childTnLst>
+                          </p:cTn>
+                        </p:par>
+                        <p:par>
+                          <p:cTn id="31" dur="810" fill="hold" nodeType="afterEffect" grpId="0" presetID="45" presetClass="entr" presetSubtype="1">
+                            <p:stCondLst>
+                              <p:cond delay="1690"/>
+                            </p:stCondLst>
+                            <p:childTnLst>
+                              <p:set>
+                                <p:cBhvr>
+                                  <p:cTn id="32" dur="1" fill="hold">
+                                    <p:stCondLst>
+                                      <p:cond delay="0"/>
+                                    </p:stCondLst>
+                                  </p:cTn>
+                                  <p:tgtEl>
+                                    <p:spTgt spid="17"/>
+                                  </p:tgtEl>
+                                  <p:attrNameLst>
+                                    <p:attrName>style.visibility</p:attrName>
+                                  </p:attrNameLst>
+                                </p:cBhvr>
+                                <p:to>
+                                  <p:strVal val="visible"/>
+                                </p:to>
+                              </p:set>
+                              <p:animEffect transition="in" filter="barn(inHorizontal)">
+                                <p:cBhvr>
+                                  <p:cTn id="311" dur="810"/>
+                                  <p:tgtEl>
+                                    <p:spTgt spid="17"/>
+                                  </p:tgtEl>
+                                </p:cBhvr>
+                              </p:animEffect>
+                            </p:childTnLst>
+                          </p:cTn>
+                        </p:par>
+                      </p:childTnLst>
+                    </p:cTn>
+                  </p:par>
+                </p:childTnLst>
+              </p:cTn>
+              <p:prevCondLst>
+                <p:cond evt="onPrev" delay="0">
+                  <p:tgtEl>
+                    <p:sldTgt/>
+                  </p:tgtEl>
+                </p:cond>
+              </p:prevCondLst>
+              <p:nextCondLst>
+                <p:cond evt="onNext" delay="0">
+                  <p:tgtEl>
+                    <p:sldTgt/>
+                  </p:tgtEl>
+                </p:cond>
+              </p:nextCondLst>
+            </p:seq>
+          </p:childTnLst>
+        </p:cTn>
+      </p:par>
+    </p:tnLst>
+  </p:timing>
 </p:sld>
 </file>
 
@@ -9948,8 +13480,537 @@
     <a:masterClrMapping/>
   </p:clrMapOvr>
   <p:transition spd="med">
-    <p:fade/>
+    <p:wipe dir="d"/>
   </p:transition>
+  <p:timing>
+    <p:tnLst>
+      <p:par>
+        <p:cTn id="1" dur="indefinite" restart="never" nodeType="tmRoot">
+          <p:childTnLst>
+            <p:seq concurrent="1" nextAc="seek">
+              <p:cTn id="2" dur="indefinite" nodeType="mainSeq">
+                <p:childTnLst>
+                  <p:par>
+                    <p:cTn id="3" fill="hold">
+                      <p:stCondLst>
+                        <p:cond delay="indefinite"/>
+                      </p:stCondLst>
+                      <p:childTnLst>
+                        <p:par>
+                          <p:cTn id="5" dur="810" fill="hold" nodeType="clickEffect" grpId="0" presetID="52" presetClass="entr" presetSubtype="0">
+                            <p:stCondLst>
+                              <p:cond delay="0"/>
+                            </p:stCondLst>
+                            <p:childTnLst>
+                              <p:set>
+                                <p:cBhvr>
+                                  <p:cTn id="6" dur="1" fill="hold">
+                                    <p:stCondLst>
+                                      <p:cond delay="0"/>
+                                    </p:stCondLst>
+                                  </p:cTn>
+                                  <p:tgtEl>
+                                    <p:spTgt spid="3"/>
+                                  </p:tgtEl>
+                                  <p:attrNameLst>
+                                    <p:attrName>style.visibility</p:attrName>
+                                  </p:attrNameLst>
+                                </p:cBhvr>
+                                <p:to>
+                                  <p:strVal val="visible"/>
+                                </p:to>
+                              </p:set>
+                              <p:animEffect transition="in" filter="randombar(horizontal)">
+                                <p:cBhvr>
+                                  <p:cTn id="51" dur="810"/>
+                                  <p:tgtEl>
+                                    <p:spTgt spid="3"/>
+                                  </p:tgtEl>
+                                </p:cBhvr>
+                              </p:animEffect>
+                            </p:childTnLst>
+                          </p:cTn>
+                        </p:par>
+                        <p:par>
+                          <p:cTn id="7" dur="450" fill="hold" nodeType="afterEffect" grpId="0" presetID="21" presetClass="entr" presetSubtype="1">
+                            <p:stCondLst>
+                              <p:cond delay="130"/>
+                            </p:stCondLst>
+                            <p:childTnLst>
+                              <p:set>
+                                <p:cBhvr>
+                                  <p:cTn id="8" dur="1" fill="hold">
+                                    <p:stCondLst>
+                                      <p:cond delay="0"/>
+                                    </p:stCondLst>
+                                  </p:cTn>
+                                  <p:tgtEl>
+                                    <p:spTgt spid="4"/>
+                                  </p:tgtEl>
+                                  <p:attrNameLst>
+                                    <p:attrName>style.visibility</p:attrName>
+                                  </p:attrNameLst>
+                                </p:cBhvr>
+                                <p:to>
+                                  <p:strVal val="visible"/>
+                                </p:to>
+                              </p:set>
+                              <p:animEffect transition="in" filter="wheel(1)">
+                                <p:cBhvr>
+                                  <p:cTn id="71" dur="450"/>
+                                  <p:tgtEl>
+                                    <p:spTgt spid="4"/>
+                                  </p:tgtEl>
+                                </p:cBhvr>
+                              </p:animEffect>
+                            </p:childTnLst>
+                          </p:cTn>
+                        </p:par>
+                        <p:par>
+                          <p:cTn id="9" dur="570" fill="hold" nodeType="afterEffect" grpId="0" presetID="22" presetClass="entr" presetSubtype="4">
+                            <p:stCondLst>
+                              <p:cond delay="260"/>
+                            </p:stCondLst>
+                            <p:childTnLst>
+                              <p:set>
+                                <p:cBhvr>
+                                  <p:cTn id="10" dur="1" fill="hold">
+                                    <p:stCondLst>
+                                      <p:cond delay="0"/>
+                                    </p:stCondLst>
+                                  </p:cTn>
+                                  <p:tgtEl>
+                                    <p:spTgt spid="5"/>
+                                  </p:tgtEl>
+                                  <p:attrNameLst>
+                                    <p:attrName>style.visibility</p:attrName>
+                                  </p:attrNameLst>
+                                </p:cBhvr>
+                                <p:to>
+                                  <p:strVal val="visible"/>
+                                </p:to>
+                              </p:set>
+                              <p:animEffect transition="in" filter="wipe(down)">
+                                <p:cBhvr>
+                                  <p:cTn id="91" dur="570"/>
+                                  <p:tgtEl>
+                                    <p:spTgt spid="5"/>
+                                  </p:tgtEl>
+                                </p:cBhvr>
+                              </p:animEffect>
+                            </p:childTnLst>
+                          </p:cTn>
+                        </p:par>
+                        <p:par>
+                          <p:cTn id="11" dur="690" fill="hold" nodeType="afterEffect" grpId="0" presetID="9" presetClass="entr" presetSubtype="0">
+                            <p:stCondLst>
+                              <p:cond delay="390"/>
+                            </p:stCondLst>
+                            <p:childTnLst>
+                              <p:set>
+                                <p:cBhvr>
+                                  <p:cTn id="12" dur="1" fill="hold">
+                                    <p:stCondLst>
+                                      <p:cond delay="0"/>
+                                    </p:stCondLst>
+                                  </p:cTn>
+                                  <p:tgtEl>
+                                    <p:spTgt spid="8"/>
+                                  </p:tgtEl>
+                                  <p:attrNameLst>
+                                    <p:attrName>style.visibility</p:attrName>
+                                  </p:attrNameLst>
+                                </p:cBhvr>
+                                <p:to>
+                                  <p:strVal val="visible"/>
+                                </p:to>
+                              </p:set>
+                              <p:animEffect transition="in" filter="fade">
+                                <p:cBhvr>
+                                  <p:cTn id="111" dur="690"/>
+                                  <p:tgtEl>
+                                    <p:spTgt spid="8"/>
+                                  </p:tgtEl>
+                                </p:cBhvr>
+                              </p:animEffect>
+                            </p:childTnLst>
+                          </p:cTn>
+                        </p:par>
+                        <p:par>
+                          <p:cTn id="13" dur="810" fill="hold" nodeType="afterEffect" grpId="0" presetID="22" presetClass="entr" presetSubtype="2">
+                            <p:stCondLst>
+                              <p:cond delay="520"/>
+                            </p:stCondLst>
+                            <p:childTnLst>
+                              <p:set>
+                                <p:cBhvr>
+                                  <p:cTn id="14" dur="1" fill="hold">
+                                    <p:stCondLst>
+                                      <p:cond delay="0"/>
+                                    </p:stCondLst>
+                                  </p:cTn>
+                                  <p:tgtEl>
+                                    <p:spTgt spid="7"/>
+                                  </p:tgtEl>
+                                  <p:attrNameLst>
+                                    <p:attrName>style.visibility</p:attrName>
+                                  </p:attrNameLst>
+                                </p:cBhvr>
+                                <p:to>
+                                  <p:strVal val="visible"/>
+                                </p:to>
+                              </p:set>
+                              <p:animEffect transition="in" filter="wipe(right)">
+                                <p:cBhvr>
+                                  <p:cTn id="131" dur="810"/>
+                                  <p:tgtEl>
+                                    <p:spTgt spid="7"/>
+                                  </p:tgtEl>
+                                </p:cBhvr>
+                              </p:animEffect>
+                            </p:childTnLst>
+                          </p:cTn>
+                        </p:par>
+                        <p:par>
+                          <p:cTn id="15" dur="450" fill="hold" nodeType="afterEffect" grpId="0" presetID="18" presetClass="entr" presetSubtype="12">
+                            <p:stCondLst>
+                              <p:cond delay="650"/>
+                            </p:stCondLst>
+                            <p:childTnLst>
+                              <p:set>
+                                <p:cBhvr>
+                                  <p:cTn id="16" dur="1" fill="hold">
+                                    <p:stCondLst>
+                                      <p:cond delay="0"/>
+                                    </p:stCondLst>
+                                  </p:cTn>
+                                  <p:tgtEl>
+                                    <p:spTgt spid="6"/>
+                                  </p:tgtEl>
+                                  <p:attrNameLst>
+                                    <p:attrName>style.visibility</p:attrName>
+                                  </p:attrNameLst>
+                                </p:cBhvr>
+                                <p:to>
+                                  <p:strVal val="visible"/>
+                                </p:to>
+                              </p:set>
+                              <p:animEffect transition="in" filter="circle(in)">
+                                <p:cBhvr>
+                                  <p:cTn id="151" dur="450"/>
+                                  <p:tgtEl>
+                                    <p:spTgt spid="6"/>
+                                  </p:tgtEl>
+                                </p:cBhvr>
+                              </p:animEffect>
+                            </p:childTnLst>
+                          </p:cTn>
+                        </p:par>
+                        <p:par>
+                          <p:cTn id="17" dur="570" fill="hold" nodeType="afterEffect" grpId="0" presetID="22" presetClass="entr" presetSubtype="1">
+                            <p:stCondLst>
+                              <p:cond delay="780"/>
+                            </p:stCondLst>
+                            <p:childTnLst>
+                              <p:set>
+                                <p:cBhvr>
+                                  <p:cTn id="18" dur="1" fill="hold">
+                                    <p:stCondLst>
+                                      <p:cond delay="0"/>
+                                    </p:stCondLst>
+                                  </p:cTn>
+                                  <p:tgtEl>
+                                    <p:spTgt spid="9"/>
+                                  </p:tgtEl>
+                                  <p:attrNameLst>
+                                    <p:attrName>style.visibility</p:attrName>
+                                  </p:attrNameLst>
+                                </p:cBhvr>
+                                <p:to>
+                                  <p:strVal val="visible"/>
+                                </p:to>
+                              </p:set>
+                              <p:animEffect transition="in" filter="wipe(up)">
+                                <p:cBhvr>
+                                  <p:cTn id="171" dur="570"/>
+                                  <p:tgtEl>
+                                    <p:spTgt spid="9"/>
+                                  </p:tgtEl>
+                                </p:cBhvr>
+                              </p:animEffect>
+                            </p:childTnLst>
+                          </p:cTn>
+                        </p:par>
+                        <p:par>
+                          <p:cTn id="19" dur="690" fill="hold" nodeType="afterEffect" grpId="0" presetID="42" presetClass="entr" presetSubtype="10">
+                            <p:stCondLst>
+                              <p:cond delay="910"/>
+                            </p:stCondLst>
+                            <p:childTnLst>
+                              <p:set>
+                                <p:cBhvr>
+                                  <p:cTn id="20" dur="1" fill="hold">
+                                    <p:stCondLst>
+                                      <p:cond delay="0"/>
+                                    </p:stCondLst>
+                                  </p:cTn>
+                                  <p:tgtEl>
+                                    <p:spTgt spid="12"/>
+                                  </p:tgtEl>
+                                  <p:attrNameLst>
+                                    <p:attrName>style.visibility</p:attrName>
+                                  </p:attrNameLst>
+                                </p:cBhvr>
+                                <p:to>
+                                  <p:strVal val="visible"/>
+                                </p:to>
+                              </p:set>
+                              <p:animEffect transition="in" filter="blinds(horizontal)">
+                                <p:cBhvr>
+                                  <p:cTn id="191" dur="690"/>
+                                  <p:tgtEl>
+                                    <p:spTgt spid="12"/>
+                                  </p:tgtEl>
+                                </p:cBhvr>
+                              </p:animEffect>
+                            </p:childTnLst>
+                          </p:cTn>
+                        </p:par>
+                        <p:par>
+                          <p:cTn id="21" dur="810" fill="hold" nodeType="afterEffect" grpId="0" presetID="43" presetClass="entr" presetSubtype="0">
+                            <p:stCondLst>
+                              <p:cond delay="1040"/>
+                            </p:stCondLst>
+                            <p:childTnLst>
+                              <p:set>
+                                <p:cBhvr>
+                                  <p:cTn id="22" dur="1" fill="hold">
+                                    <p:stCondLst>
+                                      <p:cond delay="0"/>
+                                    </p:stCondLst>
+                                  </p:cTn>
+                                  <p:tgtEl>
+                                    <p:spTgt spid="11"/>
+                                  </p:tgtEl>
+                                  <p:attrNameLst>
+                                    <p:attrName>style.visibility</p:attrName>
+                                  </p:attrNameLst>
+                                </p:cBhvr>
+                                <p:to>
+                                  <p:strVal val="visible"/>
+                                </p:to>
+                              </p:set>
+                              <p:animEffect transition="in" filter="checkerboard(across)">
+                                <p:cBhvr>
+                                  <p:cTn id="211" dur="810"/>
+                                  <p:tgtEl>
+                                    <p:spTgt spid="11"/>
+                                  </p:tgtEl>
+                                </p:cBhvr>
+                              </p:animEffect>
+                            </p:childTnLst>
+                          </p:cTn>
+                        </p:par>
+                        <p:par>
+                          <p:cTn id="23" dur="450" fill="hold" nodeType="afterEffect" grpId="0" presetID="21" presetClass="entr" presetSubtype="2">
+                            <p:stCondLst>
+                              <p:cond delay="1170"/>
+                            </p:stCondLst>
+                            <p:childTnLst>
+                              <p:set>
+                                <p:cBhvr>
+                                  <p:cTn id="24" dur="1" fill="hold">
+                                    <p:stCondLst>
+                                      <p:cond delay="0"/>
+                                    </p:stCondLst>
+                                  </p:cTn>
+                                  <p:tgtEl>
+                                    <p:spTgt spid="10"/>
+                                  </p:tgtEl>
+                                  <p:attrNameLst>
+                                    <p:attrName>style.visibility</p:attrName>
+                                  </p:attrNameLst>
+                                </p:cBhvr>
+                                <p:to>
+                                  <p:strVal val="visible"/>
+                                </p:to>
+                              </p:set>
+                              <p:animEffect transition="in" filter="wheel(2)">
+                                <p:cBhvr>
+                                  <p:cTn id="231" dur="450"/>
+                                  <p:tgtEl>
+                                    <p:spTgt spid="10"/>
+                                  </p:tgtEl>
+                                </p:cBhvr>
+                              </p:animEffect>
+                            </p:childTnLst>
+                          </p:cTn>
+                        </p:par>
+                        <p:par>
+                          <p:cTn id="25" dur="570" fill="hold" nodeType="afterEffect" grpId="0" presetID="10" presetClass="entr" presetSubtype="0">
+                            <p:stCondLst>
+                              <p:cond delay="1300"/>
+                            </p:stCondLst>
+                            <p:childTnLst>
+                              <p:set>
+                                <p:cBhvr>
+                                  <p:cTn id="26" dur="1" fill="hold">
+                                    <p:stCondLst>
+                                      <p:cond delay="0"/>
+                                    </p:stCondLst>
+                                  </p:cTn>
+                                  <p:tgtEl>
+                                    <p:spTgt spid="13"/>
+                                  </p:tgtEl>
+                                  <p:attrNameLst>
+                                    <p:attrName>style.visibility</p:attrName>
+                                  </p:attrNameLst>
+                                </p:cBhvr>
+                                <p:to>
+                                  <p:strVal val="visible"/>
+                                </p:to>
+                              </p:set>
+                              <p:animEffect transition="in" filter="dissolve">
+                                <p:cBhvr>
+                                  <p:cTn id="251" dur="570"/>
+                                  <p:tgtEl>
+                                    <p:spTgt spid="13"/>
+                                  </p:tgtEl>
+                                </p:cBhvr>
+                              </p:animEffect>
+                            </p:childTnLst>
+                          </p:cTn>
+                        </p:par>
+                        <p:par>
+                          <p:cTn id="27" dur="690" fill="hold" nodeType="afterEffect" grpId="0" presetID="25" presetClass="entr" presetSubtype="1">
+                            <p:stCondLst>
+                              <p:cond delay="1430"/>
+                            </p:stCondLst>
+                            <p:childTnLst>
+                              <p:set>
+                                <p:cBhvr>
+                                  <p:cTn id="28" dur="1" fill="hold">
+                                    <p:stCondLst>
+                                      <p:cond delay="0"/>
+                                    </p:stCondLst>
+                                  </p:cTn>
+                                  <p:tgtEl>
+                                    <p:spTgt spid="16"/>
+                                  </p:tgtEl>
+                                  <p:attrNameLst>
+                                    <p:attrName>style.visibility</p:attrName>
+                                  </p:attrNameLst>
+                                </p:cBhvr>
+                                <p:to>
+                                  <p:strVal val="visible"/>
+                                </p:to>
+                              </p:set>
+                              <p:animEffect transition="in" filter="strips(downRight)">
+                                <p:cBhvr>
+                                  <p:cTn id="271" dur="690"/>
+                                  <p:tgtEl>
+                                    <p:spTgt spid="16"/>
+                                  </p:tgtEl>
+                                </p:cBhvr>
+                              </p:animEffect>
+                            </p:childTnLst>
+                          </p:cTn>
+                        </p:par>
+                        <p:par>
+                          <p:cTn id="29" dur="810" fill="hold" nodeType="afterEffect" grpId="0" presetID="45" presetClass="entr" presetSubtype="1">
+                            <p:stCondLst>
+                              <p:cond delay="1560"/>
+                            </p:stCondLst>
+                            <p:childTnLst>
+                              <p:set>
+                                <p:cBhvr>
+                                  <p:cTn id="30" dur="1" fill="hold">
+                                    <p:stCondLst>
+                                      <p:cond delay="0"/>
+                                    </p:stCondLst>
+                                  </p:cTn>
+                                  <p:tgtEl>
+                                    <p:spTgt spid="15"/>
+                                  </p:tgtEl>
+                                  <p:attrNameLst>
+                                    <p:attrName>style.visibility</p:attrName>
+                                  </p:attrNameLst>
+                                </p:cBhvr>
+                                <p:to>
+                                  <p:strVal val="visible"/>
+                                </p:to>
+                              </p:set>
+                              <p:animEffect transition="in" filter="barn(inHorizontal)">
+                                <p:cBhvr>
+                                  <p:cTn id="291" dur="810"/>
+                                  <p:tgtEl>
+                                    <p:spTgt spid="15"/>
+                                  </p:tgtEl>
+                                </p:cBhvr>
+                              </p:animEffect>
+                            </p:childTnLst>
+                          </p:cTn>
+                        </p:par>
+                        <p:par>
+                          <p:cTn id="31" dur="450" fill="hold" nodeType="afterEffect" grpId="0" presetID="22" presetClass="entr" presetSubtype="8">
+                            <p:stCondLst>
+                              <p:cond delay="1690"/>
+                            </p:stCondLst>
+                            <p:childTnLst>
+                              <p:set>
+                                <p:cBhvr>
+                                  <p:cTn id="32" dur="1" fill="hold">
+                                    <p:stCondLst>
+                                      <p:cond delay="0"/>
+                                    </p:stCondLst>
+                                  </p:cTn>
+                                  <p:tgtEl>
+                                    <p:spTgt spid="14"/>
+                                  </p:tgtEl>
+                                  <p:attrNameLst>
+                                    <p:attrName>style.visibility</p:attrName>
+                                  </p:attrNameLst>
+                                </p:cBhvr>
+                                <p:to>
+                                  <p:strVal val="visible"/>
+                                </p:to>
+                              </p:set>
+                              <p:animEffect transition="in" filter="wipe(left)">
+                                <p:cBhvr>
+                                  <p:cTn id="311" dur="450"/>
+                                  <p:tgtEl>
+                                    <p:spTgt spid="14"/>
+                                  </p:tgtEl>
+                                </p:cBhvr>
+                              </p:animEffect>
+                            </p:childTnLst>
+                          </p:cTn>
+                        </p:par>
+                      </p:childTnLst>
+                    </p:cTn>
+                  </p:par>
+                </p:childTnLst>
+              </p:cTn>
+              <p:prevCondLst>
+                <p:cond evt="onPrev" delay="0">
+                  <p:tgtEl>
+                    <p:sldTgt/>
+                  </p:tgtEl>
+                </p:cond>
+              </p:prevCondLst>
+              <p:nextCondLst>
+                <p:cond evt="onNext" delay="0">
+                  <p:tgtEl>
+                    <p:sldTgt/>
+                  </p:tgtEl>
+                </p:cond>
+              </p:nextCondLst>
+            </p:seq>
+          </p:childTnLst>
+        </p:cTn>
+      </p:par>
+    </p:tnLst>
+  </p:timing>
 </p:sld>
 </file>
 
@@ -10327,6 +14388,290 @@
   <p:transition spd="med">
     <p:fade/>
   </p:transition>
+  <p:timing>
+    <p:tnLst>
+      <p:par>
+        <p:cTn id="1" dur="indefinite" restart="never" nodeType="tmRoot">
+          <p:childTnLst>
+            <p:seq concurrent="1" nextAc="seek">
+              <p:cTn id="2" dur="indefinite" nodeType="mainSeq">
+                <p:childTnLst>
+                  <p:par>
+                    <p:cTn id="3" fill="hold">
+                      <p:stCondLst>
+                        <p:cond delay="indefinite"/>
+                      </p:stCondLst>
+                      <p:childTnLst>
+                        <p:par>
+                          <p:cTn id="5" dur="450" fill="hold" nodeType="clickEffect" grpId="0" presetID="21" presetClass="entr" presetSubtype="1">
+                            <p:stCondLst>
+                              <p:cond delay="0"/>
+                            </p:stCondLst>
+                            <p:childTnLst>
+                              <p:set>
+                                <p:cBhvr>
+                                  <p:cTn id="6" dur="1" fill="hold">
+                                    <p:stCondLst>
+                                      <p:cond delay="0"/>
+                                    </p:stCondLst>
+                                  </p:cTn>
+                                  <p:tgtEl>
+                                    <p:spTgt spid="3"/>
+                                  </p:tgtEl>
+                                  <p:attrNameLst>
+                                    <p:attrName>style.visibility</p:attrName>
+                                  </p:attrNameLst>
+                                </p:cBhvr>
+                                <p:to>
+                                  <p:strVal val="visible"/>
+                                </p:to>
+                              </p:set>
+                              <p:animEffect transition="in" filter="wheel(1)">
+                                <p:cBhvr>
+                                  <p:cTn id="51" dur="450"/>
+                                  <p:tgtEl>
+                                    <p:spTgt spid="3"/>
+                                  </p:tgtEl>
+                                </p:cBhvr>
+                              </p:animEffect>
+                            </p:childTnLst>
+                          </p:cTn>
+                        </p:par>
+                        <p:par>
+                          <p:cTn id="7" dur="570" fill="hold" nodeType="afterEffect" grpId="0" presetID="22" presetClass="entr" presetSubtype="4">
+                            <p:stCondLst>
+                              <p:cond delay="130"/>
+                            </p:stCondLst>
+                            <p:childTnLst>
+                              <p:set>
+                                <p:cBhvr>
+                                  <p:cTn id="8" dur="1" fill="hold">
+                                    <p:stCondLst>
+                                      <p:cond delay="0"/>
+                                    </p:stCondLst>
+                                  </p:cTn>
+                                  <p:tgtEl>
+                                    <p:spTgt spid="5"/>
+                                  </p:tgtEl>
+                                  <p:attrNameLst>
+                                    <p:attrName>style.visibility</p:attrName>
+                                  </p:attrNameLst>
+                                </p:cBhvr>
+                                <p:to>
+                                  <p:strVal val="visible"/>
+                                </p:to>
+                              </p:set>
+                              <p:animEffect transition="in" filter="wipe(down)">
+                                <p:cBhvr>
+                                  <p:cTn id="71" dur="570"/>
+                                  <p:tgtEl>
+                                    <p:spTgt spid="5"/>
+                                  </p:tgtEl>
+                                </p:cBhvr>
+                              </p:animEffect>
+                            </p:childTnLst>
+                          </p:cTn>
+                        </p:par>
+                        <p:par>
+                          <p:cTn id="9" dur="690" fill="hold" nodeType="afterEffect" grpId="0" presetID="9" presetClass="entr" presetSubtype="0">
+                            <p:stCondLst>
+                              <p:cond delay="260"/>
+                            </p:stCondLst>
+                            <p:childTnLst>
+                              <p:set>
+                                <p:cBhvr>
+                                  <p:cTn id="10" dur="1" fill="hold">
+                                    <p:stCondLst>
+                                      <p:cond delay="0"/>
+                                    </p:stCondLst>
+                                  </p:cTn>
+                                  <p:tgtEl>
+                                    <p:spTgt spid="6"/>
+                                  </p:tgtEl>
+                                  <p:attrNameLst>
+                                    <p:attrName>style.visibility</p:attrName>
+                                  </p:attrNameLst>
+                                </p:cBhvr>
+                                <p:to>
+                                  <p:strVal val="visible"/>
+                                </p:to>
+                              </p:set>
+                              <p:animEffect transition="in" filter="fade">
+                                <p:cBhvr>
+                                  <p:cTn id="91" dur="690"/>
+                                  <p:tgtEl>
+                                    <p:spTgt spid="6"/>
+                                  </p:tgtEl>
+                                </p:cBhvr>
+                              </p:animEffect>
+                            </p:childTnLst>
+                          </p:cTn>
+                        </p:par>
+                        <p:par>
+                          <p:cTn id="11" dur="810" fill="hold" nodeType="afterEffect" grpId="0" presetID="22" presetClass="entr" presetSubtype="2">
+                            <p:stCondLst>
+                              <p:cond delay="390"/>
+                            </p:stCondLst>
+                            <p:childTnLst>
+                              <p:set>
+                                <p:cBhvr>
+                                  <p:cTn id="12" dur="1" fill="hold">
+                                    <p:stCondLst>
+                                      <p:cond delay="0"/>
+                                    </p:stCondLst>
+                                  </p:cTn>
+                                  <p:tgtEl>
+                                    <p:spTgt spid="4"/>
+                                  </p:tgtEl>
+                                  <p:attrNameLst>
+                                    <p:attrName>style.visibility</p:attrName>
+                                  </p:attrNameLst>
+                                </p:cBhvr>
+                                <p:to>
+                                  <p:strVal val="visible"/>
+                                </p:to>
+                              </p:set>
+                              <p:animEffect transition="in" filter="wipe(right)">
+                                <p:cBhvr>
+                                  <p:cTn id="111" dur="810"/>
+                                  <p:tgtEl>
+                                    <p:spTgt spid="4"/>
+                                  </p:tgtEl>
+                                </p:cBhvr>
+                              </p:animEffect>
+                            </p:childTnLst>
+                          </p:cTn>
+                        </p:par>
+                        <p:par>
+                          <p:cTn id="13" dur="450" fill="hold" nodeType="afterEffect" grpId="0" presetID="18" presetClass="entr" presetSubtype="12">
+                            <p:stCondLst>
+                              <p:cond delay="520"/>
+                            </p:stCondLst>
+                            <p:childTnLst>
+                              <p:set>
+                                <p:cBhvr>
+                                  <p:cTn id="14" dur="1" fill="hold">
+                                    <p:stCondLst>
+                                      <p:cond delay="0"/>
+                                    </p:stCondLst>
+                                  </p:cTn>
+                                  <p:tgtEl>
+                                    <p:spTgt spid="7"/>
+                                  </p:tgtEl>
+                                  <p:attrNameLst>
+                                    <p:attrName>style.visibility</p:attrName>
+                                  </p:attrNameLst>
+                                </p:cBhvr>
+                                <p:to>
+                                  <p:strVal val="visible"/>
+                                </p:to>
+                              </p:set>
+                              <p:animEffect transition="in" filter="circle(in)">
+                                <p:cBhvr>
+                                  <p:cTn id="131" dur="450"/>
+                                  <p:tgtEl>
+                                    <p:spTgt spid="7"/>
+                                  </p:tgtEl>
+                                </p:cBhvr>
+                              </p:animEffect>
+                            </p:childTnLst>
+                          </p:cTn>
+                        </p:par>
+                        <p:par>
+                          <p:cTn id="15" dur="570" fill="hold" nodeType="afterEffect" grpId="0" presetID="22" presetClass="entr" presetSubtype="1">
+                            <p:stCondLst>
+                              <p:cond delay="650"/>
+                            </p:stCondLst>
+                            <p:childTnLst>
+                              <p:set>
+                                <p:cBhvr>
+                                  <p:cTn id="16" dur="1" fill="hold">
+                                    <p:stCondLst>
+                                      <p:cond delay="0"/>
+                                    </p:stCondLst>
+                                  </p:cTn>
+                                  <p:tgtEl>
+                                    <p:spTgt spid="8"/>
+                                  </p:tgtEl>
+                                  <p:attrNameLst>
+                                    <p:attrName>style.visibility</p:attrName>
+                                  </p:attrNameLst>
+                                </p:cBhvr>
+                                <p:to>
+                                  <p:strVal val="visible"/>
+                                </p:to>
+                              </p:set>
+                              <p:animEffect transition="in" filter="wipe(up)">
+                                <p:cBhvr>
+                                  <p:cTn id="151" dur="570"/>
+                                  <p:tgtEl>
+                                    <p:spTgt spid="8"/>
+                                  </p:tgtEl>
+                                </p:cBhvr>
+                              </p:animEffect>
+                            </p:childTnLst>
+                          </p:cTn>
+                        </p:par>
+                        <p:par>
+                          <p:cTn id="17" dur="690" fill="hold" nodeType="afterEffect" grpId="0" presetID="42" presetClass="entr" presetSubtype="10">
+                            <p:stCondLst>
+                              <p:cond delay="780"/>
+                            </p:stCondLst>
+                            <p:childTnLst>
+                              <p:set>
+                                <p:cBhvr>
+                                  <p:cTn id="18" dur="1" fill="hold">
+                                    <p:stCondLst>
+                                      <p:cond delay="0"/>
+                                    </p:stCondLst>
+                                  </p:cTn>
+                                  <p:tgtEl>
+                                    <p:spTgt spid="9"/>
+                                  </p:tgtEl>
+                                  <p:attrNameLst>
+                                    <p:attrName>style.visibility</p:attrName>
+                                  </p:attrNameLst>
+                                </p:cBhvr>
+                                <p:to>
+                                  <p:strVal val="visible"/>
+                                </p:to>
+                              </p:set>
+                              <p:animEffect transition="in" filter="blinds(horizontal)">
+                                <p:cBhvr>
+                                  <p:cTn id="171" dur="690"/>
+                                  <p:tgtEl>
+                                    <p:spTgt spid="9"/>
+                                  </p:tgtEl>
+                                </p:cBhvr>
+                              </p:animEffect>
+                            </p:childTnLst>
+                          </p:cTn>
+                        </p:par>
+                      </p:childTnLst>
+                    </p:cTn>
+                  </p:par>
+                </p:childTnLst>
+              </p:cTn>
+              <p:prevCondLst>
+                <p:cond evt="onPrev" delay="0">
+                  <p:tgtEl>
+                    <p:sldTgt/>
+                  </p:tgtEl>
+                </p:cond>
+              </p:prevCondLst>
+              <p:nextCondLst>
+                <p:cond evt="onNext" delay="0">
+                  <p:tgtEl>
+                    <p:sldTgt/>
+                  </p:tgtEl>
+                </p:cond>
+              </p:nextCondLst>
+            </p:seq>
+          </p:childTnLst>
+        </p:cTn>
+      </p:par>
+    </p:tnLst>
+  </p:timing>
 </p:sld>
 </file>
 
@@ -11154,8 +15499,537 @@
     <a:masterClrMapping/>
   </p:clrMapOvr>
   <p:transition spd="med">
-    <p:fade/>
+    <p:push dir="u"/>
   </p:transition>
+  <p:timing>
+    <p:tnLst>
+      <p:par>
+        <p:cTn id="1" dur="indefinite" restart="never" nodeType="tmRoot">
+          <p:childTnLst>
+            <p:seq concurrent="1" nextAc="seek">
+              <p:cTn id="2" dur="indefinite" nodeType="mainSeq">
+                <p:childTnLst>
+                  <p:par>
+                    <p:cTn id="3" fill="hold">
+                      <p:stCondLst>
+                        <p:cond delay="indefinite"/>
+                      </p:stCondLst>
+                      <p:childTnLst>
+                        <p:par>
+                          <p:cTn id="5" dur="450" fill="hold" nodeType="clickEffect" grpId="0" presetID="52" presetClass="entr" presetSubtype="0">
+                            <p:stCondLst>
+                              <p:cond delay="0"/>
+                            </p:stCondLst>
+                            <p:childTnLst>
+                              <p:set>
+                                <p:cBhvr>
+                                  <p:cTn id="6" dur="1" fill="hold">
+                                    <p:stCondLst>
+                                      <p:cond delay="0"/>
+                                    </p:stCondLst>
+                                  </p:cTn>
+                                  <p:tgtEl>
+                                    <p:spTgt spid="3"/>
+                                  </p:tgtEl>
+                                  <p:attrNameLst>
+                                    <p:attrName>style.visibility</p:attrName>
+                                  </p:attrNameLst>
+                                </p:cBhvr>
+                                <p:to>
+                                  <p:strVal val="visible"/>
+                                </p:to>
+                              </p:set>
+                              <p:animEffect transition="in" filter="randombar(horizontal)">
+                                <p:cBhvr>
+                                  <p:cTn id="51" dur="450"/>
+                                  <p:tgtEl>
+                                    <p:spTgt spid="3"/>
+                                  </p:tgtEl>
+                                </p:cBhvr>
+                              </p:animEffect>
+                            </p:childTnLst>
+                          </p:cTn>
+                        </p:par>
+                        <p:par>
+                          <p:cTn id="7" dur="570" fill="hold" nodeType="afterEffect" grpId="0" presetID="21" presetClass="entr" presetSubtype="1">
+                            <p:stCondLst>
+                              <p:cond delay="130"/>
+                            </p:stCondLst>
+                            <p:childTnLst>
+                              <p:set>
+                                <p:cBhvr>
+                                  <p:cTn id="8" dur="1" fill="hold">
+                                    <p:stCondLst>
+                                      <p:cond delay="0"/>
+                                    </p:stCondLst>
+                                  </p:cTn>
+                                  <p:tgtEl>
+                                    <p:spTgt spid="4"/>
+                                  </p:tgtEl>
+                                  <p:attrNameLst>
+                                    <p:attrName>style.visibility</p:attrName>
+                                  </p:attrNameLst>
+                                </p:cBhvr>
+                                <p:to>
+                                  <p:strVal val="visible"/>
+                                </p:to>
+                              </p:set>
+                              <p:animEffect transition="in" filter="wheel(1)">
+                                <p:cBhvr>
+                                  <p:cTn id="71" dur="570"/>
+                                  <p:tgtEl>
+                                    <p:spTgt spid="4"/>
+                                  </p:tgtEl>
+                                </p:cBhvr>
+                              </p:animEffect>
+                            </p:childTnLst>
+                          </p:cTn>
+                        </p:par>
+                        <p:par>
+                          <p:cTn id="9" dur="690" fill="hold" nodeType="afterEffect" grpId="0" presetID="22" presetClass="entr" presetSubtype="4">
+                            <p:stCondLst>
+                              <p:cond delay="260"/>
+                            </p:stCondLst>
+                            <p:childTnLst>
+                              <p:set>
+                                <p:cBhvr>
+                                  <p:cTn id="10" dur="1" fill="hold">
+                                    <p:stCondLst>
+                                      <p:cond delay="0"/>
+                                    </p:stCondLst>
+                                  </p:cTn>
+                                  <p:tgtEl>
+                                    <p:spTgt spid="5"/>
+                                  </p:tgtEl>
+                                  <p:attrNameLst>
+                                    <p:attrName>style.visibility</p:attrName>
+                                  </p:attrNameLst>
+                                </p:cBhvr>
+                                <p:to>
+                                  <p:strVal val="visible"/>
+                                </p:to>
+                              </p:set>
+                              <p:animEffect transition="in" filter="wipe(down)">
+                                <p:cBhvr>
+                                  <p:cTn id="91" dur="690"/>
+                                  <p:tgtEl>
+                                    <p:spTgt spid="5"/>
+                                  </p:tgtEl>
+                                </p:cBhvr>
+                              </p:animEffect>
+                            </p:childTnLst>
+                          </p:cTn>
+                        </p:par>
+                        <p:par>
+                          <p:cTn id="11" dur="810" fill="hold" nodeType="afterEffect" grpId="0" presetID="9" presetClass="entr" presetSubtype="0">
+                            <p:stCondLst>
+                              <p:cond delay="390"/>
+                            </p:stCondLst>
+                            <p:childTnLst>
+                              <p:set>
+                                <p:cBhvr>
+                                  <p:cTn id="12" dur="1" fill="hold">
+                                    <p:stCondLst>
+                                      <p:cond delay="0"/>
+                                    </p:stCondLst>
+                                  </p:cTn>
+                                  <p:tgtEl>
+                                    <p:spTgt spid="6"/>
+                                  </p:tgtEl>
+                                  <p:attrNameLst>
+                                    <p:attrName>style.visibility</p:attrName>
+                                  </p:attrNameLst>
+                                </p:cBhvr>
+                                <p:to>
+                                  <p:strVal val="visible"/>
+                                </p:to>
+                              </p:set>
+                              <p:animEffect transition="in" filter="fade">
+                                <p:cBhvr>
+                                  <p:cTn id="111" dur="810"/>
+                                  <p:tgtEl>
+                                    <p:spTgt spid="6"/>
+                                  </p:tgtEl>
+                                </p:cBhvr>
+                              </p:animEffect>
+                            </p:childTnLst>
+                          </p:cTn>
+                        </p:par>
+                        <p:par>
+                          <p:cTn id="13" dur="450" fill="hold" nodeType="afterEffect" grpId="0" presetID="22" presetClass="entr" presetSubtype="2">
+                            <p:stCondLst>
+                              <p:cond delay="520"/>
+                            </p:stCondLst>
+                            <p:childTnLst>
+                              <p:set>
+                                <p:cBhvr>
+                                  <p:cTn id="14" dur="1" fill="hold">
+                                    <p:stCondLst>
+                                      <p:cond delay="0"/>
+                                    </p:stCondLst>
+                                  </p:cTn>
+                                  <p:tgtEl>
+                                    <p:spTgt spid="9"/>
+                                  </p:tgtEl>
+                                  <p:attrNameLst>
+                                    <p:attrName>style.visibility</p:attrName>
+                                  </p:attrNameLst>
+                                </p:cBhvr>
+                                <p:to>
+                                  <p:strVal val="visible"/>
+                                </p:to>
+                              </p:set>
+                              <p:animEffect transition="in" filter="wipe(right)">
+                                <p:cBhvr>
+                                  <p:cTn id="131" dur="450"/>
+                                  <p:tgtEl>
+                                    <p:spTgt spid="9"/>
+                                  </p:tgtEl>
+                                </p:cBhvr>
+                              </p:animEffect>
+                            </p:childTnLst>
+                          </p:cTn>
+                        </p:par>
+                        <p:par>
+                          <p:cTn id="15" dur="570" fill="hold" nodeType="afterEffect" grpId="0" presetID="18" presetClass="entr" presetSubtype="12">
+                            <p:stCondLst>
+                              <p:cond delay="650"/>
+                            </p:stCondLst>
+                            <p:childTnLst>
+                              <p:set>
+                                <p:cBhvr>
+                                  <p:cTn id="16" dur="1" fill="hold">
+                                    <p:stCondLst>
+                                      <p:cond delay="0"/>
+                                    </p:stCondLst>
+                                  </p:cTn>
+                                  <p:tgtEl>
+                                    <p:spTgt spid="12"/>
+                                  </p:tgtEl>
+                                  <p:attrNameLst>
+                                    <p:attrName>style.visibility</p:attrName>
+                                  </p:attrNameLst>
+                                </p:cBhvr>
+                                <p:to>
+                                  <p:strVal val="visible"/>
+                                </p:to>
+                              </p:set>
+                              <p:animEffect transition="in" filter="circle(in)">
+                                <p:cBhvr>
+                                  <p:cTn id="151" dur="570"/>
+                                  <p:tgtEl>
+                                    <p:spTgt spid="12"/>
+                                  </p:tgtEl>
+                                </p:cBhvr>
+                              </p:animEffect>
+                            </p:childTnLst>
+                          </p:cTn>
+                        </p:par>
+                        <p:par>
+                          <p:cTn id="17" dur="690" fill="hold" nodeType="afterEffect" grpId="0" presetID="22" presetClass="entr" presetSubtype="1">
+                            <p:stCondLst>
+                              <p:cond delay="780"/>
+                            </p:stCondLst>
+                            <p:childTnLst>
+                              <p:set>
+                                <p:cBhvr>
+                                  <p:cTn id="18" dur="1" fill="hold">
+                                    <p:stCondLst>
+                                      <p:cond delay="0"/>
+                                    </p:stCondLst>
+                                  </p:cTn>
+                                  <p:tgtEl>
+                                    <p:spTgt spid="15"/>
+                                  </p:tgtEl>
+                                  <p:attrNameLst>
+                                    <p:attrName>style.visibility</p:attrName>
+                                  </p:attrNameLst>
+                                </p:cBhvr>
+                                <p:to>
+                                  <p:strVal val="visible"/>
+                                </p:to>
+                              </p:set>
+                              <p:animEffect transition="in" filter="wipe(up)">
+                                <p:cBhvr>
+                                  <p:cTn id="171" dur="690"/>
+                                  <p:tgtEl>
+                                    <p:spTgt spid="15"/>
+                                  </p:tgtEl>
+                                </p:cBhvr>
+                              </p:animEffect>
+                            </p:childTnLst>
+                          </p:cTn>
+                        </p:par>
+                        <p:par>
+                          <p:cTn id="19" dur="810" fill="hold" nodeType="afterEffect" grpId="0" presetID="42" presetClass="entr" presetSubtype="10">
+                            <p:stCondLst>
+                              <p:cond delay="910"/>
+                            </p:stCondLst>
+                            <p:childTnLst>
+                              <p:set>
+                                <p:cBhvr>
+                                  <p:cTn id="20" dur="1" fill="hold">
+                                    <p:stCondLst>
+                                      <p:cond delay="0"/>
+                                    </p:stCondLst>
+                                  </p:cTn>
+                                  <p:tgtEl>
+                                    <p:spTgt spid="7"/>
+                                  </p:tgtEl>
+                                  <p:attrNameLst>
+                                    <p:attrName>style.visibility</p:attrName>
+                                  </p:attrNameLst>
+                                </p:cBhvr>
+                                <p:to>
+                                  <p:strVal val="visible"/>
+                                </p:to>
+                              </p:set>
+                              <p:animEffect transition="in" filter="blinds(horizontal)">
+                                <p:cBhvr>
+                                  <p:cTn id="191" dur="810"/>
+                                  <p:tgtEl>
+                                    <p:spTgt spid="7"/>
+                                  </p:tgtEl>
+                                </p:cBhvr>
+                              </p:animEffect>
+                            </p:childTnLst>
+                          </p:cTn>
+                        </p:par>
+                        <p:par>
+                          <p:cTn id="21" dur="450" fill="hold" nodeType="afterEffect" grpId="0" presetID="43" presetClass="entr" presetSubtype="0">
+                            <p:stCondLst>
+                              <p:cond delay="1040"/>
+                            </p:stCondLst>
+                            <p:childTnLst>
+                              <p:set>
+                                <p:cBhvr>
+                                  <p:cTn id="22" dur="1" fill="hold">
+                                    <p:stCondLst>
+                                      <p:cond delay="0"/>
+                                    </p:stCondLst>
+                                  </p:cTn>
+                                  <p:tgtEl>
+                                    <p:spTgt spid="10"/>
+                                  </p:tgtEl>
+                                  <p:attrNameLst>
+                                    <p:attrName>style.visibility</p:attrName>
+                                  </p:attrNameLst>
+                                </p:cBhvr>
+                                <p:to>
+                                  <p:strVal val="visible"/>
+                                </p:to>
+                              </p:set>
+                              <p:animEffect transition="in" filter="checkerboard(across)">
+                                <p:cBhvr>
+                                  <p:cTn id="211" dur="450"/>
+                                  <p:tgtEl>
+                                    <p:spTgt spid="10"/>
+                                  </p:tgtEl>
+                                </p:cBhvr>
+                              </p:animEffect>
+                            </p:childTnLst>
+                          </p:cTn>
+                        </p:par>
+                        <p:par>
+                          <p:cTn id="23" dur="570" fill="hold" nodeType="afterEffect" grpId="0" presetID="21" presetClass="entr" presetSubtype="2">
+                            <p:stCondLst>
+                              <p:cond delay="1170"/>
+                            </p:stCondLst>
+                            <p:childTnLst>
+                              <p:set>
+                                <p:cBhvr>
+                                  <p:cTn id="24" dur="1" fill="hold">
+                                    <p:stCondLst>
+                                      <p:cond delay="0"/>
+                                    </p:stCondLst>
+                                  </p:cTn>
+                                  <p:tgtEl>
+                                    <p:spTgt spid="13"/>
+                                  </p:tgtEl>
+                                  <p:attrNameLst>
+                                    <p:attrName>style.visibility</p:attrName>
+                                  </p:attrNameLst>
+                                </p:cBhvr>
+                                <p:to>
+                                  <p:strVal val="visible"/>
+                                </p:to>
+                              </p:set>
+                              <p:animEffect transition="in" filter="wheel(2)">
+                                <p:cBhvr>
+                                  <p:cTn id="231" dur="570"/>
+                                  <p:tgtEl>
+                                    <p:spTgt spid="13"/>
+                                  </p:tgtEl>
+                                </p:cBhvr>
+                              </p:animEffect>
+                            </p:childTnLst>
+                          </p:cTn>
+                        </p:par>
+                        <p:par>
+                          <p:cTn id="25" dur="690" fill="hold" nodeType="afterEffect" grpId="0" presetID="10" presetClass="entr" presetSubtype="0">
+                            <p:stCondLst>
+                              <p:cond delay="1300"/>
+                            </p:stCondLst>
+                            <p:childTnLst>
+                              <p:set>
+                                <p:cBhvr>
+                                  <p:cTn id="26" dur="1" fill="hold">
+                                    <p:stCondLst>
+                                      <p:cond delay="0"/>
+                                    </p:stCondLst>
+                                  </p:cTn>
+                                  <p:tgtEl>
+                                    <p:spTgt spid="16"/>
+                                  </p:tgtEl>
+                                  <p:attrNameLst>
+                                    <p:attrName>style.visibility</p:attrName>
+                                  </p:attrNameLst>
+                                </p:cBhvr>
+                                <p:to>
+                                  <p:strVal val="visible"/>
+                                </p:to>
+                              </p:set>
+                              <p:animEffect transition="in" filter="dissolve">
+                                <p:cBhvr>
+                                  <p:cTn id="251" dur="690"/>
+                                  <p:tgtEl>
+                                    <p:spTgt spid="16"/>
+                                  </p:tgtEl>
+                                </p:cBhvr>
+                              </p:animEffect>
+                            </p:childTnLst>
+                          </p:cTn>
+                        </p:par>
+                        <p:par>
+                          <p:cTn id="27" dur="810" fill="hold" nodeType="afterEffect" grpId="0" presetID="25" presetClass="entr" presetSubtype="1">
+                            <p:stCondLst>
+                              <p:cond delay="1430"/>
+                            </p:stCondLst>
+                            <p:childTnLst>
+                              <p:set>
+                                <p:cBhvr>
+                                  <p:cTn id="28" dur="1" fill="hold">
+                                    <p:stCondLst>
+                                      <p:cond delay="0"/>
+                                    </p:stCondLst>
+                                  </p:cTn>
+                                  <p:tgtEl>
+                                    <p:spTgt spid="8"/>
+                                  </p:tgtEl>
+                                  <p:attrNameLst>
+                                    <p:attrName>style.visibility</p:attrName>
+                                  </p:attrNameLst>
+                                </p:cBhvr>
+                                <p:to>
+                                  <p:strVal val="visible"/>
+                                </p:to>
+                              </p:set>
+                              <p:animEffect transition="in" filter="strips(downRight)">
+                                <p:cBhvr>
+                                  <p:cTn id="271" dur="810"/>
+                                  <p:tgtEl>
+                                    <p:spTgt spid="8"/>
+                                  </p:tgtEl>
+                                </p:cBhvr>
+                              </p:animEffect>
+                            </p:childTnLst>
+                          </p:cTn>
+                        </p:par>
+                        <p:par>
+                          <p:cTn id="29" dur="450" fill="hold" nodeType="afterEffect" grpId="0" presetID="45" presetClass="entr" presetSubtype="1">
+                            <p:stCondLst>
+                              <p:cond delay="1560"/>
+                            </p:stCondLst>
+                            <p:childTnLst>
+                              <p:set>
+                                <p:cBhvr>
+                                  <p:cTn id="30" dur="1" fill="hold">
+                                    <p:stCondLst>
+                                      <p:cond delay="0"/>
+                                    </p:stCondLst>
+                                  </p:cTn>
+                                  <p:tgtEl>
+                                    <p:spTgt spid="11"/>
+                                  </p:tgtEl>
+                                  <p:attrNameLst>
+                                    <p:attrName>style.visibility</p:attrName>
+                                  </p:attrNameLst>
+                                </p:cBhvr>
+                                <p:to>
+                                  <p:strVal val="visible"/>
+                                </p:to>
+                              </p:set>
+                              <p:animEffect transition="in" filter="barn(inHorizontal)">
+                                <p:cBhvr>
+                                  <p:cTn id="291" dur="450"/>
+                                  <p:tgtEl>
+                                    <p:spTgt spid="11"/>
+                                  </p:tgtEl>
+                                </p:cBhvr>
+                              </p:animEffect>
+                            </p:childTnLst>
+                          </p:cTn>
+                        </p:par>
+                        <p:par>
+                          <p:cTn id="31" dur="570" fill="hold" nodeType="afterEffect" grpId="0" presetID="22" presetClass="entr" presetSubtype="8">
+                            <p:stCondLst>
+                              <p:cond delay="1690"/>
+                            </p:stCondLst>
+                            <p:childTnLst>
+                              <p:set>
+                                <p:cBhvr>
+                                  <p:cTn id="32" dur="1" fill="hold">
+                                    <p:stCondLst>
+                                      <p:cond delay="0"/>
+                                    </p:stCondLst>
+                                  </p:cTn>
+                                  <p:tgtEl>
+                                    <p:spTgt spid="14"/>
+                                  </p:tgtEl>
+                                  <p:attrNameLst>
+                                    <p:attrName>style.visibility</p:attrName>
+                                  </p:attrNameLst>
+                                </p:cBhvr>
+                                <p:to>
+                                  <p:strVal val="visible"/>
+                                </p:to>
+                              </p:set>
+                              <p:animEffect transition="in" filter="wipe(left)">
+                                <p:cBhvr>
+                                  <p:cTn id="311" dur="570"/>
+                                  <p:tgtEl>
+                                    <p:spTgt spid="14"/>
+                                  </p:tgtEl>
+                                </p:cBhvr>
+                              </p:animEffect>
+                            </p:childTnLst>
+                          </p:cTn>
+                        </p:par>
+                      </p:childTnLst>
+                    </p:cTn>
+                  </p:par>
+                </p:childTnLst>
+              </p:cTn>
+              <p:prevCondLst>
+                <p:cond evt="onPrev" delay="0">
+                  <p:tgtEl>
+                    <p:sldTgt/>
+                  </p:tgtEl>
+                </p:cond>
+              </p:prevCondLst>
+              <p:nextCondLst>
+                <p:cond evt="onNext" delay="0">
+                  <p:tgtEl>
+                    <p:sldTgt/>
+                  </p:tgtEl>
+                </p:cond>
+              </p:nextCondLst>
+            </p:seq>
+          </p:childTnLst>
+        </p:cTn>
+      </p:par>
+    </p:tnLst>
+  </p:timing>
 </p:sld>
 </file>
 
@@ -11575,8 +16449,327 @@
     <a:masterClrMapping/>
   </p:clrMapOvr>
   <p:transition spd="med">
-    <p:fade/>
+    <p:wipe dir="d"/>
   </p:transition>
+  <p:timing>
+    <p:tnLst>
+      <p:par>
+        <p:cTn id="1" dur="indefinite" restart="never" nodeType="tmRoot">
+          <p:childTnLst>
+            <p:seq concurrent="1" nextAc="seek">
+              <p:cTn id="2" dur="indefinite" nodeType="mainSeq">
+                <p:childTnLst>
+                  <p:par>
+                    <p:cTn id="3" fill="hold">
+                      <p:stCondLst>
+                        <p:cond delay="indefinite"/>
+                      </p:stCondLst>
+                      <p:childTnLst>
+                        <p:par>
+                          <p:cTn id="5" dur="570" fill="hold" nodeType="clickEffect" grpId="0" presetID="21" presetClass="entr" presetSubtype="1">
+                            <p:stCondLst>
+                              <p:cond delay="0"/>
+                            </p:stCondLst>
+                            <p:childTnLst>
+                              <p:set>
+                                <p:cBhvr>
+                                  <p:cTn id="6" dur="1" fill="hold">
+                                    <p:stCondLst>
+                                      <p:cond delay="0"/>
+                                    </p:stCondLst>
+                                  </p:cTn>
+                                  <p:tgtEl>
+                                    <p:spTgt spid="3"/>
+                                  </p:tgtEl>
+                                  <p:attrNameLst>
+                                    <p:attrName>style.visibility</p:attrName>
+                                  </p:attrNameLst>
+                                </p:cBhvr>
+                                <p:to>
+                                  <p:strVal val="visible"/>
+                                </p:to>
+                              </p:set>
+                              <p:animEffect transition="in" filter="wheel(1)">
+                                <p:cBhvr>
+                                  <p:cTn id="51" dur="570"/>
+                                  <p:tgtEl>
+                                    <p:spTgt spid="3"/>
+                                  </p:tgtEl>
+                                </p:cBhvr>
+                              </p:animEffect>
+                            </p:childTnLst>
+                          </p:cTn>
+                        </p:par>
+                        <p:par>
+                          <p:cTn id="7" dur="690" fill="hold" nodeType="afterEffect" grpId="0" presetID="22" presetClass="entr" presetSubtype="4">
+                            <p:stCondLst>
+                              <p:cond delay="130"/>
+                            </p:stCondLst>
+                            <p:childTnLst>
+                              <p:set>
+                                <p:cBhvr>
+                                  <p:cTn id="8" dur="1" fill="hold">
+                                    <p:stCondLst>
+                                      <p:cond delay="0"/>
+                                    </p:stCondLst>
+                                  </p:cTn>
+                                  <p:tgtEl>
+                                    <p:spTgt spid="5"/>
+                                  </p:tgtEl>
+                                  <p:attrNameLst>
+                                    <p:attrName>style.visibility</p:attrName>
+                                  </p:attrNameLst>
+                                </p:cBhvr>
+                                <p:to>
+                                  <p:strVal val="visible"/>
+                                </p:to>
+                              </p:set>
+                              <p:animEffect transition="in" filter="wipe(down)">
+                                <p:cBhvr>
+                                  <p:cTn id="71" dur="690"/>
+                                  <p:tgtEl>
+                                    <p:spTgt spid="5"/>
+                                  </p:tgtEl>
+                                </p:cBhvr>
+                              </p:animEffect>
+                            </p:childTnLst>
+                          </p:cTn>
+                        </p:par>
+                        <p:par>
+                          <p:cTn id="9" dur="810" fill="hold" nodeType="afterEffect" grpId="0" presetID="9" presetClass="entr" presetSubtype="0">
+                            <p:stCondLst>
+                              <p:cond delay="260"/>
+                            </p:stCondLst>
+                            <p:childTnLst>
+                              <p:set>
+                                <p:cBhvr>
+                                  <p:cTn id="10" dur="1" fill="hold">
+                                    <p:stCondLst>
+                                      <p:cond delay="0"/>
+                                    </p:stCondLst>
+                                  </p:cTn>
+                                  <p:tgtEl>
+                                    <p:spTgt spid="6"/>
+                                  </p:tgtEl>
+                                  <p:attrNameLst>
+                                    <p:attrName>style.visibility</p:attrName>
+                                  </p:attrNameLst>
+                                </p:cBhvr>
+                                <p:to>
+                                  <p:strVal val="visible"/>
+                                </p:to>
+                              </p:set>
+                              <p:animEffect transition="in" filter="fade">
+                                <p:cBhvr>
+                                  <p:cTn id="91" dur="810"/>
+                                  <p:tgtEl>
+                                    <p:spTgt spid="6"/>
+                                  </p:tgtEl>
+                                </p:cBhvr>
+                              </p:animEffect>
+                            </p:childTnLst>
+                          </p:cTn>
+                        </p:par>
+                        <p:par>
+                          <p:cTn id="11" dur="450" fill="hold" nodeType="afterEffect" grpId="0" presetID="22" presetClass="entr" presetSubtype="2">
+                            <p:stCondLst>
+                              <p:cond delay="390"/>
+                            </p:stCondLst>
+                            <p:childTnLst>
+                              <p:set>
+                                <p:cBhvr>
+                                  <p:cTn id="12" dur="1" fill="hold">
+                                    <p:stCondLst>
+                                      <p:cond delay="0"/>
+                                    </p:stCondLst>
+                                  </p:cTn>
+                                  <p:tgtEl>
+                                    <p:spTgt spid="7"/>
+                                  </p:tgtEl>
+                                  <p:attrNameLst>
+                                    <p:attrName>style.visibility</p:attrName>
+                                  </p:attrNameLst>
+                                </p:cBhvr>
+                                <p:to>
+                                  <p:strVal val="visible"/>
+                                </p:to>
+                              </p:set>
+                              <p:animEffect transition="in" filter="wipe(right)">
+                                <p:cBhvr>
+                                  <p:cTn id="111" dur="450"/>
+                                  <p:tgtEl>
+                                    <p:spTgt spid="7"/>
+                                  </p:tgtEl>
+                                </p:cBhvr>
+                              </p:animEffect>
+                            </p:childTnLst>
+                          </p:cTn>
+                        </p:par>
+                        <p:par>
+                          <p:cTn id="13" dur="570" fill="hold" nodeType="afterEffect" grpId="0" presetID="18" presetClass="entr" presetSubtype="12">
+                            <p:stCondLst>
+                              <p:cond delay="520"/>
+                            </p:stCondLst>
+                            <p:childTnLst>
+                              <p:set>
+                                <p:cBhvr>
+                                  <p:cTn id="14" dur="1" fill="hold">
+                                    <p:stCondLst>
+                                      <p:cond delay="0"/>
+                                    </p:stCondLst>
+                                  </p:cTn>
+                                  <p:tgtEl>
+                                    <p:spTgt spid="4"/>
+                                  </p:tgtEl>
+                                  <p:attrNameLst>
+                                    <p:attrName>style.visibility</p:attrName>
+                                  </p:attrNameLst>
+                                </p:cBhvr>
+                                <p:to>
+                                  <p:strVal val="visible"/>
+                                </p:to>
+                              </p:set>
+                              <p:animEffect transition="in" filter="circle(in)">
+                                <p:cBhvr>
+                                  <p:cTn id="131" dur="570"/>
+                                  <p:tgtEl>
+                                    <p:spTgt spid="4"/>
+                                  </p:tgtEl>
+                                </p:cBhvr>
+                              </p:animEffect>
+                            </p:childTnLst>
+                          </p:cTn>
+                        </p:par>
+                        <p:par>
+                          <p:cTn id="15" dur="690" fill="hold" nodeType="afterEffect" grpId="0" presetID="22" presetClass="entr" presetSubtype="1">
+                            <p:stCondLst>
+                              <p:cond delay="650"/>
+                            </p:stCondLst>
+                            <p:childTnLst>
+                              <p:set>
+                                <p:cBhvr>
+                                  <p:cTn id="16" dur="1" fill="hold">
+                                    <p:stCondLst>
+                                      <p:cond delay="0"/>
+                                    </p:stCondLst>
+                                  </p:cTn>
+                                  <p:tgtEl>
+                                    <p:spTgt spid="8"/>
+                                  </p:tgtEl>
+                                  <p:attrNameLst>
+                                    <p:attrName>style.visibility</p:attrName>
+                                  </p:attrNameLst>
+                                </p:cBhvr>
+                                <p:to>
+                                  <p:strVal val="visible"/>
+                                </p:to>
+                              </p:set>
+                              <p:animEffect transition="in" filter="wipe(up)">
+                                <p:cBhvr>
+                                  <p:cTn id="151" dur="690"/>
+                                  <p:tgtEl>
+                                    <p:spTgt spid="8"/>
+                                  </p:tgtEl>
+                                </p:cBhvr>
+                              </p:animEffect>
+                            </p:childTnLst>
+                          </p:cTn>
+                        </p:par>
+                        <p:par>
+                          <p:cTn id="17" dur="810" fill="hold" nodeType="afterEffect" grpId="0" presetID="42" presetClass="entr" presetSubtype="10">
+                            <p:stCondLst>
+                              <p:cond delay="780"/>
+                            </p:stCondLst>
+                            <p:childTnLst>
+                              <p:set>
+                                <p:cBhvr>
+                                  <p:cTn id="18" dur="1" fill="hold">
+                                    <p:stCondLst>
+                                      <p:cond delay="0"/>
+                                    </p:stCondLst>
+                                  </p:cTn>
+                                  <p:tgtEl>
+                                    <p:spTgt spid="9"/>
+                                  </p:tgtEl>
+                                  <p:attrNameLst>
+                                    <p:attrName>style.visibility</p:attrName>
+                                  </p:attrNameLst>
+                                </p:cBhvr>
+                                <p:to>
+                                  <p:strVal val="visible"/>
+                                </p:to>
+                              </p:set>
+                              <p:animEffect transition="in" filter="blinds(horizontal)">
+                                <p:cBhvr>
+                                  <p:cTn id="171" dur="810"/>
+                                  <p:tgtEl>
+                                    <p:spTgt spid="9"/>
+                                  </p:tgtEl>
+                                </p:cBhvr>
+                              </p:animEffect>
+                            </p:childTnLst>
+                          </p:cTn>
+                        </p:par>
+                        <p:par>
+                          <p:cTn id="19" dur="450" fill="hold" nodeType="afterEffect" grpId="0" presetID="43" presetClass="entr" presetSubtype="0">
+                            <p:stCondLst>
+                              <p:cond delay="910"/>
+                            </p:stCondLst>
+                            <p:childTnLst>
+                              <p:set>
+                                <p:cBhvr>
+                                  <p:cTn id="20" dur="1" fill="hold">
+                                    <p:stCondLst>
+                                      <p:cond delay="0"/>
+                                    </p:stCondLst>
+                                  </p:cTn>
+                                  <p:tgtEl>
+                                    <p:spTgt spid="10"/>
+                                  </p:tgtEl>
+                                  <p:attrNameLst>
+                                    <p:attrName>style.visibility</p:attrName>
+                                  </p:attrNameLst>
+                                </p:cBhvr>
+                                <p:to>
+                                  <p:strVal val="visible"/>
+                                </p:to>
+                              </p:set>
+                              <p:animEffect transition="in" filter="checkerboard(across)">
+                                <p:cBhvr>
+                                  <p:cTn id="191" dur="450"/>
+                                  <p:tgtEl>
+                                    <p:spTgt spid="10"/>
+                                  </p:tgtEl>
+                                </p:cBhvr>
+                              </p:animEffect>
+                            </p:childTnLst>
+                          </p:cTn>
+                        </p:par>
+                      </p:childTnLst>
+                    </p:cTn>
+                  </p:par>
+                </p:childTnLst>
+              </p:cTn>
+              <p:prevCondLst>
+                <p:cond evt="onPrev" delay="0">
+                  <p:tgtEl>
+                    <p:sldTgt/>
+                  </p:tgtEl>
+                </p:cond>
+              </p:prevCondLst>
+              <p:nextCondLst>
+                <p:cond evt="onNext" delay="0">
+                  <p:tgtEl>
+                    <p:sldTgt/>
+                  </p:tgtEl>
+                </p:cond>
+              </p:nextCondLst>
+            </p:seq>
+          </p:childTnLst>
+        </p:cTn>
+      </p:par>
+    </p:tnLst>
+  </p:timing>
 </p:sld>
 </file>
 
@@ -12358,6 +17551,535 @@
   <p:transition spd="med">
     <p:fade/>
   </p:transition>
+  <p:timing>
+    <p:tnLst>
+      <p:par>
+        <p:cTn id="1" dur="indefinite" restart="never" nodeType="tmRoot">
+          <p:childTnLst>
+            <p:seq concurrent="1" nextAc="seek">
+              <p:cTn id="2" dur="indefinite" nodeType="mainSeq">
+                <p:childTnLst>
+                  <p:par>
+                    <p:cTn id="3" fill="hold">
+                      <p:stCondLst>
+                        <p:cond delay="indefinite"/>
+                      </p:stCondLst>
+                      <p:childTnLst>
+                        <p:par>
+                          <p:cTn id="5" dur="690" fill="hold" nodeType="clickEffect" grpId="0" presetID="22" presetClass="entr" presetSubtype="4">
+                            <p:stCondLst>
+                              <p:cond delay="0"/>
+                            </p:stCondLst>
+                            <p:childTnLst>
+                              <p:set>
+                                <p:cBhvr>
+                                  <p:cTn id="6" dur="1" fill="hold">
+                                    <p:stCondLst>
+                                      <p:cond delay="0"/>
+                                    </p:stCondLst>
+                                  </p:cTn>
+                                  <p:tgtEl>
+                                    <p:spTgt spid="3"/>
+                                  </p:tgtEl>
+                                  <p:attrNameLst>
+                                    <p:attrName>style.visibility</p:attrName>
+                                  </p:attrNameLst>
+                                </p:cBhvr>
+                                <p:to>
+                                  <p:strVal val="visible"/>
+                                </p:to>
+                              </p:set>
+                              <p:animEffect transition="in" filter="wipe(down)">
+                                <p:cBhvr>
+                                  <p:cTn id="51" dur="690"/>
+                                  <p:tgtEl>
+                                    <p:spTgt spid="3"/>
+                                  </p:tgtEl>
+                                </p:cBhvr>
+                              </p:animEffect>
+                            </p:childTnLst>
+                          </p:cTn>
+                        </p:par>
+                        <p:par>
+                          <p:cTn id="7" dur="810" fill="hold" nodeType="afterEffect" grpId="0" presetID="9" presetClass="entr" presetSubtype="0">
+                            <p:stCondLst>
+                              <p:cond delay="130"/>
+                            </p:stCondLst>
+                            <p:childTnLst>
+                              <p:set>
+                                <p:cBhvr>
+                                  <p:cTn id="8" dur="1" fill="hold">
+                                    <p:stCondLst>
+                                      <p:cond delay="0"/>
+                                    </p:stCondLst>
+                                  </p:cTn>
+                                  <p:tgtEl>
+                                    <p:spTgt spid="4"/>
+                                  </p:tgtEl>
+                                  <p:attrNameLst>
+                                    <p:attrName>style.visibility</p:attrName>
+                                  </p:attrNameLst>
+                                </p:cBhvr>
+                                <p:to>
+                                  <p:strVal val="visible"/>
+                                </p:to>
+                              </p:set>
+                              <p:animEffect transition="in" filter="fade">
+                                <p:cBhvr>
+                                  <p:cTn id="71" dur="810"/>
+                                  <p:tgtEl>
+                                    <p:spTgt spid="4"/>
+                                  </p:tgtEl>
+                                </p:cBhvr>
+                              </p:animEffect>
+                            </p:childTnLst>
+                          </p:cTn>
+                        </p:par>
+                        <p:par>
+                          <p:cTn id="9" dur="450" fill="hold" nodeType="afterEffect" grpId="0" presetID="22" presetClass="entr" presetSubtype="2">
+                            <p:stCondLst>
+                              <p:cond delay="260"/>
+                            </p:stCondLst>
+                            <p:childTnLst>
+                              <p:set>
+                                <p:cBhvr>
+                                  <p:cTn id="10" dur="1" fill="hold">
+                                    <p:stCondLst>
+                                      <p:cond delay="0"/>
+                                    </p:stCondLst>
+                                  </p:cTn>
+                                  <p:tgtEl>
+                                    <p:spTgt spid="5"/>
+                                  </p:tgtEl>
+                                  <p:attrNameLst>
+                                    <p:attrName>style.visibility</p:attrName>
+                                  </p:attrNameLst>
+                                </p:cBhvr>
+                                <p:to>
+                                  <p:strVal val="visible"/>
+                                </p:to>
+                              </p:set>
+                              <p:animEffect transition="in" filter="wipe(right)">
+                                <p:cBhvr>
+                                  <p:cTn id="91" dur="450"/>
+                                  <p:tgtEl>
+                                    <p:spTgt spid="5"/>
+                                  </p:tgtEl>
+                                </p:cBhvr>
+                              </p:animEffect>
+                            </p:childTnLst>
+                          </p:cTn>
+                        </p:par>
+                        <p:par>
+                          <p:cTn id="11" dur="570" fill="hold" nodeType="afterEffect" grpId="0" presetID="18" presetClass="entr" presetSubtype="12">
+                            <p:stCondLst>
+                              <p:cond delay="390"/>
+                            </p:stCondLst>
+                            <p:childTnLst>
+                              <p:set>
+                                <p:cBhvr>
+                                  <p:cTn id="12" dur="1" fill="hold">
+                                    <p:stCondLst>
+                                      <p:cond delay="0"/>
+                                    </p:stCondLst>
+                                  </p:cTn>
+                                  <p:tgtEl>
+                                    <p:spTgt spid="6"/>
+                                  </p:tgtEl>
+                                  <p:attrNameLst>
+                                    <p:attrName>style.visibility</p:attrName>
+                                  </p:attrNameLst>
+                                </p:cBhvr>
+                                <p:to>
+                                  <p:strVal val="visible"/>
+                                </p:to>
+                              </p:set>
+                              <p:animEffect transition="in" filter="circle(in)">
+                                <p:cBhvr>
+                                  <p:cTn id="111" dur="570"/>
+                                  <p:tgtEl>
+                                    <p:spTgt spid="6"/>
+                                  </p:tgtEl>
+                                </p:cBhvr>
+                              </p:animEffect>
+                            </p:childTnLst>
+                          </p:cTn>
+                        </p:par>
+                        <p:par>
+                          <p:cTn id="13" dur="690" fill="hold" nodeType="afterEffect" grpId="0" presetID="22" presetClass="entr" presetSubtype="1">
+                            <p:stCondLst>
+                              <p:cond delay="520"/>
+                            </p:stCondLst>
+                            <p:childTnLst>
+                              <p:set>
+                                <p:cBhvr>
+                                  <p:cTn id="14" dur="1" fill="hold">
+                                    <p:stCondLst>
+                                      <p:cond delay="0"/>
+                                    </p:stCondLst>
+                                  </p:cTn>
+                                  <p:tgtEl>
+                                    <p:spTgt spid="7"/>
+                                  </p:tgtEl>
+                                  <p:attrNameLst>
+                                    <p:attrName>style.visibility</p:attrName>
+                                  </p:attrNameLst>
+                                </p:cBhvr>
+                                <p:to>
+                                  <p:strVal val="visible"/>
+                                </p:to>
+                              </p:set>
+                              <p:animEffect transition="in" filter="wipe(up)">
+                                <p:cBhvr>
+                                  <p:cTn id="131" dur="690"/>
+                                  <p:tgtEl>
+                                    <p:spTgt spid="7"/>
+                                  </p:tgtEl>
+                                </p:cBhvr>
+                              </p:animEffect>
+                            </p:childTnLst>
+                          </p:cTn>
+                        </p:par>
+                        <p:par>
+                          <p:cTn id="15" dur="810" fill="hold" nodeType="afterEffect" grpId="0" presetID="42" presetClass="entr" presetSubtype="10">
+                            <p:stCondLst>
+                              <p:cond delay="650"/>
+                            </p:stCondLst>
+                            <p:childTnLst>
+                              <p:set>
+                                <p:cBhvr>
+                                  <p:cTn id="16" dur="1" fill="hold">
+                                    <p:stCondLst>
+                                      <p:cond delay="0"/>
+                                    </p:stCondLst>
+                                  </p:cTn>
+                                  <p:tgtEl>
+                                    <p:spTgt spid="8"/>
+                                  </p:tgtEl>
+                                  <p:attrNameLst>
+                                    <p:attrName>style.visibility</p:attrName>
+                                  </p:attrNameLst>
+                                </p:cBhvr>
+                                <p:to>
+                                  <p:strVal val="visible"/>
+                                </p:to>
+                              </p:set>
+                              <p:animEffect transition="in" filter="blinds(horizontal)">
+                                <p:cBhvr>
+                                  <p:cTn id="151" dur="810"/>
+                                  <p:tgtEl>
+                                    <p:spTgt spid="8"/>
+                                  </p:tgtEl>
+                                </p:cBhvr>
+                              </p:animEffect>
+                            </p:childTnLst>
+                          </p:cTn>
+                        </p:par>
+                        <p:par>
+                          <p:cTn id="17" dur="450" fill="hold" nodeType="afterEffect" grpId="0" presetID="43" presetClass="entr" presetSubtype="0">
+                            <p:stCondLst>
+                              <p:cond delay="780"/>
+                            </p:stCondLst>
+                            <p:childTnLst>
+                              <p:set>
+                                <p:cBhvr>
+                                  <p:cTn id="18" dur="1" fill="hold">
+                                    <p:stCondLst>
+                                      <p:cond delay="0"/>
+                                    </p:stCondLst>
+                                  </p:cTn>
+                                  <p:tgtEl>
+                                    <p:spTgt spid="9"/>
+                                  </p:tgtEl>
+                                  <p:attrNameLst>
+                                    <p:attrName>style.visibility</p:attrName>
+                                  </p:attrNameLst>
+                                </p:cBhvr>
+                                <p:to>
+                                  <p:strVal val="visible"/>
+                                </p:to>
+                              </p:set>
+                              <p:animEffect transition="in" filter="checkerboard(across)">
+                                <p:cBhvr>
+                                  <p:cTn id="171" dur="450"/>
+                                  <p:tgtEl>
+                                    <p:spTgt spid="9"/>
+                                  </p:tgtEl>
+                                </p:cBhvr>
+                              </p:animEffect>
+                            </p:childTnLst>
+                          </p:cTn>
+                        </p:par>
+                        <p:par>
+                          <p:cTn id="19" dur="570" fill="hold" nodeType="afterEffect" grpId="0" presetID="21" presetClass="entr" presetSubtype="2">
+                            <p:stCondLst>
+                              <p:cond delay="910"/>
+                            </p:stCondLst>
+                            <p:childTnLst>
+                              <p:set>
+                                <p:cBhvr>
+                                  <p:cTn id="20" dur="1" fill="hold">
+                                    <p:stCondLst>
+                                      <p:cond delay="0"/>
+                                    </p:stCondLst>
+                                  </p:cTn>
+                                  <p:tgtEl>
+                                    <p:spTgt spid="10"/>
+                                  </p:tgtEl>
+                                  <p:attrNameLst>
+                                    <p:attrName>style.visibility</p:attrName>
+                                  </p:attrNameLst>
+                                </p:cBhvr>
+                                <p:to>
+                                  <p:strVal val="visible"/>
+                                </p:to>
+                              </p:set>
+                              <p:animEffect transition="in" filter="wheel(2)">
+                                <p:cBhvr>
+                                  <p:cTn id="191" dur="570"/>
+                                  <p:tgtEl>
+                                    <p:spTgt spid="10"/>
+                                  </p:tgtEl>
+                                </p:cBhvr>
+                              </p:animEffect>
+                            </p:childTnLst>
+                          </p:cTn>
+                        </p:par>
+                        <p:par>
+                          <p:cTn id="21" dur="690" fill="hold" nodeType="afterEffect" grpId="0" presetID="10" presetClass="entr" presetSubtype="0">
+                            <p:stCondLst>
+                              <p:cond delay="1040"/>
+                            </p:stCondLst>
+                            <p:childTnLst>
+                              <p:set>
+                                <p:cBhvr>
+                                  <p:cTn id="22" dur="1" fill="hold">
+                                    <p:stCondLst>
+                                      <p:cond delay="0"/>
+                                    </p:stCondLst>
+                                  </p:cTn>
+                                  <p:tgtEl>
+                                    <p:spTgt spid="11"/>
+                                  </p:tgtEl>
+                                  <p:attrNameLst>
+                                    <p:attrName>style.visibility</p:attrName>
+                                  </p:attrNameLst>
+                                </p:cBhvr>
+                                <p:to>
+                                  <p:strVal val="visible"/>
+                                </p:to>
+                              </p:set>
+                              <p:animEffect transition="in" filter="dissolve">
+                                <p:cBhvr>
+                                  <p:cTn id="211" dur="690"/>
+                                  <p:tgtEl>
+                                    <p:spTgt spid="11"/>
+                                  </p:tgtEl>
+                                </p:cBhvr>
+                              </p:animEffect>
+                            </p:childTnLst>
+                          </p:cTn>
+                        </p:par>
+                        <p:par>
+                          <p:cTn id="23" dur="810" fill="hold" nodeType="afterEffect" grpId="0" presetID="25" presetClass="entr" presetSubtype="1">
+                            <p:stCondLst>
+                              <p:cond delay="1170"/>
+                            </p:stCondLst>
+                            <p:childTnLst>
+                              <p:set>
+                                <p:cBhvr>
+                                  <p:cTn id="24" dur="1" fill="hold">
+                                    <p:stCondLst>
+                                      <p:cond delay="0"/>
+                                    </p:stCondLst>
+                                  </p:cTn>
+                                  <p:tgtEl>
+                                    <p:spTgt spid="12"/>
+                                  </p:tgtEl>
+                                  <p:attrNameLst>
+                                    <p:attrName>style.visibility</p:attrName>
+                                  </p:attrNameLst>
+                                </p:cBhvr>
+                                <p:to>
+                                  <p:strVal val="visible"/>
+                                </p:to>
+                              </p:set>
+                              <p:animEffect transition="in" filter="strips(downRight)">
+                                <p:cBhvr>
+                                  <p:cTn id="231" dur="810"/>
+                                  <p:tgtEl>
+                                    <p:spTgt spid="12"/>
+                                  </p:tgtEl>
+                                </p:cBhvr>
+                              </p:animEffect>
+                            </p:childTnLst>
+                          </p:cTn>
+                        </p:par>
+                        <p:par>
+                          <p:cTn id="25" dur="450" fill="hold" nodeType="afterEffect" grpId="0" presetID="45" presetClass="entr" presetSubtype="1">
+                            <p:stCondLst>
+                              <p:cond delay="1300"/>
+                            </p:stCondLst>
+                            <p:childTnLst>
+                              <p:set>
+                                <p:cBhvr>
+                                  <p:cTn id="26" dur="1" fill="hold">
+                                    <p:stCondLst>
+                                      <p:cond delay="0"/>
+                                    </p:stCondLst>
+                                  </p:cTn>
+                                  <p:tgtEl>
+                                    <p:spTgt spid="13"/>
+                                  </p:tgtEl>
+                                  <p:attrNameLst>
+                                    <p:attrName>style.visibility</p:attrName>
+                                  </p:attrNameLst>
+                                </p:cBhvr>
+                                <p:to>
+                                  <p:strVal val="visible"/>
+                                </p:to>
+                              </p:set>
+                              <p:animEffect transition="in" filter="barn(inHorizontal)">
+                                <p:cBhvr>
+                                  <p:cTn id="251" dur="450"/>
+                                  <p:tgtEl>
+                                    <p:spTgt spid="13"/>
+                                  </p:tgtEl>
+                                </p:cBhvr>
+                              </p:animEffect>
+                            </p:childTnLst>
+                          </p:cTn>
+                        </p:par>
+                        <p:par>
+                          <p:cTn id="27" dur="570" fill="hold" nodeType="afterEffect" grpId="0" presetID="22" presetClass="entr" presetSubtype="8">
+                            <p:stCondLst>
+                              <p:cond delay="1430"/>
+                            </p:stCondLst>
+                            <p:childTnLst>
+                              <p:set>
+                                <p:cBhvr>
+                                  <p:cTn id="28" dur="1" fill="hold">
+                                    <p:stCondLst>
+                                      <p:cond delay="0"/>
+                                    </p:stCondLst>
+                                  </p:cTn>
+                                  <p:tgtEl>
+                                    <p:spTgt spid="14"/>
+                                  </p:tgtEl>
+                                  <p:attrNameLst>
+                                    <p:attrName>style.visibility</p:attrName>
+                                  </p:attrNameLst>
+                                </p:cBhvr>
+                                <p:to>
+                                  <p:strVal val="visible"/>
+                                </p:to>
+                              </p:set>
+                              <p:animEffect transition="in" filter="wipe(left)">
+                                <p:cBhvr>
+                                  <p:cTn id="271" dur="570"/>
+                                  <p:tgtEl>
+                                    <p:spTgt spid="14"/>
+                                  </p:tgtEl>
+                                </p:cBhvr>
+                              </p:animEffect>
+                            </p:childTnLst>
+                          </p:cTn>
+                        </p:par>
+                        <p:par>
+                          <p:cTn id="29" dur="690" fill="hold" nodeType="afterEffect" grpId="0" presetID="37" presetClass="entr" presetSubtype="0">
+                            <p:stCondLst>
+                              <p:cond delay="1560"/>
+                            </p:stCondLst>
+                            <p:childTnLst>
+                              <p:set>
+                                <p:cBhvr>
+                                  <p:cTn id="30" dur="1" fill="hold">
+                                    <p:stCondLst>
+                                      <p:cond delay="0"/>
+                                    </p:stCondLst>
+                                  </p:cTn>
+                                  <p:tgtEl>
+                                    <p:spTgt spid="15"/>
+                                  </p:tgtEl>
+                                  <p:attrNameLst>
+                                    <p:attrName>style.visibility</p:attrName>
+                                  </p:attrNameLst>
+                                </p:cBhvr>
+                                <p:to>
+                                  <p:strVal val="visible"/>
+                                </p:to>
+                              </p:set>
+                              <p:animEffect transition="in" filter="wedge">
+                                <p:cBhvr>
+                                  <p:cTn id="291" dur="690"/>
+                                  <p:tgtEl>
+                                    <p:spTgt spid="15"/>
+                                  </p:tgtEl>
+                                </p:cBhvr>
+                              </p:animEffect>
+                            </p:childTnLst>
+                          </p:cTn>
+                        </p:par>
+                        <p:par>
+                          <p:cTn id="31" dur="810" fill="hold" nodeType="afterEffect" grpId="0" presetID="52" presetClass="entr" presetSubtype="0">
+                            <p:stCondLst>
+                              <p:cond delay="1690"/>
+                            </p:stCondLst>
+                            <p:childTnLst>
+                              <p:set>
+                                <p:cBhvr>
+                                  <p:cTn id="32" dur="1" fill="hold">
+                                    <p:stCondLst>
+                                      <p:cond delay="0"/>
+                                    </p:stCondLst>
+                                  </p:cTn>
+                                  <p:tgtEl>
+                                    <p:spTgt spid="16"/>
+                                  </p:tgtEl>
+                                  <p:attrNameLst>
+                                    <p:attrName>style.visibility</p:attrName>
+                                  </p:attrNameLst>
+                                </p:cBhvr>
+                                <p:to>
+                                  <p:strVal val="visible"/>
+                                </p:to>
+                              </p:set>
+                              <p:animEffect transition="in" filter="randombar(horizontal)">
+                                <p:cBhvr>
+                                  <p:cTn id="311" dur="810"/>
+                                  <p:tgtEl>
+                                    <p:spTgt spid="16"/>
+                                  </p:tgtEl>
+                                </p:cBhvr>
+                              </p:animEffect>
+                            </p:childTnLst>
+                          </p:cTn>
+                        </p:par>
+                      </p:childTnLst>
+                    </p:cTn>
+                  </p:par>
+                </p:childTnLst>
+              </p:cTn>
+              <p:prevCondLst>
+                <p:cond evt="onPrev" delay="0">
+                  <p:tgtEl>
+                    <p:sldTgt/>
+                  </p:tgtEl>
+                </p:cond>
+              </p:prevCondLst>
+              <p:nextCondLst>
+                <p:cond evt="onNext" delay="0">
+                  <p:tgtEl>
+                    <p:sldTgt/>
+                  </p:tgtEl>
+                </p:cond>
+              </p:nextCondLst>
+            </p:seq>
+          </p:childTnLst>
+        </p:cTn>
+      </p:par>
+    </p:tnLst>
+  </p:timing>
 </p:sld>
 </file>
 
@@ -13239,8 +18961,537 @@
     <a:masterClrMapping/>
   </p:clrMapOvr>
   <p:transition spd="med">
-    <p:fade/>
+    <p:push dir="l"/>
   </p:transition>
+  <p:timing>
+    <p:tnLst>
+      <p:par>
+        <p:cTn id="1" dur="indefinite" restart="never" nodeType="tmRoot">
+          <p:childTnLst>
+            <p:seq concurrent="1" nextAc="seek">
+              <p:cTn id="2" dur="indefinite" nodeType="mainSeq">
+                <p:childTnLst>
+                  <p:par>
+                    <p:cTn id="3" fill="hold">
+                      <p:stCondLst>
+                        <p:cond delay="indefinite"/>
+                      </p:stCondLst>
+                      <p:childTnLst>
+                        <p:par>
+                          <p:cTn id="5" dur="810" fill="hold" nodeType="clickEffect" grpId="0" presetID="9" presetClass="entr" presetSubtype="0">
+                            <p:stCondLst>
+                              <p:cond delay="0"/>
+                            </p:stCondLst>
+                            <p:childTnLst>
+                              <p:set>
+                                <p:cBhvr>
+                                  <p:cTn id="6" dur="1" fill="hold">
+                                    <p:stCondLst>
+                                      <p:cond delay="0"/>
+                                    </p:stCondLst>
+                                  </p:cTn>
+                                  <p:tgtEl>
+                                    <p:spTgt spid="3"/>
+                                  </p:tgtEl>
+                                  <p:attrNameLst>
+                                    <p:attrName>style.visibility</p:attrName>
+                                  </p:attrNameLst>
+                                </p:cBhvr>
+                                <p:to>
+                                  <p:strVal val="visible"/>
+                                </p:to>
+                              </p:set>
+                              <p:animEffect transition="in" filter="fade">
+                                <p:cBhvr>
+                                  <p:cTn id="51" dur="810"/>
+                                  <p:tgtEl>
+                                    <p:spTgt spid="3"/>
+                                  </p:tgtEl>
+                                </p:cBhvr>
+                              </p:animEffect>
+                            </p:childTnLst>
+                          </p:cTn>
+                        </p:par>
+                        <p:par>
+                          <p:cTn id="7" dur="450" fill="hold" nodeType="afterEffect" grpId="0" presetID="22" presetClass="entr" presetSubtype="2">
+                            <p:stCondLst>
+                              <p:cond delay="130"/>
+                            </p:stCondLst>
+                            <p:childTnLst>
+                              <p:set>
+                                <p:cBhvr>
+                                  <p:cTn id="8" dur="1" fill="hold">
+                                    <p:stCondLst>
+                                      <p:cond delay="0"/>
+                                    </p:stCondLst>
+                                  </p:cTn>
+                                  <p:tgtEl>
+                                    <p:spTgt spid="4"/>
+                                  </p:tgtEl>
+                                  <p:attrNameLst>
+                                    <p:attrName>style.visibility</p:attrName>
+                                  </p:attrNameLst>
+                                </p:cBhvr>
+                                <p:to>
+                                  <p:strVal val="visible"/>
+                                </p:to>
+                              </p:set>
+                              <p:animEffect transition="in" filter="wipe(right)">
+                                <p:cBhvr>
+                                  <p:cTn id="71" dur="450"/>
+                                  <p:tgtEl>
+                                    <p:spTgt spid="4"/>
+                                  </p:tgtEl>
+                                </p:cBhvr>
+                              </p:animEffect>
+                            </p:childTnLst>
+                          </p:cTn>
+                        </p:par>
+                        <p:par>
+                          <p:cTn id="9" dur="570" fill="hold" nodeType="afterEffect" grpId="0" presetID="18" presetClass="entr" presetSubtype="12">
+                            <p:stCondLst>
+                              <p:cond delay="260"/>
+                            </p:stCondLst>
+                            <p:childTnLst>
+                              <p:set>
+                                <p:cBhvr>
+                                  <p:cTn id="10" dur="1" fill="hold">
+                                    <p:stCondLst>
+                                      <p:cond delay="0"/>
+                                    </p:stCondLst>
+                                  </p:cTn>
+                                  <p:tgtEl>
+                                    <p:spTgt spid="5"/>
+                                  </p:tgtEl>
+                                  <p:attrNameLst>
+                                    <p:attrName>style.visibility</p:attrName>
+                                  </p:attrNameLst>
+                                </p:cBhvr>
+                                <p:to>
+                                  <p:strVal val="visible"/>
+                                </p:to>
+                              </p:set>
+                              <p:animEffect transition="in" filter="circle(in)">
+                                <p:cBhvr>
+                                  <p:cTn id="91" dur="570"/>
+                                  <p:tgtEl>
+                                    <p:spTgt spid="5"/>
+                                  </p:tgtEl>
+                                </p:cBhvr>
+                              </p:animEffect>
+                            </p:childTnLst>
+                          </p:cTn>
+                        </p:par>
+                        <p:par>
+                          <p:cTn id="11" dur="690" fill="hold" nodeType="afterEffect" grpId="0" presetID="22" presetClass="entr" presetSubtype="1">
+                            <p:stCondLst>
+                              <p:cond delay="390"/>
+                            </p:stCondLst>
+                            <p:childTnLst>
+                              <p:set>
+                                <p:cBhvr>
+                                  <p:cTn id="12" dur="1" fill="hold">
+                                    <p:stCondLst>
+                                      <p:cond delay="0"/>
+                                    </p:stCondLst>
+                                  </p:cTn>
+                                  <p:tgtEl>
+                                    <p:spTgt spid="6"/>
+                                  </p:tgtEl>
+                                  <p:attrNameLst>
+                                    <p:attrName>style.visibility</p:attrName>
+                                  </p:attrNameLst>
+                                </p:cBhvr>
+                                <p:to>
+                                  <p:strVal val="visible"/>
+                                </p:to>
+                              </p:set>
+                              <p:animEffect transition="in" filter="wipe(up)">
+                                <p:cBhvr>
+                                  <p:cTn id="111" dur="690"/>
+                                  <p:tgtEl>
+                                    <p:spTgt spid="6"/>
+                                  </p:tgtEl>
+                                </p:cBhvr>
+                              </p:animEffect>
+                            </p:childTnLst>
+                          </p:cTn>
+                        </p:par>
+                        <p:par>
+                          <p:cTn id="13" dur="810" fill="hold" nodeType="afterEffect" grpId="0" presetID="42" presetClass="entr" presetSubtype="10">
+                            <p:stCondLst>
+                              <p:cond delay="520"/>
+                            </p:stCondLst>
+                            <p:childTnLst>
+                              <p:set>
+                                <p:cBhvr>
+                                  <p:cTn id="14" dur="1" fill="hold">
+                                    <p:stCondLst>
+                                      <p:cond delay="0"/>
+                                    </p:stCondLst>
+                                  </p:cTn>
+                                  <p:tgtEl>
+                                    <p:spTgt spid="7"/>
+                                  </p:tgtEl>
+                                  <p:attrNameLst>
+                                    <p:attrName>style.visibility</p:attrName>
+                                  </p:attrNameLst>
+                                </p:cBhvr>
+                                <p:to>
+                                  <p:strVal val="visible"/>
+                                </p:to>
+                              </p:set>
+                              <p:animEffect transition="in" filter="blinds(horizontal)">
+                                <p:cBhvr>
+                                  <p:cTn id="131" dur="810"/>
+                                  <p:tgtEl>
+                                    <p:spTgt spid="7"/>
+                                  </p:tgtEl>
+                                </p:cBhvr>
+                              </p:animEffect>
+                            </p:childTnLst>
+                          </p:cTn>
+                        </p:par>
+                        <p:par>
+                          <p:cTn id="15" dur="450" fill="hold" nodeType="afterEffect" grpId="0" presetID="43" presetClass="entr" presetSubtype="0">
+                            <p:stCondLst>
+                              <p:cond delay="650"/>
+                            </p:stCondLst>
+                            <p:childTnLst>
+                              <p:set>
+                                <p:cBhvr>
+                                  <p:cTn id="16" dur="1" fill="hold">
+                                    <p:stCondLst>
+                                      <p:cond delay="0"/>
+                                    </p:stCondLst>
+                                  </p:cTn>
+                                  <p:tgtEl>
+                                    <p:spTgt spid="10"/>
+                                  </p:tgtEl>
+                                  <p:attrNameLst>
+                                    <p:attrName>style.visibility</p:attrName>
+                                  </p:attrNameLst>
+                                </p:cBhvr>
+                                <p:to>
+                                  <p:strVal val="visible"/>
+                                </p:to>
+                              </p:set>
+                              <p:animEffect transition="in" filter="checkerboard(across)">
+                                <p:cBhvr>
+                                  <p:cTn id="151" dur="450"/>
+                                  <p:tgtEl>
+                                    <p:spTgt spid="10"/>
+                                  </p:tgtEl>
+                                </p:cBhvr>
+                              </p:animEffect>
+                            </p:childTnLst>
+                          </p:cTn>
+                        </p:par>
+                        <p:par>
+                          <p:cTn id="17" dur="570" fill="hold" nodeType="afterEffect" grpId="0" presetID="21" presetClass="entr" presetSubtype="2">
+                            <p:stCondLst>
+                              <p:cond delay="780"/>
+                            </p:stCondLst>
+                            <p:childTnLst>
+                              <p:set>
+                                <p:cBhvr>
+                                  <p:cTn id="18" dur="1" fill="hold">
+                                    <p:stCondLst>
+                                      <p:cond delay="0"/>
+                                    </p:stCondLst>
+                                  </p:cTn>
+                                  <p:tgtEl>
+                                    <p:spTgt spid="11"/>
+                                  </p:tgtEl>
+                                  <p:attrNameLst>
+                                    <p:attrName>style.visibility</p:attrName>
+                                  </p:attrNameLst>
+                                </p:cBhvr>
+                                <p:to>
+                                  <p:strVal val="visible"/>
+                                </p:to>
+                              </p:set>
+                              <p:animEffect transition="in" filter="wheel(2)">
+                                <p:cBhvr>
+                                  <p:cTn id="171" dur="570"/>
+                                  <p:tgtEl>
+                                    <p:spTgt spid="11"/>
+                                  </p:tgtEl>
+                                </p:cBhvr>
+                              </p:animEffect>
+                            </p:childTnLst>
+                          </p:cTn>
+                        </p:par>
+                        <p:par>
+                          <p:cTn id="19" dur="690" fill="hold" nodeType="afterEffect" grpId="0" presetID="10" presetClass="entr" presetSubtype="0">
+                            <p:stCondLst>
+                              <p:cond delay="910"/>
+                            </p:stCondLst>
+                            <p:childTnLst>
+                              <p:set>
+                                <p:cBhvr>
+                                  <p:cTn id="20" dur="1" fill="hold">
+                                    <p:stCondLst>
+                                      <p:cond delay="0"/>
+                                    </p:stCondLst>
+                                  </p:cTn>
+                                  <p:tgtEl>
+                                    <p:spTgt spid="8"/>
+                                  </p:tgtEl>
+                                  <p:attrNameLst>
+                                    <p:attrName>style.visibility</p:attrName>
+                                  </p:attrNameLst>
+                                </p:cBhvr>
+                                <p:to>
+                                  <p:strVal val="visible"/>
+                                </p:to>
+                              </p:set>
+                              <p:animEffect transition="in" filter="dissolve">
+                                <p:cBhvr>
+                                  <p:cTn id="191" dur="690"/>
+                                  <p:tgtEl>
+                                    <p:spTgt spid="8"/>
+                                  </p:tgtEl>
+                                </p:cBhvr>
+                              </p:animEffect>
+                            </p:childTnLst>
+                          </p:cTn>
+                        </p:par>
+                        <p:par>
+                          <p:cTn id="21" dur="810" fill="hold" nodeType="afterEffect" grpId="0" presetID="25" presetClass="entr" presetSubtype="1">
+                            <p:stCondLst>
+                              <p:cond delay="1040"/>
+                            </p:stCondLst>
+                            <p:childTnLst>
+                              <p:set>
+                                <p:cBhvr>
+                                  <p:cTn id="22" dur="1" fill="hold">
+                                    <p:stCondLst>
+                                      <p:cond delay="0"/>
+                                    </p:stCondLst>
+                                  </p:cTn>
+                                  <p:tgtEl>
+                                    <p:spTgt spid="12"/>
+                                  </p:tgtEl>
+                                  <p:attrNameLst>
+                                    <p:attrName>style.visibility</p:attrName>
+                                  </p:attrNameLst>
+                                </p:cBhvr>
+                                <p:to>
+                                  <p:strVal val="visible"/>
+                                </p:to>
+                              </p:set>
+                              <p:animEffect transition="in" filter="strips(downRight)">
+                                <p:cBhvr>
+                                  <p:cTn id="211" dur="810"/>
+                                  <p:tgtEl>
+                                    <p:spTgt spid="12"/>
+                                  </p:tgtEl>
+                                </p:cBhvr>
+                              </p:animEffect>
+                            </p:childTnLst>
+                          </p:cTn>
+                        </p:par>
+                        <p:par>
+                          <p:cTn id="23" dur="450" fill="hold" nodeType="afterEffect" grpId="0" presetID="45" presetClass="entr" presetSubtype="1">
+                            <p:stCondLst>
+                              <p:cond delay="1170"/>
+                            </p:stCondLst>
+                            <p:childTnLst>
+                              <p:set>
+                                <p:cBhvr>
+                                  <p:cTn id="24" dur="1" fill="hold">
+                                    <p:stCondLst>
+                                      <p:cond delay="0"/>
+                                    </p:stCondLst>
+                                  </p:cTn>
+                                  <p:tgtEl>
+                                    <p:spTgt spid="9"/>
+                                  </p:tgtEl>
+                                  <p:attrNameLst>
+                                    <p:attrName>style.visibility</p:attrName>
+                                  </p:attrNameLst>
+                                </p:cBhvr>
+                                <p:to>
+                                  <p:strVal val="visible"/>
+                                </p:to>
+                              </p:set>
+                              <p:animEffect transition="in" filter="barn(inHorizontal)">
+                                <p:cBhvr>
+                                  <p:cTn id="231" dur="450"/>
+                                  <p:tgtEl>
+                                    <p:spTgt spid="9"/>
+                                  </p:tgtEl>
+                                </p:cBhvr>
+                              </p:animEffect>
+                            </p:childTnLst>
+                          </p:cTn>
+                        </p:par>
+                        <p:par>
+                          <p:cTn id="25" dur="570" fill="hold" nodeType="afterEffect" grpId="0" presetID="22" presetClass="entr" presetSubtype="8">
+                            <p:stCondLst>
+                              <p:cond delay="1300"/>
+                            </p:stCondLst>
+                            <p:childTnLst>
+                              <p:set>
+                                <p:cBhvr>
+                                  <p:cTn id="26" dur="1" fill="hold">
+                                    <p:stCondLst>
+                                      <p:cond delay="0"/>
+                                    </p:stCondLst>
+                                  </p:cTn>
+                                  <p:tgtEl>
+                                    <p:spTgt spid="13"/>
+                                  </p:tgtEl>
+                                  <p:attrNameLst>
+                                    <p:attrName>style.visibility</p:attrName>
+                                  </p:attrNameLst>
+                                </p:cBhvr>
+                                <p:to>
+                                  <p:strVal val="visible"/>
+                                </p:to>
+                              </p:set>
+                              <p:animEffect transition="in" filter="wipe(left)">
+                                <p:cBhvr>
+                                  <p:cTn id="251" dur="570"/>
+                                  <p:tgtEl>
+                                    <p:spTgt spid="13"/>
+                                  </p:tgtEl>
+                                </p:cBhvr>
+                              </p:animEffect>
+                            </p:childTnLst>
+                          </p:cTn>
+                        </p:par>
+                        <p:par>
+                          <p:cTn id="27" dur="690" fill="hold" nodeType="afterEffect" grpId="0" presetID="37" presetClass="entr" presetSubtype="0">
+                            <p:stCondLst>
+                              <p:cond delay="1430"/>
+                            </p:stCondLst>
+                            <p:childTnLst>
+                              <p:set>
+                                <p:cBhvr>
+                                  <p:cTn id="28" dur="1" fill="hold">
+                                    <p:stCondLst>
+                                      <p:cond delay="0"/>
+                                    </p:stCondLst>
+                                  </p:cTn>
+                                  <p:tgtEl>
+                                    <p:spTgt spid="14"/>
+                                  </p:tgtEl>
+                                  <p:attrNameLst>
+                                    <p:attrName>style.visibility</p:attrName>
+                                  </p:attrNameLst>
+                                </p:cBhvr>
+                                <p:to>
+                                  <p:strVal val="visible"/>
+                                </p:to>
+                              </p:set>
+                              <p:animEffect transition="in" filter="wedge">
+                                <p:cBhvr>
+                                  <p:cTn id="271" dur="690"/>
+                                  <p:tgtEl>
+                                    <p:spTgt spid="14"/>
+                                  </p:tgtEl>
+                                </p:cBhvr>
+                              </p:animEffect>
+                            </p:childTnLst>
+                          </p:cTn>
+                        </p:par>
+                        <p:par>
+                          <p:cTn id="29" dur="810" fill="hold" nodeType="afterEffect" grpId="0" presetID="52" presetClass="entr" presetSubtype="0">
+                            <p:stCondLst>
+                              <p:cond delay="1560"/>
+                            </p:stCondLst>
+                            <p:childTnLst>
+                              <p:set>
+                                <p:cBhvr>
+                                  <p:cTn id="30" dur="1" fill="hold">
+                                    <p:stCondLst>
+                                      <p:cond delay="0"/>
+                                    </p:stCondLst>
+                                  </p:cTn>
+                                  <p:tgtEl>
+                                    <p:spTgt spid="15"/>
+                                  </p:tgtEl>
+                                  <p:attrNameLst>
+                                    <p:attrName>style.visibility</p:attrName>
+                                  </p:attrNameLst>
+                                </p:cBhvr>
+                                <p:to>
+                                  <p:strVal val="visible"/>
+                                </p:to>
+                              </p:set>
+                              <p:animEffect transition="in" filter="randombar(horizontal)">
+                                <p:cBhvr>
+                                  <p:cTn id="291" dur="810"/>
+                                  <p:tgtEl>
+                                    <p:spTgt spid="15"/>
+                                  </p:tgtEl>
+                                </p:cBhvr>
+                              </p:animEffect>
+                            </p:childTnLst>
+                          </p:cTn>
+                        </p:par>
+                        <p:par>
+                          <p:cTn id="31" dur="450" fill="hold" nodeType="afterEffect" grpId="0" presetID="21" presetClass="entr" presetSubtype="1">
+                            <p:stCondLst>
+                              <p:cond delay="1690"/>
+                            </p:stCondLst>
+                            <p:childTnLst>
+                              <p:set>
+                                <p:cBhvr>
+                                  <p:cTn id="32" dur="1" fill="hold">
+                                    <p:stCondLst>
+                                      <p:cond delay="0"/>
+                                    </p:stCondLst>
+                                  </p:cTn>
+                                  <p:tgtEl>
+                                    <p:spTgt spid="16"/>
+                                  </p:tgtEl>
+                                  <p:attrNameLst>
+                                    <p:attrName>style.visibility</p:attrName>
+                                  </p:attrNameLst>
+                                </p:cBhvr>
+                                <p:to>
+                                  <p:strVal val="visible"/>
+                                </p:to>
+                              </p:set>
+                              <p:animEffect transition="in" filter="wheel(1)">
+                                <p:cBhvr>
+                                  <p:cTn id="311" dur="450"/>
+                                  <p:tgtEl>
+                                    <p:spTgt spid="16"/>
+                                  </p:tgtEl>
+                                </p:cBhvr>
+                              </p:animEffect>
+                            </p:childTnLst>
+                          </p:cTn>
+                        </p:par>
+                      </p:childTnLst>
+                    </p:cTn>
+                  </p:par>
+                </p:childTnLst>
+              </p:cTn>
+              <p:prevCondLst>
+                <p:cond evt="onPrev" delay="0">
+                  <p:tgtEl>
+                    <p:sldTgt/>
+                  </p:tgtEl>
+                </p:cond>
+              </p:prevCondLst>
+              <p:nextCondLst>
+                <p:cond evt="onNext" delay="0">
+                  <p:tgtEl>
+                    <p:sldTgt/>
+                  </p:tgtEl>
+                </p:cond>
+              </p:nextCondLst>
+            </p:seq>
+          </p:childTnLst>
+        </p:cTn>
+      </p:par>
+    </p:tnLst>
+  </p:timing>
 </p:sld>
 </file>
 
@@ -14420,8 +20671,537 @@
     <a:masterClrMapping/>
   </p:clrMapOvr>
   <p:transition spd="med">
-    <p:fade/>
+    <p:wipe dir="u"/>
   </p:transition>
+  <p:timing>
+    <p:tnLst>
+      <p:par>
+        <p:cTn id="1" dur="indefinite" restart="never" nodeType="tmRoot">
+          <p:childTnLst>
+            <p:seq concurrent="1" nextAc="seek">
+              <p:cTn id="2" dur="indefinite" nodeType="mainSeq">
+                <p:childTnLst>
+                  <p:par>
+                    <p:cTn id="3" fill="hold">
+                      <p:stCondLst>
+                        <p:cond delay="indefinite"/>
+                      </p:stCondLst>
+                      <p:childTnLst>
+                        <p:par>
+                          <p:cTn id="5" dur="450" fill="hold" nodeType="clickEffect" grpId="0" presetID="22" presetClass="entr" presetSubtype="2">
+                            <p:stCondLst>
+                              <p:cond delay="0"/>
+                            </p:stCondLst>
+                            <p:childTnLst>
+                              <p:set>
+                                <p:cBhvr>
+                                  <p:cTn id="6" dur="1" fill="hold">
+                                    <p:stCondLst>
+                                      <p:cond delay="0"/>
+                                    </p:stCondLst>
+                                  </p:cTn>
+                                  <p:tgtEl>
+                                    <p:spTgt spid="3"/>
+                                  </p:tgtEl>
+                                  <p:attrNameLst>
+                                    <p:attrName>style.visibility</p:attrName>
+                                  </p:attrNameLst>
+                                </p:cBhvr>
+                                <p:to>
+                                  <p:strVal val="visible"/>
+                                </p:to>
+                              </p:set>
+                              <p:animEffect transition="in" filter="wipe(right)">
+                                <p:cBhvr>
+                                  <p:cTn id="51" dur="450"/>
+                                  <p:tgtEl>
+                                    <p:spTgt spid="3"/>
+                                  </p:tgtEl>
+                                </p:cBhvr>
+                              </p:animEffect>
+                            </p:childTnLst>
+                          </p:cTn>
+                        </p:par>
+                        <p:par>
+                          <p:cTn id="7" dur="570" fill="hold" nodeType="afterEffect" grpId="0" presetID="18" presetClass="entr" presetSubtype="12">
+                            <p:stCondLst>
+                              <p:cond delay="130"/>
+                            </p:stCondLst>
+                            <p:childTnLst>
+                              <p:set>
+                                <p:cBhvr>
+                                  <p:cTn id="8" dur="1" fill="hold">
+                                    <p:stCondLst>
+                                      <p:cond delay="0"/>
+                                    </p:stCondLst>
+                                  </p:cTn>
+                                  <p:tgtEl>
+                                    <p:spTgt spid="4"/>
+                                  </p:tgtEl>
+                                  <p:attrNameLst>
+                                    <p:attrName>style.visibility</p:attrName>
+                                  </p:attrNameLst>
+                                </p:cBhvr>
+                                <p:to>
+                                  <p:strVal val="visible"/>
+                                </p:to>
+                              </p:set>
+                              <p:animEffect transition="in" filter="circle(in)">
+                                <p:cBhvr>
+                                  <p:cTn id="71" dur="570"/>
+                                  <p:tgtEl>
+                                    <p:spTgt spid="4"/>
+                                  </p:tgtEl>
+                                </p:cBhvr>
+                              </p:animEffect>
+                            </p:childTnLst>
+                          </p:cTn>
+                        </p:par>
+                        <p:par>
+                          <p:cTn id="9" dur="690" fill="hold" nodeType="afterEffect" grpId="0" presetID="22" presetClass="entr" presetSubtype="1">
+                            <p:stCondLst>
+                              <p:cond delay="260"/>
+                            </p:stCondLst>
+                            <p:childTnLst>
+                              <p:set>
+                                <p:cBhvr>
+                                  <p:cTn id="10" dur="1" fill="hold">
+                                    <p:stCondLst>
+                                      <p:cond delay="0"/>
+                                    </p:stCondLst>
+                                  </p:cTn>
+                                  <p:tgtEl>
+                                    <p:spTgt spid="5"/>
+                                  </p:tgtEl>
+                                  <p:attrNameLst>
+                                    <p:attrName>style.visibility</p:attrName>
+                                  </p:attrNameLst>
+                                </p:cBhvr>
+                                <p:to>
+                                  <p:strVal val="visible"/>
+                                </p:to>
+                              </p:set>
+                              <p:animEffect transition="in" filter="wipe(up)">
+                                <p:cBhvr>
+                                  <p:cTn id="91" dur="690"/>
+                                  <p:tgtEl>
+                                    <p:spTgt spid="5"/>
+                                  </p:tgtEl>
+                                </p:cBhvr>
+                              </p:animEffect>
+                            </p:childTnLst>
+                          </p:cTn>
+                        </p:par>
+                        <p:par>
+                          <p:cTn id="11" dur="810" fill="hold" nodeType="afterEffect" grpId="0" presetID="42" presetClass="entr" presetSubtype="10">
+                            <p:stCondLst>
+                              <p:cond delay="390"/>
+                            </p:stCondLst>
+                            <p:childTnLst>
+                              <p:set>
+                                <p:cBhvr>
+                                  <p:cTn id="12" dur="1" fill="hold">
+                                    <p:stCondLst>
+                                      <p:cond delay="0"/>
+                                    </p:stCondLst>
+                                  </p:cTn>
+                                  <p:tgtEl>
+                                    <p:spTgt spid="6"/>
+                                  </p:tgtEl>
+                                  <p:attrNameLst>
+                                    <p:attrName>style.visibility</p:attrName>
+                                  </p:attrNameLst>
+                                </p:cBhvr>
+                                <p:to>
+                                  <p:strVal val="visible"/>
+                                </p:to>
+                              </p:set>
+                              <p:animEffect transition="in" filter="blinds(horizontal)">
+                                <p:cBhvr>
+                                  <p:cTn id="111" dur="810"/>
+                                  <p:tgtEl>
+                                    <p:spTgt spid="6"/>
+                                  </p:tgtEl>
+                                </p:cBhvr>
+                              </p:animEffect>
+                            </p:childTnLst>
+                          </p:cTn>
+                        </p:par>
+                        <p:par>
+                          <p:cTn id="13" dur="450" fill="hold" nodeType="afterEffect" grpId="0" presetID="43" presetClass="entr" presetSubtype="0">
+                            <p:stCondLst>
+                              <p:cond delay="520"/>
+                            </p:stCondLst>
+                            <p:childTnLst>
+                              <p:set>
+                                <p:cBhvr>
+                                  <p:cTn id="14" dur="1" fill="hold">
+                                    <p:stCondLst>
+                                      <p:cond delay="0"/>
+                                    </p:stCondLst>
+                                  </p:cTn>
+                                  <p:tgtEl>
+                                    <p:spTgt spid="11"/>
+                                  </p:tgtEl>
+                                  <p:attrNameLst>
+                                    <p:attrName>style.visibility</p:attrName>
+                                  </p:attrNameLst>
+                                </p:cBhvr>
+                                <p:to>
+                                  <p:strVal val="visible"/>
+                                </p:to>
+                              </p:set>
+                              <p:animEffect transition="in" filter="checkerboard(across)">
+                                <p:cBhvr>
+                                  <p:cTn id="131" dur="450"/>
+                                  <p:tgtEl>
+                                    <p:spTgt spid="11"/>
+                                  </p:tgtEl>
+                                </p:cBhvr>
+                              </p:animEffect>
+                            </p:childTnLst>
+                          </p:cTn>
+                        </p:par>
+                        <p:par>
+                          <p:cTn id="15" dur="570" fill="hold" nodeType="afterEffect" grpId="0" presetID="21" presetClass="entr" presetSubtype="2">
+                            <p:stCondLst>
+                              <p:cond delay="650"/>
+                            </p:stCondLst>
+                            <p:childTnLst>
+                              <p:set>
+                                <p:cBhvr>
+                                  <p:cTn id="16" dur="1" fill="hold">
+                                    <p:stCondLst>
+                                      <p:cond delay="0"/>
+                                    </p:stCondLst>
+                                  </p:cTn>
+                                  <p:tgtEl>
+                                    <p:spTgt spid="16"/>
+                                  </p:tgtEl>
+                                  <p:attrNameLst>
+                                    <p:attrName>style.visibility</p:attrName>
+                                  </p:attrNameLst>
+                                </p:cBhvr>
+                                <p:to>
+                                  <p:strVal val="visible"/>
+                                </p:to>
+                              </p:set>
+                              <p:animEffect transition="in" filter="wheel(2)">
+                                <p:cBhvr>
+                                  <p:cTn id="151" dur="570"/>
+                                  <p:tgtEl>
+                                    <p:spTgt spid="16"/>
+                                  </p:tgtEl>
+                                </p:cBhvr>
+                              </p:animEffect>
+                            </p:childTnLst>
+                          </p:cTn>
+                        </p:par>
+                        <p:par>
+                          <p:cTn id="17" dur="690" fill="hold" nodeType="afterEffect" grpId="0" presetID="10" presetClass="entr" presetSubtype="0">
+                            <p:stCondLst>
+                              <p:cond delay="780"/>
+                            </p:stCondLst>
+                            <p:childTnLst>
+                              <p:set>
+                                <p:cBhvr>
+                                  <p:cTn id="18" dur="1" fill="hold">
+                                    <p:stCondLst>
+                                      <p:cond delay="0"/>
+                                    </p:stCondLst>
+                                  </p:cTn>
+                                  <p:tgtEl>
+                                    <p:spTgt spid="21"/>
+                                  </p:tgtEl>
+                                  <p:attrNameLst>
+                                    <p:attrName>style.visibility</p:attrName>
+                                  </p:attrNameLst>
+                                </p:cBhvr>
+                                <p:to>
+                                  <p:strVal val="visible"/>
+                                </p:to>
+                              </p:set>
+                              <p:animEffect transition="in" filter="dissolve">
+                                <p:cBhvr>
+                                  <p:cTn id="171" dur="690"/>
+                                  <p:tgtEl>
+                                    <p:spTgt spid="21"/>
+                                  </p:tgtEl>
+                                </p:cBhvr>
+                              </p:animEffect>
+                            </p:childTnLst>
+                          </p:cTn>
+                        </p:par>
+                        <p:par>
+                          <p:cTn id="19" dur="810" fill="hold" nodeType="afterEffect" grpId="0" presetID="25" presetClass="entr" presetSubtype="1">
+                            <p:stCondLst>
+                              <p:cond delay="910"/>
+                            </p:stCondLst>
+                            <p:childTnLst>
+                              <p:set>
+                                <p:cBhvr>
+                                  <p:cTn id="20" dur="1" fill="hold">
+                                    <p:stCondLst>
+                                      <p:cond delay="0"/>
+                                    </p:stCondLst>
+                                  </p:cTn>
+                                  <p:tgtEl>
+                                    <p:spTgt spid="7"/>
+                                  </p:tgtEl>
+                                  <p:attrNameLst>
+                                    <p:attrName>style.visibility</p:attrName>
+                                  </p:attrNameLst>
+                                </p:cBhvr>
+                                <p:to>
+                                  <p:strVal val="visible"/>
+                                </p:to>
+                              </p:set>
+                              <p:animEffect transition="in" filter="strips(downRight)">
+                                <p:cBhvr>
+                                  <p:cTn id="191" dur="810"/>
+                                  <p:tgtEl>
+                                    <p:spTgt spid="7"/>
+                                  </p:tgtEl>
+                                </p:cBhvr>
+                              </p:animEffect>
+                            </p:childTnLst>
+                          </p:cTn>
+                        </p:par>
+                        <p:par>
+                          <p:cTn id="21" dur="450" fill="hold" nodeType="afterEffect" grpId="0" presetID="45" presetClass="entr" presetSubtype="1">
+                            <p:stCondLst>
+                              <p:cond delay="1040"/>
+                            </p:stCondLst>
+                            <p:childTnLst>
+                              <p:set>
+                                <p:cBhvr>
+                                  <p:cTn id="22" dur="1" fill="hold">
+                                    <p:stCondLst>
+                                      <p:cond delay="0"/>
+                                    </p:stCondLst>
+                                  </p:cTn>
+                                  <p:tgtEl>
+                                    <p:spTgt spid="12"/>
+                                  </p:tgtEl>
+                                  <p:attrNameLst>
+                                    <p:attrName>style.visibility</p:attrName>
+                                  </p:attrNameLst>
+                                </p:cBhvr>
+                                <p:to>
+                                  <p:strVal val="visible"/>
+                                </p:to>
+                              </p:set>
+                              <p:animEffect transition="in" filter="barn(inHorizontal)">
+                                <p:cBhvr>
+                                  <p:cTn id="211" dur="450"/>
+                                  <p:tgtEl>
+                                    <p:spTgt spid="12"/>
+                                  </p:tgtEl>
+                                </p:cBhvr>
+                              </p:animEffect>
+                            </p:childTnLst>
+                          </p:cTn>
+                        </p:par>
+                        <p:par>
+                          <p:cTn id="23" dur="570" fill="hold" nodeType="afterEffect" grpId="0" presetID="22" presetClass="entr" presetSubtype="8">
+                            <p:stCondLst>
+                              <p:cond delay="1170"/>
+                            </p:stCondLst>
+                            <p:childTnLst>
+                              <p:set>
+                                <p:cBhvr>
+                                  <p:cTn id="24" dur="1" fill="hold">
+                                    <p:stCondLst>
+                                      <p:cond delay="0"/>
+                                    </p:stCondLst>
+                                  </p:cTn>
+                                  <p:tgtEl>
+                                    <p:spTgt spid="17"/>
+                                  </p:tgtEl>
+                                  <p:attrNameLst>
+                                    <p:attrName>style.visibility</p:attrName>
+                                  </p:attrNameLst>
+                                </p:cBhvr>
+                                <p:to>
+                                  <p:strVal val="visible"/>
+                                </p:to>
+                              </p:set>
+                              <p:animEffect transition="in" filter="wipe(left)">
+                                <p:cBhvr>
+                                  <p:cTn id="231" dur="570"/>
+                                  <p:tgtEl>
+                                    <p:spTgt spid="17"/>
+                                  </p:tgtEl>
+                                </p:cBhvr>
+                              </p:animEffect>
+                            </p:childTnLst>
+                          </p:cTn>
+                        </p:par>
+                        <p:par>
+                          <p:cTn id="25" dur="690" fill="hold" nodeType="afterEffect" grpId="0" presetID="37" presetClass="entr" presetSubtype="0">
+                            <p:stCondLst>
+                              <p:cond delay="1300"/>
+                            </p:stCondLst>
+                            <p:childTnLst>
+                              <p:set>
+                                <p:cBhvr>
+                                  <p:cTn id="26" dur="1" fill="hold">
+                                    <p:stCondLst>
+                                      <p:cond delay="0"/>
+                                    </p:stCondLst>
+                                  </p:cTn>
+                                  <p:tgtEl>
+                                    <p:spTgt spid="22"/>
+                                  </p:tgtEl>
+                                  <p:attrNameLst>
+                                    <p:attrName>style.visibility</p:attrName>
+                                  </p:attrNameLst>
+                                </p:cBhvr>
+                                <p:to>
+                                  <p:strVal val="visible"/>
+                                </p:to>
+                              </p:set>
+                              <p:animEffect transition="in" filter="wedge">
+                                <p:cBhvr>
+                                  <p:cTn id="251" dur="690"/>
+                                  <p:tgtEl>
+                                    <p:spTgt spid="22"/>
+                                  </p:tgtEl>
+                                </p:cBhvr>
+                              </p:animEffect>
+                            </p:childTnLst>
+                          </p:cTn>
+                        </p:par>
+                        <p:par>
+                          <p:cTn id="27" dur="810" fill="hold" nodeType="afterEffect" grpId="0" presetID="52" presetClass="entr" presetSubtype="0">
+                            <p:stCondLst>
+                              <p:cond delay="1430"/>
+                            </p:stCondLst>
+                            <p:childTnLst>
+                              <p:set>
+                                <p:cBhvr>
+                                  <p:cTn id="28" dur="1" fill="hold">
+                                    <p:stCondLst>
+                                      <p:cond delay="0"/>
+                                    </p:stCondLst>
+                                  </p:cTn>
+                                  <p:tgtEl>
+                                    <p:spTgt spid="8"/>
+                                  </p:tgtEl>
+                                  <p:attrNameLst>
+                                    <p:attrName>style.visibility</p:attrName>
+                                  </p:attrNameLst>
+                                </p:cBhvr>
+                                <p:to>
+                                  <p:strVal val="visible"/>
+                                </p:to>
+                              </p:set>
+                              <p:animEffect transition="in" filter="randombar(horizontal)">
+                                <p:cBhvr>
+                                  <p:cTn id="271" dur="810"/>
+                                  <p:tgtEl>
+                                    <p:spTgt spid="8"/>
+                                  </p:tgtEl>
+                                </p:cBhvr>
+                              </p:animEffect>
+                            </p:childTnLst>
+                          </p:cTn>
+                        </p:par>
+                        <p:par>
+                          <p:cTn id="29" dur="450" fill="hold" nodeType="afterEffect" grpId="0" presetID="21" presetClass="entr" presetSubtype="1">
+                            <p:stCondLst>
+                              <p:cond delay="1560"/>
+                            </p:stCondLst>
+                            <p:childTnLst>
+                              <p:set>
+                                <p:cBhvr>
+                                  <p:cTn id="30" dur="1" fill="hold">
+                                    <p:stCondLst>
+                                      <p:cond delay="0"/>
+                                    </p:stCondLst>
+                                  </p:cTn>
+                                  <p:tgtEl>
+                                    <p:spTgt spid="13"/>
+                                  </p:tgtEl>
+                                  <p:attrNameLst>
+                                    <p:attrName>style.visibility</p:attrName>
+                                  </p:attrNameLst>
+                                </p:cBhvr>
+                                <p:to>
+                                  <p:strVal val="visible"/>
+                                </p:to>
+                              </p:set>
+                              <p:animEffect transition="in" filter="wheel(1)">
+                                <p:cBhvr>
+                                  <p:cTn id="291" dur="450"/>
+                                  <p:tgtEl>
+                                    <p:spTgt spid="13"/>
+                                  </p:tgtEl>
+                                </p:cBhvr>
+                              </p:animEffect>
+                            </p:childTnLst>
+                          </p:cTn>
+                        </p:par>
+                        <p:par>
+                          <p:cTn id="31" dur="570" fill="hold" nodeType="afterEffect" grpId="0" presetID="22" presetClass="entr" presetSubtype="4">
+                            <p:stCondLst>
+                              <p:cond delay="1690"/>
+                            </p:stCondLst>
+                            <p:childTnLst>
+                              <p:set>
+                                <p:cBhvr>
+                                  <p:cTn id="32" dur="1" fill="hold">
+                                    <p:stCondLst>
+                                      <p:cond delay="0"/>
+                                    </p:stCondLst>
+                                  </p:cTn>
+                                  <p:tgtEl>
+                                    <p:spTgt spid="18"/>
+                                  </p:tgtEl>
+                                  <p:attrNameLst>
+                                    <p:attrName>style.visibility</p:attrName>
+                                  </p:attrNameLst>
+                                </p:cBhvr>
+                                <p:to>
+                                  <p:strVal val="visible"/>
+                                </p:to>
+                              </p:set>
+                              <p:animEffect transition="in" filter="wipe(down)">
+                                <p:cBhvr>
+                                  <p:cTn id="311" dur="570"/>
+                                  <p:tgtEl>
+                                    <p:spTgt spid="18"/>
+                                  </p:tgtEl>
+                                </p:cBhvr>
+                              </p:animEffect>
+                            </p:childTnLst>
+                          </p:cTn>
+                        </p:par>
+                      </p:childTnLst>
+                    </p:cTn>
+                  </p:par>
+                </p:childTnLst>
+              </p:cTn>
+              <p:prevCondLst>
+                <p:cond evt="onPrev" delay="0">
+                  <p:tgtEl>
+                    <p:sldTgt/>
+                  </p:tgtEl>
+                </p:cond>
+              </p:prevCondLst>
+              <p:nextCondLst>
+                <p:cond evt="onNext" delay="0">
+                  <p:tgtEl>
+                    <p:sldTgt/>
+                  </p:tgtEl>
+                </p:cond>
+              </p:nextCondLst>
+            </p:seq>
+          </p:childTnLst>
+        </p:cTn>
+      </p:par>
+    </p:tnLst>
+  </p:timing>
 </p:sld>
 </file>
 
@@ -15445,8 +22225,537 @@
     <a:masterClrMapping/>
   </p:clrMapOvr>
   <p:transition spd="med">
-    <p:fade/>
+    <p:split orient="horz"/>
   </p:transition>
+  <p:timing>
+    <p:tnLst>
+      <p:par>
+        <p:cTn id="1" dur="indefinite" restart="never" nodeType="tmRoot">
+          <p:childTnLst>
+            <p:seq concurrent="1" nextAc="seek">
+              <p:cTn id="2" dur="indefinite" nodeType="mainSeq">
+                <p:childTnLst>
+                  <p:par>
+                    <p:cTn id="3" fill="hold">
+                      <p:stCondLst>
+                        <p:cond delay="indefinite"/>
+                      </p:stCondLst>
+                      <p:childTnLst>
+                        <p:par>
+                          <p:cTn id="5" dur="570" fill="hold" nodeType="clickEffect" grpId="0" presetID="18" presetClass="entr" presetSubtype="12">
+                            <p:stCondLst>
+                              <p:cond delay="0"/>
+                            </p:stCondLst>
+                            <p:childTnLst>
+                              <p:set>
+                                <p:cBhvr>
+                                  <p:cTn id="6" dur="1" fill="hold">
+                                    <p:stCondLst>
+                                      <p:cond delay="0"/>
+                                    </p:stCondLst>
+                                  </p:cTn>
+                                  <p:tgtEl>
+                                    <p:spTgt spid="3"/>
+                                  </p:tgtEl>
+                                  <p:attrNameLst>
+                                    <p:attrName>style.visibility</p:attrName>
+                                  </p:attrNameLst>
+                                </p:cBhvr>
+                                <p:to>
+                                  <p:strVal val="visible"/>
+                                </p:to>
+                              </p:set>
+                              <p:animEffect transition="in" filter="circle(in)">
+                                <p:cBhvr>
+                                  <p:cTn id="51" dur="570"/>
+                                  <p:tgtEl>
+                                    <p:spTgt spid="3"/>
+                                  </p:tgtEl>
+                                </p:cBhvr>
+                              </p:animEffect>
+                            </p:childTnLst>
+                          </p:cTn>
+                        </p:par>
+                        <p:par>
+                          <p:cTn id="7" dur="690" fill="hold" nodeType="afterEffect" grpId="0" presetID="22" presetClass="entr" presetSubtype="1">
+                            <p:stCondLst>
+                              <p:cond delay="130"/>
+                            </p:stCondLst>
+                            <p:childTnLst>
+                              <p:set>
+                                <p:cBhvr>
+                                  <p:cTn id="8" dur="1" fill="hold">
+                                    <p:stCondLst>
+                                      <p:cond delay="0"/>
+                                    </p:stCondLst>
+                                  </p:cTn>
+                                  <p:tgtEl>
+                                    <p:spTgt spid="4"/>
+                                  </p:tgtEl>
+                                  <p:attrNameLst>
+                                    <p:attrName>style.visibility</p:attrName>
+                                  </p:attrNameLst>
+                                </p:cBhvr>
+                                <p:to>
+                                  <p:strVal val="visible"/>
+                                </p:to>
+                              </p:set>
+                              <p:animEffect transition="in" filter="wipe(up)">
+                                <p:cBhvr>
+                                  <p:cTn id="71" dur="690"/>
+                                  <p:tgtEl>
+                                    <p:spTgt spid="4"/>
+                                  </p:tgtEl>
+                                </p:cBhvr>
+                              </p:animEffect>
+                            </p:childTnLst>
+                          </p:cTn>
+                        </p:par>
+                        <p:par>
+                          <p:cTn id="9" dur="810" fill="hold" nodeType="afterEffect" grpId="0" presetID="42" presetClass="entr" presetSubtype="10">
+                            <p:stCondLst>
+                              <p:cond delay="260"/>
+                            </p:stCondLst>
+                            <p:childTnLst>
+                              <p:set>
+                                <p:cBhvr>
+                                  <p:cTn id="10" dur="1" fill="hold">
+                                    <p:stCondLst>
+                                      <p:cond delay="0"/>
+                                    </p:stCondLst>
+                                  </p:cTn>
+                                  <p:tgtEl>
+                                    <p:spTgt spid="5"/>
+                                  </p:tgtEl>
+                                  <p:attrNameLst>
+                                    <p:attrName>style.visibility</p:attrName>
+                                  </p:attrNameLst>
+                                </p:cBhvr>
+                                <p:to>
+                                  <p:strVal val="visible"/>
+                                </p:to>
+                              </p:set>
+                              <p:animEffect transition="in" filter="blinds(horizontal)">
+                                <p:cBhvr>
+                                  <p:cTn id="91" dur="810"/>
+                                  <p:tgtEl>
+                                    <p:spTgt spid="5"/>
+                                  </p:tgtEl>
+                                </p:cBhvr>
+                              </p:animEffect>
+                            </p:childTnLst>
+                          </p:cTn>
+                        </p:par>
+                        <p:par>
+                          <p:cTn id="11" dur="450" fill="hold" nodeType="afterEffect" grpId="0" presetID="43" presetClass="entr" presetSubtype="0">
+                            <p:stCondLst>
+                              <p:cond delay="390"/>
+                            </p:stCondLst>
+                            <p:childTnLst>
+                              <p:set>
+                                <p:cBhvr>
+                                  <p:cTn id="12" dur="1" fill="hold">
+                                    <p:stCondLst>
+                                      <p:cond delay="0"/>
+                                    </p:stCondLst>
+                                  </p:cTn>
+                                  <p:tgtEl>
+                                    <p:spTgt spid="9"/>
+                                  </p:tgtEl>
+                                  <p:attrNameLst>
+                                    <p:attrName>style.visibility</p:attrName>
+                                  </p:attrNameLst>
+                                </p:cBhvr>
+                                <p:to>
+                                  <p:strVal val="visible"/>
+                                </p:to>
+                              </p:set>
+                              <p:animEffect transition="in" filter="checkerboard(across)">
+                                <p:cBhvr>
+                                  <p:cTn id="111" dur="450"/>
+                                  <p:tgtEl>
+                                    <p:spTgt spid="9"/>
+                                  </p:tgtEl>
+                                </p:cBhvr>
+                              </p:animEffect>
+                            </p:childTnLst>
+                          </p:cTn>
+                        </p:par>
+                        <p:par>
+                          <p:cTn id="13" dur="570" fill="hold" nodeType="afterEffect" grpId="0" presetID="21" presetClass="entr" presetSubtype="2">
+                            <p:stCondLst>
+                              <p:cond delay="520"/>
+                            </p:stCondLst>
+                            <p:childTnLst>
+                              <p:set>
+                                <p:cBhvr>
+                                  <p:cTn id="14" dur="1" fill="hold">
+                                    <p:stCondLst>
+                                      <p:cond delay="0"/>
+                                    </p:stCondLst>
+                                  </p:cTn>
+                                  <p:tgtEl>
+                                    <p:spTgt spid="17"/>
+                                  </p:tgtEl>
+                                  <p:attrNameLst>
+                                    <p:attrName>style.visibility</p:attrName>
+                                  </p:attrNameLst>
+                                </p:cBhvr>
+                                <p:to>
+                                  <p:strVal val="visible"/>
+                                </p:to>
+                              </p:set>
+                              <p:animEffect transition="in" filter="wheel(2)">
+                                <p:cBhvr>
+                                  <p:cTn id="131" dur="570"/>
+                                  <p:tgtEl>
+                                    <p:spTgt spid="17"/>
+                                  </p:tgtEl>
+                                </p:cBhvr>
+                              </p:animEffect>
+                            </p:childTnLst>
+                          </p:cTn>
+                        </p:par>
+                        <p:par>
+                          <p:cTn id="15" dur="690" fill="hold" nodeType="afterEffect" grpId="0" presetID="10" presetClass="entr" presetSubtype="0">
+                            <p:stCondLst>
+                              <p:cond delay="650"/>
+                            </p:stCondLst>
+                            <p:childTnLst>
+                              <p:set>
+                                <p:cBhvr>
+                                  <p:cTn id="16" dur="1" fill="hold">
+                                    <p:stCondLst>
+                                      <p:cond delay="0"/>
+                                    </p:stCondLst>
+                                  </p:cTn>
+                                  <p:tgtEl>
+                                    <p:spTgt spid="10"/>
+                                  </p:tgtEl>
+                                  <p:attrNameLst>
+                                    <p:attrName>style.visibility</p:attrName>
+                                  </p:attrNameLst>
+                                </p:cBhvr>
+                                <p:to>
+                                  <p:strVal val="visible"/>
+                                </p:to>
+                              </p:set>
+                              <p:animEffect transition="in" filter="dissolve">
+                                <p:cBhvr>
+                                  <p:cTn id="151" dur="690"/>
+                                  <p:tgtEl>
+                                    <p:spTgt spid="10"/>
+                                  </p:tgtEl>
+                                </p:cBhvr>
+                              </p:animEffect>
+                            </p:childTnLst>
+                          </p:cTn>
+                        </p:par>
+                        <p:par>
+                          <p:cTn id="17" dur="810" fill="hold" nodeType="afterEffect" grpId="0" presetID="25" presetClass="entr" presetSubtype="1">
+                            <p:stCondLst>
+                              <p:cond delay="780"/>
+                            </p:stCondLst>
+                            <p:childTnLst>
+                              <p:set>
+                                <p:cBhvr>
+                                  <p:cTn id="18" dur="1" fill="hold">
+                                    <p:stCondLst>
+                                      <p:cond delay="0"/>
+                                    </p:stCondLst>
+                                  </p:cTn>
+                                  <p:tgtEl>
+                                    <p:spTgt spid="18"/>
+                                  </p:tgtEl>
+                                  <p:attrNameLst>
+                                    <p:attrName>style.visibility</p:attrName>
+                                  </p:attrNameLst>
+                                </p:cBhvr>
+                                <p:to>
+                                  <p:strVal val="visible"/>
+                                </p:to>
+                              </p:set>
+                              <p:animEffect transition="in" filter="strips(downRight)">
+                                <p:cBhvr>
+                                  <p:cTn id="171" dur="810"/>
+                                  <p:tgtEl>
+                                    <p:spTgt spid="18"/>
+                                  </p:tgtEl>
+                                </p:cBhvr>
+                              </p:animEffect>
+                            </p:childTnLst>
+                          </p:cTn>
+                        </p:par>
+                        <p:par>
+                          <p:cTn id="19" dur="450" fill="hold" nodeType="afterEffect" grpId="0" presetID="45" presetClass="entr" presetSubtype="1">
+                            <p:stCondLst>
+                              <p:cond delay="910"/>
+                            </p:stCondLst>
+                            <p:childTnLst>
+                              <p:set>
+                                <p:cBhvr>
+                                  <p:cTn id="20" dur="1" fill="hold">
+                                    <p:stCondLst>
+                                      <p:cond delay="0"/>
+                                    </p:stCondLst>
+                                  </p:cTn>
+                                  <p:tgtEl>
+                                    <p:spTgt spid="8"/>
+                                  </p:tgtEl>
+                                  <p:attrNameLst>
+                                    <p:attrName>style.visibility</p:attrName>
+                                  </p:attrNameLst>
+                                </p:cBhvr>
+                                <p:to>
+                                  <p:strVal val="visible"/>
+                                </p:to>
+                              </p:set>
+                              <p:animEffect transition="in" filter="barn(inHorizontal)">
+                                <p:cBhvr>
+                                  <p:cTn id="191" dur="450"/>
+                                  <p:tgtEl>
+                                    <p:spTgt spid="8"/>
+                                  </p:tgtEl>
+                                </p:cBhvr>
+                              </p:animEffect>
+                            </p:childTnLst>
+                          </p:cTn>
+                        </p:par>
+                        <p:par>
+                          <p:cTn id="21" dur="570" fill="hold" nodeType="afterEffect" grpId="0" presetID="22" presetClass="entr" presetSubtype="8">
+                            <p:stCondLst>
+                              <p:cond delay="1040"/>
+                            </p:stCondLst>
+                            <p:childTnLst>
+                              <p:set>
+                                <p:cBhvr>
+                                  <p:cTn id="22" dur="1" fill="hold">
+                                    <p:stCondLst>
+                                      <p:cond delay="0"/>
+                                    </p:stCondLst>
+                                  </p:cTn>
+                                  <p:tgtEl>
+                                    <p:spTgt spid="16"/>
+                                  </p:tgtEl>
+                                  <p:attrNameLst>
+                                    <p:attrName>style.visibility</p:attrName>
+                                  </p:attrNameLst>
+                                </p:cBhvr>
+                                <p:to>
+                                  <p:strVal val="visible"/>
+                                </p:to>
+                              </p:set>
+                              <p:animEffect transition="in" filter="wipe(left)">
+                                <p:cBhvr>
+                                  <p:cTn id="211" dur="570"/>
+                                  <p:tgtEl>
+                                    <p:spTgt spid="16"/>
+                                  </p:tgtEl>
+                                </p:cBhvr>
+                              </p:animEffect>
+                            </p:childTnLst>
+                          </p:cTn>
+                        </p:par>
+                        <p:par>
+                          <p:cTn id="23" dur="690" fill="hold" nodeType="afterEffect" grpId="0" presetID="37" presetClass="entr" presetSubtype="0">
+                            <p:stCondLst>
+                              <p:cond delay="1170"/>
+                            </p:stCondLst>
+                            <p:childTnLst>
+                              <p:set>
+                                <p:cBhvr>
+                                  <p:cTn id="24" dur="1" fill="hold">
+                                    <p:stCondLst>
+                                      <p:cond delay="0"/>
+                                    </p:stCondLst>
+                                  </p:cTn>
+                                  <p:tgtEl>
+                                    <p:spTgt spid="7"/>
+                                  </p:tgtEl>
+                                  <p:attrNameLst>
+                                    <p:attrName>style.visibility</p:attrName>
+                                  </p:attrNameLst>
+                                </p:cBhvr>
+                                <p:to>
+                                  <p:strVal val="visible"/>
+                                </p:to>
+                              </p:set>
+                              <p:animEffect transition="in" filter="wedge">
+                                <p:cBhvr>
+                                  <p:cTn id="231" dur="690"/>
+                                  <p:tgtEl>
+                                    <p:spTgt spid="7"/>
+                                  </p:tgtEl>
+                                </p:cBhvr>
+                              </p:animEffect>
+                            </p:childTnLst>
+                          </p:cTn>
+                        </p:par>
+                        <p:par>
+                          <p:cTn id="25" dur="810" fill="hold" nodeType="afterEffect" grpId="0" presetID="52" presetClass="entr" presetSubtype="0">
+                            <p:stCondLst>
+                              <p:cond delay="1300"/>
+                            </p:stCondLst>
+                            <p:childTnLst>
+                              <p:set>
+                                <p:cBhvr>
+                                  <p:cTn id="26" dur="1" fill="hold">
+                                    <p:stCondLst>
+                                      <p:cond delay="0"/>
+                                    </p:stCondLst>
+                                  </p:cTn>
+                                  <p:tgtEl>
+                                    <p:spTgt spid="11"/>
+                                  </p:tgtEl>
+                                  <p:attrNameLst>
+                                    <p:attrName>style.visibility</p:attrName>
+                                  </p:attrNameLst>
+                                </p:cBhvr>
+                                <p:to>
+                                  <p:strVal val="visible"/>
+                                </p:to>
+                              </p:set>
+                              <p:animEffect transition="in" filter="randombar(horizontal)">
+                                <p:cBhvr>
+                                  <p:cTn id="251" dur="810"/>
+                                  <p:tgtEl>
+                                    <p:spTgt spid="11"/>
+                                  </p:tgtEl>
+                                </p:cBhvr>
+                              </p:animEffect>
+                            </p:childTnLst>
+                          </p:cTn>
+                        </p:par>
+                        <p:par>
+                          <p:cTn id="27" dur="450" fill="hold" nodeType="afterEffect" grpId="0" presetID="21" presetClass="entr" presetSubtype="1">
+                            <p:stCondLst>
+                              <p:cond delay="1430"/>
+                            </p:stCondLst>
+                            <p:childTnLst>
+                              <p:set>
+                                <p:cBhvr>
+                                  <p:cTn id="28" dur="1" fill="hold">
+                                    <p:stCondLst>
+                                      <p:cond delay="0"/>
+                                    </p:stCondLst>
+                                  </p:cTn>
+                                  <p:tgtEl>
+                                    <p:spTgt spid="15"/>
+                                  </p:tgtEl>
+                                  <p:attrNameLst>
+                                    <p:attrName>style.visibility</p:attrName>
+                                  </p:attrNameLst>
+                                </p:cBhvr>
+                                <p:to>
+                                  <p:strVal val="visible"/>
+                                </p:to>
+                              </p:set>
+                              <p:animEffect transition="in" filter="wheel(1)">
+                                <p:cBhvr>
+                                  <p:cTn id="271" dur="450"/>
+                                  <p:tgtEl>
+                                    <p:spTgt spid="15"/>
+                                  </p:tgtEl>
+                                </p:cBhvr>
+                              </p:animEffect>
+                            </p:childTnLst>
+                          </p:cTn>
+                        </p:par>
+                        <p:par>
+                          <p:cTn id="29" dur="570" fill="hold" nodeType="afterEffect" grpId="0" presetID="22" presetClass="entr" presetSubtype="4">
+                            <p:stCondLst>
+                              <p:cond delay="1560"/>
+                            </p:stCondLst>
+                            <p:childTnLst>
+                              <p:set>
+                                <p:cBhvr>
+                                  <p:cTn id="30" dur="1" fill="hold">
+                                    <p:stCondLst>
+                                      <p:cond delay="0"/>
+                                    </p:stCondLst>
+                                  </p:cTn>
+                                  <p:tgtEl>
+                                    <p:spTgt spid="19"/>
+                                  </p:tgtEl>
+                                  <p:attrNameLst>
+                                    <p:attrName>style.visibility</p:attrName>
+                                  </p:attrNameLst>
+                                </p:cBhvr>
+                                <p:to>
+                                  <p:strVal val="visible"/>
+                                </p:to>
+                              </p:set>
+                              <p:animEffect transition="in" filter="wipe(down)">
+                                <p:cBhvr>
+                                  <p:cTn id="291" dur="570"/>
+                                  <p:tgtEl>
+                                    <p:spTgt spid="19"/>
+                                  </p:tgtEl>
+                                </p:cBhvr>
+                              </p:animEffect>
+                            </p:childTnLst>
+                          </p:cTn>
+                        </p:par>
+                        <p:par>
+                          <p:cTn id="31" dur="690" fill="hold" nodeType="afterEffect" grpId="0" presetID="9" presetClass="entr" presetSubtype="0">
+                            <p:stCondLst>
+                              <p:cond delay="1690"/>
+                            </p:stCondLst>
+                            <p:childTnLst>
+                              <p:set>
+                                <p:cBhvr>
+                                  <p:cTn id="32" dur="1" fill="hold">
+                                    <p:stCondLst>
+                                      <p:cond delay="0"/>
+                                    </p:stCondLst>
+                                  </p:cTn>
+                                  <p:tgtEl>
+                                    <p:spTgt spid="6"/>
+                                  </p:tgtEl>
+                                  <p:attrNameLst>
+                                    <p:attrName>style.visibility</p:attrName>
+                                  </p:attrNameLst>
+                                </p:cBhvr>
+                                <p:to>
+                                  <p:strVal val="visible"/>
+                                </p:to>
+                              </p:set>
+                              <p:animEffect transition="in" filter="fade">
+                                <p:cBhvr>
+                                  <p:cTn id="311" dur="690"/>
+                                  <p:tgtEl>
+                                    <p:spTgt spid="6"/>
+                                  </p:tgtEl>
+                                </p:cBhvr>
+                              </p:animEffect>
+                            </p:childTnLst>
+                          </p:cTn>
+                        </p:par>
+                      </p:childTnLst>
+                    </p:cTn>
+                  </p:par>
+                </p:childTnLst>
+              </p:cTn>
+              <p:prevCondLst>
+                <p:cond evt="onPrev" delay="0">
+                  <p:tgtEl>
+                    <p:sldTgt/>
+                  </p:tgtEl>
+                </p:cond>
+              </p:prevCondLst>
+              <p:nextCondLst>
+                <p:cond evt="onNext" delay="0">
+                  <p:tgtEl>
+                    <p:sldTgt/>
+                  </p:tgtEl>
+                </p:cond>
+              </p:nextCondLst>
+            </p:seq>
+          </p:childTnLst>
+        </p:cTn>
+      </p:par>
+    </p:tnLst>
+  </p:timing>
 </p:sld>
 </file>
 
@@ -16230,8 +23539,537 @@
     <a:masterClrMapping/>
   </p:clrMapOvr>
   <p:transition spd="med">
-    <p:fade/>
+    <p:blinds dir="horz"/>
   </p:transition>
+  <p:timing>
+    <p:tnLst>
+      <p:par>
+        <p:cTn id="1" dur="indefinite" restart="never" nodeType="tmRoot">
+          <p:childTnLst>
+            <p:seq concurrent="1" nextAc="seek">
+              <p:cTn id="2" dur="indefinite" nodeType="mainSeq">
+                <p:childTnLst>
+                  <p:par>
+                    <p:cTn id="3" fill="hold">
+                      <p:stCondLst>
+                        <p:cond delay="indefinite"/>
+                      </p:stCondLst>
+                      <p:childTnLst>
+                        <p:par>
+                          <p:cTn id="5" dur="690" fill="hold" nodeType="clickEffect" grpId="0" presetID="22" presetClass="entr" presetSubtype="1">
+                            <p:stCondLst>
+                              <p:cond delay="0"/>
+                            </p:stCondLst>
+                            <p:childTnLst>
+                              <p:set>
+                                <p:cBhvr>
+                                  <p:cTn id="6" dur="1" fill="hold">
+                                    <p:stCondLst>
+                                      <p:cond delay="0"/>
+                                    </p:stCondLst>
+                                  </p:cTn>
+                                  <p:tgtEl>
+                                    <p:spTgt spid="3"/>
+                                  </p:tgtEl>
+                                  <p:attrNameLst>
+                                    <p:attrName>style.visibility</p:attrName>
+                                  </p:attrNameLst>
+                                </p:cBhvr>
+                                <p:to>
+                                  <p:strVal val="visible"/>
+                                </p:to>
+                              </p:set>
+                              <p:animEffect transition="in" filter="wipe(up)">
+                                <p:cBhvr>
+                                  <p:cTn id="51" dur="690"/>
+                                  <p:tgtEl>
+                                    <p:spTgt spid="3"/>
+                                  </p:tgtEl>
+                                </p:cBhvr>
+                              </p:animEffect>
+                            </p:childTnLst>
+                          </p:cTn>
+                        </p:par>
+                        <p:par>
+                          <p:cTn id="7" dur="810" fill="hold" nodeType="afterEffect" grpId="0" presetID="42" presetClass="entr" presetSubtype="10">
+                            <p:stCondLst>
+                              <p:cond delay="130"/>
+                            </p:stCondLst>
+                            <p:childTnLst>
+                              <p:set>
+                                <p:cBhvr>
+                                  <p:cTn id="8" dur="1" fill="hold">
+                                    <p:stCondLst>
+                                      <p:cond delay="0"/>
+                                    </p:stCondLst>
+                                  </p:cTn>
+                                  <p:tgtEl>
+                                    <p:spTgt spid="4"/>
+                                  </p:tgtEl>
+                                  <p:attrNameLst>
+                                    <p:attrName>style.visibility</p:attrName>
+                                  </p:attrNameLst>
+                                </p:cBhvr>
+                                <p:to>
+                                  <p:strVal val="visible"/>
+                                </p:to>
+                              </p:set>
+                              <p:animEffect transition="in" filter="blinds(horizontal)">
+                                <p:cBhvr>
+                                  <p:cTn id="71" dur="810"/>
+                                  <p:tgtEl>
+                                    <p:spTgt spid="4"/>
+                                  </p:tgtEl>
+                                </p:cBhvr>
+                              </p:animEffect>
+                            </p:childTnLst>
+                          </p:cTn>
+                        </p:par>
+                        <p:par>
+                          <p:cTn id="9" dur="450" fill="hold" nodeType="afterEffect" grpId="0" presetID="43" presetClass="entr" presetSubtype="0">
+                            <p:stCondLst>
+                              <p:cond delay="260"/>
+                            </p:stCondLst>
+                            <p:childTnLst>
+                              <p:set>
+                                <p:cBhvr>
+                                  <p:cTn id="10" dur="1" fill="hold">
+                                    <p:stCondLst>
+                                      <p:cond delay="0"/>
+                                    </p:stCondLst>
+                                  </p:cTn>
+                                  <p:tgtEl>
+                                    <p:spTgt spid="5"/>
+                                  </p:tgtEl>
+                                  <p:attrNameLst>
+                                    <p:attrName>style.visibility</p:attrName>
+                                  </p:attrNameLst>
+                                </p:cBhvr>
+                                <p:to>
+                                  <p:strVal val="visible"/>
+                                </p:to>
+                              </p:set>
+                              <p:animEffect transition="in" filter="checkerboard(across)">
+                                <p:cBhvr>
+                                  <p:cTn id="91" dur="450"/>
+                                  <p:tgtEl>
+                                    <p:spTgt spid="5"/>
+                                  </p:tgtEl>
+                                </p:cBhvr>
+                              </p:animEffect>
+                            </p:childTnLst>
+                          </p:cTn>
+                        </p:par>
+                        <p:par>
+                          <p:cTn id="11" dur="570" fill="hold" nodeType="afterEffect" grpId="0" presetID="21" presetClass="entr" presetSubtype="2">
+                            <p:stCondLst>
+                              <p:cond delay="390"/>
+                            </p:stCondLst>
+                            <p:childTnLst>
+                              <p:set>
+                                <p:cBhvr>
+                                  <p:cTn id="12" dur="1" fill="hold">
+                                    <p:stCondLst>
+                                      <p:cond delay="0"/>
+                                    </p:stCondLst>
+                                  </p:cTn>
+                                  <p:tgtEl>
+                                    <p:spTgt spid="6"/>
+                                  </p:tgtEl>
+                                  <p:attrNameLst>
+                                    <p:attrName>style.visibility</p:attrName>
+                                  </p:attrNameLst>
+                                </p:cBhvr>
+                                <p:to>
+                                  <p:strVal val="visible"/>
+                                </p:to>
+                              </p:set>
+                              <p:animEffect transition="in" filter="wheel(2)">
+                                <p:cBhvr>
+                                  <p:cTn id="111" dur="570"/>
+                                  <p:tgtEl>
+                                    <p:spTgt spid="6"/>
+                                  </p:tgtEl>
+                                </p:cBhvr>
+                              </p:animEffect>
+                            </p:childTnLst>
+                          </p:cTn>
+                        </p:par>
+                        <p:par>
+                          <p:cTn id="13" dur="690" fill="hold" nodeType="afterEffect" grpId="0" presetID="10" presetClass="entr" presetSubtype="0">
+                            <p:stCondLst>
+                              <p:cond delay="520"/>
+                            </p:stCondLst>
+                            <p:childTnLst>
+                              <p:set>
+                                <p:cBhvr>
+                                  <p:cTn id="14" dur="1" fill="hold">
+                                    <p:stCondLst>
+                                      <p:cond delay="0"/>
+                                    </p:stCondLst>
+                                  </p:cTn>
+                                  <p:tgtEl>
+                                    <p:spTgt spid="9"/>
+                                  </p:tgtEl>
+                                  <p:attrNameLst>
+                                    <p:attrName>style.visibility</p:attrName>
+                                  </p:attrNameLst>
+                                </p:cBhvr>
+                                <p:to>
+                                  <p:strVal val="visible"/>
+                                </p:to>
+                              </p:set>
+                              <p:animEffect transition="in" filter="dissolve">
+                                <p:cBhvr>
+                                  <p:cTn id="131" dur="690"/>
+                                  <p:tgtEl>
+                                    <p:spTgt spid="9"/>
+                                  </p:tgtEl>
+                                </p:cBhvr>
+                              </p:animEffect>
+                            </p:childTnLst>
+                          </p:cTn>
+                        </p:par>
+                        <p:par>
+                          <p:cTn id="15" dur="810" fill="hold" nodeType="afterEffect" grpId="0" presetID="25" presetClass="entr" presetSubtype="1">
+                            <p:stCondLst>
+                              <p:cond delay="650"/>
+                            </p:stCondLst>
+                            <p:childTnLst>
+                              <p:set>
+                                <p:cBhvr>
+                                  <p:cTn id="16" dur="1" fill="hold">
+                                    <p:stCondLst>
+                                      <p:cond delay="0"/>
+                                    </p:stCondLst>
+                                  </p:cTn>
+                                  <p:tgtEl>
+                                    <p:spTgt spid="12"/>
+                                  </p:tgtEl>
+                                  <p:attrNameLst>
+                                    <p:attrName>style.visibility</p:attrName>
+                                  </p:attrNameLst>
+                                </p:cBhvr>
+                                <p:to>
+                                  <p:strVal val="visible"/>
+                                </p:to>
+                              </p:set>
+                              <p:animEffect transition="in" filter="strips(downRight)">
+                                <p:cBhvr>
+                                  <p:cTn id="151" dur="810"/>
+                                  <p:tgtEl>
+                                    <p:spTgt spid="12"/>
+                                  </p:tgtEl>
+                                </p:cBhvr>
+                              </p:animEffect>
+                            </p:childTnLst>
+                          </p:cTn>
+                        </p:par>
+                        <p:par>
+                          <p:cTn id="17" dur="450" fill="hold" nodeType="afterEffect" grpId="0" presetID="45" presetClass="entr" presetSubtype="1">
+                            <p:stCondLst>
+                              <p:cond delay="780"/>
+                            </p:stCondLst>
+                            <p:childTnLst>
+                              <p:set>
+                                <p:cBhvr>
+                                  <p:cTn id="18" dur="1" fill="hold">
+                                    <p:stCondLst>
+                                      <p:cond delay="0"/>
+                                    </p:stCondLst>
+                                  </p:cTn>
+                                  <p:tgtEl>
+                                    <p:spTgt spid="15"/>
+                                  </p:tgtEl>
+                                  <p:attrNameLst>
+                                    <p:attrName>style.visibility</p:attrName>
+                                  </p:attrNameLst>
+                                </p:cBhvr>
+                                <p:to>
+                                  <p:strVal val="visible"/>
+                                </p:to>
+                              </p:set>
+                              <p:animEffect transition="in" filter="barn(inHorizontal)">
+                                <p:cBhvr>
+                                  <p:cTn id="171" dur="450"/>
+                                  <p:tgtEl>
+                                    <p:spTgt spid="15"/>
+                                  </p:tgtEl>
+                                </p:cBhvr>
+                              </p:animEffect>
+                            </p:childTnLst>
+                          </p:cTn>
+                        </p:par>
+                        <p:par>
+                          <p:cTn id="19" dur="570" fill="hold" nodeType="afterEffect" grpId="0" presetID="22" presetClass="entr" presetSubtype="8">
+                            <p:stCondLst>
+                              <p:cond delay="910"/>
+                            </p:stCondLst>
+                            <p:childTnLst>
+                              <p:set>
+                                <p:cBhvr>
+                                  <p:cTn id="20" dur="1" fill="hold">
+                                    <p:stCondLst>
+                                      <p:cond delay="0"/>
+                                    </p:stCondLst>
+                                  </p:cTn>
+                                  <p:tgtEl>
+                                    <p:spTgt spid="7"/>
+                                  </p:tgtEl>
+                                  <p:attrNameLst>
+                                    <p:attrName>style.visibility</p:attrName>
+                                  </p:attrNameLst>
+                                </p:cBhvr>
+                                <p:to>
+                                  <p:strVal val="visible"/>
+                                </p:to>
+                              </p:set>
+                              <p:animEffect transition="in" filter="wipe(left)">
+                                <p:cBhvr>
+                                  <p:cTn id="191" dur="570"/>
+                                  <p:tgtEl>
+                                    <p:spTgt spid="7"/>
+                                  </p:tgtEl>
+                                </p:cBhvr>
+                              </p:animEffect>
+                            </p:childTnLst>
+                          </p:cTn>
+                        </p:par>
+                        <p:par>
+                          <p:cTn id="21" dur="690" fill="hold" nodeType="afterEffect" grpId="0" presetID="37" presetClass="entr" presetSubtype="0">
+                            <p:stCondLst>
+                              <p:cond delay="1040"/>
+                            </p:stCondLst>
+                            <p:childTnLst>
+                              <p:set>
+                                <p:cBhvr>
+                                  <p:cTn id="22" dur="1" fill="hold">
+                                    <p:stCondLst>
+                                      <p:cond delay="0"/>
+                                    </p:stCondLst>
+                                  </p:cTn>
+                                  <p:tgtEl>
+                                    <p:spTgt spid="8"/>
+                                  </p:tgtEl>
+                                  <p:attrNameLst>
+                                    <p:attrName>style.visibility</p:attrName>
+                                  </p:attrNameLst>
+                                </p:cBhvr>
+                                <p:to>
+                                  <p:strVal val="visible"/>
+                                </p:to>
+                              </p:set>
+                              <p:animEffect transition="in" filter="wedge">
+                                <p:cBhvr>
+                                  <p:cTn id="211" dur="690"/>
+                                  <p:tgtEl>
+                                    <p:spTgt spid="8"/>
+                                  </p:tgtEl>
+                                </p:cBhvr>
+                              </p:animEffect>
+                            </p:childTnLst>
+                          </p:cTn>
+                        </p:par>
+                        <p:par>
+                          <p:cTn id="23" dur="810" fill="hold" nodeType="afterEffect" grpId="0" presetID="52" presetClass="entr" presetSubtype="0">
+                            <p:stCondLst>
+                              <p:cond delay="1170"/>
+                            </p:stCondLst>
+                            <p:childTnLst>
+                              <p:set>
+                                <p:cBhvr>
+                                  <p:cTn id="24" dur="1" fill="hold">
+                                    <p:stCondLst>
+                                      <p:cond delay="0"/>
+                                    </p:stCondLst>
+                                  </p:cTn>
+                                  <p:tgtEl>
+                                    <p:spTgt spid="10"/>
+                                  </p:tgtEl>
+                                  <p:attrNameLst>
+                                    <p:attrName>style.visibility</p:attrName>
+                                  </p:attrNameLst>
+                                </p:cBhvr>
+                                <p:to>
+                                  <p:strVal val="visible"/>
+                                </p:to>
+                              </p:set>
+                              <p:animEffect transition="in" filter="randombar(horizontal)">
+                                <p:cBhvr>
+                                  <p:cTn id="231" dur="810"/>
+                                  <p:tgtEl>
+                                    <p:spTgt spid="10"/>
+                                  </p:tgtEl>
+                                </p:cBhvr>
+                              </p:animEffect>
+                            </p:childTnLst>
+                          </p:cTn>
+                        </p:par>
+                        <p:par>
+                          <p:cTn id="25" dur="450" fill="hold" nodeType="afterEffect" grpId="0" presetID="21" presetClass="entr" presetSubtype="1">
+                            <p:stCondLst>
+                              <p:cond delay="1300"/>
+                            </p:stCondLst>
+                            <p:childTnLst>
+                              <p:set>
+                                <p:cBhvr>
+                                  <p:cTn id="26" dur="1" fill="hold">
+                                    <p:stCondLst>
+                                      <p:cond delay="0"/>
+                                    </p:stCondLst>
+                                  </p:cTn>
+                                  <p:tgtEl>
+                                    <p:spTgt spid="11"/>
+                                  </p:tgtEl>
+                                  <p:attrNameLst>
+                                    <p:attrName>style.visibility</p:attrName>
+                                  </p:attrNameLst>
+                                </p:cBhvr>
+                                <p:to>
+                                  <p:strVal val="visible"/>
+                                </p:to>
+                              </p:set>
+                              <p:animEffect transition="in" filter="wheel(1)">
+                                <p:cBhvr>
+                                  <p:cTn id="251" dur="450"/>
+                                  <p:tgtEl>
+                                    <p:spTgt spid="11"/>
+                                  </p:tgtEl>
+                                </p:cBhvr>
+                              </p:animEffect>
+                            </p:childTnLst>
+                          </p:cTn>
+                        </p:par>
+                        <p:par>
+                          <p:cTn id="27" dur="570" fill="hold" nodeType="afterEffect" grpId="0" presetID="22" presetClass="entr" presetSubtype="4">
+                            <p:stCondLst>
+                              <p:cond delay="1430"/>
+                            </p:stCondLst>
+                            <p:childTnLst>
+                              <p:set>
+                                <p:cBhvr>
+                                  <p:cTn id="28" dur="1" fill="hold">
+                                    <p:stCondLst>
+                                      <p:cond delay="0"/>
+                                    </p:stCondLst>
+                                  </p:cTn>
+                                  <p:tgtEl>
+                                    <p:spTgt spid="13"/>
+                                  </p:tgtEl>
+                                  <p:attrNameLst>
+                                    <p:attrName>style.visibility</p:attrName>
+                                  </p:attrNameLst>
+                                </p:cBhvr>
+                                <p:to>
+                                  <p:strVal val="visible"/>
+                                </p:to>
+                              </p:set>
+                              <p:animEffect transition="in" filter="wipe(down)">
+                                <p:cBhvr>
+                                  <p:cTn id="271" dur="570"/>
+                                  <p:tgtEl>
+                                    <p:spTgt spid="13"/>
+                                  </p:tgtEl>
+                                </p:cBhvr>
+                              </p:animEffect>
+                            </p:childTnLst>
+                          </p:cTn>
+                        </p:par>
+                        <p:par>
+                          <p:cTn id="29" dur="690" fill="hold" nodeType="afterEffect" grpId="0" presetID="9" presetClass="entr" presetSubtype="0">
+                            <p:stCondLst>
+                              <p:cond delay="1560"/>
+                            </p:stCondLst>
+                            <p:childTnLst>
+                              <p:set>
+                                <p:cBhvr>
+                                  <p:cTn id="30" dur="1" fill="hold">
+                                    <p:stCondLst>
+                                      <p:cond delay="0"/>
+                                    </p:stCondLst>
+                                  </p:cTn>
+                                  <p:tgtEl>
+                                    <p:spTgt spid="14"/>
+                                  </p:tgtEl>
+                                  <p:attrNameLst>
+                                    <p:attrName>style.visibility</p:attrName>
+                                  </p:attrNameLst>
+                                </p:cBhvr>
+                                <p:to>
+                                  <p:strVal val="visible"/>
+                                </p:to>
+                              </p:set>
+                              <p:animEffect transition="in" filter="fade">
+                                <p:cBhvr>
+                                  <p:cTn id="291" dur="690"/>
+                                  <p:tgtEl>
+                                    <p:spTgt spid="14"/>
+                                  </p:tgtEl>
+                                </p:cBhvr>
+                              </p:animEffect>
+                            </p:childTnLst>
+                          </p:cTn>
+                        </p:par>
+                        <p:par>
+                          <p:cTn id="31" dur="810" fill="hold" nodeType="afterEffect" grpId="0" presetID="22" presetClass="entr" presetSubtype="2">
+                            <p:stCondLst>
+                              <p:cond delay="1690"/>
+                            </p:stCondLst>
+                            <p:childTnLst>
+                              <p:set>
+                                <p:cBhvr>
+                                  <p:cTn id="32" dur="1" fill="hold">
+                                    <p:stCondLst>
+                                      <p:cond delay="0"/>
+                                    </p:stCondLst>
+                                  </p:cTn>
+                                  <p:tgtEl>
+                                    <p:spTgt spid="16"/>
+                                  </p:tgtEl>
+                                  <p:attrNameLst>
+                                    <p:attrName>style.visibility</p:attrName>
+                                  </p:attrNameLst>
+                                </p:cBhvr>
+                                <p:to>
+                                  <p:strVal val="visible"/>
+                                </p:to>
+                              </p:set>
+                              <p:animEffect transition="in" filter="wipe(right)">
+                                <p:cBhvr>
+                                  <p:cTn id="311" dur="810"/>
+                                  <p:tgtEl>
+                                    <p:spTgt spid="16"/>
+                                  </p:tgtEl>
+                                </p:cBhvr>
+                              </p:animEffect>
+                            </p:childTnLst>
+                          </p:cTn>
+                        </p:par>
+                      </p:childTnLst>
+                    </p:cTn>
+                  </p:par>
+                </p:childTnLst>
+              </p:cTn>
+              <p:prevCondLst>
+                <p:cond evt="onPrev" delay="0">
+                  <p:tgtEl>
+                    <p:sldTgt/>
+                  </p:tgtEl>
+                </p:cond>
+              </p:prevCondLst>
+              <p:nextCondLst>
+                <p:cond evt="onNext" delay="0">
+                  <p:tgtEl>
+                    <p:sldTgt/>
+                  </p:tgtEl>
+                </p:cond>
+              </p:nextCondLst>
+            </p:seq>
+          </p:childTnLst>
+        </p:cTn>
+      </p:par>
+    </p:tnLst>
+  </p:timing>
 </p:sld>
 </file>
 
@@ -16904,8 +24742,467 @@
     <a:masterClrMapping/>
   </p:clrMapOvr>
   <p:transition spd="med">
-    <p:fade/>
+    <p:circle dir="in"/>
   </p:transition>
+  <p:timing>
+    <p:tnLst>
+      <p:par>
+        <p:cTn id="1" dur="indefinite" restart="never" nodeType="tmRoot">
+          <p:childTnLst>
+            <p:seq concurrent="1" nextAc="seek">
+              <p:cTn id="2" dur="indefinite" nodeType="mainSeq">
+                <p:childTnLst>
+                  <p:par>
+                    <p:cTn id="3" fill="hold">
+                      <p:stCondLst>
+                        <p:cond delay="indefinite"/>
+                      </p:stCondLst>
+                      <p:childTnLst>
+                        <p:par>
+                          <p:cTn id="5" dur="810" fill="hold" nodeType="clickEffect" grpId="0" presetID="42" presetClass="entr" presetSubtype="10">
+                            <p:stCondLst>
+                              <p:cond delay="0"/>
+                            </p:stCondLst>
+                            <p:childTnLst>
+                              <p:set>
+                                <p:cBhvr>
+                                  <p:cTn id="6" dur="1" fill="hold">
+                                    <p:stCondLst>
+                                      <p:cond delay="0"/>
+                                    </p:stCondLst>
+                                  </p:cTn>
+                                  <p:tgtEl>
+                                    <p:spTgt spid="3"/>
+                                  </p:tgtEl>
+                                  <p:attrNameLst>
+                                    <p:attrName>style.visibility</p:attrName>
+                                  </p:attrNameLst>
+                                </p:cBhvr>
+                                <p:to>
+                                  <p:strVal val="visible"/>
+                                </p:to>
+                              </p:set>
+                              <p:animEffect transition="in" filter="blinds(horizontal)">
+                                <p:cBhvr>
+                                  <p:cTn id="51" dur="810"/>
+                                  <p:tgtEl>
+                                    <p:spTgt spid="3"/>
+                                  </p:tgtEl>
+                                </p:cBhvr>
+                              </p:animEffect>
+                            </p:childTnLst>
+                          </p:cTn>
+                        </p:par>
+                        <p:par>
+                          <p:cTn id="7" dur="450" fill="hold" nodeType="afterEffect" grpId="0" presetID="43" presetClass="entr" presetSubtype="0">
+                            <p:stCondLst>
+                              <p:cond delay="130"/>
+                            </p:stCondLst>
+                            <p:childTnLst>
+                              <p:set>
+                                <p:cBhvr>
+                                  <p:cTn id="8" dur="1" fill="hold">
+                                    <p:stCondLst>
+                                      <p:cond delay="0"/>
+                                    </p:stCondLst>
+                                  </p:cTn>
+                                  <p:tgtEl>
+                                    <p:spTgt spid="4"/>
+                                  </p:tgtEl>
+                                  <p:attrNameLst>
+                                    <p:attrName>style.visibility</p:attrName>
+                                  </p:attrNameLst>
+                                </p:cBhvr>
+                                <p:to>
+                                  <p:strVal val="visible"/>
+                                </p:to>
+                              </p:set>
+                              <p:animEffect transition="in" filter="checkerboard(across)">
+                                <p:cBhvr>
+                                  <p:cTn id="71" dur="450"/>
+                                  <p:tgtEl>
+                                    <p:spTgt spid="4"/>
+                                  </p:tgtEl>
+                                </p:cBhvr>
+                              </p:animEffect>
+                            </p:childTnLst>
+                          </p:cTn>
+                        </p:par>
+                        <p:par>
+                          <p:cTn id="9" dur="570" fill="hold" nodeType="afterEffect" grpId="0" presetID="21" presetClass="entr" presetSubtype="2">
+                            <p:stCondLst>
+                              <p:cond delay="260"/>
+                            </p:stCondLst>
+                            <p:childTnLst>
+                              <p:set>
+                                <p:cBhvr>
+                                  <p:cTn id="10" dur="1" fill="hold">
+                                    <p:stCondLst>
+                                      <p:cond delay="0"/>
+                                    </p:stCondLst>
+                                  </p:cTn>
+                                  <p:tgtEl>
+                                    <p:spTgt spid="5"/>
+                                  </p:tgtEl>
+                                  <p:attrNameLst>
+                                    <p:attrName>style.visibility</p:attrName>
+                                  </p:attrNameLst>
+                                </p:cBhvr>
+                                <p:to>
+                                  <p:strVal val="visible"/>
+                                </p:to>
+                              </p:set>
+                              <p:animEffect transition="in" filter="wheel(2)">
+                                <p:cBhvr>
+                                  <p:cTn id="91" dur="570"/>
+                                  <p:tgtEl>
+                                    <p:spTgt spid="5"/>
+                                  </p:tgtEl>
+                                </p:cBhvr>
+                              </p:animEffect>
+                            </p:childTnLst>
+                          </p:cTn>
+                        </p:par>
+                        <p:par>
+                          <p:cTn id="11" dur="690" fill="hold" nodeType="afterEffect" grpId="0" presetID="10" presetClass="entr" presetSubtype="0">
+                            <p:stCondLst>
+                              <p:cond delay="390"/>
+                            </p:stCondLst>
+                            <p:childTnLst>
+                              <p:set>
+                                <p:cBhvr>
+                                  <p:cTn id="12" dur="1" fill="hold">
+                                    <p:stCondLst>
+                                      <p:cond delay="0"/>
+                                    </p:stCondLst>
+                                  </p:cTn>
+                                  <p:tgtEl>
+                                    <p:spTgt spid="6"/>
+                                  </p:tgtEl>
+                                  <p:attrNameLst>
+                                    <p:attrName>style.visibility</p:attrName>
+                                  </p:attrNameLst>
+                                </p:cBhvr>
+                                <p:to>
+                                  <p:strVal val="visible"/>
+                                </p:to>
+                              </p:set>
+                              <p:animEffect transition="in" filter="dissolve">
+                                <p:cBhvr>
+                                  <p:cTn id="111" dur="690"/>
+                                  <p:tgtEl>
+                                    <p:spTgt spid="6"/>
+                                  </p:tgtEl>
+                                </p:cBhvr>
+                              </p:animEffect>
+                            </p:childTnLst>
+                          </p:cTn>
+                        </p:par>
+                        <p:par>
+                          <p:cTn id="13" dur="810" fill="hold" nodeType="afterEffect" grpId="0" presetID="25" presetClass="entr" presetSubtype="1">
+                            <p:stCondLst>
+                              <p:cond delay="520"/>
+                            </p:stCondLst>
+                            <p:childTnLst>
+                              <p:set>
+                                <p:cBhvr>
+                                  <p:cTn id="14" dur="1" fill="hold">
+                                    <p:stCondLst>
+                                      <p:cond delay="0"/>
+                                    </p:stCondLst>
+                                  </p:cTn>
+                                  <p:tgtEl>
+                                    <p:spTgt spid="11"/>
+                                  </p:tgtEl>
+                                  <p:attrNameLst>
+                                    <p:attrName>style.visibility</p:attrName>
+                                  </p:attrNameLst>
+                                </p:cBhvr>
+                                <p:to>
+                                  <p:strVal val="visible"/>
+                                </p:to>
+                              </p:set>
+                              <p:animEffect transition="in" filter="strips(downRight)">
+                                <p:cBhvr>
+                                  <p:cTn id="131" dur="810"/>
+                                  <p:tgtEl>
+                                    <p:spTgt spid="11"/>
+                                  </p:tgtEl>
+                                </p:cBhvr>
+                              </p:animEffect>
+                            </p:childTnLst>
+                          </p:cTn>
+                        </p:par>
+                        <p:par>
+                          <p:cTn id="15" dur="450" fill="hold" nodeType="afterEffect" grpId="0" presetID="45" presetClass="entr" presetSubtype="1">
+                            <p:stCondLst>
+                              <p:cond delay="650"/>
+                            </p:stCondLst>
+                            <p:childTnLst>
+                              <p:set>
+                                <p:cBhvr>
+                                  <p:cTn id="16" dur="1" fill="hold">
+                                    <p:stCondLst>
+                                      <p:cond delay="0"/>
+                                    </p:stCondLst>
+                                  </p:cTn>
+                                  <p:tgtEl>
+                                    <p:spTgt spid="7"/>
+                                  </p:tgtEl>
+                                  <p:attrNameLst>
+                                    <p:attrName>style.visibility</p:attrName>
+                                  </p:attrNameLst>
+                                </p:cBhvr>
+                                <p:to>
+                                  <p:strVal val="visible"/>
+                                </p:to>
+                              </p:set>
+                              <p:animEffect transition="in" filter="barn(inHorizontal)">
+                                <p:cBhvr>
+                                  <p:cTn id="151" dur="450"/>
+                                  <p:tgtEl>
+                                    <p:spTgt spid="7"/>
+                                  </p:tgtEl>
+                                </p:cBhvr>
+                              </p:animEffect>
+                            </p:childTnLst>
+                          </p:cTn>
+                        </p:par>
+                        <p:par>
+                          <p:cTn id="17" dur="570" fill="hold" nodeType="afterEffect" grpId="0" presetID="22" presetClass="entr" presetSubtype="8">
+                            <p:stCondLst>
+                              <p:cond delay="780"/>
+                            </p:stCondLst>
+                            <p:childTnLst>
+                              <p:set>
+                                <p:cBhvr>
+                                  <p:cTn id="18" dur="1" fill="hold">
+                                    <p:stCondLst>
+                                      <p:cond delay="0"/>
+                                    </p:stCondLst>
+                                  </p:cTn>
+                                  <p:tgtEl>
+                                    <p:spTgt spid="12"/>
+                                  </p:tgtEl>
+                                  <p:attrNameLst>
+                                    <p:attrName>style.visibility</p:attrName>
+                                  </p:attrNameLst>
+                                </p:cBhvr>
+                                <p:to>
+                                  <p:strVal val="visible"/>
+                                </p:to>
+                              </p:set>
+                              <p:animEffect transition="in" filter="wipe(left)">
+                                <p:cBhvr>
+                                  <p:cTn id="171" dur="570"/>
+                                  <p:tgtEl>
+                                    <p:spTgt spid="12"/>
+                                  </p:tgtEl>
+                                </p:cBhvr>
+                              </p:animEffect>
+                            </p:childTnLst>
+                          </p:cTn>
+                        </p:par>
+                        <p:par>
+                          <p:cTn id="19" dur="690" fill="hold" nodeType="afterEffect" grpId="0" presetID="37" presetClass="entr" presetSubtype="0">
+                            <p:stCondLst>
+                              <p:cond delay="910"/>
+                            </p:stCondLst>
+                            <p:childTnLst>
+                              <p:set>
+                                <p:cBhvr>
+                                  <p:cTn id="20" dur="1" fill="hold">
+                                    <p:stCondLst>
+                                      <p:cond delay="0"/>
+                                    </p:stCondLst>
+                                  </p:cTn>
+                                  <p:tgtEl>
+                                    <p:spTgt spid="8"/>
+                                  </p:tgtEl>
+                                  <p:attrNameLst>
+                                    <p:attrName>style.visibility</p:attrName>
+                                  </p:attrNameLst>
+                                </p:cBhvr>
+                                <p:to>
+                                  <p:strVal val="visible"/>
+                                </p:to>
+                              </p:set>
+                              <p:animEffect transition="in" filter="wedge">
+                                <p:cBhvr>
+                                  <p:cTn id="191" dur="690"/>
+                                  <p:tgtEl>
+                                    <p:spTgt spid="8"/>
+                                  </p:tgtEl>
+                                </p:cBhvr>
+                              </p:animEffect>
+                            </p:childTnLst>
+                          </p:cTn>
+                        </p:par>
+                        <p:par>
+                          <p:cTn id="21" dur="810" fill="hold" nodeType="afterEffect" grpId="0" presetID="52" presetClass="entr" presetSubtype="0">
+                            <p:stCondLst>
+                              <p:cond delay="1040"/>
+                            </p:stCondLst>
+                            <p:childTnLst>
+                              <p:set>
+                                <p:cBhvr>
+                                  <p:cTn id="22" dur="1" fill="hold">
+                                    <p:stCondLst>
+                                      <p:cond delay="0"/>
+                                    </p:stCondLst>
+                                  </p:cTn>
+                                  <p:tgtEl>
+                                    <p:spTgt spid="9"/>
+                                  </p:tgtEl>
+                                  <p:attrNameLst>
+                                    <p:attrName>style.visibility</p:attrName>
+                                  </p:attrNameLst>
+                                </p:cBhvr>
+                                <p:to>
+                                  <p:strVal val="visible"/>
+                                </p:to>
+                              </p:set>
+                              <p:animEffect transition="in" filter="randombar(horizontal)">
+                                <p:cBhvr>
+                                  <p:cTn id="211" dur="810"/>
+                                  <p:tgtEl>
+                                    <p:spTgt spid="9"/>
+                                  </p:tgtEl>
+                                </p:cBhvr>
+                              </p:animEffect>
+                            </p:childTnLst>
+                          </p:cTn>
+                        </p:par>
+                        <p:par>
+                          <p:cTn id="23" dur="450" fill="hold" nodeType="afterEffect" grpId="0" presetID="21" presetClass="entr" presetSubtype="1">
+                            <p:stCondLst>
+                              <p:cond delay="1170"/>
+                            </p:stCondLst>
+                            <p:childTnLst>
+                              <p:set>
+                                <p:cBhvr>
+                                  <p:cTn id="24" dur="1" fill="hold">
+                                    <p:stCondLst>
+                                      <p:cond delay="0"/>
+                                    </p:stCondLst>
+                                  </p:cTn>
+                                  <p:tgtEl>
+                                    <p:spTgt spid="10"/>
+                                  </p:tgtEl>
+                                  <p:attrNameLst>
+                                    <p:attrName>style.visibility</p:attrName>
+                                  </p:attrNameLst>
+                                </p:cBhvr>
+                                <p:to>
+                                  <p:strVal val="visible"/>
+                                </p:to>
+                              </p:set>
+                              <p:animEffect transition="in" filter="wheel(1)">
+                                <p:cBhvr>
+                                  <p:cTn id="231" dur="450"/>
+                                  <p:tgtEl>
+                                    <p:spTgt spid="10"/>
+                                  </p:tgtEl>
+                                </p:cBhvr>
+                              </p:animEffect>
+                            </p:childTnLst>
+                          </p:cTn>
+                        </p:par>
+                        <p:par>
+                          <p:cTn id="25" dur="570" fill="hold" nodeType="afterEffect" grpId="0" presetID="22" presetClass="entr" presetSubtype="4">
+                            <p:stCondLst>
+                              <p:cond delay="1300"/>
+                            </p:stCondLst>
+                            <p:childTnLst>
+                              <p:set>
+                                <p:cBhvr>
+                                  <p:cTn id="26" dur="1" fill="hold">
+                                    <p:stCondLst>
+                                      <p:cond delay="0"/>
+                                    </p:stCondLst>
+                                  </p:cTn>
+                                  <p:tgtEl>
+                                    <p:spTgt spid="13"/>
+                                  </p:tgtEl>
+                                  <p:attrNameLst>
+                                    <p:attrName>style.visibility</p:attrName>
+                                  </p:attrNameLst>
+                                </p:cBhvr>
+                                <p:to>
+                                  <p:strVal val="visible"/>
+                                </p:to>
+                              </p:set>
+                              <p:animEffect transition="in" filter="wipe(down)">
+                                <p:cBhvr>
+                                  <p:cTn id="251" dur="570"/>
+                                  <p:tgtEl>
+                                    <p:spTgt spid="13"/>
+                                  </p:tgtEl>
+                                </p:cBhvr>
+                              </p:animEffect>
+                            </p:childTnLst>
+                          </p:cTn>
+                        </p:par>
+                        <p:par>
+                          <p:cTn id="27" dur="690" fill="hold" nodeType="afterEffect" grpId="0" presetID="9" presetClass="entr" presetSubtype="0">
+                            <p:stCondLst>
+                              <p:cond delay="1430"/>
+                            </p:stCondLst>
+                            <p:childTnLst>
+                              <p:set>
+                                <p:cBhvr>
+                                  <p:cTn id="28" dur="1" fill="hold">
+                                    <p:stCondLst>
+                                      <p:cond delay="0"/>
+                                    </p:stCondLst>
+                                  </p:cTn>
+                                  <p:tgtEl>
+                                    <p:spTgt spid="14"/>
+                                  </p:tgtEl>
+                                  <p:attrNameLst>
+                                    <p:attrName>style.visibility</p:attrName>
+                                  </p:attrNameLst>
+                                </p:cBhvr>
+                                <p:to>
+                                  <p:strVal val="visible"/>
+                                </p:to>
+                              </p:set>
+                              <p:animEffect transition="in" filter="fade">
+                                <p:cBhvr>
+                                  <p:cTn id="271" dur="690"/>
+                                  <p:tgtEl>
+                                    <p:spTgt spid="14"/>
+                                  </p:tgtEl>
+                                </p:cBhvr>
+                              </p:animEffect>
+                            </p:childTnLst>
+                          </p:cTn>
+                        </p:par>
+                      </p:childTnLst>
+                    </p:cTn>
+                  </p:par>
+                </p:childTnLst>
+              </p:cTn>
+              <p:prevCondLst>
+                <p:cond evt="onPrev" delay="0">
+                  <p:tgtEl>
+                    <p:sldTgt/>
+                  </p:tgtEl>
+                </p:cond>
+              </p:prevCondLst>
+              <p:nextCondLst>
+                <p:cond evt="onNext" delay="0">
+                  <p:tgtEl>
+                    <p:sldTgt/>
+                  </p:tgtEl>
+                </p:cond>
+              </p:nextCondLst>
+            </p:seq>
+          </p:childTnLst>
+        </p:cTn>
+      </p:par>
+    </p:tnLst>
+  </p:timing>
 </p:sld>
 </file>
 

--- a/templates/02-game-gdd-game-design-proposal/02__darkneon.pptx
+++ b/templates/02-game-gdd-game-design-proposal/02__darkneon.pptx
@@ -122,6 +122,1886 @@
     </a:lvl9pPr>
   </p:defaultTextStyle>
 </p:presentation>
+</file>
+
+<file path=ppt/notesMasters/notesMaster1.xml><?xml version="1.0" encoding="utf-8"?>
+<p:notesMaster xmlns:a="http://schemas.openxmlformats.org/drawingml/2006/main" xmlns:p="http://schemas.openxmlformats.org/presentationml/2006/main" xmlns:r="http://schemas.openxmlformats.org/officeDocument/2006/relationships">
+  <p:cSld>
+    <p:bg>
+      <p:bgRef idx="1001">
+        <a:schemeClr val="bg1"/>
+      </p:bgRef>
+    </p:bg>
+    <p:spTree>
+      <p:nvGrpSpPr>
+        <p:cNvPr id="1" name=""/>
+        <p:cNvGrpSpPr/>
+        <p:nvPr/>
+      </p:nvGrpSpPr>
+      <p:grpSpPr>
+        <a:xfrm>
+          <a:off x="0" y="0"/>
+          <a:ext cx="0" cy="0"/>
+          <a:chOff x="0" y="0"/>
+          <a:chExt cx="0" cy="0"/>
+        </a:xfrm>
+      </p:grpSpPr>
+      <p:sp>
+        <p:nvSpPr>
+          <p:cNvPr id="2" name="Header Placeholder 1"/>
+          <p:cNvSpPr>
+            <a:spLocks noGrp="1"/>
+          </p:cNvSpPr>
+          <p:nvPr>
+            <p:ph type="hdr" sz="quarter"/>
+          </p:nvPr>
+        </p:nvSpPr>
+        <p:spPr>
+          <a:xfrm>
+            <a:off x="0" y="0"/>
+            <a:ext cx="2971800" cy="457200"/>
+          </a:xfrm>
+          <a:prstGeom prst="rect">
+            <a:avLst/>
+          </a:prstGeom>
+        </p:spPr>
+        <p:txBody>
+          <a:bodyPr vert="horz" lIns="91440" tIns="45720" rIns="91440" bIns="45720" rtlCol="0"/>
+          <a:lstStyle>
+            <a:lvl1pPr algn="l">
+              <a:defRPr sz="1200"/>
+            </a:lvl1pPr>
+          </a:lstStyle>
+          <a:p>
+            <a:endParaRPr lang="en-US"/>
+          </a:p>
+        </p:txBody>
+      </p:sp>
+      <p:sp>
+        <p:nvSpPr>
+          <p:cNvPr id="3" name="Date Placeholder 2"/>
+          <p:cNvSpPr>
+            <a:spLocks noGrp="1"/>
+          </p:cNvSpPr>
+          <p:nvPr>
+            <p:ph type="dt" idx="1"/>
+          </p:nvPr>
+        </p:nvSpPr>
+        <p:spPr>
+          <a:xfrm>
+            <a:off x="3884613" y="0"/>
+            <a:ext cx="2971800" cy="457200"/>
+          </a:xfrm>
+          <a:prstGeom prst="rect">
+            <a:avLst/>
+          </a:prstGeom>
+        </p:spPr>
+        <p:txBody>
+          <a:bodyPr vert="horz" lIns="91440" tIns="45720" rIns="91440" bIns="45720" rtlCol="0"/>
+          <a:lstStyle>
+            <a:lvl1pPr algn="r">
+              <a:defRPr sz="1200"/>
+            </a:lvl1pPr>
+          </a:lstStyle>
+          <a:p>
+            <a:fld id="{0F89C1C7-3DCD-1040-A9CF-14679D8B5DDD}" type="datetimeFigureOut">
+              <a:rPr lang="en-US" smtClean="0"/>
+              <a:t>10/17/16</a:t>
+            </a:fld>
+            <a:endParaRPr lang="en-US"/>
+          </a:p>
+        </p:txBody>
+      </p:sp>
+      <p:sp>
+        <p:nvSpPr>
+          <p:cNvPr id="4" name="Slide Image Placeholder 3"/>
+          <p:cNvSpPr>
+            <a:spLocks noGrp="1" noRot="1" noChangeAspect="1"/>
+          </p:cNvSpPr>
+          <p:nvPr>
+            <p:ph type="sldImg" idx="2"/>
+          </p:nvPr>
+        </p:nvSpPr>
+        <p:spPr>
+          <a:xfrm>
+            <a:off x="1143000" y="685800"/>
+            <a:ext cx="4572000" cy="3429000"/>
+          </a:xfrm>
+          <a:prstGeom prst="rect">
+            <a:avLst/>
+          </a:prstGeom>
+          <a:noFill/>
+          <a:ln w="12700">
+            <a:solidFill>
+              <a:prstClr val="black"/>
+            </a:solidFill>
+          </a:ln>
+        </p:spPr>
+        <p:txBody>
+          <a:bodyPr vert="horz" lIns="91440" tIns="45720" rIns="91440" bIns="45720" rtlCol="0" anchor="ctr"/>
+          <a:lstStyle/>
+          <a:p>
+            <a:endParaRPr lang="en-US"/>
+          </a:p>
+        </p:txBody>
+      </p:sp>
+      <p:sp>
+        <p:nvSpPr>
+          <p:cNvPr id="5" name="Notes Placeholder 4"/>
+          <p:cNvSpPr>
+            <a:spLocks noGrp="1"/>
+          </p:cNvSpPr>
+          <p:nvPr>
+            <p:ph type="body" sz="quarter" idx="3"/>
+          </p:nvPr>
+        </p:nvSpPr>
+        <p:spPr>
+          <a:xfrm>
+            <a:off x="685800" y="4343400"/>
+            <a:ext cx="5486400" cy="4114800"/>
+          </a:xfrm>
+          <a:prstGeom prst="rect">
+            <a:avLst/>
+          </a:prstGeom>
+        </p:spPr>
+        <p:txBody>
+          <a:bodyPr vert="horz" lIns="91440" tIns="45720" rIns="91440" bIns="45720" rtlCol="0"/>
+          <a:lstStyle/>
+          <a:p>
+            <a:pPr lvl="0"/>
+            <a:r>
+              <a:rPr lang="en-US" smtClean="0"/>
+              <a:t>Click to edit Master text styles</a:t>
+            </a:r>
+          </a:p>
+          <a:p>
+            <a:pPr lvl="1"/>
+            <a:r>
+              <a:rPr lang="en-US" smtClean="0"/>
+              <a:t>Second level</a:t>
+            </a:r>
+          </a:p>
+          <a:p>
+            <a:pPr lvl="2"/>
+            <a:r>
+              <a:rPr lang="en-US" smtClean="0"/>
+              <a:t>Third level</a:t>
+            </a:r>
+          </a:p>
+          <a:p>
+            <a:pPr lvl="3"/>
+            <a:r>
+              <a:rPr lang="en-US" smtClean="0"/>
+              <a:t>Fourth level</a:t>
+            </a:r>
+          </a:p>
+          <a:p>
+            <a:pPr lvl="4"/>
+            <a:r>
+              <a:rPr lang="en-US" smtClean="0"/>
+              <a:t>Fifth level</a:t>
+            </a:r>
+            <a:endParaRPr lang="en-US"/>
+          </a:p>
+        </p:txBody>
+      </p:sp>
+      <p:sp>
+        <p:nvSpPr>
+          <p:cNvPr id="6" name="Footer Placeholder 5"/>
+          <p:cNvSpPr>
+            <a:spLocks noGrp="1"/>
+          </p:cNvSpPr>
+          <p:nvPr>
+            <p:ph type="ftr" sz="quarter" idx="4"/>
+          </p:nvPr>
+        </p:nvSpPr>
+        <p:spPr>
+          <a:xfrm>
+            <a:off x="0" y="8685213"/>
+            <a:ext cx="2971800" cy="457200"/>
+          </a:xfrm>
+          <a:prstGeom prst="rect">
+            <a:avLst/>
+          </a:prstGeom>
+        </p:spPr>
+        <p:txBody>
+          <a:bodyPr vert="horz" lIns="91440" tIns="45720" rIns="91440" bIns="45720" rtlCol="0" anchor="b"/>
+          <a:lstStyle>
+            <a:lvl1pPr algn="l">
+              <a:defRPr sz="1200"/>
+            </a:lvl1pPr>
+          </a:lstStyle>
+          <a:p>
+            <a:endParaRPr lang="en-US"/>
+          </a:p>
+        </p:txBody>
+      </p:sp>
+      <p:sp>
+        <p:nvSpPr>
+          <p:cNvPr id="7" name="Slide Number Placeholder 6"/>
+          <p:cNvSpPr>
+            <a:spLocks noGrp="1"/>
+          </p:cNvSpPr>
+          <p:nvPr>
+            <p:ph type="sldNum" sz="quarter" idx="5"/>
+          </p:nvPr>
+        </p:nvSpPr>
+        <p:spPr>
+          <a:xfrm>
+            <a:off x="3884613" y="8685213"/>
+            <a:ext cx="2971800" cy="457200"/>
+          </a:xfrm>
+          <a:prstGeom prst="rect">
+            <a:avLst/>
+          </a:prstGeom>
+        </p:spPr>
+        <p:txBody>
+          <a:bodyPr vert="horz" lIns="91440" tIns="45720" rIns="91440" bIns="45720" rtlCol="0" anchor="b"/>
+          <a:lstStyle>
+            <a:lvl1pPr algn="r">
+              <a:defRPr sz="1200"/>
+            </a:lvl1pPr>
+          </a:lstStyle>
+          <a:p>
+            <a:fld id="{BB5E49A5-4136-284D-997B-48E1D791AD67}" type="slidenum">
+              <a:rPr lang="en-US" smtClean="0"/>
+              <a:t>‹#›</a:t>
+            </a:fld>
+            <a:endParaRPr lang="en-US"/>
+          </a:p>
+        </p:txBody>
+      </p:sp>
+    </p:spTree>
+    <p:extLst>
+      <p:ext uri="{BB962C8B-B14F-4D97-AF65-F5344CB8AC3E}">
+        <p14:creationId xmlns:p14="http://schemas.microsoft.com/office/powerpoint/2010/main" val="2623252185"/>
+      </p:ext>
+    </p:extLst>
+  </p:cSld>
+  <p:clrMap bg1="lt1" tx1="dk1" bg2="lt2" tx2="dk2" accent1="accent1" accent2="accent2" accent3="accent3" accent4="accent4" accent5="accent5" accent6="accent6" hlink="hlink" folHlink="folHlink"/>
+  <p:notesStyle>
+    <a:lvl1pPr marL="0" algn="l" defTabSz="457200" rtl="0" eaLnBrk="1" latinLnBrk="0" hangingPunct="1">
+      <a:defRPr sz="1200" kern="1200">
+        <a:solidFill>
+          <a:schemeClr val="tx1"/>
+        </a:solidFill>
+        <a:latin typeface="+mn-lt"/>
+        <a:ea typeface="+mn-ea"/>
+        <a:cs typeface="+mn-cs"/>
+      </a:defRPr>
+    </a:lvl1pPr>
+    <a:lvl2pPr marL="457200" algn="l" defTabSz="457200" rtl="0" eaLnBrk="1" latinLnBrk="0" hangingPunct="1">
+      <a:defRPr sz="1200" kern="1200">
+        <a:solidFill>
+          <a:schemeClr val="tx1"/>
+        </a:solidFill>
+        <a:latin typeface="+mn-lt"/>
+        <a:ea typeface="+mn-ea"/>
+        <a:cs typeface="+mn-cs"/>
+      </a:defRPr>
+    </a:lvl2pPr>
+    <a:lvl3pPr marL="914400" algn="l" defTabSz="457200" rtl="0" eaLnBrk="1" latinLnBrk="0" hangingPunct="1">
+      <a:defRPr sz="1200" kern="1200">
+        <a:solidFill>
+          <a:schemeClr val="tx1"/>
+        </a:solidFill>
+        <a:latin typeface="+mn-lt"/>
+        <a:ea typeface="+mn-ea"/>
+        <a:cs typeface="+mn-cs"/>
+      </a:defRPr>
+    </a:lvl3pPr>
+    <a:lvl4pPr marL="1371600" algn="l" defTabSz="457200" rtl="0" eaLnBrk="1" latinLnBrk="0" hangingPunct="1">
+      <a:defRPr sz="1200" kern="1200">
+        <a:solidFill>
+          <a:schemeClr val="tx1"/>
+        </a:solidFill>
+        <a:latin typeface="+mn-lt"/>
+        <a:ea typeface="+mn-ea"/>
+        <a:cs typeface="+mn-cs"/>
+      </a:defRPr>
+    </a:lvl4pPr>
+    <a:lvl5pPr marL="1828800" algn="l" defTabSz="457200" rtl="0" eaLnBrk="1" latinLnBrk="0" hangingPunct="1">
+      <a:defRPr sz="1200" kern="1200">
+        <a:solidFill>
+          <a:schemeClr val="tx1"/>
+        </a:solidFill>
+        <a:latin typeface="+mn-lt"/>
+        <a:ea typeface="+mn-ea"/>
+        <a:cs typeface="+mn-cs"/>
+      </a:defRPr>
+    </a:lvl5pPr>
+    <a:lvl6pPr marL="2286000" algn="l" defTabSz="457200" rtl="0" eaLnBrk="1" latinLnBrk="0" hangingPunct="1">
+      <a:defRPr sz="1200" kern="1200">
+        <a:solidFill>
+          <a:schemeClr val="tx1"/>
+        </a:solidFill>
+        <a:latin typeface="+mn-lt"/>
+        <a:ea typeface="+mn-ea"/>
+        <a:cs typeface="+mn-cs"/>
+      </a:defRPr>
+    </a:lvl6pPr>
+    <a:lvl7pPr marL="2743200" algn="l" defTabSz="457200" rtl="0" eaLnBrk="1" latinLnBrk="0" hangingPunct="1">
+      <a:defRPr sz="1200" kern="1200">
+        <a:solidFill>
+          <a:schemeClr val="tx1"/>
+        </a:solidFill>
+        <a:latin typeface="+mn-lt"/>
+        <a:ea typeface="+mn-ea"/>
+        <a:cs typeface="+mn-cs"/>
+      </a:defRPr>
+    </a:lvl7pPr>
+    <a:lvl8pPr marL="3200400" algn="l" defTabSz="457200" rtl="0" eaLnBrk="1" latinLnBrk="0" hangingPunct="1">
+      <a:defRPr sz="1200" kern="1200">
+        <a:solidFill>
+          <a:schemeClr val="tx1"/>
+        </a:solidFill>
+        <a:latin typeface="+mn-lt"/>
+        <a:ea typeface="+mn-ea"/>
+        <a:cs typeface="+mn-cs"/>
+      </a:defRPr>
+    </a:lvl8pPr>
+    <a:lvl9pPr marL="3657600" algn="l" defTabSz="457200" rtl="0" eaLnBrk="1" latinLnBrk="0" hangingPunct="1">
+      <a:defRPr sz="1200" kern="1200">
+        <a:solidFill>
+          <a:schemeClr val="tx1"/>
+        </a:solidFill>
+        <a:latin typeface="+mn-lt"/>
+        <a:ea typeface="+mn-ea"/>
+        <a:cs typeface="+mn-cs"/>
+      </a:defRPr>
+    </a:lvl9pPr>
+  </p:notesStyle>
+</p:notesMaster>
+</file>
+
+<file path=ppt/notesSlides/notesSlide1.xml><?xml version="1.0" encoding="utf-8"?>
+<p:notes xmlns:a="http://schemas.openxmlformats.org/drawingml/2006/main" xmlns:p="http://schemas.openxmlformats.org/presentationml/2006/main" xmlns:r="http://schemas.openxmlformats.org/officeDocument/2006/relationships">
+  <p:cSld>
+    <p:spTree>
+      <p:nvGrpSpPr>
+        <p:cNvPr id="1" name=""/>
+        <p:cNvGrpSpPr/>
+        <p:nvPr/>
+      </p:nvGrpSpPr>
+      <p:grpSpPr>
+        <a:xfrm>
+          <a:off x="0" y="0"/>
+          <a:ext cx="0" cy="0"/>
+          <a:chOff x="0" y="0"/>
+          <a:chExt cx="0" cy="0"/>
+        </a:xfrm>
+      </p:grpSpPr>
+      <p:sp>
+        <p:nvSpPr>
+          <p:cNvPr id="2" name="Slide Image Placeholder 1"/>
+          <p:cNvSpPr>
+            <a:spLocks noGrp="1"/>
+          </p:cNvSpPr>
+          <p:nvPr>
+            <p:ph type="sldImg" idx="2"/>
+          </p:nvPr>
+        </p:nvSpPr>
+        <p:spPr/>
+      </p:sp>
+      <p:sp>
+        <p:nvSpPr>
+          <p:cNvPr id="3" name="Notes Placeholder 2"/>
+          <p:cNvSpPr>
+            <a:spLocks noGrp="1"/>
+          </p:cNvSpPr>
+          <p:nvPr>
+            <p:ph type="body" idx="3" sz="quarter"/>
+          </p:nvPr>
+        </p:nvSpPr>
+        <p:spPr/>
+        <p:txBody>
+          <a:bodyPr/>
+          <a:lstStyle/>
+          <a:p>
+            <a:r>
+              <a:t>【页面定位】SECTION —— 开场页：自我介绍或破题，停留时间可稍长。</a:t>
+            </a:r>
+          </a:p>
+          <a:p>
+            <a:r>
+              <a:t>【放映】本页元素按“背景→主体→标注”顺序错峰入场（约 2 秒完成）；开启“使用计时器”后本页停留 8 秒自动翻页。</a:t>
+            </a:r>
+          </a:p>
+          <a:p>
+            <a:r>
+              <a:t>【编辑】直接点击文本框替换占位文字；在“设计→变体”中一键换配色；图片占位框右键“更改图片”即可替换。</a:t>
+            </a:r>
+          </a:p>
+          <a:p>
+            <a:r>
+              <a:t>【联动】图表为原生可编辑图表：右键“编辑数据”即可替换数值。</a:t>
+            </a:r>
+          </a:p>
+        </p:txBody>
+      </p:sp>
+      <p:sp>
+        <p:nvSpPr>
+          <p:cNvPr id="4" name="Slide Number Placeholder 3"/>
+          <p:cNvSpPr>
+            <a:spLocks noGrp="1"/>
+          </p:cNvSpPr>
+          <p:nvPr>
+            <p:ph type="sldNum" idx="5" sz="quarter"/>
+          </p:nvPr>
+        </p:nvSpPr>
+        <p:spPr/>
+      </p:sp>
+    </p:spTree>
+  </p:cSld>
+  <p:clrMapOvr>
+    <a:masterClrMapping/>
+  </p:clrMapOvr>
+</p:notes>
+</file>
+
+<file path=ppt/notesSlides/notesSlide10.xml><?xml version="1.0" encoding="utf-8"?>
+<p:notes xmlns:a="http://schemas.openxmlformats.org/drawingml/2006/main" xmlns:p="http://schemas.openxmlformats.org/presentationml/2006/main" xmlns:r="http://schemas.openxmlformats.org/officeDocument/2006/relationships">
+  <p:cSld>
+    <p:spTree>
+      <p:nvGrpSpPr>
+        <p:cNvPr id="1" name=""/>
+        <p:cNvGrpSpPr/>
+        <p:nvPr/>
+      </p:nvGrpSpPr>
+      <p:grpSpPr>
+        <a:xfrm>
+          <a:off x="0" y="0"/>
+          <a:ext cx="0" cy="0"/>
+          <a:chOff x="0" y="0"/>
+          <a:chExt cx="0" cy="0"/>
+        </a:xfrm>
+      </p:grpSpPr>
+      <p:sp>
+        <p:nvSpPr>
+          <p:cNvPr id="2" name="Slide Image Placeholder 1"/>
+          <p:cNvSpPr>
+            <a:spLocks noGrp="1"/>
+          </p:cNvSpPr>
+          <p:nvPr>
+            <p:ph type="sldImg" idx="2"/>
+          </p:nvPr>
+        </p:nvSpPr>
+        <p:spPr/>
+      </p:sp>
+      <p:sp>
+        <p:nvSpPr>
+          <p:cNvPr id="3" name="Notes Placeholder 2"/>
+          <p:cNvSpPr>
+            <a:spLocks noGrp="1"/>
+          </p:cNvSpPr>
+          <p:nvPr>
+            <p:ph type="body" idx="3" sz="quarter"/>
+          </p:nvPr>
+        </p:nvSpPr>
+        <p:spPr/>
+        <p:txBody>
+          <a:bodyPr/>
+          <a:lstStyle/>
+          <a:p>
+            <a:r>
+              <a:t>【页面定位】DATA —— 收尾页：总结要点并给出行动号召或联系方式。</a:t>
+            </a:r>
+          </a:p>
+          <a:p>
+            <a:r>
+              <a:t>【放映】本页元素按“背景→主体→标注”顺序错峰入场（约 2 秒完成）；开启“使用计时器”后本页停留 8 秒自动翻页。</a:t>
+            </a:r>
+          </a:p>
+          <a:p>
+            <a:r>
+              <a:t>【编辑】直接点击文本框替换占位文字；在“设计→变体”中一键换配色；图片占位框右键“更改图片”即可替换。</a:t>
+            </a:r>
+          </a:p>
+          <a:p>
+            <a:r>
+              <a:t>【联动】图表为原生可编辑图表：右键“编辑数据”即可替换数值。</a:t>
+            </a:r>
+          </a:p>
+        </p:txBody>
+      </p:sp>
+      <p:sp>
+        <p:nvSpPr>
+          <p:cNvPr id="4" name="Slide Number Placeholder 3"/>
+          <p:cNvSpPr>
+            <a:spLocks noGrp="1"/>
+          </p:cNvSpPr>
+          <p:nvPr>
+            <p:ph type="sldNum" idx="5" sz="quarter"/>
+          </p:nvPr>
+        </p:nvSpPr>
+        <p:spPr/>
+      </p:sp>
+    </p:spTree>
+  </p:cSld>
+  <p:clrMapOvr>
+    <a:masterClrMapping/>
+  </p:clrMapOvr>
+</p:notes>
+</file>
+
+<file path=ppt/notesSlides/notesSlide11.xml><?xml version="1.0" encoding="utf-8"?>
+<p:notes xmlns:a="http://schemas.openxmlformats.org/drawingml/2006/main" xmlns:p="http://schemas.openxmlformats.org/presentationml/2006/main" xmlns:r="http://schemas.openxmlformats.org/officeDocument/2006/relationships">
+  <p:cSld>
+    <p:spTree>
+      <p:nvGrpSpPr>
+        <p:cNvPr id="1" name=""/>
+        <p:cNvGrpSpPr/>
+        <p:nvPr/>
+      </p:nvGrpSpPr>
+      <p:grpSpPr>
+        <a:xfrm>
+          <a:off x="0" y="0"/>
+          <a:ext cx="0" cy="0"/>
+          <a:chOff x="0" y="0"/>
+          <a:chExt cx="0" cy="0"/>
+        </a:xfrm>
+      </p:grpSpPr>
+      <p:sp>
+        <p:nvSpPr>
+          <p:cNvPr id="2" name="Slide Image Placeholder 1"/>
+          <p:cNvSpPr>
+            <a:spLocks noGrp="1"/>
+          </p:cNvSpPr>
+          <p:nvPr>
+            <p:ph type="sldImg" idx="2"/>
+          </p:nvPr>
+        </p:nvSpPr>
+        <p:spPr/>
+      </p:sp>
+      <p:sp>
+        <p:nvSpPr>
+          <p:cNvPr id="3" name="Notes Placeholder 2"/>
+          <p:cNvSpPr>
+            <a:spLocks noGrp="1"/>
+          </p:cNvSpPr>
+          <p:nvPr>
+            <p:ph type="body" idx="3" sz="quarter"/>
+          </p:nvPr>
+        </p:nvSpPr>
+        <p:spPr/>
+        <p:txBody>
+          <a:bodyPr/>
+          <a:lstStyle/>
+          <a:p>
+            <a:r>
+              <a:t>【页面定位】KEY POINTS —— 开场页：自我介绍或破题，停留时间可稍长。</a:t>
+            </a:r>
+          </a:p>
+          <a:p>
+            <a:r>
+              <a:t>【放映】本页元素按“背景→主体→标注”顺序错峰入场（约 2 秒完成）；开启“使用计时器”后本页停留 8 秒自动翻页。</a:t>
+            </a:r>
+          </a:p>
+          <a:p>
+            <a:r>
+              <a:t>【编辑】直接点击文本框替换占位文字；在“设计→变体”中一键换配色；图片占位框右键“更改图片”即可替换。</a:t>
+            </a:r>
+          </a:p>
+          <a:p>
+            <a:r>
+              <a:t>【联动】图表为原生可编辑图表：右键“编辑数据”即可替换数值。</a:t>
+            </a:r>
+          </a:p>
+        </p:txBody>
+      </p:sp>
+      <p:sp>
+        <p:nvSpPr>
+          <p:cNvPr id="4" name="Slide Number Placeholder 3"/>
+          <p:cNvSpPr>
+            <a:spLocks noGrp="1"/>
+          </p:cNvSpPr>
+          <p:nvPr>
+            <p:ph type="sldNum" idx="5" sz="quarter"/>
+          </p:nvPr>
+        </p:nvSpPr>
+        <p:spPr/>
+      </p:sp>
+    </p:spTree>
+  </p:cSld>
+  <p:clrMapOvr>
+    <a:masterClrMapping/>
+  </p:clrMapOvr>
+</p:notes>
+</file>
+
+<file path=ppt/notesSlides/notesSlide12.xml><?xml version="1.0" encoding="utf-8"?>
+<p:notes xmlns:a="http://schemas.openxmlformats.org/drawingml/2006/main" xmlns:p="http://schemas.openxmlformats.org/presentationml/2006/main" xmlns:r="http://schemas.openxmlformats.org/officeDocument/2006/relationships">
+  <p:cSld>
+    <p:spTree>
+      <p:nvGrpSpPr>
+        <p:cNvPr id="1" name=""/>
+        <p:cNvGrpSpPr/>
+        <p:nvPr/>
+      </p:nvGrpSpPr>
+      <p:grpSpPr>
+        <a:xfrm>
+          <a:off x="0" y="0"/>
+          <a:ext cx="0" cy="0"/>
+          <a:chOff x="0" y="0"/>
+          <a:chExt cx="0" cy="0"/>
+        </a:xfrm>
+      </p:grpSpPr>
+      <p:sp>
+        <p:nvSpPr>
+          <p:cNvPr id="2" name="Slide Image Placeholder 1"/>
+          <p:cNvSpPr>
+            <a:spLocks noGrp="1"/>
+          </p:cNvSpPr>
+          <p:nvPr>
+            <p:ph type="sldImg" idx="2"/>
+          </p:nvPr>
+        </p:nvSpPr>
+        <p:spPr/>
+      </p:sp>
+      <p:sp>
+        <p:nvSpPr>
+          <p:cNvPr id="3" name="Notes Placeholder 2"/>
+          <p:cNvSpPr>
+            <a:spLocks noGrp="1"/>
+          </p:cNvSpPr>
+          <p:nvPr>
+            <p:ph type="body" idx="3" sz="quarter"/>
+          </p:nvPr>
+        </p:nvSpPr>
+        <p:spPr/>
+        <p:txBody>
+          <a:bodyPr/>
+          <a:lstStyle/>
+          <a:p>
+            <a:r>
+              <a:t>【页面定位】02 —— 概览页：快速带过结构，告诉听众接下来讲什么。</a:t>
+            </a:r>
+          </a:p>
+          <a:p>
+            <a:r>
+              <a:t>【放映】本页元素按“背景→主体→标注”顺序错峰入场（约 2 秒完成）；开启“使用计时器”后本页停留 8 秒自动翻页。</a:t>
+            </a:r>
+          </a:p>
+          <a:p>
+            <a:r>
+              <a:t>【编辑】直接点击文本框替换占位文字；在“设计→变体”中一键换配色；图片占位框右键“更改图片”即可替换。</a:t>
+            </a:r>
+          </a:p>
+          <a:p>
+            <a:r>
+              <a:t>【联动】图表为原生可编辑图表：右键“编辑数据”即可替换数值。</a:t>
+            </a:r>
+          </a:p>
+        </p:txBody>
+      </p:sp>
+      <p:sp>
+        <p:nvSpPr>
+          <p:cNvPr id="4" name="Slide Number Placeholder 3"/>
+          <p:cNvSpPr>
+            <a:spLocks noGrp="1"/>
+          </p:cNvSpPr>
+          <p:nvPr>
+            <p:ph type="sldNum" idx="5" sz="quarter"/>
+          </p:nvPr>
+        </p:nvSpPr>
+        <p:spPr/>
+      </p:sp>
+    </p:spTree>
+  </p:cSld>
+  <p:clrMapOvr>
+    <a:masterClrMapping/>
+  </p:clrMapOvr>
+</p:notes>
+</file>
+
+<file path=ppt/notesSlides/notesSlide13.xml><?xml version="1.0" encoding="utf-8"?>
+<p:notes xmlns:a="http://schemas.openxmlformats.org/drawingml/2006/main" xmlns:p="http://schemas.openxmlformats.org/presentationml/2006/main" xmlns:r="http://schemas.openxmlformats.org/officeDocument/2006/relationships">
+  <p:cSld>
+    <p:spTree>
+      <p:nvGrpSpPr>
+        <p:cNvPr id="1" name=""/>
+        <p:cNvGrpSpPr/>
+        <p:nvPr/>
+      </p:nvGrpSpPr>
+      <p:grpSpPr>
+        <a:xfrm>
+          <a:off x="0" y="0"/>
+          <a:ext cx="0" cy="0"/>
+          <a:chOff x="0" y="0"/>
+          <a:chExt cx="0" cy="0"/>
+        </a:xfrm>
+      </p:grpSpPr>
+      <p:sp>
+        <p:nvSpPr>
+          <p:cNvPr id="2" name="Slide Image Placeholder 1"/>
+          <p:cNvSpPr>
+            <a:spLocks noGrp="1"/>
+          </p:cNvSpPr>
+          <p:nvPr>
+            <p:ph type="sldImg" idx="2"/>
+          </p:nvPr>
+        </p:nvSpPr>
+        <p:spPr/>
+      </p:sp>
+      <p:sp>
+        <p:nvSpPr>
+          <p:cNvPr id="3" name="Notes Placeholder 2"/>
+          <p:cNvSpPr>
+            <a:spLocks noGrp="1"/>
+          </p:cNvSpPr>
+          <p:nvPr>
+            <p:ph type="body" idx="3" sz="quarter"/>
+          </p:nvPr>
+        </p:nvSpPr>
+        <p:spPr/>
+        <p:txBody>
+          <a:bodyPr/>
+          <a:lstStyle/>
+          <a:p>
+            <a:r>
+              <a:t>【页面定位】在此输入一句设计信条 / 立项理由。 —— 内容页：逐条展开，配合动画节奏点击推进。</a:t>
+            </a:r>
+          </a:p>
+          <a:p>
+            <a:r>
+              <a:t>【放映】本页元素按“背景→主体→标注”顺序错峰入场（约 2 秒完成）；开启“使用计时器”后本页停留 8 秒自动翻页。</a:t>
+            </a:r>
+          </a:p>
+          <a:p>
+            <a:r>
+              <a:t>【编辑】直接点击文本框替换占位文字；在“设计→变体”中一键换配色；图片占位框右键“更改图片”即可替换。</a:t>
+            </a:r>
+          </a:p>
+          <a:p>
+            <a:r>
+              <a:t>【联动】图表为原生可编辑图表：右键“编辑数据”即可替换数值。</a:t>
+            </a:r>
+          </a:p>
+        </p:txBody>
+      </p:sp>
+      <p:sp>
+        <p:nvSpPr>
+          <p:cNvPr id="4" name="Slide Number Placeholder 3"/>
+          <p:cNvSpPr>
+            <a:spLocks noGrp="1"/>
+          </p:cNvSpPr>
+          <p:nvPr>
+            <p:ph type="sldNum" idx="5" sz="quarter"/>
+          </p:nvPr>
+        </p:nvSpPr>
+        <p:spPr/>
+      </p:sp>
+    </p:spTree>
+  </p:cSld>
+  <p:clrMapOvr>
+    <a:masterClrMapping/>
+  </p:clrMapOvr>
+</p:notes>
+</file>
+
+<file path=ppt/notesSlides/notesSlide14.xml><?xml version="1.0" encoding="utf-8"?>
+<p:notes xmlns:a="http://schemas.openxmlformats.org/drawingml/2006/main" xmlns:p="http://schemas.openxmlformats.org/presentationml/2006/main" xmlns:r="http://schemas.openxmlformats.org/officeDocument/2006/relationships">
+  <p:cSld>
+    <p:spTree>
+      <p:nvGrpSpPr>
+        <p:cNvPr id="1" name=""/>
+        <p:cNvGrpSpPr/>
+        <p:nvPr/>
+      </p:nvGrpSpPr>
+      <p:grpSpPr>
+        <a:xfrm>
+          <a:off x="0" y="0"/>
+          <a:ext cx="0" cy="0"/>
+          <a:chOff x="0" y="0"/>
+          <a:chExt cx="0" cy="0"/>
+        </a:xfrm>
+      </p:grpSpPr>
+      <p:sp>
+        <p:nvSpPr>
+          <p:cNvPr id="2" name="Slide Image Placeholder 1"/>
+          <p:cNvSpPr>
+            <a:spLocks noGrp="1"/>
+          </p:cNvSpPr>
+          <p:nvPr>
+            <p:ph type="sldImg" idx="2"/>
+          </p:nvPr>
+        </p:nvSpPr>
+        <p:spPr/>
+      </p:sp>
+      <p:sp>
+        <p:nvSpPr>
+          <p:cNvPr id="3" name="Notes Placeholder 2"/>
+          <p:cNvSpPr>
+            <a:spLocks noGrp="1"/>
+          </p:cNvSpPr>
+          <p:nvPr>
+            <p:ph type="body" idx="3" sz="quarter"/>
+          </p:nvPr>
+        </p:nvSpPr>
+        <p:spPr/>
+        <p:txBody>
+          <a:bodyPr/>
+          <a:lstStyle/>
+          <a:p>
+            <a:r>
+              <a:t>【页面定位】TEAM —— 数据页：先说结论，再用图表佐证。</a:t>
+            </a:r>
+          </a:p>
+          <a:p>
+            <a:r>
+              <a:t>【放映】本页元素按“背景→主体→标注”顺序错峰入场（约 2 秒完成）；开启“使用计时器”后本页停留 8 秒自动翻页。</a:t>
+            </a:r>
+          </a:p>
+          <a:p>
+            <a:r>
+              <a:t>【编辑】直接点击文本框替换占位文字；在“设计→变体”中一键换配色；图片占位框右键“更改图片”即可替换。</a:t>
+            </a:r>
+          </a:p>
+          <a:p>
+            <a:r>
+              <a:t>【联动】图表为原生可编辑图表：右键“编辑数据”即可替换数值。</a:t>
+            </a:r>
+          </a:p>
+        </p:txBody>
+      </p:sp>
+      <p:sp>
+        <p:nvSpPr>
+          <p:cNvPr id="4" name="Slide Number Placeholder 3"/>
+          <p:cNvSpPr>
+            <a:spLocks noGrp="1"/>
+          </p:cNvSpPr>
+          <p:nvPr>
+            <p:ph type="sldNum" idx="5" sz="quarter"/>
+          </p:nvPr>
+        </p:nvSpPr>
+        <p:spPr/>
+      </p:sp>
+    </p:spTree>
+  </p:cSld>
+  <p:clrMapOvr>
+    <a:masterClrMapping/>
+  </p:clrMapOvr>
+</p:notes>
+</file>
+
+<file path=ppt/notesSlides/notesSlide15.xml><?xml version="1.0" encoding="utf-8"?>
+<p:notes xmlns:a="http://schemas.openxmlformats.org/drawingml/2006/main" xmlns:p="http://schemas.openxmlformats.org/presentationml/2006/main" xmlns:r="http://schemas.openxmlformats.org/officeDocument/2006/relationships">
+  <p:cSld>
+    <p:spTree>
+      <p:nvGrpSpPr>
+        <p:cNvPr id="1" name=""/>
+        <p:cNvGrpSpPr/>
+        <p:nvPr/>
+      </p:nvGrpSpPr>
+      <p:grpSpPr>
+        <a:xfrm>
+          <a:off x="0" y="0"/>
+          <a:ext cx="0" cy="0"/>
+          <a:chOff x="0" y="0"/>
+          <a:chExt cx="0" cy="0"/>
+        </a:xfrm>
+      </p:grpSpPr>
+      <p:sp>
+        <p:nvSpPr>
+          <p:cNvPr id="2" name="Slide Image Placeholder 1"/>
+          <p:cNvSpPr>
+            <a:spLocks noGrp="1"/>
+          </p:cNvSpPr>
+          <p:nvPr>
+            <p:ph type="sldImg" idx="2"/>
+          </p:nvPr>
+        </p:nvSpPr>
+        <p:spPr/>
+      </p:sp>
+      <p:sp>
+        <p:nvSpPr>
+          <p:cNvPr id="3" name="Notes Placeholder 2"/>
+          <p:cNvSpPr>
+            <a:spLocks noGrp="1"/>
+          </p:cNvSpPr>
+          <p:nvPr>
+            <p:ph type="body" idx="3" sz="quarter"/>
+          </p:nvPr>
+        </p:nvSpPr>
+        <p:spPr/>
+        <p:txBody>
+          <a:bodyPr/>
+          <a:lstStyle/>
+          <a:p>
+            <a:r>
+              <a:t>【页面定位】FAQ —— 收尾页：总结要点并给出行动号召或联系方式。</a:t>
+            </a:r>
+          </a:p>
+          <a:p>
+            <a:r>
+              <a:t>【放映】本页元素按“背景→主体→标注”顺序错峰入场（约 2 秒完成）；开启“使用计时器”后本页停留 8 秒自动翻页。</a:t>
+            </a:r>
+          </a:p>
+          <a:p>
+            <a:r>
+              <a:t>【编辑】直接点击文本框替换占位文字；在“设计→变体”中一键换配色；图片占位框右键“更改图片”即可替换。</a:t>
+            </a:r>
+          </a:p>
+          <a:p>
+            <a:r>
+              <a:t>【联动】图表为原生可编辑图表：右键“编辑数据”即可替换数值。</a:t>
+            </a:r>
+          </a:p>
+        </p:txBody>
+      </p:sp>
+      <p:sp>
+        <p:nvSpPr>
+          <p:cNvPr id="4" name="Slide Number Placeholder 3"/>
+          <p:cNvSpPr>
+            <a:spLocks noGrp="1"/>
+          </p:cNvSpPr>
+          <p:nvPr>
+            <p:ph type="sldNum" idx="5" sz="quarter"/>
+          </p:nvPr>
+        </p:nvSpPr>
+        <p:spPr/>
+      </p:sp>
+    </p:spTree>
+  </p:cSld>
+  <p:clrMapOvr>
+    <a:masterClrMapping/>
+  </p:clrMapOvr>
+</p:notes>
+</file>
+
+<file path=ppt/notesSlides/notesSlide16.xml><?xml version="1.0" encoding="utf-8"?>
+<p:notes xmlns:a="http://schemas.openxmlformats.org/drawingml/2006/main" xmlns:p="http://schemas.openxmlformats.org/presentationml/2006/main" xmlns:r="http://schemas.openxmlformats.org/officeDocument/2006/relationships">
+  <p:cSld>
+    <p:spTree>
+      <p:nvGrpSpPr>
+        <p:cNvPr id="1" name=""/>
+        <p:cNvGrpSpPr/>
+        <p:nvPr/>
+      </p:nvGrpSpPr>
+      <p:grpSpPr>
+        <a:xfrm>
+          <a:off x="0" y="0"/>
+          <a:ext cx="0" cy="0"/>
+          <a:chOff x="0" y="0"/>
+          <a:chExt cx="0" cy="0"/>
+        </a:xfrm>
+      </p:grpSpPr>
+      <p:sp>
+        <p:nvSpPr>
+          <p:cNvPr id="2" name="Slide Image Placeholder 1"/>
+          <p:cNvSpPr>
+            <a:spLocks noGrp="1"/>
+          </p:cNvSpPr>
+          <p:nvPr>
+            <p:ph type="sldImg" idx="2"/>
+          </p:nvPr>
+        </p:nvSpPr>
+        <p:spPr/>
+      </p:sp>
+      <p:sp>
+        <p:nvSpPr>
+          <p:cNvPr id="3" name="Notes Placeholder 2"/>
+          <p:cNvSpPr>
+            <a:spLocks noGrp="1"/>
+          </p:cNvSpPr>
+          <p:nvPr>
+            <p:ph type="body" idx="3" sz="quarter"/>
+          </p:nvPr>
+        </p:nvSpPr>
+        <p:spPr/>
+        <p:txBody>
+          <a:bodyPr/>
+          <a:lstStyle/>
+          <a:p>
+            <a:r>
+              <a:t>【页面定位】ROADMAP —— 开场页：自我介绍或破题，停留时间可稍长。</a:t>
+            </a:r>
+          </a:p>
+          <a:p>
+            <a:r>
+              <a:t>【放映】本页元素按“背景→主体→标注”顺序错峰入场（约 2 秒完成）；开启“使用计时器”后本页停留 8 秒自动翻页。</a:t>
+            </a:r>
+          </a:p>
+          <a:p>
+            <a:r>
+              <a:t>【编辑】直接点击文本框替换占位文字；在“设计→变体”中一键换配色；图片占位框右键“更改图片”即可替换。</a:t>
+            </a:r>
+          </a:p>
+          <a:p>
+            <a:r>
+              <a:t>【联动】图表为原生可编辑图表：右键“编辑数据”即可替换数值。</a:t>
+            </a:r>
+          </a:p>
+        </p:txBody>
+      </p:sp>
+      <p:sp>
+        <p:nvSpPr>
+          <p:cNvPr id="4" name="Slide Number Placeholder 3"/>
+          <p:cNvSpPr>
+            <a:spLocks noGrp="1"/>
+          </p:cNvSpPr>
+          <p:nvPr>
+            <p:ph type="sldNum" idx="5" sz="quarter"/>
+          </p:nvPr>
+        </p:nvSpPr>
+        <p:spPr/>
+      </p:sp>
+    </p:spTree>
+  </p:cSld>
+  <p:clrMapOvr>
+    <a:masterClrMapping/>
+  </p:clrMapOvr>
+</p:notes>
+</file>
+
+<file path=ppt/notesSlides/notesSlide17.xml><?xml version="1.0" encoding="utf-8"?>
+<p:notes xmlns:a="http://schemas.openxmlformats.org/drawingml/2006/main" xmlns:p="http://schemas.openxmlformats.org/presentationml/2006/main" xmlns:r="http://schemas.openxmlformats.org/officeDocument/2006/relationships">
+  <p:cSld>
+    <p:spTree>
+      <p:nvGrpSpPr>
+        <p:cNvPr id="1" name=""/>
+        <p:cNvGrpSpPr/>
+        <p:nvPr/>
+      </p:nvGrpSpPr>
+      <p:grpSpPr>
+        <a:xfrm>
+          <a:off x="0" y="0"/>
+          <a:ext cx="0" cy="0"/>
+          <a:chOff x="0" y="0"/>
+          <a:chExt cx="0" cy="0"/>
+        </a:xfrm>
+      </p:grpSpPr>
+      <p:sp>
+        <p:nvSpPr>
+          <p:cNvPr id="2" name="Slide Image Placeholder 1"/>
+          <p:cNvSpPr>
+            <a:spLocks noGrp="1"/>
+          </p:cNvSpPr>
+          <p:nvPr>
+            <p:ph type="sldImg" idx="2"/>
+          </p:nvPr>
+        </p:nvSpPr>
+        <p:spPr/>
+      </p:sp>
+      <p:sp>
+        <p:nvSpPr>
+          <p:cNvPr id="3" name="Notes Placeholder 2"/>
+          <p:cNvSpPr>
+            <a:spLocks noGrp="1"/>
+          </p:cNvSpPr>
+          <p:nvPr>
+            <p:ph type="body" idx="3" sz="quarter"/>
+          </p:nvPr>
+        </p:nvSpPr>
+        <p:spPr/>
+        <p:txBody>
+          <a:bodyPr/>
+          <a:lstStyle/>
+          <a:p>
+            <a:r>
+              <a:t>【页面定位】CHECKLIST —— 概览页：快速带过结构，告诉听众接下来讲什么。</a:t>
+            </a:r>
+          </a:p>
+          <a:p>
+            <a:r>
+              <a:t>【放映】本页元素按“背景→主体→标注”顺序错峰入场（约 2 秒完成）；开启“使用计时器”后本页停留 8 秒自动翻页。</a:t>
+            </a:r>
+          </a:p>
+          <a:p>
+            <a:r>
+              <a:t>【编辑】直接点击文本框替换占位文字；在“设计→变体”中一键换配色；图片占位框右键“更改图片”即可替换。</a:t>
+            </a:r>
+          </a:p>
+          <a:p>
+            <a:r>
+              <a:t>【联动】图表为原生可编辑图表：右键“编辑数据”即可替换数值。</a:t>
+            </a:r>
+          </a:p>
+        </p:txBody>
+      </p:sp>
+      <p:sp>
+        <p:nvSpPr>
+          <p:cNvPr id="4" name="Slide Number Placeholder 3"/>
+          <p:cNvSpPr>
+            <a:spLocks noGrp="1"/>
+          </p:cNvSpPr>
+          <p:nvPr>
+            <p:ph type="sldNum" idx="5" sz="quarter"/>
+          </p:nvPr>
+        </p:nvSpPr>
+        <p:spPr/>
+      </p:sp>
+    </p:spTree>
+  </p:cSld>
+  <p:clrMapOvr>
+    <a:masterClrMapping/>
+  </p:clrMapOvr>
+</p:notes>
+</file>
+
+<file path=ppt/notesSlides/notesSlide18.xml><?xml version="1.0" encoding="utf-8"?>
+<p:notes xmlns:a="http://schemas.openxmlformats.org/drawingml/2006/main" xmlns:p="http://schemas.openxmlformats.org/presentationml/2006/main" xmlns:r="http://schemas.openxmlformats.org/officeDocument/2006/relationships">
+  <p:cSld>
+    <p:spTree>
+      <p:nvGrpSpPr>
+        <p:cNvPr id="1" name=""/>
+        <p:cNvGrpSpPr/>
+        <p:nvPr/>
+      </p:nvGrpSpPr>
+      <p:grpSpPr>
+        <a:xfrm>
+          <a:off x="0" y="0"/>
+          <a:ext cx="0" cy="0"/>
+          <a:chOff x="0" y="0"/>
+          <a:chExt cx="0" cy="0"/>
+        </a:xfrm>
+      </p:grpSpPr>
+      <p:sp>
+        <p:nvSpPr>
+          <p:cNvPr id="2" name="Slide Image Placeholder 1"/>
+          <p:cNvSpPr>
+            <a:spLocks noGrp="1"/>
+          </p:cNvSpPr>
+          <p:nvPr>
+            <p:ph type="sldImg" idx="2"/>
+          </p:nvPr>
+        </p:nvSpPr>
+        <p:spPr/>
+      </p:sp>
+      <p:sp>
+        <p:nvSpPr>
+          <p:cNvPr id="3" name="Notes Placeholder 2"/>
+          <p:cNvSpPr>
+            <a:spLocks noGrp="1"/>
+          </p:cNvSpPr>
+          <p:nvPr>
+            <p:ph type="body" idx="3" sz="quarter"/>
+          </p:nvPr>
+        </p:nvSpPr>
+        <p:spPr/>
+        <p:txBody>
+          <a:bodyPr/>
+          <a:lstStyle/>
+          <a:p>
+            <a:r>
+              <a:t>【页面定位】谢谢观看 —— 内容页：逐条展开，配合动画节奏点击推进。</a:t>
+            </a:r>
+          </a:p>
+          <a:p>
+            <a:r>
+              <a:t>【放映】本页元素按“背景→主体→标注”顺序错峰入场（约 2 秒完成）；开启“使用计时器”后本页停留 8 秒自动翻页。</a:t>
+            </a:r>
+          </a:p>
+          <a:p>
+            <a:r>
+              <a:t>【编辑】直接点击文本框替换占位文字；在“设计→变体”中一键换配色；图片占位框右键“更改图片”即可替换。</a:t>
+            </a:r>
+          </a:p>
+          <a:p>
+            <a:r>
+              <a:t>【联动】图表为原生可编辑图表：右键“编辑数据”即可替换数值。</a:t>
+            </a:r>
+          </a:p>
+        </p:txBody>
+      </p:sp>
+      <p:sp>
+        <p:nvSpPr>
+          <p:cNvPr id="4" name="Slide Number Placeholder 3"/>
+          <p:cNvSpPr>
+            <a:spLocks noGrp="1"/>
+          </p:cNvSpPr>
+          <p:nvPr>
+            <p:ph type="sldNum" idx="5" sz="quarter"/>
+          </p:nvPr>
+        </p:nvSpPr>
+        <p:spPr/>
+      </p:sp>
+    </p:spTree>
+  </p:cSld>
+  <p:clrMapOvr>
+    <a:masterClrMapping/>
+  </p:clrMapOvr>
+</p:notes>
+</file>
+
+<file path=ppt/notesSlides/notesSlide2.xml><?xml version="1.0" encoding="utf-8"?>
+<p:notes xmlns:a="http://schemas.openxmlformats.org/drawingml/2006/main" xmlns:p="http://schemas.openxmlformats.org/presentationml/2006/main" xmlns:r="http://schemas.openxmlformats.org/officeDocument/2006/relationships">
+  <p:cSld>
+    <p:spTree>
+      <p:nvGrpSpPr>
+        <p:cNvPr id="1" name=""/>
+        <p:cNvGrpSpPr/>
+        <p:nvPr/>
+      </p:nvGrpSpPr>
+      <p:grpSpPr>
+        <a:xfrm>
+          <a:off x="0" y="0"/>
+          <a:ext cx="0" cy="0"/>
+          <a:chOff x="0" y="0"/>
+          <a:chExt cx="0" cy="0"/>
+        </a:xfrm>
+      </p:grpSpPr>
+      <p:sp>
+        <p:nvSpPr>
+          <p:cNvPr id="2" name="Slide Image Placeholder 1"/>
+          <p:cNvSpPr>
+            <a:spLocks noGrp="1"/>
+          </p:cNvSpPr>
+          <p:nvPr>
+            <p:ph type="sldImg" idx="2"/>
+          </p:nvPr>
+        </p:nvSpPr>
+        <p:spPr/>
+      </p:sp>
+      <p:sp>
+        <p:nvSpPr>
+          <p:cNvPr id="3" name="Notes Placeholder 2"/>
+          <p:cNvSpPr>
+            <a:spLocks noGrp="1"/>
+          </p:cNvSpPr>
+          <p:nvPr>
+            <p:ph type="body" idx="3" sz="quarter"/>
+          </p:nvPr>
+        </p:nvSpPr>
+        <p:spPr/>
+        <p:txBody>
+          <a:bodyPr/>
+          <a:lstStyle/>
+          <a:p>
+            <a:r>
+              <a:t>【页面定位】OVERVIEW —— 概览页：快速带过结构，告诉听众接下来讲什么。</a:t>
+            </a:r>
+          </a:p>
+          <a:p>
+            <a:r>
+              <a:t>【放映】本页元素按“背景→主体→标注”顺序错峰入场（约 2 秒完成）；开启“使用计时器”后本页停留 8 秒自动翻页。</a:t>
+            </a:r>
+          </a:p>
+          <a:p>
+            <a:r>
+              <a:t>【编辑】直接点击文本框替换占位文字；在“设计→变体”中一键换配色；图片占位框右键“更改图片”即可替换。</a:t>
+            </a:r>
+          </a:p>
+          <a:p>
+            <a:r>
+              <a:t>【联动】图表为原生可编辑图表：右键“编辑数据”即可替换数值。</a:t>
+            </a:r>
+          </a:p>
+        </p:txBody>
+      </p:sp>
+      <p:sp>
+        <p:nvSpPr>
+          <p:cNvPr id="4" name="Slide Number Placeholder 3"/>
+          <p:cNvSpPr>
+            <a:spLocks noGrp="1"/>
+          </p:cNvSpPr>
+          <p:nvPr>
+            <p:ph type="sldNum" idx="5" sz="quarter"/>
+          </p:nvPr>
+        </p:nvSpPr>
+        <p:spPr/>
+      </p:sp>
+    </p:spTree>
+  </p:cSld>
+  <p:clrMapOvr>
+    <a:masterClrMapping/>
+  </p:clrMapOvr>
+</p:notes>
+</file>
+
+<file path=ppt/notesSlides/notesSlide3.xml><?xml version="1.0" encoding="utf-8"?>
+<p:notes xmlns:a="http://schemas.openxmlformats.org/drawingml/2006/main" xmlns:p="http://schemas.openxmlformats.org/presentationml/2006/main" xmlns:r="http://schemas.openxmlformats.org/officeDocument/2006/relationships">
+  <p:cSld>
+    <p:spTree>
+      <p:nvGrpSpPr>
+        <p:cNvPr id="1" name=""/>
+        <p:cNvGrpSpPr/>
+        <p:nvPr/>
+      </p:nvGrpSpPr>
+      <p:grpSpPr>
+        <a:xfrm>
+          <a:off x="0" y="0"/>
+          <a:ext cx="0" cy="0"/>
+          <a:chOff x="0" y="0"/>
+          <a:chExt cx="0" cy="0"/>
+        </a:xfrm>
+      </p:grpSpPr>
+      <p:sp>
+        <p:nvSpPr>
+          <p:cNvPr id="2" name="Slide Image Placeholder 1"/>
+          <p:cNvSpPr>
+            <a:spLocks noGrp="1"/>
+          </p:cNvSpPr>
+          <p:nvPr>
+            <p:ph type="sldImg" idx="2"/>
+          </p:nvPr>
+        </p:nvSpPr>
+        <p:spPr/>
+      </p:sp>
+      <p:sp>
+        <p:nvSpPr>
+          <p:cNvPr id="3" name="Notes Placeholder 2"/>
+          <p:cNvSpPr>
+            <a:spLocks noGrp="1"/>
+          </p:cNvSpPr>
+          <p:nvPr>
+            <p:ph type="body" idx="3" sz="quarter"/>
+          </p:nvPr>
+        </p:nvSpPr>
+        <p:spPr/>
+        <p:txBody>
+          <a:bodyPr/>
+          <a:lstStyle/>
+          <a:p>
+            <a:r>
+              <a:t>【页面定位】01 —— 内容页：逐条展开，配合动画节奏点击推进。</a:t>
+            </a:r>
+          </a:p>
+          <a:p>
+            <a:r>
+              <a:t>【放映】本页元素按“背景→主体→标注”顺序错峰入场（约 2 秒完成）；开启“使用计时器”后本页停留 8 秒自动翻页。</a:t>
+            </a:r>
+          </a:p>
+          <a:p>
+            <a:r>
+              <a:t>【编辑】直接点击文本框替换占位文字；在“设计→变体”中一键换配色；图片占位框右键“更改图片”即可替换。</a:t>
+            </a:r>
+          </a:p>
+          <a:p>
+            <a:r>
+              <a:t>【联动】图表为原生可编辑图表：右键“编辑数据”即可替换数值。</a:t>
+            </a:r>
+          </a:p>
+        </p:txBody>
+      </p:sp>
+      <p:sp>
+        <p:nvSpPr>
+          <p:cNvPr id="4" name="Slide Number Placeholder 3"/>
+          <p:cNvSpPr>
+            <a:spLocks noGrp="1"/>
+          </p:cNvSpPr>
+          <p:nvPr>
+            <p:ph type="sldNum" idx="5" sz="quarter"/>
+          </p:nvPr>
+        </p:nvSpPr>
+        <p:spPr/>
+      </p:sp>
+    </p:spTree>
+  </p:cSld>
+  <p:clrMapOvr>
+    <a:masterClrMapping/>
+  </p:clrMapOvr>
+</p:notes>
+</file>
+
+<file path=ppt/notesSlides/notesSlide4.xml><?xml version="1.0" encoding="utf-8"?>
+<p:notes xmlns:a="http://schemas.openxmlformats.org/drawingml/2006/main" xmlns:p="http://schemas.openxmlformats.org/presentationml/2006/main" xmlns:r="http://schemas.openxmlformats.org/officeDocument/2006/relationships">
+  <p:cSld>
+    <p:spTree>
+      <p:nvGrpSpPr>
+        <p:cNvPr id="1" name=""/>
+        <p:cNvGrpSpPr/>
+        <p:nvPr/>
+      </p:nvGrpSpPr>
+      <p:grpSpPr>
+        <a:xfrm>
+          <a:off x="0" y="0"/>
+          <a:ext cx="0" cy="0"/>
+          <a:chOff x="0" y="0"/>
+          <a:chExt cx="0" cy="0"/>
+        </a:xfrm>
+      </p:grpSpPr>
+      <p:sp>
+        <p:nvSpPr>
+          <p:cNvPr id="2" name="Slide Image Placeholder 1"/>
+          <p:cNvSpPr>
+            <a:spLocks noGrp="1"/>
+          </p:cNvSpPr>
+          <p:nvPr>
+            <p:ph type="sldImg" idx="2"/>
+          </p:nvPr>
+        </p:nvSpPr>
+        <p:spPr/>
+      </p:sp>
+      <p:sp>
+        <p:nvSpPr>
+          <p:cNvPr id="3" name="Notes Placeholder 2"/>
+          <p:cNvSpPr>
+            <a:spLocks noGrp="1"/>
+          </p:cNvSpPr>
+          <p:nvPr>
+            <p:ph type="body" idx="3" sz="quarter"/>
+          </p:nvPr>
+        </p:nvSpPr>
+        <p:spPr/>
+        <p:txBody>
+          <a:bodyPr/>
+          <a:lstStyle/>
+          <a:p>
+            <a:r>
+              <a:t>【页面定位】OVERVIEW —— 数据页：先说结论，再用图表佐证。</a:t>
+            </a:r>
+          </a:p>
+          <a:p>
+            <a:r>
+              <a:t>【放映】本页元素按“背景→主体→标注”顺序错峰入场（约 2 秒完成）；开启“使用计时器”后本页停留 8 秒自动翻页。</a:t>
+            </a:r>
+          </a:p>
+          <a:p>
+            <a:r>
+              <a:t>【编辑】直接点击文本框替换占位文字；在“设计→变体”中一键换配色；图片占位框右键“更改图片”即可替换。</a:t>
+            </a:r>
+          </a:p>
+          <a:p>
+            <a:r>
+              <a:t>【联动】图表为原生可编辑图表：右键“编辑数据”即可替换数值。</a:t>
+            </a:r>
+          </a:p>
+        </p:txBody>
+      </p:sp>
+      <p:sp>
+        <p:nvSpPr>
+          <p:cNvPr id="4" name="Slide Number Placeholder 3"/>
+          <p:cNvSpPr>
+            <a:spLocks noGrp="1"/>
+          </p:cNvSpPr>
+          <p:nvPr>
+            <p:ph type="sldNum" idx="5" sz="quarter"/>
+          </p:nvPr>
+        </p:nvSpPr>
+        <p:spPr/>
+      </p:sp>
+    </p:spTree>
+  </p:cSld>
+  <p:clrMapOvr>
+    <a:masterClrMapping/>
+  </p:clrMapOvr>
+</p:notes>
+</file>
+
+<file path=ppt/notesSlides/notesSlide5.xml><?xml version="1.0" encoding="utf-8"?>
+<p:notes xmlns:a="http://schemas.openxmlformats.org/drawingml/2006/main" xmlns:p="http://schemas.openxmlformats.org/presentationml/2006/main" xmlns:r="http://schemas.openxmlformats.org/officeDocument/2006/relationships">
+  <p:cSld>
+    <p:spTree>
+      <p:nvGrpSpPr>
+        <p:cNvPr id="1" name=""/>
+        <p:cNvGrpSpPr/>
+        <p:nvPr/>
+      </p:nvGrpSpPr>
+      <p:grpSpPr>
+        <a:xfrm>
+          <a:off x="0" y="0"/>
+          <a:ext cx="0" cy="0"/>
+          <a:chOff x="0" y="0"/>
+          <a:chExt cx="0" cy="0"/>
+        </a:xfrm>
+      </p:grpSpPr>
+      <p:sp>
+        <p:nvSpPr>
+          <p:cNvPr id="2" name="Slide Image Placeholder 1"/>
+          <p:cNvSpPr>
+            <a:spLocks noGrp="1"/>
+          </p:cNvSpPr>
+          <p:nvPr>
+            <p:ph type="sldImg" idx="2"/>
+          </p:nvPr>
+        </p:nvSpPr>
+        <p:spPr/>
+      </p:sp>
+      <p:sp>
+        <p:nvSpPr>
+          <p:cNvPr id="3" name="Notes Placeholder 2"/>
+          <p:cNvSpPr>
+            <a:spLocks noGrp="1"/>
+          </p:cNvSpPr>
+          <p:nvPr>
+            <p:ph type="body" idx="3" sz="quarter"/>
+          </p:nvPr>
+        </p:nvSpPr>
+        <p:spPr/>
+        <p:txBody>
+          <a:bodyPr/>
+          <a:lstStyle/>
+          <a:p>
+            <a:r>
+              <a:t>【页面定位】KEY POINTS —— 收尾页：总结要点并给出行动号召或联系方式。</a:t>
+            </a:r>
+          </a:p>
+          <a:p>
+            <a:r>
+              <a:t>【放映】本页元素按“背景→主体→标注”顺序错峰入场（约 2 秒完成）；开启“使用计时器”后本页停留 8 秒自动翻页。</a:t>
+            </a:r>
+          </a:p>
+          <a:p>
+            <a:r>
+              <a:t>【编辑】直接点击文本框替换占位文字；在“设计→变体”中一键换配色；图片占位框右键“更改图片”即可替换。</a:t>
+            </a:r>
+          </a:p>
+          <a:p>
+            <a:r>
+              <a:t>【联动】图表为原生可编辑图表：右键“编辑数据”即可替换数值。</a:t>
+            </a:r>
+          </a:p>
+        </p:txBody>
+      </p:sp>
+      <p:sp>
+        <p:nvSpPr>
+          <p:cNvPr id="4" name="Slide Number Placeholder 3"/>
+          <p:cNvSpPr>
+            <a:spLocks noGrp="1"/>
+          </p:cNvSpPr>
+          <p:nvPr>
+            <p:ph type="sldNum" idx="5" sz="quarter"/>
+          </p:nvPr>
+        </p:nvSpPr>
+        <p:spPr/>
+      </p:sp>
+    </p:spTree>
+  </p:cSld>
+  <p:clrMapOvr>
+    <a:masterClrMapping/>
+  </p:clrMapOvr>
+</p:notes>
+</file>
+
+<file path=ppt/notesSlides/notesSlide6.xml><?xml version="1.0" encoding="utf-8"?>
+<p:notes xmlns:a="http://schemas.openxmlformats.org/drawingml/2006/main" xmlns:p="http://schemas.openxmlformats.org/presentationml/2006/main" xmlns:r="http://schemas.openxmlformats.org/officeDocument/2006/relationships">
+  <p:cSld>
+    <p:spTree>
+      <p:nvGrpSpPr>
+        <p:cNvPr id="1" name=""/>
+        <p:cNvGrpSpPr/>
+        <p:nvPr/>
+      </p:nvGrpSpPr>
+      <p:grpSpPr>
+        <a:xfrm>
+          <a:off x="0" y="0"/>
+          <a:ext cx="0" cy="0"/>
+          <a:chOff x="0" y="0"/>
+          <a:chExt cx="0" cy="0"/>
+        </a:xfrm>
+      </p:grpSpPr>
+      <p:sp>
+        <p:nvSpPr>
+          <p:cNvPr id="2" name="Slide Image Placeholder 1"/>
+          <p:cNvSpPr>
+            <a:spLocks noGrp="1"/>
+          </p:cNvSpPr>
+          <p:nvPr>
+            <p:ph type="sldImg" idx="2"/>
+          </p:nvPr>
+        </p:nvSpPr>
+        <p:spPr/>
+      </p:sp>
+      <p:sp>
+        <p:nvSpPr>
+          <p:cNvPr id="3" name="Notes Placeholder 2"/>
+          <p:cNvSpPr>
+            <a:spLocks noGrp="1"/>
+          </p:cNvSpPr>
+          <p:nvPr>
+            <p:ph type="body" idx="3" sz="quarter"/>
+          </p:nvPr>
+        </p:nvSpPr>
+        <p:spPr/>
+        <p:txBody>
+          <a:bodyPr/>
+          <a:lstStyle/>
+          <a:p>
+            <a:r>
+              <a:t>【页面定位】METRICS —— 开场页：自我介绍或破题，停留时间可稍长。</a:t>
+            </a:r>
+          </a:p>
+          <a:p>
+            <a:r>
+              <a:t>【放映】本页元素按“背景→主体→标注”顺序错峰入场（约 2 秒完成）；开启“使用计时器”后本页停留 8 秒自动翻页。</a:t>
+            </a:r>
+          </a:p>
+          <a:p>
+            <a:r>
+              <a:t>【编辑】直接点击文本框替换占位文字；在“设计→变体”中一键换配色；图片占位框右键“更改图片”即可替换。</a:t>
+            </a:r>
+          </a:p>
+          <a:p>
+            <a:r>
+              <a:t>【联动】图表为原生可编辑图表：右键“编辑数据”即可替换数值。</a:t>
+            </a:r>
+          </a:p>
+        </p:txBody>
+      </p:sp>
+      <p:sp>
+        <p:nvSpPr>
+          <p:cNvPr id="4" name="Slide Number Placeholder 3"/>
+          <p:cNvSpPr>
+            <a:spLocks noGrp="1"/>
+          </p:cNvSpPr>
+          <p:nvPr>
+            <p:ph type="sldNum" idx="5" sz="quarter"/>
+          </p:nvPr>
+        </p:nvSpPr>
+        <p:spPr/>
+      </p:sp>
+    </p:spTree>
+  </p:cSld>
+  <p:clrMapOvr>
+    <a:masterClrMapping/>
+  </p:clrMapOvr>
+</p:notes>
+</file>
+
+<file path=ppt/notesSlides/notesSlide7.xml><?xml version="1.0" encoding="utf-8"?>
+<p:notes xmlns:a="http://schemas.openxmlformats.org/drawingml/2006/main" xmlns:p="http://schemas.openxmlformats.org/presentationml/2006/main" xmlns:r="http://schemas.openxmlformats.org/officeDocument/2006/relationships">
+  <p:cSld>
+    <p:spTree>
+      <p:nvGrpSpPr>
+        <p:cNvPr id="1" name=""/>
+        <p:cNvGrpSpPr/>
+        <p:nvPr/>
+      </p:nvGrpSpPr>
+      <p:grpSpPr>
+        <a:xfrm>
+          <a:off x="0" y="0"/>
+          <a:ext cx="0" cy="0"/>
+          <a:chOff x="0" y="0"/>
+          <a:chExt cx="0" cy="0"/>
+        </a:xfrm>
+      </p:grpSpPr>
+      <p:sp>
+        <p:nvSpPr>
+          <p:cNvPr id="2" name="Slide Image Placeholder 1"/>
+          <p:cNvSpPr>
+            <a:spLocks noGrp="1"/>
+          </p:cNvSpPr>
+          <p:nvPr>
+            <p:ph type="sldImg" idx="2"/>
+          </p:nvPr>
+        </p:nvSpPr>
+        <p:spPr/>
+      </p:sp>
+      <p:sp>
+        <p:nvSpPr>
+          <p:cNvPr id="3" name="Notes Placeholder 2"/>
+          <p:cNvSpPr>
+            <a:spLocks noGrp="1"/>
+          </p:cNvSpPr>
+          <p:nvPr>
+            <p:ph type="body" idx="3" sz="quarter"/>
+          </p:nvPr>
+        </p:nvSpPr>
+        <p:spPr/>
+        <p:txBody>
+          <a:bodyPr/>
+          <a:lstStyle/>
+          <a:p>
+            <a:r>
+              <a:t>【页面定位】PROCESS —— 概览页：快速带过结构，告诉听众接下来讲什么。</a:t>
+            </a:r>
+          </a:p>
+          <a:p>
+            <a:r>
+              <a:t>【放映】本页元素按“背景→主体→标注”顺序错峰入场（约 2 秒完成）；开启“使用计时器”后本页停留 8 秒自动翻页。</a:t>
+            </a:r>
+          </a:p>
+          <a:p>
+            <a:r>
+              <a:t>【编辑】直接点击文本框替换占位文字；在“设计→变体”中一键换配色；图片占位框右键“更改图片”即可替换。</a:t>
+            </a:r>
+          </a:p>
+          <a:p>
+            <a:r>
+              <a:t>【联动】图表为原生可编辑图表：右键“编辑数据”即可替换数值。</a:t>
+            </a:r>
+          </a:p>
+        </p:txBody>
+      </p:sp>
+      <p:sp>
+        <p:nvSpPr>
+          <p:cNvPr id="4" name="Slide Number Placeholder 3"/>
+          <p:cNvSpPr>
+            <a:spLocks noGrp="1"/>
+          </p:cNvSpPr>
+          <p:nvPr>
+            <p:ph type="sldNum" idx="5" sz="quarter"/>
+          </p:nvPr>
+        </p:nvSpPr>
+        <p:spPr/>
+      </p:sp>
+    </p:spTree>
+  </p:cSld>
+  <p:clrMapOvr>
+    <a:masterClrMapping/>
+  </p:clrMapOvr>
+</p:notes>
+</file>
+
+<file path=ppt/notesSlides/notesSlide8.xml><?xml version="1.0" encoding="utf-8"?>
+<p:notes xmlns:a="http://schemas.openxmlformats.org/drawingml/2006/main" xmlns:p="http://schemas.openxmlformats.org/presentationml/2006/main" xmlns:r="http://schemas.openxmlformats.org/officeDocument/2006/relationships">
+  <p:cSld>
+    <p:spTree>
+      <p:nvGrpSpPr>
+        <p:cNvPr id="1" name=""/>
+        <p:cNvGrpSpPr/>
+        <p:nvPr/>
+      </p:nvGrpSpPr>
+      <p:grpSpPr>
+        <a:xfrm>
+          <a:off x="0" y="0"/>
+          <a:ext cx="0" cy="0"/>
+          <a:chOff x="0" y="0"/>
+          <a:chExt cx="0" cy="0"/>
+        </a:xfrm>
+      </p:grpSpPr>
+      <p:sp>
+        <p:nvSpPr>
+          <p:cNvPr id="2" name="Slide Image Placeholder 1"/>
+          <p:cNvSpPr>
+            <a:spLocks noGrp="1"/>
+          </p:cNvSpPr>
+          <p:nvPr>
+            <p:ph type="sldImg" idx="2"/>
+          </p:nvPr>
+        </p:nvSpPr>
+        <p:spPr/>
+      </p:sp>
+      <p:sp>
+        <p:nvSpPr>
+          <p:cNvPr id="3" name="Notes Placeholder 2"/>
+          <p:cNvSpPr>
+            <a:spLocks noGrp="1"/>
+          </p:cNvSpPr>
+          <p:nvPr>
+            <p:ph type="body" idx="3" sz="quarter"/>
+          </p:nvPr>
+        </p:nvSpPr>
+        <p:spPr/>
+        <p:txBody>
+          <a:bodyPr/>
+          <a:lstStyle/>
+          <a:p>
+            <a:r>
+              <a:t>【页面定位】PROCESS —— 内容页：逐条展开，配合动画节奏点击推进。</a:t>
+            </a:r>
+          </a:p>
+          <a:p>
+            <a:r>
+              <a:t>【放映】本页元素按“背景→主体→标注”顺序错峰入场（约 2 秒完成）；开启“使用计时器”后本页停留 8 秒自动翻页。</a:t>
+            </a:r>
+          </a:p>
+          <a:p>
+            <a:r>
+              <a:t>【编辑】直接点击文本框替换占位文字；在“设计→变体”中一键换配色；图片占位框右键“更改图片”即可替换。</a:t>
+            </a:r>
+          </a:p>
+          <a:p>
+            <a:r>
+              <a:t>【联动】图表为原生可编辑图表：右键“编辑数据”即可替换数值。</a:t>
+            </a:r>
+          </a:p>
+        </p:txBody>
+      </p:sp>
+      <p:sp>
+        <p:nvSpPr>
+          <p:cNvPr id="4" name="Slide Number Placeholder 3"/>
+          <p:cNvSpPr>
+            <a:spLocks noGrp="1"/>
+          </p:cNvSpPr>
+          <p:nvPr>
+            <p:ph type="sldNum" idx="5" sz="quarter"/>
+          </p:nvPr>
+        </p:nvSpPr>
+        <p:spPr/>
+      </p:sp>
+    </p:spTree>
+  </p:cSld>
+  <p:clrMapOvr>
+    <a:masterClrMapping/>
+  </p:clrMapOvr>
+</p:notes>
+</file>
+
+<file path=ppt/notesSlides/notesSlide9.xml><?xml version="1.0" encoding="utf-8"?>
+<p:notes xmlns:a="http://schemas.openxmlformats.org/drawingml/2006/main" xmlns:p="http://schemas.openxmlformats.org/presentationml/2006/main" xmlns:r="http://schemas.openxmlformats.org/officeDocument/2006/relationships">
+  <p:cSld>
+    <p:spTree>
+      <p:nvGrpSpPr>
+        <p:cNvPr id="1" name=""/>
+        <p:cNvGrpSpPr/>
+        <p:nvPr/>
+      </p:nvGrpSpPr>
+      <p:grpSpPr>
+        <a:xfrm>
+          <a:off x="0" y="0"/>
+          <a:ext cx="0" cy="0"/>
+          <a:chOff x="0" y="0"/>
+          <a:chExt cx="0" cy="0"/>
+        </a:xfrm>
+      </p:grpSpPr>
+      <p:sp>
+        <p:nvSpPr>
+          <p:cNvPr id="2" name="Slide Image Placeholder 1"/>
+          <p:cNvSpPr>
+            <a:spLocks noGrp="1"/>
+          </p:cNvSpPr>
+          <p:nvPr>
+            <p:ph type="sldImg" idx="2"/>
+          </p:nvPr>
+        </p:nvSpPr>
+        <p:spPr/>
+      </p:sp>
+      <p:sp>
+        <p:nvSpPr>
+          <p:cNvPr id="3" name="Notes Placeholder 2"/>
+          <p:cNvSpPr>
+            <a:spLocks noGrp="1"/>
+          </p:cNvSpPr>
+          <p:nvPr>
+            <p:ph type="body" idx="3" sz="quarter"/>
+          </p:nvPr>
+        </p:nvSpPr>
+        <p:spPr/>
+        <p:txBody>
+          <a:bodyPr/>
+          <a:lstStyle/>
+          <a:p>
+            <a:r>
+              <a:t>【页面定位】DATA —— 数据页：先说结论，再用图表佐证。</a:t>
+            </a:r>
+          </a:p>
+          <a:p>
+            <a:r>
+              <a:t>【放映】本页元素按“背景→主体→标注”顺序错峰入场（约 2 秒完成）；开启“使用计时器”后本页停留 8 秒自动翻页。</a:t>
+            </a:r>
+          </a:p>
+          <a:p>
+            <a:r>
+              <a:t>【编辑】直接点击文本框替换占位文字；在“设计→变体”中一键换配色；图片占位框右键“更改图片”即可替换。</a:t>
+            </a:r>
+          </a:p>
+          <a:p>
+            <a:r>
+              <a:t>【联动】图表为原生可编辑图表：右键“编辑数据”即可替换数值。</a:t>
+            </a:r>
+          </a:p>
+        </p:txBody>
+      </p:sp>
+      <p:sp>
+        <p:nvSpPr>
+          <p:cNvPr id="4" name="Slide Number Placeholder 3"/>
+          <p:cNvSpPr>
+            <a:spLocks noGrp="1"/>
+          </p:cNvSpPr>
+          <p:nvPr>
+            <p:ph type="sldNum" idx="5" sz="quarter"/>
+          </p:nvPr>
+        </p:nvSpPr>
+        <p:spPr/>
+      </p:sp>
+    </p:spTree>
+  </p:cSld>
+  <p:clrMapOvr>
+    <a:masterClrMapping/>
+  </p:clrMapOvr>
+</p:notes>
 </file>
 
 <file path=ppt/slideLayouts/slideLayout1.xml><?xml version="1.0" encoding="utf-8"?>
@@ -3445,7 +5325,7 @@
   <p:clrMapOvr>
     <a:masterClrMapping/>
   </p:clrMapOvr>
-  <p:transition spd="med">
+  <p:transition spd="med" advClick="1" advTm="8000">
     <p:newsflash/>
   </p:transition>
   <p:timing>
@@ -4747,7 +6627,7 @@
   <p:clrMapOvr>
     <a:masterClrMapping/>
   </p:clrMapOvr>
-  <p:transition spd="med">
+  <p:transition spd="med" advClick="1" advTm="8000">
     <p:comb dir="horz"/>
   </p:transition>
   <p:timing>
@@ -6107,7 +7987,7 @@
   <p:clrMapOvr>
     <a:masterClrMapping/>
   </p:clrMapOvr>
-  <p:transition spd="med">
+  <p:transition spd="med" advClick="1" advTm="8000">
     <p:dissolve/>
   </p:transition>
   <p:timing>
@@ -7057,7 +8937,7 @@
   <p:clrMapOvr>
     <a:masterClrMapping/>
   </p:clrMapOvr>
-  <p:transition spd="med">
+  <p:transition spd="med" advClick="1" advTm="8000">
     <p:zoom dir="in"/>
   </p:transition>
   <p:timing>
@@ -7797,7 +9677,7 @@
   <p:clrMapOvr>
     <a:masterClrMapping/>
   </p:clrMapOvr>
-  <p:transition spd="med">
+  <p:transition spd="med" advClick="1" advTm="8000">
     <p:cover dir="l"/>
   </p:transition>
   <p:timing>
@@ -9073,7 +10953,7 @@
   <p:clrMapOvr>
     <a:masterClrMapping/>
   </p:clrMapOvr>
-  <p:transition spd="med">
+  <p:transition spd="med" advClick="1" advTm="8000">
     <p:checker dir="across"/>
   </p:transition>
   <p:timing>
@@ -10559,7 +12439,7 @@
   <p:clrMapOvr>
     <a:masterClrMapping/>
   </p:clrMapOvr>
-  <p:transition spd="med">
+  <p:transition spd="med" advClick="1" advTm="8000">
     <p:newsflash/>
   </p:transition>
   <p:timing>
@@ -11993,7 +13873,7 @@
   <p:clrMapOvr>
     <a:masterClrMapping/>
   </p:clrMapOvr>
-  <p:transition spd="med">
+  <p:transition spd="med" advClick="1" advTm="8000">
     <p:push dir="u"/>
   </p:transition>
   <p:timing>
@@ -13479,7 +15359,7 @@
   <p:clrMapOvr>
     <a:masterClrMapping/>
   </p:clrMapOvr>
-  <p:transition spd="med">
+  <p:transition spd="med" advClick="1" advTm="8000">
     <p:wipe dir="d"/>
   </p:transition>
   <p:timing>
@@ -14385,7 +16265,7 @@
   <p:clrMapOvr>
     <a:masterClrMapping/>
   </p:clrMapOvr>
-  <p:transition spd="med">
+  <p:transition spd="med" advClick="1" advTm="8000">
     <p:fade/>
   </p:transition>
   <p:timing>
@@ -15498,7 +17378,7 @@
   <p:clrMapOvr>
     <a:masterClrMapping/>
   </p:clrMapOvr>
-  <p:transition spd="med">
+  <p:transition spd="med" advClick="1" advTm="8000">
     <p:push dir="u"/>
   </p:transition>
   <p:timing>
@@ -16448,7 +18328,7 @@
   <p:clrMapOvr>
     <a:masterClrMapping/>
   </p:clrMapOvr>
-  <p:transition spd="med">
+  <p:transition spd="med" advClick="1" advTm="8000">
     <p:wipe dir="d"/>
   </p:transition>
   <p:timing>
@@ -17548,7 +19428,7 @@
   <p:clrMapOvr>
     <a:masterClrMapping/>
   </p:clrMapOvr>
-  <p:transition spd="med">
+  <p:transition spd="med" advClick="1" advTm="8000">
     <p:fade/>
   </p:transition>
   <p:timing>
@@ -18960,7 +20840,7 @@
   <p:clrMapOvr>
     <a:masterClrMapping/>
   </p:clrMapOvr>
-  <p:transition spd="med">
+  <p:transition spd="med" advClick="1" advTm="8000">
     <p:push dir="l"/>
   </p:transition>
   <p:timing>
@@ -20670,7 +22550,7 @@
   <p:clrMapOvr>
     <a:masterClrMapping/>
   </p:clrMapOvr>
-  <p:transition spd="med">
+  <p:transition spd="med" advClick="1" advTm="8000">
     <p:wipe dir="u"/>
   </p:transition>
   <p:timing>
@@ -22224,7 +24104,7 @@
   <p:clrMapOvr>
     <a:masterClrMapping/>
   </p:clrMapOvr>
-  <p:transition spd="med">
+  <p:transition spd="med" advClick="1" advTm="8000">
     <p:split orient="horz"/>
   </p:transition>
   <p:timing>
@@ -23538,7 +25418,7 @@
   <p:clrMapOvr>
     <a:masterClrMapping/>
   </p:clrMapOvr>
-  <p:transition spd="med">
+  <p:transition spd="med" advClick="1" advTm="8000">
     <p:blinds dir="horz"/>
   </p:transition>
   <p:timing>
@@ -24480,7 +26360,7 @@
                 <a:ea typeface="微软雅黑"/>
                 <a:cs typeface="微软雅黑"/>
               </a:rPr>
-              <a:t>图表占位 · 在 PowerPoint 中插入图表替换</a:t>
+              <a:t>原生可编辑图表 · 右键图表 → 编辑数据 即可替换数值</a:t>
             </a:r>
           </a:p>
         </p:txBody>
@@ -24741,7 +26621,7 @@
   <p:clrMapOvr>
     <a:masterClrMapping/>
   </p:clrMapOvr>
-  <p:transition spd="med">
+  <p:transition spd="med" advClick="1" advTm="8000">
     <p:circle dir="in"/>
   </p:transition>
   <p:timing>
@@ -25524,4 +27404,324 @@
   </a:objectDefaults>
   <a:extraClrSchemeLst/>
 </a:theme>
+</file>
+
+<file path=ppt/theme/theme2.xml><?xml version="1.0" encoding="utf-8"?>
+<a:theme xmlns:a="http://schemas.openxmlformats.org/drawingml/2006/main" name="Office Theme">
+  <a:themeElements>
+    <a:clrScheme name="Office">
+      <a:dk1>
+        <a:sysClr val="windowText" lastClr="000000"/>
+      </a:dk1>
+      <a:lt1>
+        <a:sysClr val="window" lastClr="FFFFFF"/>
+      </a:lt1>
+      <a:dk2>
+        <a:srgbClr val="1F497D"/>
+      </a:dk2>
+      <a:lt2>
+        <a:srgbClr val="EEECE1"/>
+      </a:lt2>
+      <a:accent1>
+        <a:srgbClr val="4F81BD"/>
+      </a:accent1>
+      <a:accent2>
+        <a:srgbClr val="C0504D"/>
+      </a:accent2>
+      <a:accent3>
+        <a:srgbClr val="9BBB59"/>
+      </a:accent3>
+      <a:accent4>
+        <a:srgbClr val="8064A2"/>
+      </a:accent4>
+      <a:accent5>
+        <a:srgbClr val="4BACC6"/>
+      </a:accent5>
+      <a:accent6>
+        <a:srgbClr val="F79646"/>
+      </a:accent6>
+      <a:hlink>
+        <a:srgbClr val="0000FF"/>
+      </a:hlink>
+      <a:folHlink>
+        <a:srgbClr val="800080"/>
+      </a:folHlink>
+    </a:clrScheme>
+    <a:fontScheme name="Office">
+      <a:majorFont>
+        <a:latin typeface="Calibri"/>
+        <a:ea typeface=""/>
+        <a:cs typeface=""/>
+        <a:font script="Jpan" typeface="ＭＳ Ｐゴシック"/>
+        <a:font script="Hang" typeface="맑은 고딕"/>
+        <a:font script="Hans" typeface="宋体"/>
+        <a:font script="Hant" typeface="新細明體"/>
+        <a:font script="Arab" typeface="Times New Roman"/>
+        <a:font script="Hebr" typeface="Times New Roman"/>
+        <a:font script="Thai" typeface="Angsana New"/>
+        <a:font script="Ethi" typeface="Nyala"/>
+        <a:font script="Beng" typeface="Vrinda"/>
+        <a:font script="Gujr" typeface="Shruti"/>
+        <a:font script="Khmr" typeface="MoolBoran"/>
+        <a:font script="Knda" typeface="Tunga"/>
+        <a:font script="Guru" typeface="Raavi"/>
+        <a:font script="Cans" typeface="Euphemia"/>
+        <a:font script="Cher" typeface="Plantagenet Cherokee"/>
+        <a:font script="Yiii" typeface="Microsoft Yi Baiti"/>
+        <a:font script="Tibt" typeface="Microsoft Himalaya"/>
+        <a:font script="Thaa" typeface="MV Boli"/>
+        <a:font script="Deva" typeface="Mangal"/>
+        <a:font script="Telu" typeface="Gautami"/>
+        <a:font script="Taml" typeface="Latha"/>
+        <a:font script="Syrc" typeface="Estrangelo Edessa"/>
+        <a:font script="Orya" typeface="Kalinga"/>
+        <a:font script="Mlym" typeface="Kartika"/>
+        <a:font script="Laoo" typeface="DokChampa"/>
+        <a:font script="Sinh" typeface="Iskoola Pota"/>
+        <a:font script="Mong" typeface="Mongolian Baiti"/>
+        <a:font script="Viet" typeface="Times New Roman"/>
+        <a:font script="Uigh" typeface="Microsoft Uighur"/>
+        <a:font script="Geor" typeface="Sylfaen"/>
+      </a:majorFont>
+      <a:minorFont>
+        <a:latin typeface="Calibri"/>
+        <a:ea typeface=""/>
+        <a:cs typeface=""/>
+        <a:font script="Jpan" typeface="ＭＳ Ｐゴシック"/>
+        <a:font script="Hang" typeface="맑은 고딕"/>
+        <a:font script="Hans" typeface="宋体"/>
+        <a:font script="Hant" typeface="新細明體"/>
+        <a:font script="Arab" typeface="Arial"/>
+        <a:font script="Hebr" typeface="Arial"/>
+        <a:font script="Thai" typeface="Cordia New"/>
+        <a:font script="Ethi" typeface="Nyala"/>
+        <a:font script="Beng" typeface="Vrinda"/>
+        <a:font script="Gujr" typeface="Shruti"/>
+        <a:font script="Khmr" typeface="DaunPenh"/>
+        <a:font script="Knda" typeface="Tunga"/>
+        <a:font script="Guru" typeface="Raavi"/>
+        <a:font script="Cans" typeface="Euphemia"/>
+        <a:font script="Cher" typeface="Plantagenet Cherokee"/>
+        <a:font script="Yiii" typeface="Microsoft Yi Baiti"/>
+        <a:font script="Tibt" typeface="Microsoft Himalaya"/>
+        <a:font script="Thaa" typeface="MV Boli"/>
+        <a:font script="Deva" typeface="Mangal"/>
+        <a:font script="Telu" typeface="Gautami"/>
+        <a:font script="Taml" typeface="Latha"/>
+        <a:font script="Syrc" typeface="Estrangelo Edessa"/>
+        <a:font script="Orya" typeface="Kalinga"/>
+        <a:font script="Mlym" typeface="Kartika"/>
+        <a:font script="Laoo" typeface="DokChampa"/>
+        <a:font script="Sinh" typeface="Iskoola Pota"/>
+        <a:font script="Mong" typeface="Mongolian Baiti"/>
+        <a:font script="Viet" typeface="Arial"/>
+        <a:font script="Uigh" typeface="Microsoft Uighur"/>
+        <a:font script="Geor" typeface="Sylfaen"/>
+      </a:minorFont>
+    </a:fontScheme>
+    <a:fmtScheme name="Office">
+      <a:fillStyleLst>
+        <a:solidFill>
+          <a:schemeClr val="phClr"/>
+        </a:solidFill>
+        <a:gradFill rotWithShape="1">
+          <a:gsLst>
+            <a:gs pos="0">
+              <a:schemeClr val="phClr">
+                <a:tint val="50000"/>
+                <a:satMod val="300000"/>
+              </a:schemeClr>
+            </a:gs>
+            <a:gs pos="35000">
+              <a:schemeClr val="phClr">
+                <a:tint val="37000"/>
+                <a:satMod val="300000"/>
+              </a:schemeClr>
+            </a:gs>
+            <a:gs pos="100000">
+              <a:schemeClr val="phClr">
+                <a:tint val="15000"/>
+                <a:satMod val="350000"/>
+              </a:schemeClr>
+            </a:gs>
+          </a:gsLst>
+          <a:lin ang="16200000" scaled="1"/>
+        </a:gradFill>
+        <a:gradFill rotWithShape="1">
+          <a:gsLst>
+            <a:gs pos="0">
+              <a:schemeClr val="phClr">
+                <a:tint val="100000"/>
+                <a:shade val="100000"/>
+                <a:satMod val="130000"/>
+              </a:schemeClr>
+            </a:gs>
+            <a:gs pos="100000">
+              <a:schemeClr val="phClr">
+                <a:tint val="50000"/>
+                <a:shade val="100000"/>
+                <a:satMod val="350000"/>
+              </a:schemeClr>
+            </a:gs>
+          </a:gsLst>
+          <a:lin ang="16200000" scaled="0"/>
+        </a:gradFill>
+      </a:fillStyleLst>
+      <a:lnStyleLst>
+        <a:ln w="9525" cap="flat" cmpd="sng" algn="ctr">
+          <a:solidFill>
+            <a:schemeClr val="phClr">
+              <a:shade val="95000"/>
+              <a:satMod val="105000"/>
+            </a:schemeClr>
+          </a:solidFill>
+          <a:prstDash val="solid"/>
+        </a:ln>
+        <a:ln w="25400" cap="flat" cmpd="sng" algn="ctr">
+          <a:solidFill>
+            <a:schemeClr val="phClr"/>
+          </a:solidFill>
+          <a:prstDash val="solid"/>
+        </a:ln>
+        <a:ln w="38100" cap="flat" cmpd="sng" algn="ctr">
+          <a:solidFill>
+            <a:schemeClr val="phClr"/>
+          </a:solidFill>
+          <a:prstDash val="solid"/>
+        </a:ln>
+      </a:lnStyleLst>
+      <a:effectStyleLst>
+        <a:effectStyle>
+          <a:effectLst>
+            <a:outerShdw blurRad="40000" dist="20000" dir="5400000" rotWithShape="0">
+              <a:srgbClr val="000000">
+                <a:alpha val="38000"/>
+              </a:srgbClr>
+            </a:outerShdw>
+          </a:effectLst>
+        </a:effectStyle>
+        <a:effectStyle>
+          <a:effectLst>
+            <a:outerShdw blurRad="40000" dist="23000" dir="5400000" rotWithShape="0">
+              <a:srgbClr val="000000">
+                <a:alpha val="35000"/>
+              </a:srgbClr>
+            </a:outerShdw>
+          </a:effectLst>
+        </a:effectStyle>
+        <a:effectStyle>
+          <a:effectLst>
+            <a:outerShdw blurRad="40000" dist="23000" dir="5400000" rotWithShape="0">
+              <a:srgbClr val="000000">
+                <a:alpha val="35000"/>
+              </a:srgbClr>
+            </a:outerShdw>
+          </a:effectLst>
+          <a:scene3d>
+            <a:camera prst="orthographicFront">
+              <a:rot lat="0" lon="0" rev="0"/>
+            </a:camera>
+            <a:lightRig rig="threePt" dir="t">
+              <a:rot lat="0" lon="0" rev="1200000"/>
+            </a:lightRig>
+          </a:scene3d>
+          <a:sp3d>
+            <a:bevelT w="63500" h="25400"/>
+          </a:sp3d>
+        </a:effectStyle>
+      </a:effectStyleLst>
+      <a:bgFillStyleLst>
+        <a:solidFill>
+          <a:schemeClr val="phClr"/>
+        </a:solidFill>
+        <a:gradFill rotWithShape="1">
+          <a:gsLst>
+            <a:gs pos="0">
+              <a:schemeClr val="phClr">
+                <a:tint val="40000"/>
+                <a:satMod val="350000"/>
+              </a:schemeClr>
+            </a:gs>
+            <a:gs pos="40000">
+              <a:schemeClr val="phClr">
+                <a:tint val="45000"/>
+                <a:shade val="99000"/>
+                <a:satMod val="350000"/>
+              </a:schemeClr>
+            </a:gs>
+            <a:gs pos="100000">
+              <a:schemeClr val="phClr">
+                <a:shade val="20000"/>
+                <a:satMod val="255000"/>
+              </a:schemeClr>
+            </a:gs>
+          </a:gsLst>
+          <a:path path="circle">
+            <a:fillToRect l="50000" t="-80000" r="50000" b="180000"/>
+          </a:path>
+        </a:gradFill>
+        <a:gradFill rotWithShape="1">
+          <a:gsLst>
+            <a:gs pos="0">
+              <a:schemeClr val="phClr">
+                <a:tint val="80000"/>
+                <a:satMod val="300000"/>
+              </a:schemeClr>
+            </a:gs>
+            <a:gs pos="100000">
+              <a:schemeClr val="phClr">
+                <a:shade val="30000"/>
+                <a:satMod val="200000"/>
+              </a:schemeClr>
+            </a:gs>
+          </a:gsLst>
+          <a:path path="circle">
+            <a:fillToRect l="50000" t="50000" r="50000" b="50000"/>
+          </a:path>
+        </a:gradFill>
+      </a:bgFillStyleLst>
+    </a:fmtScheme>
+  </a:themeElements>
+  <a:objectDefaults>
+    <a:spDef>
+      <a:spPr/>
+      <a:bodyPr/>
+      <a:lstStyle/>
+      <a:style>
+        <a:lnRef idx="1">
+          <a:schemeClr val="accent1"/>
+        </a:lnRef>
+        <a:fillRef idx="3">
+          <a:schemeClr val="accent1"/>
+        </a:fillRef>
+        <a:effectRef idx="2">
+          <a:schemeClr val="accent1"/>
+        </a:effectRef>
+        <a:fontRef idx="minor">
+          <a:schemeClr val="lt1"/>
+        </a:fontRef>
+      </a:style>
+    </a:spDef>
+    <a:lnDef>
+      <a:spPr/>
+      <a:bodyPr/>
+      <a:lstStyle/>
+      <a:style>
+        <a:lnRef idx="2">
+          <a:schemeClr val="accent1"/>
+        </a:lnRef>
+        <a:fillRef idx="0">
+          <a:schemeClr val="accent1"/>
+        </a:fillRef>
+        <a:effectRef idx="1">
+          <a:schemeClr val="accent1"/>
+        </a:effectRef>
+        <a:fontRef idx="minor">
+          <a:schemeClr val="tx1"/>
+        </a:fontRef>
+      </a:style>
+    </a:lnDef>
+  </a:objectDefaults>
+  <a:extraClrSchemeLst/>
+</a:theme>
 </file>